--- a/docs/pptx/whole/jx-linsubhr-ratio-hosp6.pptx
+++ b/docs/pptx/whole/jx-linsubhr-ratio-hosp6.pptx
@@ -2271,7 +2271,7 @@
           </p:nvSpPr>
           <p:spPr>
             <a:xfrm>
-              <a:off x="817517" y="5114368"/>
+              <a:off x="817517" y="5142518"/>
               <a:ext cx="7799693" cy="0"/>
             </a:xfrm>
             <a:custGeom>
@@ -2314,7 +2314,7 @@
           </p:nvSpPr>
           <p:spPr>
             <a:xfrm>
-              <a:off x="817517" y="4244691"/>
+              <a:off x="817517" y="4313054"/>
               <a:ext cx="7799693" cy="0"/>
             </a:xfrm>
             <a:custGeom>
@@ -2357,7 +2357,7 @@
           </p:nvSpPr>
           <p:spPr>
             <a:xfrm>
-              <a:off x="817517" y="3375014"/>
+              <a:off x="817517" y="3483591"/>
               <a:ext cx="7799693" cy="0"/>
             </a:xfrm>
             <a:custGeom>
@@ -2400,7 +2400,7 @@
           </p:nvSpPr>
           <p:spPr>
             <a:xfrm>
-              <a:off x="817517" y="2505337"/>
+              <a:off x="817517" y="2654127"/>
               <a:ext cx="7799693" cy="0"/>
             </a:xfrm>
             <a:custGeom>
@@ -2443,15 +2443,15 @@
           </p:nvSpPr>
           <p:spPr>
             <a:xfrm>
-              <a:off x="1615213" y="1896563"/>
-              <a:ext cx="0" cy="3826579"/>
+              <a:off x="1615213" y="2073503"/>
+              <a:ext cx="0" cy="3649639"/>
             </a:xfrm>
             <a:custGeom>
               <a:avLst/>
               <a:pathLst>
-                <a:path w="0" h="3826579">
+                <a:path w="0" h="3649639">
                   <a:moveTo>
-                    <a:pt x="0" y="3826579"/>
+                    <a:pt x="0" y="3649639"/>
                   </a:moveTo>
                   <a:lnTo>
                     <a:pt x="0" y="0"/>
@@ -2486,15 +2486,15 @@
           </p:nvSpPr>
           <p:spPr>
             <a:xfrm>
-              <a:off x="3387871" y="1896563"/>
-              <a:ext cx="0" cy="3826579"/>
+              <a:off x="3387871" y="2073503"/>
+              <a:ext cx="0" cy="3649639"/>
             </a:xfrm>
             <a:custGeom>
               <a:avLst/>
               <a:pathLst>
-                <a:path w="0" h="3826579">
+                <a:path w="0" h="3649639">
                   <a:moveTo>
-                    <a:pt x="0" y="3826579"/>
+                    <a:pt x="0" y="3649639"/>
                   </a:moveTo>
                   <a:lnTo>
                     <a:pt x="0" y="0"/>
@@ -2529,15 +2529,15 @@
           </p:nvSpPr>
           <p:spPr>
             <a:xfrm>
-              <a:off x="5160528" y="1896563"/>
-              <a:ext cx="0" cy="3826579"/>
+              <a:off x="5160528" y="2073503"/>
+              <a:ext cx="0" cy="3649639"/>
             </a:xfrm>
             <a:custGeom>
               <a:avLst/>
               <a:pathLst>
-                <a:path w="0" h="3826579">
+                <a:path w="0" h="3649639">
                   <a:moveTo>
-                    <a:pt x="0" y="3826579"/>
+                    <a:pt x="0" y="3649639"/>
                   </a:moveTo>
                   <a:lnTo>
                     <a:pt x="0" y="0"/>
@@ -2572,15 +2572,15 @@
           </p:nvSpPr>
           <p:spPr>
             <a:xfrm>
-              <a:off x="6933186" y="1896563"/>
-              <a:ext cx="0" cy="3826579"/>
+              <a:off x="6933186" y="2073503"/>
+              <a:ext cx="0" cy="3649639"/>
             </a:xfrm>
             <a:custGeom>
               <a:avLst/>
               <a:pathLst>
-                <a:path w="0" h="3826579">
+                <a:path w="0" h="3649639">
                   <a:moveTo>
-                    <a:pt x="0" y="3826579"/>
+                    <a:pt x="0" y="3649639"/>
                   </a:moveTo>
                   <a:lnTo>
                     <a:pt x="0" y="0"/>
@@ -2615,7 +2615,7 @@
           </p:nvSpPr>
           <p:spPr>
             <a:xfrm>
-              <a:off x="817517" y="5549207"/>
+              <a:off x="817517" y="5557249"/>
               <a:ext cx="7799693" cy="0"/>
             </a:xfrm>
             <a:custGeom>
@@ -2658,7 +2658,7 @@
           </p:nvSpPr>
           <p:spPr>
             <a:xfrm>
-              <a:off x="817517" y="4679530"/>
+              <a:off x="817517" y="4727786"/>
               <a:ext cx="7799693" cy="0"/>
             </a:xfrm>
             <a:custGeom>
@@ -2701,7 +2701,7 @@
           </p:nvSpPr>
           <p:spPr>
             <a:xfrm>
-              <a:off x="817517" y="3809853"/>
+              <a:off x="817517" y="3898322"/>
               <a:ext cx="7799693" cy="0"/>
             </a:xfrm>
             <a:custGeom>
@@ -2744,7 +2744,7 @@
           </p:nvSpPr>
           <p:spPr>
             <a:xfrm>
-              <a:off x="817517" y="2940175"/>
+              <a:off x="817517" y="3068859"/>
               <a:ext cx="7799693" cy="0"/>
             </a:xfrm>
             <a:custGeom>
@@ -2787,7 +2787,7 @@
           </p:nvSpPr>
           <p:spPr>
             <a:xfrm>
-              <a:off x="817517" y="2070498"/>
+              <a:off x="817517" y="2239395"/>
               <a:ext cx="7799693" cy="0"/>
             </a:xfrm>
             <a:custGeom>
@@ -2830,15 +2830,15 @@
           </p:nvSpPr>
           <p:spPr>
             <a:xfrm>
-              <a:off x="2501542" y="1896563"/>
-              <a:ext cx="0" cy="3826579"/>
+              <a:off x="2501542" y="2073503"/>
+              <a:ext cx="0" cy="3649639"/>
             </a:xfrm>
             <a:custGeom>
               <a:avLst/>
               <a:pathLst>
-                <a:path w="0" h="3826579">
+                <a:path w="0" h="3649639">
                   <a:moveTo>
-                    <a:pt x="0" y="3826579"/>
+                    <a:pt x="0" y="3649639"/>
                   </a:moveTo>
                   <a:lnTo>
                     <a:pt x="0" y="0"/>
@@ -2873,15 +2873,15 @@
           </p:nvSpPr>
           <p:spPr>
             <a:xfrm>
-              <a:off x="4274200" y="1896563"/>
-              <a:ext cx="0" cy="3826579"/>
+              <a:off x="4274200" y="2073503"/>
+              <a:ext cx="0" cy="3649639"/>
             </a:xfrm>
             <a:custGeom>
               <a:avLst/>
               <a:pathLst>
-                <a:path w="0" h="3826579">
+                <a:path w="0" h="3649639">
                   <a:moveTo>
-                    <a:pt x="0" y="3826579"/>
+                    <a:pt x="0" y="3649639"/>
                   </a:moveTo>
                   <a:lnTo>
                     <a:pt x="0" y="0"/>
@@ -2916,15 +2916,15 @@
           </p:nvSpPr>
           <p:spPr>
             <a:xfrm>
-              <a:off x="6046857" y="1896563"/>
-              <a:ext cx="0" cy="3826579"/>
+              <a:off x="6046857" y="2073503"/>
+              <a:ext cx="0" cy="3649639"/>
             </a:xfrm>
             <a:custGeom>
               <a:avLst/>
               <a:pathLst>
-                <a:path w="0" h="3826579">
+                <a:path w="0" h="3649639">
                   <a:moveTo>
-                    <a:pt x="0" y="3826579"/>
+                    <a:pt x="0" y="3649639"/>
                   </a:moveTo>
                   <a:lnTo>
                     <a:pt x="0" y="0"/>
@@ -2959,15 +2959,15 @@
           </p:nvSpPr>
           <p:spPr>
             <a:xfrm>
-              <a:off x="7819515" y="1896563"/>
-              <a:ext cx="0" cy="3826579"/>
+              <a:off x="7819515" y="2073503"/>
+              <a:ext cx="0" cy="3649639"/>
             </a:xfrm>
             <a:custGeom>
               <a:avLst/>
               <a:pathLst>
-                <a:path w="0" h="3826579">
+                <a:path w="0" h="3649639">
                   <a:moveTo>
-                    <a:pt x="0" y="3826579"/>
+                    <a:pt x="0" y="3649639"/>
                   </a:moveTo>
                   <a:lnTo>
                     <a:pt x="0" y="0"/>
@@ -3002,567 +3002,567 @@
           </p:nvSpPr>
           <p:spPr>
             <a:xfrm>
-              <a:off x="817517" y="1896563"/>
-              <a:ext cx="7235830" cy="3561407"/>
+              <a:off x="817517" y="2073503"/>
+              <a:ext cx="7235830" cy="3396729"/>
             </a:xfrm>
             <a:custGeom>
               <a:avLst/>
               <a:pathLst>
-                <a:path w="7235830" h="3561407">
+                <a:path w="7235830" h="3396729">
                   <a:moveTo>
                     <a:pt x="1043093" y="0"/>
                   </a:moveTo>
                   <a:lnTo>
-                    <a:pt x="1113747" y="150708"/>
-                  </a:lnTo>
-                  <a:lnTo>
-                    <a:pt x="1187508" y="301275"/>
-                  </a:lnTo>
-                  <a:lnTo>
-                    <a:pt x="1261268" y="445369"/>
-                  </a:lnTo>
-                  <a:lnTo>
-                    <a:pt x="1335028" y="583268"/>
-                  </a:lnTo>
-                  <a:lnTo>
-                    <a:pt x="1408788" y="715238"/>
-                  </a:lnTo>
-                  <a:lnTo>
-                    <a:pt x="1482548" y="841533"/>
-                  </a:lnTo>
-                  <a:lnTo>
-                    <a:pt x="1556308" y="962398"/>
-                  </a:lnTo>
-                  <a:lnTo>
-                    <a:pt x="1630068" y="1078067"/>
-                  </a:lnTo>
-                  <a:lnTo>
-                    <a:pt x="1703828" y="1188762"/>
-                  </a:lnTo>
-                  <a:lnTo>
-                    <a:pt x="1777588" y="1294698"/>
-                  </a:lnTo>
-                  <a:lnTo>
-                    <a:pt x="1851348" y="1396080"/>
-                  </a:lnTo>
-                  <a:lnTo>
-                    <a:pt x="1925108" y="1493102"/>
-                  </a:lnTo>
-                  <a:lnTo>
-                    <a:pt x="1998868" y="1585953"/>
-                  </a:lnTo>
-                  <a:lnTo>
-                    <a:pt x="2072628" y="1674811"/>
-                  </a:lnTo>
-                  <a:lnTo>
-                    <a:pt x="2146388" y="1759849"/>
-                  </a:lnTo>
-                  <a:lnTo>
-                    <a:pt x="2220148" y="1841231"/>
-                  </a:lnTo>
-                  <a:lnTo>
-                    <a:pt x="2293908" y="1919114"/>
-                  </a:lnTo>
-                  <a:lnTo>
-                    <a:pt x="2367668" y="1993648"/>
-                  </a:lnTo>
-                  <a:lnTo>
-                    <a:pt x="2441428" y="2064977"/>
-                  </a:lnTo>
-                  <a:lnTo>
-                    <a:pt x="2515188" y="2133240"/>
-                  </a:lnTo>
-                  <a:lnTo>
-                    <a:pt x="2588948" y="2198568"/>
-                  </a:lnTo>
-                  <a:lnTo>
-                    <a:pt x="2662708" y="2261086"/>
-                  </a:lnTo>
-                  <a:lnTo>
-                    <a:pt x="2736468" y="2320917"/>
-                  </a:lnTo>
-                  <a:lnTo>
-                    <a:pt x="2810228" y="2378176"/>
-                  </a:lnTo>
-                  <a:lnTo>
-                    <a:pt x="2883988" y="2432972"/>
-                  </a:lnTo>
-                  <a:lnTo>
-                    <a:pt x="2957748" y="2485413"/>
-                  </a:lnTo>
-                  <a:lnTo>
-                    <a:pt x="3031508" y="2535598"/>
-                  </a:lnTo>
-                  <a:lnTo>
-                    <a:pt x="3105268" y="2583626"/>
-                  </a:lnTo>
-                  <a:lnTo>
-                    <a:pt x="3179028" y="2629589"/>
-                  </a:lnTo>
-                  <a:lnTo>
-                    <a:pt x="3252788" y="2673576"/>
-                  </a:lnTo>
-                  <a:lnTo>
-                    <a:pt x="3326548" y="2715672"/>
-                  </a:lnTo>
-                  <a:lnTo>
-                    <a:pt x="3400308" y="2755957"/>
-                  </a:lnTo>
-                  <a:lnTo>
-                    <a:pt x="3474068" y="2780184"/>
-                  </a:lnTo>
-                  <a:lnTo>
-                    <a:pt x="3547828" y="2770973"/>
-                  </a:lnTo>
-                  <a:lnTo>
-                    <a:pt x="3621588" y="2761664"/>
-                  </a:lnTo>
-                  <a:lnTo>
-                    <a:pt x="3695348" y="2752257"/>
-                  </a:lnTo>
-                  <a:lnTo>
-                    <a:pt x="3769108" y="2742751"/>
-                  </a:lnTo>
-                  <a:lnTo>
-                    <a:pt x="3842868" y="2733144"/>
-                  </a:lnTo>
-                  <a:lnTo>
-                    <a:pt x="3916628" y="2723436"/>
-                  </a:lnTo>
-                  <a:lnTo>
-                    <a:pt x="3990388" y="2713626"/>
-                  </a:lnTo>
-                  <a:lnTo>
-                    <a:pt x="4064149" y="2703711"/>
-                  </a:lnTo>
-                  <a:lnTo>
-                    <a:pt x="4137909" y="2693693"/>
-                  </a:lnTo>
-                  <a:lnTo>
-                    <a:pt x="4211669" y="2683568"/>
-                  </a:lnTo>
-                  <a:lnTo>
-                    <a:pt x="4285429" y="2673336"/>
-                  </a:lnTo>
-                  <a:lnTo>
-                    <a:pt x="4359189" y="2662997"/>
-                  </a:lnTo>
-                  <a:lnTo>
-                    <a:pt x="4432949" y="2652548"/>
-                  </a:lnTo>
-                  <a:lnTo>
-                    <a:pt x="4506709" y="2641989"/>
-                  </a:lnTo>
-                  <a:lnTo>
-                    <a:pt x="4580469" y="2631319"/>
-                  </a:lnTo>
-                  <a:lnTo>
-                    <a:pt x="4654229" y="2620536"/>
-                  </a:lnTo>
-                  <a:lnTo>
-                    <a:pt x="4727989" y="2609639"/>
-                  </a:lnTo>
-                  <a:lnTo>
-                    <a:pt x="4801749" y="2598626"/>
-                  </a:lnTo>
-                  <a:lnTo>
-                    <a:pt x="4875509" y="2587498"/>
-                  </a:lnTo>
-                  <a:lnTo>
-                    <a:pt x="4949269" y="2576252"/>
-                  </a:lnTo>
-                  <a:lnTo>
-                    <a:pt x="5023029" y="2564888"/>
-                  </a:lnTo>
-                  <a:lnTo>
-                    <a:pt x="5096789" y="2553403"/>
-                  </a:lnTo>
-                  <a:lnTo>
-                    <a:pt x="5170549" y="2541797"/>
-                  </a:lnTo>
-                  <a:lnTo>
-                    <a:pt x="5244309" y="2530069"/>
-                  </a:lnTo>
-                  <a:lnTo>
-                    <a:pt x="5318069" y="2518217"/>
-                  </a:lnTo>
-                  <a:lnTo>
-                    <a:pt x="5391829" y="2506240"/>
-                  </a:lnTo>
-                  <a:lnTo>
-                    <a:pt x="5465589" y="2494136"/>
-                  </a:lnTo>
-                  <a:lnTo>
-                    <a:pt x="5539349" y="2481904"/>
-                  </a:lnTo>
-                  <a:lnTo>
-                    <a:pt x="5613109" y="2469544"/>
-                  </a:lnTo>
-                  <a:lnTo>
-                    <a:pt x="5686869" y="2457053"/>
-                  </a:lnTo>
-                  <a:lnTo>
-                    <a:pt x="5760629" y="2444429"/>
-                  </a:lnTo>
-                  <a:lnTo>
-                    <a:pt x="5834389" y="2431673"/>
-                  </a:lnTo>
-                  <a:lnTo>
-                    <a:pt x="5908149" y="2418782"/>
-                  </a:lnTo>
-                  <a:lnTo>
-                    <a:pt x="5981909" y="2405755"/>
-                  </a:lnTo>
-                  <a:lnTo>
-                    <a:pt x="6055669" y="2392590"/>
-                  </a:lnTo>
-                  <a:lnTo>
-                    <a:pt x="6129429" y="2379287"/>
-                  </a:lnTo>
-                  <a:lnTo>
-                    <a:pt x="6203189" y="2365843"/>
-                  </a:lnTo>
-                  <a:lnTo>
-                    <a:pt x="6276949" y="2352256"/>
-                  </a:lnTo>
-                  <a:lnTo>
-                    <a:pt x="6350709" y="2338527"/>
-                  </a:lnTo>
-                  <a:lnTo>
-                    <a:pt x="6424469" y="2324653"/>
-                  </a:lnTo>
-                  <a:lnTo>
-                    <a:pt x="6498229" y="2310632"/>
-                  </a:lnTo>
-                  <a:lnTo>
-                    <a:pt x="6571989" y="2296463"/>
-                  </a:lnTo>
-                  <a:lnTo>
-                    <a:pt x="6645749" y="2282144"/>
-                  </a:lnTo>
-                  <a:lnTo>
-                    <a:pt x="6719509" y="2267674"/>
-                  </a:lnTo>
-                  <a:lnTo>
-                    <a:pt x="6793269" y="2253052"/>
-                  </a:lnTo>
-                  <a:lnTo>
-                    <a:pt x="6867029" y="2238275"/>
-                  </a:lnTo>
-                  <a:lnTo>
-                    <a:pt x="6940789" y="2223342"/>
-                  </a:lnTo>
-                  <a:lnTo>
-                    <a:pt x="7014550" y="2208251"/>
-                  </a:lnTo>
-                  <a:lnTo>
-                    <a:pt x="7088310" y="2193001"/>
-                  </a:lnTo>
-                  <a:lnTo>
-                    <a:pt x="7162070" y="2177590"/>
-                  </a:lnTo>
-                  <a:lnTo>
-                    <a:pt x="7235830" y="2162017"/>
-                  </a:lnTo>
-                  <a:lnTo>
-                    <a:pt x="7235830" y="3561407"/>
-                  </a:lnTo>
-                  <a:lnTo>
-                    <a:pt x="7162070" y="3557308"/>
-                  </a:lnTo>
-                  <a:lnTo>
-                    <a:pt x="7088310" y="3553025"/>
-                  </a:lnTo>
-                  <a:lnTo>
-                    <a:pt x="7014550" y="3548550"/>
-                  </a:lnTo>
-                  <a:lnTo>
-                    <a:pt x="6940789" y="3543873"/>
-                  </a:lnTo>
-                  <a:lnTo>
-                    <a:pt x="6867029" y="3538986"/>
-                  </a:lnTo>
-                  <a:lnTo>
-                    <a:pt x="6793269" y="3533880"/>
-                  </a:lnTo>
-                  <a:lnTo>
-                    <a:pt x="6719509" y="3528544"/>
-                  </a:lnTo>
-                  <a:lnTo>
-                    <a:pt x="6645749" y="3522969"/>
-                  </a:lnTo>
-                  <a:lnTo>
-                    <a:pt x="6571989" y="3517143"/>
-                  </a:lnTo>
-                  <a:lnTo>
-                    <a:pt x="6498229" y="3511055"/>
-                  </a:lnTo>
-                  <a:lnTo>
-                    <a:pt x="6424469" y="3504694"/>
-                  </a:lnTo>
-                  <a:lnTo>
-                    <a:pt x="6350709" y="3498047"/>
-                  </a:lnTo>
-                  <a:lnTo>
-                    <a:pt x="6276949" y="3491102"/>
-                  </a:lnTo>
-                  <a:lnTo>
-                    <a:pt x="6203189" y="3483844"/>
-                  </a:lnTo>
-                  <a:lnTo>
-                    <a:pt x="6129429" y="3476260"/>
-                  </a:lnTo>
-                  <a:lnTo>
-                    <a:pt x="6055669" y="3468336"/>
-                  </a:lnTo>
-                  <a:lnTo>
-                    <a:pt x="5981909" y="3460056"/>
-                  </a:lnTo>
-                  <a:lnTo>
-                    <a:pt x="5908149" y="3451403"/>
-                  </a:lnTo>
-                  <a:lnTo>
-                    <a:pt x="5834389" y="3442362"/>
-                  </a:lnTo>
-                  <a:lnTo>
-                    <a:pt x="5760629" y="3432915"/>
-                  </a:lnTo>
-                  <a:lnTo>
-                    <a:pt x="5686869" y="3423043"/>
-                  </a:lnTo>
-                  <a:lnTo>
-                    <a:pt x="5613109" y="3412728"/>
-                  </a:lnTo>
-                  <a:lnTo>
-                    <a:pt x="5539349" y="3401949"/>
-                  </a:lnTo>
-                  <a:lnTo>
-                    <a:pt x="5465589" y="3390686"/>
-                  </a:lnTo>
-                  <a:lnTo>
-                    <a:pt x="5391829" y="3378917"/>
-                  </a:lnTo>
-                  <a:lnTo>
-                    <a:pt x="5318069" y="3366619"/>
-                  </a:lnTo>
-                  <a:lnTo>
-                    <a:pt x="5244309" y="3353769"/>
-                  </a:lnTo>
-                  <a:lnTo>
-                    <a:pt x="5170549" y="3340341"/>
-                  </a:lnTo>
-                  <a:lnTo>
-                    <a:pt x="5096789" y="3326310"/>
-                  </a:lnTo>
-                  <a:lnTo>
-                    <a:pt x="5023029" y="3311649"/>
-                  </a:lnTo>
-                  <a:lnTo>
-                    <a:pt x="4949269" y="3296329"/>
-                  </a:lnTo>
-                  <a:lnTo>
-                    <a:pt x="4875509" y="3280321"/>
-                  </a:lnTo>
-                  <a:lnTo>
-                    <a:pt x="4801749" y="3263593"/>
-                  </a:lnTo>
-                  <a:lnTo>
-                    <a:pt x="4727989" y="3246114"/>
-                  </a:lnTo>
-                  <a:lnTo>
-                    <a:pt x="4654229" y="3227850"/>
-                  </a:lnTo>
-                  <a:lnTo>
-                    <a:pt x="4580469" y="3208765"/>
-                  </a:lnTo>
-                  <a:lnTo>
-                    <a:pt x="4506709" y="3188823"/>
-                  </a:lnTo>
-                  <a:lnTo>
-                    <a:pt x="4432949" y="3167985"/>
-                  </a:lnTo>
-                  <a:lnTo>
-                    <a:pt x="4359189" y="3146211"/>
-                  </a:lnTo>
-                  <a:lnTo>
-                    <a:pt x="4285429" y="3123458"/>
-                  </a:lnTo>
-                  <a:lnTo>
-                    <a:pt x="4211669" y="3099683"/>
-                  </a:lnTo>
-                  <a:lnTo>
-                    <a:pt x="4137909" y="3074840"/>
-                  </a:lnTo>
-                  <a:lnTo>
-                    <a:pt x="4064149" y="3048881"/>
-                  </a:lnTo>
-                  <a:lnTo>
-                    <a:pt x="3990388" y="3021756"/>
-                  </a:lnTo>
-                  <a:lnTo>
-                    <a:pt x="3916628" y="2993412"/>
-                  </a:lnTo>
-                  <a:lnTo>
-                    <a:pt x="3842868" y="2963794"/>
-                  </a:lnTo>
-                  <a:lnTo>
-                    <a:pt x="3769108" y="2932846"/>
-                  </a:lnTo>
-                  <a:lnTo>
-                    <a:pt x="3695348" y="2900508"/>
-                  </a:lnTo>
-                  <a:lnTo>
-                    <a:pt x="3621588" y="2866716"/>
-                  </a:lnTo>
-                  <a:lnTo>
-                    <a:pt x="3547828" y="2831407"/>
-                  </a:lnTo>
-                  <a:lnTo>
-                    <a:pt x="3474068" y="2794511"/>
-                  </a:lnTo>
-                  <a:lnTo>
-                    <a:pt x="3400308" y="2789300"/>
-                  </a:lnTo>
-                  <a:lnTo>
-                    <a:pt x="3326548" y="2798319"/>
-                  </a:lnTo>
-                  <a:lnTo>
-                    <a:pt x="3252788" y="2807245"/>
-                  </a:lnTo>
-                  <a:lnTo>
-                    <a:pt x="3179028" y="2816078"/>
-                  </a:lnTo>
-                  <a:lnTo>
-                    <a:pt x="3105268" y="2824818"/>
-                  </a:lnTo>
-                  <a:lnTo>
-                    <a:pt x="3031508" y="2833467"/>
-                  </a:lnTo>
-                  <a:lnTo>
-                    <a:pt x="2957748" y="2842025"/>
-                  </a:lnTo>
-                  <a:lnTo>
-                    <a:pt x="2883988" y="2850494"/>
-                  </a:lnTo>
-                  <a:lnTo>
-                    <a:pt x="2810228" y="2858875"/>
-                  </a:lnTo>
-                  <a:lnTo>
-                    <a:pt x="2736468" y="2867168"/>
-                  </a:lnTo>
-                  <a:lnTo>
-                    <a:pt x="2662708" y="2875374"/>
-                  </a:lnTo>
-                  <a:lnTo>
-                    <a:pt x="2588948" y="2883495"/>
-                  </a:lnTo>
-                  <a:lnTo>
-                    <a:pt x="2515188" y="2891531"/>
-                  </a:lnTo>
-                  <a:lnTo>
-                    <a:pt x="2441428" y="2899483"/>
-                  </a:lnTo>
-                  <a:lnTo>
-                    <a:pt x="2367668" y="2907352"/>
-                  </a:lnTo>
-                  <a:lnTo>
-                    <a:pt x="2293908" y="2915138"/>
-                  </a:lnTo>
-                  <a:lnTo>
-                    <a:pt x="2220148" y="2922843"/>
-                  </a:lnTo>
-                  <a:lnTo>
-                    <a:pt x="2146388" y="2930468"/>
-                  </a:lnTo>
-                  <a:lnTo>
-                    <a:pt x="2072628" y="2938013"/>
-                  </a:lnTo>
-                  <a:lnTo>
-                    <a:pt x="1998868" y="2945480"/>
-                  </a:lnTo>
-                  <a:lnTo>
-                    <a:pt x="1925108" y="2952868"/>
-                  </a:lnTo>
-                  <a:lnTo>
-                    <a:pt x="1851348" y="2960179"/>
-                  </a:lnTo>
-                  <a:lnTo>
-                    <a:pt x="1777588" y="2967413"/>
-                  </a:lnTo>
-                  <a:lnTo>
-                    <a:pt x="1703828" y="2974573"/>
-                  </a:lnTo>
-                  <a:lnTo>
-                    <a:pt x="1630068" y="2981657"/>
-                  </a:lnTo>
-                  <a:lnTo>
-                    <a:pt x="1556308" y="2988667"/>
-                  </a:lnTo>
-                  <a:lnTo>
-                    <a:pt x="1482548" y="2995604"/>
-                  </a:lnTo>
-                  <a:lnTo>
-                    <a:pt x="1408788" y="3002469"/>
-                  </a:lnTo>
-                  <a:lnTo>
-                    <a:pt x="1335028" y="3009262"/>
-                  </a:lnTo>
-                  <a:lnTo>
-                    <a:pt x="1261268" y="3015983"/>
-                  </a:lnTo>
-                  <a:lnTo>
-                    <a:pt x="1187508" y="3022635"/>
-                  </a:lnTo>
-                  <a:lnTo>
-                    <a:pt x="1113747" y="3029217"/>
-                  </a:lnTo>
-                  <a:lnTo>
-                    <a:pt x="1039987" y="3035731"/>
-                  </a:lnTo>
-                  <a:lnTo>
-                    <a:pt x="966227" y="3042176"/>
-                  </a:lnTo>
-                  <a:lnTo>
-                    <a:pt x="892467" y="3048554"/>
-                  </a:lnTo>
-                  <a:lnTo>
-                    <a:pt x="818707" y="3054865"/>
-                  </a:lnTo>
-                  <a:lnTo>
-                    <a:pt x="744947" y="3061111"/>
-                  </a:lnTo>
-                  <a:lnTo>
-                    <a:pt x="671187" y="3067291"/>
-                  </a:lnTo>
-                  <a:lnTo>
-                    <a:pt x="597427" y="3073406"/>
-                  </a:lnTo>
-                  <a:lnTo>
-                    <a:pt x="523667" y="3079458"/>
-                  </a:lnTo>
-                  <a:lnTo>
-                    <a:pt x="449907" y="3085447"/>
-                  </a:lnTo>
-                  <a:lnTo>
-                    <a:pt x="376147" y="3091372"/>
-                  </a:lnTo>
-                  <a:lnTo>
-                    <a:pt x="302387" y="3097236"/>
-                  </a:lnTo>
-                  <a:lnTo>
-                    <a:pt x="228627" y="3103039"/>
-                  </a:lnTo>
-                  <a:lnTo>
-                    <a:pt x="154867" y="3108781"/>
-                  </a:lnTo>
-                  <a:lnTo>
-                    <a:pt x="81107" y="3114463"/>
-                  </a:lnTo>
-                  <a:lnTo>
-                    <a:pt x="7347" y="3120086"/>
-                  </a:lnTo>
-                  <a:lnTo>
-                    <a:pt x="0" y="3120640"/>
+                    <a:pt x="1113747" y="143739"/>
+                  </a:lnTo>
+                  <a:lnTo>
+                    <a:pt x="1187508" y="287345"/>
+                  </a:lnTo>
+                  <a:lnTo>
+                    <a:pt x="1261268" y="424776"/>
+                  </a:lnTo>
+                  <a:lnTo>
+                    <a:pt x="1335028" y="556298"/>
+                  </a:lnTo>
+                  <a:lnTo>
+                    <a:pt x="1408788" y="682165"/>
+                  </a:lnTo>
+                  <a:lnTo>
+                    <a:pt x="1482548" y="802621"/>
+                  </a:lnTo>
+                  <a:lnTo>
+                    <a:pt x="1556308" y="917897"/>
+                  </a:lnTo>
+                  <a:lnTo>
+                    <a:pt x="1630068" y="1028218"/>
+                  </a:lnTo>
+                  <a:lnTo>
+                    <a:pt x="1703828" y="1133795"/>
+                  </a:lnTo>
+                  <a:lnTo>
+                    <a:pt x="1777588" y="1234832"/>
+                  </a:lnTo>
+                  <a:lnTo>
+                    <a:pt x="1851348" y="1331525"/>
+                  </a:lnTo>
+                  <a:lnTo>
+                    <a:pt x="1925108" y="1424061"/>
+                  </a:lnTo>
+                  <a:lnTo>
+                    <a:pt x="1998868" y="1512619"/>
+                  </a:lnTo>
+                  <a:lnTo>
+                    <a:pt x="2072628" y="1597369"/>
+                  </a:lnTo>
+                  <a:lnTo>
+                    <a:pt x="2146388" y="1678474"/>
+                  </a:lnTo>
+                  <a:lnTo>
+                    <a:pt x="2220148" y="1756093"/>
+                  </a:lnTo>
+                  <a:lnTo>
+                    <a:pt x="2293908" y="1830375"/>
+                  </a:lnTo>
+                  <a:lnTo>
+                    <a:pt x="2367668" y="1901462"/>
+                  </a:lnTo>
+                  <a:lnTo>
+                    <a:pt x="2441428" y="1969494"/>
+                  </a:lnTo>
+                  <a:lnTo>
+                    <a:pt x="2515188" y="2034600"/>
+                  </a:lnTo>
+                  <a:lnTo>
+                    <a:pt x="2588948" y="2096907"/>
+                  </a:lnTo>
+                  <a:lnTo>
+                    <a:pt x="2662708" y="2156535"/>
+                  </a:lnTo>
+                  <a:lnTo>
+                    <a:pt x="2736468" y="2213599"/>
+                  </a:lnTo>
+                  <a:lnTo>
+                    <a:pt x="2810228" y="2268210"/>
+                  </a:lnTo>
+                  <a:lnTo>
+                    <a:pt x="2883988" y="2320472"/>
+                  </a:lnTo>
+                  <a:lnTo>
+                    <a:pt x="2957748" y="2370488"/>
+                  </a:lnTo>
+                  <a:lnTo>
+                    <a:pt x="3031508" y="2418353"/>
+                  </a:lnTo>
+                  <a:lnTo>
+                    <a:pt x="3105268" y="2464160"/>
+                  </a:lnTo>
+                  <a:lnTo>
+                    <a:pt x="3179028" y="2507998"/>
+                  </a:lnTo>
+                  <a:lnTo>
+                    <a:pt x="3252788" y="2549951"/>
+                  </a:lnTo>
+                  <a:lnTo>
+                    <a:pt x="3326548" y="2590100"/>
+                  </a:lnTo>
+                  <a:lnTo>
+                    <a:pt x="3400308" y="2628523"/>
+                  </a:lnTo>
+                  <a:lnTo>
+                    <a:pt x="3474068" y="2651630"/>
+                  </a:lnTo>
+                  <a:lnTo>
+                    <a:pt x="3547828" y="2642844"/>
+                  </a:lnTo>
+                  <a:lnTo>
+                    <a:pt x="3621588" y="2633966"/>
+                  </a:lnTo>
+                  <a:lnTo>
+                    <a:pt x="3695348" y="2624994"/>
+                  </a:lnTo>
+                  <a:lnTo>
+                    <a:pt x="3769108" y="2615927"/>
+                  </a:lnTo>
+                  <a:lnTo>
+                    <a:pt x="3842868" y="2606765"/>
+                  </a:lnTo>
+                  <a:lnTo>
+                    <a:pt x="3916628" y="2597505"/>
+                  </a:lnTo>
+                  <a:lnTo>
+                    <a:pt x="3990388" y="2588149"/>
+                  </a:lnTo>
+                  <a:lnTo>
+                    <a:pt x="4064149" y="2578693"/>
+                  </a:lnTo>
+                  <a:lnTo>
+                    <a:pt x="4137909" y="2569137"/>
+                  </a:lnTo>
+                  <a:lnTo>
+                    <a:pt x="4211669" y="2559481"/>
+                  </a:lnTo>
+                  <a:lnTo>
+                    <a:pt x="4285429" y="2549722"/>
+                  </a:lnTo>
+                  <a:lnTo>
+                    <a:pt x="4359189" y="2539861"/>
+                  </a:lnTo>
+                  <a:lnTo>
+                    <a:pt x="4432949" y="2529895"/>
+                  </a:lnTo>
+                  <a:lnTo>
+                    <a:pt x="4506709" y="2519825"/>
+                  </a:lnTo>
+                  <a:lnTo>
+                    <a:pt x="4580469" y="2509647"/>
+                  </a:lnTo>
+                  <a:lnTo>
+                    <a:pt x="4654229" y="2499363"/>
+                  </a:lnTo>
+                  <a:lnTo>
+                    <a:pt x="4727989" y="2488970"/>
+                  </a:lnTo>
+                  <a:lnTo>
+                    <a:pt x="4801749" y="2478467"/>
+                  </a:lnTo>
+                  <a:lnTo>
+                    <a:pt x="4875509" y="2467853"/>
+                  </a:lnTo>
+                  <a:lnTo>
+                    <a:pt x="4949269" y="2457127"/>
+                  </a:lnTo>
+                  <a:lnTo>
+                    <a:pt x="5023029" y="2446288"/>
+                  </a:lnTo>
+                  <a:lnTo>
+                    <a:pt x="5096789" y="2435335"/>
+                  </a:lnTo>
+                  <a:lnTo>
+                    <a:pt x="5170549" y="2424266"/>
+                  </a:lnTo>
+                  <a:lnTo>
+                    <a:pt x="5244309" y="2413080"/>
+                  </a:lnTo>
+                  <a:lnTo>
+                    <a:pt x="5318069" y="2401776"/>
+                  </a:lnTo>
+                  <a:lnTo>
+                    <a:pt x="5391829" y="2390352"/>
+                  </a:lnTo>
+                  <a:lnTo>
+                    <a:pt x="5465589" y="2378808"/>
+                  </a:lnTo>
+                  <a:lnTo>
+                    <a:pt x="5539349" y="2367142"/>
+                  </a:lnTo>
+                  <a:lnTo>
+                    <a:pt x="5613109" y="2355353"/>
+                  </a:lnTo>
+                  <a:lnTo>
+                    <a:pt x="5686869" y="2343439"/>
+                  </a:lnTo>
+                  <a:lnTo>
+                    <a:pt x="5760629" y="2331400"/>
+                  </a:lnTo>
+                  <a:lnTo>
+                    <a:pt x="5834389" y="2319233"/>
+                  </a:lnTo>
+                  <a:lnTo>
+                    <a:pt x="5908149" y="2306938"/>
+                  </a:lnTo>
+                  <a:lnTo>
+                    <a:pt x="5981909" y="2294514"/>
+                  </a:lnTo>
+                  <a:lnTo>
+                    <a:pt x="6055669" y="2281958"/>
+                  </a:lnTo>
+                  <a:lnTo>
+                    <a:pt x="6129429" y="2269269"/>
+                  </a:lnTo>
+                  <a:lnTo>
+                    <a:pt x="6203189" y="2256447"/>
+                  </a:lnTo>
+                  <a:lnTo>
+                    <a:pt x="6276949" y="2243489"/>
+                  </a:lnTo>
+                  <a:lnTo>
+                    <a:pt x="6350709" y="2230394"/>
+                  </a:lnTo>
+                  <a:lnTo>
+                    <a:pt x="6424469" y="2217161"/>
+                  </a:lnTo>
+                  <a:lnTo>
+                    <a:pt x="6498229" y="2203789"/>
+                  </a:lnTo>
+                  <a:lnTo>
+                    <a:pt x="6571989" y="2190275"/>
+                  </a:lnTo>
+                  <a:lnTo>
+                    <a:pt x="6645749" y="2176618"/>
+                  </a:lnTo>
+                  <a:lnTo>
+                    <a:pt x="6719509" y="2162818"/>
+                  </a:lnTo>
+                  <a:lnTo>
+                    <a:pt x="6793269" y="2148871"/>
+                  </a:lnTo>
+                  <a:lnTo>
+                    <a:pt x="6867029" y="2134778"/>
+                  </a:lnTo>
+                  <a:lnTo>
+                    <a:pt x="6940789" y="2120535"/>
+                  </a:lnTo>
+                  <a:lnTo>
+                    <a:pt x="7014550" y="2106143"/>
+                  </a:lnTo>
+                  <a:lnTo>
+                    <a:pt x="7088310" y="2091598"/>
+                  </a:lnTo>
+                  <a:lnTo>
+                    <a:pt x="7162070" y="2076899"/>
+                  </a:lnTo>
+                  <a:lnTo>
+                    <a:pt x="7235830" y="2062046"/>
+                  </a:lnTo>
+                  <a:lnTo>
+                    <a:pt x="7235830" y="3396729"/>
+                  </a:lnTo>
+                  <a:lnTo>
+                    <a:pt x="7162070" y="3392820"/>
+                  </a:lnTo>
+                  <a:lnTo>
+                    <a:pt x="7088310" y="3388735"/>
+                  </a:lnTo>
+                  <a:lnTo>
+                    <a:pt x="7014550" y="3384466"/>
+                  </a:lnTo>
+                  <a:lnTo>
+                    <a:pt x="6940789" y="3380006"/>
+                  </a:lnTo>
+                  <a:lnTo>
+                    <a:pt x="6867029" y="3375345"/>
+                  </a:lnTo>
+                  <a:lnTo>
+                    <a:pt x="6793269" y="3370475"/>
+                  </a:lnTo>
+                  <a:lnTo>
+                    <a:pt x="6719509" y="3365386"/>
+                  </a:lnTo>
+                  <a:lnTo>
+                    <a:pt x="6645749" y="3360068"/>
+                  </a:lnTo>
+                  <a:lnTo>
+                    <a:pt x="6571989" y="3354512"/>
+                  </a:lnTo>
+                  <a:lnTo>
+                    <a:pt x="6498229" y="3348706"/>
+                  </a:lnTo>
+                  <a:lnTo>
+                    <a:pt x="6424469" y="3342639"/>
+                  </a:lnTo>
+                  <a:lnTo>
+                    <a:pt x="6350709" y="3336299"/>
+                  </a:lnTo>
+                  <a:lnTo>
+                    <a:pt x="6276949" y="3329674"/>
+                  </a:lnTo>
+                  <a:lnTo>
+                    <a:pt x="6203189" y="3322752"/>
+                  </a:lnTo>
+                  <a:lnTo>
+                    <a:pt x="6129429" y="3315519"/>
+                  </a:lnTo>
+                  <a:lnTo>
+                    <a:pt x="6055669" y="3307961"/>
+                  </a:lnTo>
+                  <a:lnTo>
+                    <a:pt x="5981909" y="3300064"/>
+                  </a:lnTo>
+                  <a:lnTo>
+                    <a:pt x="5908149" y="3291812"/>
+                  </a:lnTo>
+                  <a:lnTo>
+                    <a:pt x="5834389" y="3283188"/>
+                  </a:lnTo>
+                  <a:lnTo>
+                    <a:pt x="5760629" y="3274178"/>
+                  </a:lnTo>
+                  <a:lnTo>
+                    <a:pt x="5686869" y="3264763"/>
+                  </a:lnTo>
+                  <a:lnTo>
+                    <a:pt x="5613109" y="3254924"/>
+                  </a:lnTo>
+                  <a:lnTo>
+                    <a:pt x="5539349" y="3244644"/>
+                  </a:lnTo>
+                  <a:lnTo>
+                    <a:pt x="5465589" y="3233902"/>
+                  </a:lnTo>
+                  <a:lnTo>
+                    <a:pt x="5391829" y="3222677"/>
+                  </a:lnTo>
+                  <a:lnTo>
+                    <a:pt x="5318069" y="3210948"/>
+                  </a:lnTo>
+                  <a:lnTo>
+                    <a:pt x="5244309" y="3198692"/>
+                  </a:lnTo>
+                  <a:lnTo>
+                    <a:pt x="5170549" y="3185885"/>
+                  </a:lnTo>
+                  <a:lnTo>
+                    <a:pt x="5096789" y="3172503"/>
+                  </a:lnTo>
+                  <a:lnTo>
+                    <a:pt x="5023029" y="3158520"/>
+                  </a:lnTo>
+                  <a:lnTo>
+                    <a:pt x="4949269" y="3143908"/>
+                  </a:lnTo>
+                  <a:lnTo>
+                    <a:pt x="4875509" y="3128640"/>
+                  </a:lnTo>
+                  <a:lnTo>
+                    <a:pt x="4801749" y="3112686"/>
+                  </a:lnTo>
+                  <a:lnTo>
+                    <a:pt x="4727989" y="3096015"/>
+                  </a:lnTo>
+                  <a:lnTo>
+                    <a:pt x="4654229" y="3078596"/>
+                  </a:lnTo>
+                  <a:lnTo>
+                    <a:pt x="4580469" y="3060393"/>
+                  </a:lnTo>
+                  <a:lnTo>
+                    <a:pt x="4506709" y="3041373"/>
+                  </a:lnTo>
+                  <a:lnTo>
+                    <a:pt x="4432949" y="3021499"/>
+                  </a:lnTo>
+                  <a:lnTo>
+                    <a:pt x="4359189" y="3000731"/>
+                  </a:lnTo>
+                  <a:lnTo>
+                    <a:pt x="4285429" y="2979031"/>
+                  </a:lnTo>
+                  <a:lnTo>
+                    <a:pt x="4211669" y="2956355"/>
+                  </a:lnTo>
+                  <a:lnTo>
+                    <a:pt x="4137909" y="2932661"/>
+                  </a:lnTo>
+                  <a:lnTo>
+                    <a:pt x="4064149" y="2907902"/>
+                  </a:lnTo>
+                  <a:lnTo>
+                    <a:pt x="3990388" y="2882031"/>
+                  </a:lnTo>
+                  <a:lnTo>
+                    <a:pt x="3916628" y="2854997"/>
+                  </a:lnTo>
+                  <a:lnTo>
+                    <a:pt x="3842868" y="2826749"/>
+                  </a:lnTo>
+                  <a:lnTo>
+                    <a:pt x="3769108" y="2797232"/>
+                  </a:lnTo>
+                  <a:lnTo>
+                    <a:pt x="3695348" y="2766389"/>
+                  </a:lnTo>
+                  <a:lnTo>
+                    <a:pt x="3621588" y="2734160"/>
+                  </a:lnTo>
+                  <a:lnTo>
+                    <a:pt x="3547828" y="2700484"/>
+                  </a:lnTo>
+                  <a:lnTo>
+                    <a:pt x="3474068" y="2665294"/>
+                  </a:lnTo>
+                  <a:lnTo>
+                    <a:pt x="3400308" y="2660323"/>
+                  </a:lnTo>
+                  <a:lnTo>
+                    <a:pt x="3326548" y="2668926"/>
+                  </a:lnTo>
+                  <a:lnTo>
+                    <a:pt x="3252788" y="2677439"/>
+                  </a:lnTo>
+                  <a:lnTo>
+                    <a:pt x="3179028" y="2685863"/>
+                  </a:lnTo>
+                  <a:lnTo>
+                    <a:pt x="3105268" y="2694199"/>
+                  </a:lnTo>
+                  <a:lnTo>
+                    <a:pt x="3031508" y="2702448"/>
+                  </a:lnTo>
+                  <a:lnTo>
+                    <a:pt x="2957748" y="2710611"/>
+                  </a:lnTo>
+                  <a:lnTo>
+                    <a:pt x="2883988" y="2718689"/>
+                  </a:lnTo>
+                  <a:lnTo>
+                    <a:pt x="2810228" y="2726682"/>
+                  </a:lnTo>
+                  <a:lnTo>
+                    <a:pt x="2736468" y="2734591"/>
+                  </a:lnTo>
+                  <a:lnTo>
+                    <a:pt x="2662708" y="2742418"/>
+                  </a:lnTo>
+                  <a:lnTo>
+                    <a:pt x="2588948" y="2750163"/>
+                  </a:lnTo>
+                  <a:lnTo>
+                    <a:pt x="2515188" y="2757828"/>
+                  </a:lnTo>
+                  <a:lnTo>
+                    <a:pt x="2441428" y="2765412"/>
+                  </a:lnTo>
+                  <a:lnTo>
+                    <a:pt x="2367668" y="2772917"/>
+                  </a:lnTo>
+                  <a:lnTo>
+                    <a:pt x="2293908" y="2780343"/>
+                  </a:lnTo>
+                  <a:lnTo>
+                    <a:pt x="2220148" y="2787692"/>
+                  </a:lnTo>
+                  <a:lnTo>
+                    <a:pt x="2146388" y="2794964"/>
+                  </a:lnTo>
+                  <a:lnTo>
+                    <a:pt x="2072628" y="2802161"/>
+                  </a:lnTo>
+                  <a:lnTo>
+                    <a:pt x="1998868" y="2809282"/>
+                  </a:lnTo>
+                  <a:lnTo>
+                    <a:pt x="1925108" y="2816328"/>
+                  </a:lnTo>
+                  <a:lnTo>
+                    <a:pt x="1851348" y="2823301"/>
+                  </a:lnTo>
+                  <a:lnTo>
+                    <a:pt x="1777588" y="2830201"/>
+                  </a:lnTo>
+                  <a:lnTo>
+                    <a:pt x="1703828" y="2837029"/>
+                  </a:lnTo>
+                  <a:lnTo>
+                    <a:pt x="1630068" y="2843786"/>
+                  </a:lnTo>
+                  <a:lnTo>
+                    <a:pt x="1556308" y="2850472"/>
+                  </a:lnTo>
+                  <a:lnTo>
+                    <a:pt x="1482548" y="2857089"/>
+                  </a:lnTo>
+                  <a:lnTo>
+                    <a:pt x="1408788" y="2863636"/>
+                  </a:lnTo>
+                  <a:lnTo>
+                    <a:pt x="1335028" y="2870114"/>
+                  </a:lnTo>
+                  <a:lnTo>
+                    <a:pt x="1261268" y="2876525"/>
+                  </a:lnTo>
+                  <a:lnTo>
+                    <a:pt x="1187508" y="2882870"/>
+                  </a:lnTo>
+                  <a:lnTo>
+                    <a:pt x="1113747" y="2889147"/>
+                  </a:lnTo>
+                  <a:lnTo>
+                    <a:pt x="1039987" y="2895359"/>
+                  </a:lnTo>
+                  <a:lnTo>
+                    <a:pt x="966227" y="2901507"/>
+                  </a:lnTo>
+                  <a:lnTo>
+                    <a:pt x="892467" y="2907590"/>
+                  </a:lnTo>
+                  <a:lnTo>
+                    <a:pt x="818707" y="2913609"/>
+                  </a:lnTo>
+                  <a:lnTo>
+                    <a:pt x="744947" y="2919566"/>
+                  </a:lnTo>
+                  <a:lnTo>
+                    <a:pt x="671187" y="2925460"/>
+                  </a:lnTo>
+                  <a:lnTo>
+                    <a:pt x="597427" y="2931293"/>
+                  </a:lnTo>
+                  <a:lnTo>
+                    <a:pt x="523667" y="2937065"/>
+                  </a:lnTo>
+                  <a:lnTo>
+                    <a:pt x="449907" y="2942777"/>
+                  </a:lnTo>
+                  <a:lnTo>
+                    <a:pt x="376147" y="2948429"/>
+                  </a:lnTo>
+                  <a:lnTo>
+                    <a:pt x="302387" y="2954021"/>
+                  </a:lnTo>
+                  <a:lnTo>
+                    <a:pt x="228627" y="2959556"/>
+                  </a:lnTo>
+                  <a:lnTo>
+                    <a:pt x="154867" y="2965032"/>
+                  </a:lnTo>
+                  <a:lnTo>
+                    <a:pt x="81107" y="2970452"/>
+                  </a:lnTo>
+                  <a:lnTo>
+                    <a:pt x="7347" y="2975815"/>
+                  </a:lnTo>
+                  <a:lnTo>
+                    <a:pt x="0" y="2976343"/>
                   </a:lnTo>
                   <a:close/>
                 </a:path>
@@ -3588,267 +3588,267 @@
           </p:nvSpPr>
           <p:spPr>
             <a:xfrm>
-              <a:off x="1860611" y="1896563"/>
-              <a:ext cx="6192736" cy="2780184"/>
+              <a:off x="1860611" y="2073503"/>
+              <a:ext cx="6192736" cy="2651630"/>
             </a:xfrm>
             <a:custGeom>
               <a:avLst/>
               <a:pathLst>
-                <a:path w="6192736" h="2780184">
+                <a:path w="6192736" h="2651630">
                   <a:moveTo>
                     <a:pt x="0" y="0"/>
                   </a:moveTo>
                   <a:lnTo>
-                    <a:pt x="70654" y="150708"/>
-                  </a:lnTo>
-                  <a:lnTo>
-                    <a:pt x="144414" y="301275"/>
-                  </a:lnTo>
-                  <a:lnTo>
-                    <a:pt x="218174" y="445369"/>
-                  </a:lnTo>
-                  <a:lnTo>
-                    <a:pt x="291934" y="583268"/>
-                  </a:lnTo>
-                  <a:lnTo>
-                    <a:pt x="365694" y="715238"/>
-                  </a:lnTo>
-                  <a:lnTo>
-                    <a:pt x="439454" y="841533"/>
-                  </a:lnTo>
-                  <a:lnTo>
-                    <a:pt x="513214" y="962398"/>
-                  </a:lnTo>
-                  <a:lnTo>
-                    <a:pt x="586974" y="1078067"/>
-                  </a:lnTo>
-                  <a:lnTo>
-                    <a:pt x="660734" y="1188762"/>
-                  </a:lnTo>
-                  <a:lnTo>
-                    <a:pt x="734494" y="1294698"/>
-                  </a:lnTo>
-                  <a:lnTo>
-                    <a:pt x="808254" y="1396080"/>
-                  </a:lnTo>
-                  <a:lnTo>
-                    <a:pt x="882014" y="1493102"/>
-                  </a:lnTo>
-                  <a:lnTo>
-                    <a:pt x="955774" y="1585953"/>
-                  </a:lnTo>
-                  <a:lnTo>
-                    <a:pt x="1029534" y="1674811"/>
-                  </a:lnTo>
-                  <a:lnTo>
-                    <a:pt x="1103294" y="1759849"/>
-                  </a:lnTo>
-                  <a:lnTo>
-                    <a:pt x="1177054" y="1841231"/>
-                  </a:lnTo>
-                  <a:lnTo>
-                    <a:pt x="1250814" y="1919114"/>
-                  </a:lnTo>
-                  <a:lnTo>
-                    <a:pt x="1324574" y="1993648"/>
-                  </a:lnTo>
-                  <a:lnTo>
-                    <a:pt x="1398334" y="2064977"/>
-                  </a:lnTo>
-                  <a:lnTo>
-                    <a:pt x="1472095" y="2133240"/>
-                  </a:lnTo>
-                  <a:lnTo>
-                    <a:pt x="1545855" y="2198568"/>
-                  </a:lnTo>
-                  <a:lnTo>
-                    <a:pt x="1619615" y="2261086"/>
-                  </a:lnTo>
-                  <a:lnTo>
-                    <a:pt x="1693375" y="2320917"/>
-                  </a:lnTo>
-                  <a:lnTo>
-                    <a:pt x="1767135" y="2378176"/>
-                  </a:lnTo>
-                  <a:lnTo>
-                    <a:pt x="1840895" y="2432972"/>
-                  </a:lnTo>
-                  <a:lnTo>
-                    <a:pt x="1914655" y="2485413"/>
-                  </a:lnTo>
-                  <a:lnTo>
-                    <a:pt x="1988415" y="2535598"/>
-                  </a:lnTo>
-                  <a:lnTo>
-                    <a:pt x="2062175" y="2583626"/>
-                  </a:lnTo>
-                  <a:lnTo>
-                    <a:pt x="2135935" y="2629589"/>
-                  </a:lnTo>
-                  <a:lnTo>
-                    <a:pt x="2209695" y="2673576"/>
-                  </a:lnTo>
-                  <a:lnTo>
-                    <a:pt x="2283455" y="2715672"/>
-                  </a:lnTo>
-                  <a:lnTo>
-                    <a:pt x="2357215" y="2755957"/>
-                  </a:lnTo>
-                  <a:lnTo>
-                    <a:pt x="2430975" y="2780184"/>
-                  </a:lnTo>
-                  <a:lnTo>
-                    <a:pt x="2504735" y="2770973"/>
-                  </a:lnTo>
-                  <a:lnTo>
-                    <a:pt x="2578495" y="2761664"/>
-                  </a:lnTo>
-                  <a:lnTo>
-                    <a:pt x="2652255" y="2752257"/>
-                  </a:lnTo>
-                  <a:lnTo>
-                    <a:pt x="2726015" y="2742751"/>
-                  </a:lnTo>
-                  <a:lnTo>
-                    <a:pt x="2799775" y="2733144"/>
-                  </a:lnTo>
-                  <a:lnTo>
-                    <a:pt x="2873535" y="2723436"/>
-                  </a:lnTo>
-                  <a:lnTo>
-                    <a:pt x="2947295" y="2713626"/>
-                  </a:lnTo>
-                  <a:lnTo>
-                    <a:pt x="3021055" y="2703711"/>
-                  </a:lnTo>
-                  <a:lnTo>
-                    <a:pt x="3094815" y="2693693"/>
-                  </a:lnTo>
-                  <a:lnTo>
-                    <a:pt x="3168575" y="2683568"/>
-                  </a:lnTo>
-                  <a:lnTo>
-                    <a:pt x="3242335" y="2673336"/>
-                  </a:lnTo>
-                  <a:lnTo>
-                    <a:pt x="3316095" y="2662997"/>
-                  </a:lnTo>
-                  <a:lnTo>
-                    <a:pt x="3389855" y="2652548"/>
-                  </a:lnTo>
-                  <a:lnTo>
-                    <a:pt x="3463615" y="2641989"/>
-                  </a:lnTo>
-                  <a:lnTo>
-                    <a:pt x="3537375" y="2631319"/>
-                  </a:lnTo>
-                  <a:lnTo>
-                    <a:pt x="3611135" y="2620536"/>
-                  </a:lnTo>
-                  <a:lnTo>
-                    <a:pt x="3684895" y="2609639"/>
-                  </a:lnTo>
-                  <a:lnTo>
-                    <a:pt x="3758655" y="2598626"/>
-                  </a:lnTo>
-                  <a:lnTo>
-                    <a:pt x="3832415" y="2587498"/>
-                  </a:lnTo>
-                  <a:lnTo>
-                    <a:pt x="3906175" y="2576252"/>
-                  </a:lnTo>
-                  <a:lnTo>
-                    <a:pt x="3979935" y="2564888"/>
-                  </a:lnTo>
-                  <a:lnTo>
-                    <a:pt x="4053695" y="2553403"/>
-                  </a:lnTo>
-                  <a:lnTo>
-                    <a:pt x="4127455" y="2541797"/>
-                  </a:lnTo>
-                  <a:lnTo>
-                    <a:pt x="4201215" y="2530069"/>
-                  </a:lnTo>
-                  <a:lnTo>
-                    <a:pt x="4274975" y="2518217"/>
-                  </a:lnTo>
-                  <a:lnTo>
-                    <a:pt x="4348735" y="2506240"/>
-                  </a:lnTo>
-                  <a:lnTo>
-                    <a:pt x="4422496" y="2494136"/>
-                  </a:lnTo>
-                  <a:lnTo>
-                    <a:pt x="4496256" y="2481904"/>
-                  </a:lnTo>
-                  <a:lnTo>
-                    <a:pt x="4570016" y="2469544"/>
-                  </a:lnTo>
-                  <a:lnTo>
-                    <a:pt x="4643776" y="2457053"/>
-                  </a:lnTo>
-                  <a:lnTo>
-                    <a:pt x="4717536" y="2444429"/>
-                  </a:lnTo>
-                  <a:lnTo>
-                    <a:pt x="4791296" y="2431673"/>
-                  </a:lnTo>
-                  <a:lnTo>
-                    <a:pt x="4865056" y="2418782"/>
-                  </a:lnTo>
-                  <a:lnTo>
-                    <a:pt x="4938816" y="2405755"/>
-                  </a:lnTo>
-                  <a:lnTo>
-                    <a:pt x="5012576" y="2392590"/>
-                  </a:lnTo>
-                  <a:lnTo>
-                    <a:pt x="5086336" y="2379287"/>
-                  </a:lnTo>
-                  <a:lnTo>
-                    <a:pt x="5160096" y="2365843"/>
-                  </a:lnTo>
-                  <a:lnTo>
-                    <a:pt x="5233856" y="2352256"/>
-                  </a:lnTo>
-                  <a:lnTo>
-                    <a:pt x="5307616" y="2338527"/>
-                  </a:lnTo>
-                  <a:lnTo>
-                    <a:pt x="5381376" y="2324653"/>
-                  </a:lnTo>
-                  <a:lnTo>
-                    <a:pt x="5455136" y="2310632"/>
-                  </a:lnTo>
-                  <a:lnTo>
-                    <a:pt x="5528896" y="2296463"/>
-                  </a:lnTo>
-                  <a:lnTo>
-                    <a:pt x="5602656" y="2282144"/>
-                  </a:lnTo>
-                  <a:lnTo>
-                    <a:pt x="5676416" y="2267674"/>
-                  </a:lnTo>
-                  <a:lnTo>
-                    <a:pt x="5750176" y="2253052"/>
-                  </a:lnTo>
-                  <a:lnTo>
-                    <a:pt x="5823936" y="2238275"/>
-                  </a:lnTo>
-                  <a:lnTo>
-                    <a:pt x="5897696" y="2223342"/>
-                  </a:lnTo>
-                  <a:lnTo>
-                    <a:pt x="5971456" y="2208251"/>
-                  </a:lnTo>
-                  <a:lnTo>
-                    <a:pt x="6045216" y="2193001"/>
-                  </a:lnTo>
-                  <a:lnTo>
-                    <a:pt x="6118976" y="2177590"/>
-                  </a:lnTo>
-                  <a:lnTo>
-                    <a:pt x="6192736" y="2162017"/>
+                    <a:pt x="70654" y="143739"/>
+                  </a:lnTo>
+                  <a:lnTo>
+                    <a:pt x="144414" y="287345"/>
+                  </a:lnTo>
+                  <a:lnTo>
+                    <a:pt x="218174" y="424776"/>
+                  </a:lnTo>
+                  <a:lnTo>
+                    <a:pt x="291934" y="556298"/>
+                  </a:lnTo>
+                  <a:lnTo>
+                    <a:pt x="365694" y="682165"/>
+                  </a:lnTo>
+                  <a:lnTo>
+                    <a:pt x="439454" y="802621"/>
+                  </a:lnTo>
+                  <a:lnTo>
+                    <a:pt x="513214" y="917897"/>
+                  </a:lnTo>
+                  <a:lnTo>
+                    <a:pt x="586974" y="1028218"/>
+                  </a:lnTo>
+                  <a:lnTo>
+                    <a:pt x="660734" y="1133795"/>
+                  </a:lnTo>
+                  <a:lnTo>
+                    <a:pt x="734494" y="1234832"/>
+                  </a:lnTo>
+                  <a:lnTo>
+                    <a:pt x="808254" y="1331525"/>
+                  </a:lnTo>
+                  <a:lnTo>
+                    <a:pt x="882014" y="1424061"/>
+                  </a:lnTo>
+                  <a:lnTo>
+                    <a:pt x="955774" y="1512619"/>
+                  </a:lnTo>
+                  <a:lnTo>
+                    <a:pt x="1029534" y="1597369"/>
+                  </a:lnTo>
+                  <a:lnTo>
+                    <a:pt x="1103294" y="1678474"/>
+                  </a:lnTo>
+                  <a:lnTo>
+                    <a:pt x="1177054" y="1756093"/>
+                  </a:lnTo>
+                  <a:lnTo>
+                    <a:pt x="1250814" y="1830375"/>
+                  </a:lnTo>
+                  <a:lnTo>
+                    <a:pt x="1324574" y="1901462"/>
+                  </a:lnTo>
+                  <a:lnTo>
+                    <a:pt x="1398334" y="1969494"/>
+                  </a:lnTo>
+                  <a:lnTo>
+                    <a:pt x="1472095" y="2034600"/>
+                  </a:lnTo>
+                  <a:lnTo>
+                    <a:pt x="1545855" y="2096907"/>
+                  </a:lnTo>
+                  <a:lnTo>
+                    <a:pt x="1619615" y="2156535"/>
+                  </a:lnTo>
+                  <a:lnTo>
+                    <a:pt x="1693375" y="2213599"/>
+                  </a:lnTo>
+                  <a:lnTo>
+                    <a:pt x="1767135" y="2268210"/>
+                  </a:lnTo>
+                  <a:lnTo>
+                    <a:pt x="1840895" y="2320472"/>
+                  </a:lnTo>
+                  <a:lnTo>
+                    <a:pt x="1914655" y="2370488"/>
+                  </a:lnTo>
+                  <a:lnTo>
+                    <a:pt x="1988415" y="2418353"/>
+                  </a:lnTo>
+                  <a:lnTo>
+                    <a:pt x="2062175" y="2464160"/>
+                  </a:lnTo>
+                  <a:lnTo>
+                    <a:pt x="2135935" y="2507998"/>
+                  </a:lnTo>
+                  <a:lnTo>
+                    <a:pt x="2209695" y="2549951"/>
+                  </a:lnTo>
+                  <a:lnTo>
+                    <a:pt x="2283455" y="2590100"/>
+                  </a:lnTo>
+                  <a:lnTo>
+                    <a:pt x="2357215" y="2628523"/>
+                  </a:lnTo>
+                  <a:lnTo>
+                    <a:pt x="2430975" y="2651630"/>
+                  </a:lnTo>
+                  <a:lnTo>
+                    <a:pt x="2504735" y="2642844"/>
+                  </a:lnTo>
+                  <a:lnTo>
+                    <a:pt x="2578495" y="2633966"/>
+                  </a:lnTo>
+                  <a:lnTo>
+                    <a:pt x="2652255" y="2624994"/>
+                  </a:lnTo>
+                  <a:lnTo>
+                    <a:pt x="2726015" y="2615927"/>
+                  </a:lnTo>
+                  <a:lnTo>
+                    <a:pt x="2799775" y="2606765"/>
+                  </a:lnTo>
+                  <a:lnTo>
+                    <a:pt x="2873535" y="2597505"/>
+                  </a:lnTo>
+                  <a:lnTo>
+                    <a:pt x="2947295" y="2588149"/>
+                  </a:lnTo>
+                  <a:lnTo>
+                    <a:pt x="3021055" y="2578693"/>
+                  </a:lnTo>
+                  <a:lnTo>
+                    <a:pt x="3094815" y="2569137"/>
+                  </a:lnTo>
+                  <a:lnTo>
+                    <a:pt x="3168575" y="2559481"/>
+                  </a:lnTo>
+                  <a:lnTo>
+                    <a:pt x="3242335" y="2549722"/>
+                  </a:lnTo>
+                  <a:lnTo>
+                    <a:pt x="3316095" y="2539861"/>
+                  </a:lnTo>
+                  <a:lnTo>
+                    <a:pt x="3389855" y="2529895"/>
+                  </a:lnTo>
+                  <a:lnTo>
+                    <a:pt x="3463615" y="2519825"/>
+                  </a:lnTo>
+                  <a:lnTo>
+                    <a:pt x="3537375" y="2509647"/>
+                  </a:lnTo>
+                  <a:lnTo>
+                    <a:pt x="3611135" y="2499363"/>
+                  </a:lnTo>
+                  <a:lnTo>
+                    <a:pt x="3684895" y="2488970"/>
+                  </a:lnTo>
+                  <a:lnTo>
+                    <a:pt x="3758655" y="2478467"/>
+                  </a:lnTo>
+                  <a:lnTo>
+                    <a:pt x="3832415" y="2467853"/>
+                  </a:lnTo>
+                  <a:lnTo>
+                    <a:pt x="3906175" y="2457127"/>
+                  </a:lnTo>
+                  <a:lnTo>
+                    <a:pt x="3979935" y="2446288"/>
+                  </a:lnTo>
+                  <a:lnTo>
+                    <a:pt x="4053695" y="2435335"/>
+                  </a:lnTo>
+                  <a:lnTo>
+                    <a:pt x="4127455" y="2424266"/>
+                  </a:lnTo>
+                  <a:lnTo>
+                    <a:pt x="4201215" y="2413080"/>
+                  </a:lnTo>
+                  <a:lnTo>
+                    <a:pt x="4274975" y="2401776"/>
+                  </a:lnTo>
+                  <a:lnTo>
+                    <a:pt x="4348735" y="2390352"/>
+                  </a:lnTo>
+                  <a:lnTo>
+                    <a:pt x="4422496" y="2378808"/>
+                  </a:lnTo>
+                  <a:lnTo>
+                    <a:pt x="4496256" y="2367142"/>
+                  </a:lnTo>
+                  <a:lnTo>
+                    <a:pt x="4570016" y="2355353"/>
+                  </a:lnTo>
+                  <a:lnTo>
+                    <a:pt x="4643776" y="2343439"/>
+                  </a:lnTo>
+                  <a:lnTo>
+                    <a:pt x="4717536" y="2331400"/>
+                  </a:lnTo>
+                  <a:lnTo>
+                    <a:pt x="4791296" y="2319233"/>
+                  </a:lnTo>
+                  <a:lnTo>
+                    <a:pt x="4865056" y="2306938"/>
+                  </a:lnTo>
+                  <a:lnTo>
+                    <a:pt x="4938816" y="2294514"/>
+                  </a:lnTo>
+                  <a:lnTo>
+                    <a:pt x="5012576" y="2281958"/>
+                  </a:lnTo>
+                  <a:lnTo>
+                    <a:pt x="5086336" y="2269269"/>
+                  </a:lnTo>
+                  <a:lnTo>
+                    <a:pt x="5160096" y="2256447"/>
+                  </a:lnTo>
+                  <a:lnTo>
+                    <a:pt x="5233856" y="2243489"/>
+                  </a:lnTo>
+                  <a:lnTo>
+                    <a:pt x="5307616" y="2230394"/>
+                  </a:lnTo>
+                  <a:lnTo>
+                    <a:pt x="5381376" y="2217161"/>
+                  </a:lnTo>
+                  <a:lnTo>
+                    <a:pt x="5455136" y="2203789"/>
+                  </a:lnTo>
+                  <a:lnTo>
+                    <a:pt x="5528896" y="2190275"/>
+                  </a:lnTo>
+                  <a:lnTo>
+                    <a:pt x="5602656" y="2176618"/>
+                  </a:lnTo>
+                  <a:lnTo>
+                    <a:pt x="5676416" y="2162818"/>
+                  </a:lnTo>
+                  <a:lnTo>
+                    <a:pt x="5750176" y="2148871"/>
+                  </a:lnTo>
+                  <a:lnTo>
+                    <a:pt x="5823936" y="2134778"/>
+                  </a:lnTo>
+                  <a:lnTo>
+                    <a:pt x="5897696" y="2120535"/>
+                  </a:lnTo>
+                  <a:lnTo>
+                    <a:pt x="5971456" y="2106143"/>
+                  </a:lnTo>
+                  <a:lnTo>
+                    <a:pt x="6045216" y="2091598"/>
+                  </a:lnTo>
+                  <a:lnTo>
+                    <a:pt x="6118976" y="2076899"/>
+                  </a:lnTo>
+                  <a:lnTo>
+                    <a:pt x="6192736" y="2062046"/>
                   </a:lnTo>
                 </a:path>
               </a:pathLst>
@@ -3868,312 +3868,312 @@
           </p:nvSpPr>
           <p:spPr>
             <a:xfrm>
-              <a:off x="817517" y="4685863"/>
-              <a:ext cx="7235830" cy="772107"/>
+              <a:off x="817517" y="4733826"/>
+              <a:ext cx="7235830" cy="736405"/>
             </a:xfrm>
             <a:custGeom>
               <a:avLst/>
               <a:pathLst>
-                <a:path w="7235830" h="772107">
+                <a:path w="7235830" h="736405">
                   <a:moveTo>
-                    <a:pt x="7235830" y="772107"/>
+                    <a:pt x="7235830" y="736405"/>
                   </a:moveTo>
                   <a:lnTo>
-                    <a:pt x="7162070" y="768008"/>
-                  </a:lnTo>
-                  <a:lnTo>
-                    <a:pt x="7088310" y="763725"/>
-                  </a:lnTo>
-                  <a:lnTo>
-                    <a:pt x="7014550" y="759250"/>
-                  </a:lnTo>
-                  <a:lnTo>
-                    <a:pt x="6940789" y="754573"/>
-                  </a:lnTo>
-                  <a:lnTo>
-                    <a:pt x="6867029" y="749686"/>
-                  </a:lnTo>
-                  <a:lnTo>
-                    <a:pt x="6793269" y="744580"/>
-                  </a:lnTo>
-                  <a:lnTo>
-                    <a:pt x="6719509" y="739244"/>
-                  </a:lnTo>
-                  <a:lnTo>
-                    <a:pt x="6645749" y="733669"/>
-                  </a:lnTo>
-                  <a:lnTo>
-                    <a:pt x="6571989" y="727843"/>
-                  </a:lnTo>
-                  <a:lnTo>
-                    <a:pt x="6498229" y="721755"/>
-                  </a:lnTo>
-                  <a:lnTo>
-                    <a:pt x="6424469" y="715394"/>
-                  </a:lnTo>
-                  <a:lnTo>
-                    <a:pt x="6350709" y="708747"/>
-                  </a:lnTo>
-                  <a:lnTo>
-                    <a:pt x="6276949" y="701802"/>
-                  </a:lnTo>
-                  <a:lnTo>
-                    <a:pt x="6203189" y="694544"/>
-                  </a:lnTo>
-                  <a:lnTo>
-                    <a:pt x="6129429" y="686960"/>
-                  </a:lnTo>
-                  <a:lnTo>
-                    <a:pt x="6055669" y="679036"/>
-                  </a:lnTo>
-                  <a:lnTo>
-                    <a:pt x="5981909" y="670756"/>
-                  </a:lnTo>
-                  <a:lnTo>
-                    <a:pt x="5908149" y="662103"/>
-                  </a:lnTo>
-                  <a:lnTo>
-                    <a:pt x="5834389" y="653062"/>
-                  </a:lnTo>
-                  <a:lnTo>
-                    <a:pt x="5760629" y="643615"/>
-                  </a:lnTo>
-                  <a:lnTo>
-                    <a:pt x="5686869" y="633743"/>
-                  </a:lnTo>
-                  <a:lnTo>
-                    <a:pt x="5613109" y="623428"/>
-                  </a:lnTo>
-                  <a:lnTo>
-                    <a:pt x="5539349" y="612649"/>
-                  </a:lnTo>
-                  <a:lnTo>
-                    <a:pt x="5465589" y="601386"/>
-                  </a:lnTo>
-                  <a:lnTo>
-                    <a:pt x="5391829" y="589617"/>
-                  </a:lnTo>
-                  <a:lnTo>
-                    <a:pt x="5318069" y="577319"/>
-                  </a:lnTo>
-                  <a:lnTo>
-                    <a:pt x="5244309" y="564469"/>
-                  </a:lnTo>
-                  <a:lnTo>
-                    <a:pt x="5170549" y="551041"/>
-                  </a:lnTo>
-                  <a:lnTo>
-                    <a:pt x="5096789" y="537010"/>
-                  </a:lnTo>
-                  <a:lnTo>
-                    <a:pt x="5023029" y="522349"/>
-                  </a:lnTo>
-                  <a:lnTo>
-                    <a:pt x="4949269" y="507029"/>
-                  </a:lnTo>
-                  <a:lnTo>
-                    <a:pt x="4875509" y="491021"/>
-                  </a:lnTo>
-                  <a:lnTo>
-                    <a:pt x="4801749" y="474293"/>
-                  </a:lnTo>
-                  <a:lnTo>
-                    <a:pt x="4727989" y="456814"/>
-                  </a:lnTo>
-                  <a:lnTo>
-                    <a:pt x="4654229" y="438550"/>
-                  </a:lnTo>
-                  <a:lnTo>
-                    <a:pt x="4580469" y="419465"/>
-                  </a:lnTo>
-                  <a:lnTo>
-                    <a:pt x="4506709" y="399523"/>
-                  </a:lnTo>
-                  <a:lnTo>
-                    <a:pt x="4432949" y="378685"/>
-                  </a:lnTo>
-                  <a:lnTo>
-                    <a:pt x="4359189" y="356911"/>
-                  </a:lnTo>
-                  <a:lnTo>
-                    <a:pt x="4285429" y="334158"/>
-                  </a:lnTo>
-                  <a:lnTo>
-                    <a:pt x="4211669" y="310383"/>
-                  </a:lnTo>
-                  <a:lnTo>
-                    <a:pt x="4137909" y="285540"/>
-                  </a:lnTo>
-                  <a:lnTo>
-                    <a:pt x="4064149" y="259581"/>
-                  </a:lnTo>
-                  <a:lnTo>
-                    <a:pt x="3990388" y="232456"/>
-                  </a:lnTo>
-                  <a:lnTo>
-                    <a:pt x="3916628" y="204112"/>
-                  </a:lnTo>
-                  <a:lnTo>
-                    <a:pt x="3842868" y="174494"/>
-                  </a:lnTo>
-                  <a:lnTo>
-                    <a:pt x="3769108" y="143546"/>
-                  </a:lnTo>
-                  <a:lnTo>
-                    <a:pt x="3695348" y="111208"/>
-                  </a:lnTo>
-                  <a:lnTo>
-                    <a:pt x="3621588" y="77416"/>
-                  </a:lnTo>
-                  <a:lnTo>
-                    <a:pt x="3547828" y="42107"/>
-                  </a:lnTo>
-                  <a:lnTo>
-                    <a:pt x="3474068" y="5211"/>
+                    <a:pt x="7162070" y="732496"/>
+                  </a:lnTo>
+                  <a:lnTo>
+                    <a:pt x="7088310" y="728411"/>
+                  </a:lnTo>
+                  <a:lnTo>
+                    <a:pt x="7014550" y="724142"/>
+                  </a:lnTo>
+                  <a:lnTo>
+                    <a:pt x="6940789" y="719682"/>
+                  </a:lnTo>
+                  <a:lnTo>
+                    <a:pt x="6867029" y="715021"/>
+                  </a:lnTo>
+                  <a:lnTo>
+                    <a:pt x="6793269" y="710151"/>
+                  </a:lnTo>
+                  <a:lnTo>
+                    <a:pt x="6719509" y="705062"/>
+                  </a:lnTo>
+                  <a:lnTo>
+                    <a:pt x="6645749" y="699744"/>
+                  </a:lnTo>
+                  <a:lnTo>
+                    <a:pt x="6571989" y="694188"/>
+                  </a:lnTo>
+                  <a:lnTo>
+                    <a:pt x="6498229" y="688382"/>
+                  </a:lnTo>
+                  <a:lnTo>
+                    <a:pt x="6424469" y="682315"/>
+                  </a:lnTo>
+                  <a:lnTo>
+                    <a:pt x="6350709" y="675975"/>
+                  </a:lnTo>
+                  <a:lnTo>
+                    <a:pt x="6276949" y="669351"/>
+                  </a:lnTo>
+                  <a:lnTo>
+                    <a:pt x="6203189" y="662429"/>
+                  </a:lnTo>
+                  <a:lnTo>
+                    <a:pt x="6129429" y="655196"/>
+                  </a:lnTo>
+                  <a:lnTo>
+                    <a:pt x="6055669" y="647638"/>
+                  </a:lnTo>
+                  <a:lnTo>
+                    <a:pt x="5981909" y="639740"/>
+                  </a:lnTo>
+                  <a:lnTo>
+                    <a:pt x="5908149" y="631488"/>
+                  </a:lnTo>
+                  <a:lnTo>
+                    <a:pt x="5834389" y="622865"/>
+                  </a:lnTo>
+                  <a:lnTo>
+                    <a:pt x="5760629" y="613854"/>
+                  </a:lnTo>
+                  <a:lnTo>
+                    <a:pt x="5686869" y="604439"/>
+                  </a:lnTo>
+                  <a:lnTo>
+                    <a:pt x="5613109" y="594600"/>
+                  </a:lnTo>
+                  <a:lnTo>
+                    <a:pt x="5539349" y="584320"/>
+                  </a:lnTo>
+                  <a:lnTo>
+                    <a:pt x="5465589" y="573578"/>
+                  </a:lnTo>
+                  <a:lnTo>
+                    <a:pt x="5391829" y="562353"/>
+                  </a:lnTo>
+                  <a:lnTo>
+                    <a:pt x="5318069" y="550624"/>
+                  </a:lnTo>
+                  <a:lnTo>
+                    <a:pt x="5244309" y="538368"/>
+                  </a:lnTo>
+                  <a:lnTo>
+                    <a:pt x="5170549" y="525561"/>
+                  </a:lnTo>
+                  <a:lnTo>
+                    <a:pt x="5096789" y="512179"/>
+                  </a:lnTo>
+                  <a:lnTo>
+                    <a:pt x="5023029" y="498196"/>
+                  </a:lnTo>
+                  <a:lnTo>
+                    <a:pt x="4949269" y="483584"/>
+                  </a:lnTo>
+                  <a:lnTo>
+                    <a:pt x="4875509" y="468316"/>
+                  </a:lnTo>
+                  <a:lnTo>
+                    <a:pt x="4801749" y="452362"/>
+                  </a:lnTo>
+                  <a:lnTo>
+                    <a:pt x="4727989" y="435691"/>
+                  </a:lnTo>
+                  <a:lnTo>
+                    <a:pt x="4654229" y="418272"/>
+                  </a:lnTo>
+                  <a:lnTo>
+                    <a:pt x="4580469" y="400069"/>
+                  </a:lnTo>
+                  <a:lnTo>
+                    <a:pt x="4506709" y="381049"/>
+                  </a:lnTo>
+                  <a:lnTo>
+                    <a:pt x="4432949" y="361175"/>
+                  </a:lnTo>
+                  <a:lnTo>
+                    <a:pt x="4359189" y="340407"/>
+                  </a:lnTo>
+                  <a:lnTo>
+                    <a:pt x="4285429" y="318707"/>
+                  </a:lnTo>
+                  <a:lnTo>
+                    <a:pt x="4211669" y="296031"/>
+                  </a:lnTo>
+                  <a:lnTo>
+                    <a:pt x="4137909" y="272337"/>
+                  </a:lnTo>
+                  <a:lnTo>
+                    <a:pt x="4064149" y="247578"/>
+                  </a:lnTo>
+                  <a:lnTo>
+                    <a:pt x="3990388" y="221707"/>
+                  </a:lnTo>
+                  <a:lnTo>
+                    <a:pt x="3916628" y="194674"/>
+                  </a:lnTo>
+                  <a:lnTo>
+                    <a:pt x="3842868" y="166426"/>
+                  </a:lnTo>
+                  <a:lnTo>
+                    <a:pt x="3769108" y="136909"/>
+                  </a:lnTo>
+                  <a:lnTo>
+                    <a:pt x="3695348" y="106065"/>
+                  </a:lnTo>
+                  <a:lnTo>
+                    <a:pt x="3621588" y="73837"/>
+                  </a:lnTo>
+                  <a:lnTo>
+                    <a:pt x="3547828" y="40160"/>
+                  </a:lnTo>
+                  <a:lnTo>
+                    <a:pt x="3474068" y="4970"/>
                   </a:lnTo>
                   <a:lnTo>
                     <a:pt x="3400308" y="0"/>
                   </a:lnTo>
                   <a:lnTo>
-                    <a:pt x="3326548" y="9019"/>
-                  </a:lnTo>
-                  <a:lnTo>
-                    <a:pt x="3252788" y="17945"/>
-                  </a:lnTo>
-                  <a:lnTo>
-                    <a:pt x="3179028" y="26778"/>
-                  </a:lnTo>
-                  <a:lnTo>
-                    <a:pt x="3105268" y="35518"/>
-                  </a:lnTo>
-                  <a:lnTo>
-                    <a:pt x="3031508" y="44167"/>
-                  </a:lnTo>
-                  <a:lnTo>
-                    <a:pt x="2957748" y="52725"/>
-                  </a:lnTo>
-                  <a:lnTo>
-                    <a:pt x="2883988" y="61194"/>
-                  </a:lnTo>
-                  <a:lnTo>
-                    <a:pt x="2810228" y="69575"/>
-                  </a:lnTo>
-                  <a:lnTo>
-                    <a:pt x="2736468" y="77868"/>
-                  </a:lnTo>
-                  <a:lnTo>
-                    <a:pt x="2662708" y="86074"/>
-                  </a:lnTo>
-                  <a:lnTo>
-                    <a:pt x="2588948" y="94195"/>
-                  </a:lnTo>
-                  <a:lnTo>
-                    <a:pt x="2515188" y="102231"/>
-                  </a:lnTo>
-                  <a:lnTo>
-                    <a:pt x="2441428" y="110183"/>
-                  </a:lnTo>
-                  <a:lnTo>
-                    <a:pt x="2367668" y="118052"/>
-                  </a:lnTo>
-                  <a:lnTo>
-                    <a:pt x="2293908" y="125838"/>
-                  </a:lnTo>
-                  <a:lnTo>
-                    <a:pt x="2220148" y="133543"/>
-                  </a:lnTo>
-                  <a:lnTo>
-                    <a:pt x="2146388" y="141168"/>
-                  </a:lnTo>
-                  <a:lnTo>
-                    <a:pt x="2072628" y="148713"/>
-                  </a:lnTo>
-                  <a:lnTo>
-                    <a:pt x="1998868" y="156180"/>
-                  </a:lnTo>
-                  <a:lnTo>
-                    <a:pt x="1925108" y="163568"/>
-                  </a:lnTo>
-                  <a:lnTo>
-                    <a:pt x="1851348" y="170879"/>
-                  </a:lnTo>
-                  <a:lnTo>
-                    <a:pt x="1777588" y="178113"/>
-                  </a:lnTo>
-                  <a:lnTo>
-                    <a:pt x="1703828" y="185273"/>
-                  </a:lnTo>
-                  <a:lnTo>
-                    <a:pt x="1630068" y="192357"/>
-                  </a:lnTo>
-                  <a:lnTo>
-                    <a:pt x="1556308" y="199367"/>
-                  </a:lnTo>
-                  <a:lnTo>
-                    <a:pt x="1482548" y="206304"/>
-                  </a:lnTo>
-                  <a:lnTo>
-                    <a:pt x="1408788" y="213169"/>
-                  </a:lnTo>
-                  <a:lnTo>
-                    <a:pt x="1335028" y="219962"/>
-                  </a:lnTo>
-                  <a:lnTo>
-                    <a:pt x="1261268" y="226683"/>
-                  </a:lnTo>
-                  <a:lnTo>
-                    <a:pt x="1187508" y="233335"/>
-                  </a:lnTo>
-                  <a:lnTo>
-                    <a:pt x="1113747" y="239917"/>
-                  </a:lnTo>
-                  <a:lnTo>
-                    <a:pt x="1039987" y="246431"/>
-                  </a:lnTo>
-                  <a:lnTo>
-                    <a:pt x="966227" y="252876"/>
-                  </a:lnTo>
-                  <a:lnTo>
-                    <a:pt x="892467" y="259254"/>
-                  </a:lnTo>
-                  <a:lnTo>
-                    <a:pt x="818707" y="265565"/>
-                  </a:lnTo>
-                  <a:lnTo>
-                    <a:pt x="744947" y="271811"/>
-                  </a:lnTo>
-                  <a:lnTo>
-                    <a:pt x="671187" y="277991"/>
-                  </a:lnTo>
-                  <a:lnTo>
-                    <a:pt x="597427" y="284106"/>
-                  </a:lnTo>
-                  <a:lnTo>
-                    <a:pt x="523667" y="290158"/>
-                  </a:lnTo>
-                  <a:lnTo>
-                    <a:pt x="449907" y="296147"/>
-                  </a:lnTo>
-                  <a:lnTo>
-                    <a:pt x="376147" y="302072"/>
-                  </a:lnTo>
-                  <a:lnTo>
-                    <a:pt x="302387" y="307936"/>
-                  </a:lnTo>
-                  <a:lnTo>
-                    <a:pt x="228627" y="313739"/>
-                  </a:lnTo>
-                  <a:lnTo>
-                    <a:pt x="154867" y="319481"/>
-                  </a:lnTo>
-                  <a:lnTo>
-                    <a:pt x="81107" y="325163"/>
-                  </a:lnTo>
-                  <a:lnTo>
-                    <a:pt x="7347" y="330786"/>
-                  </a:lnTo>
-                  <a:lnTo>
-                    <a:pt x="0" y="331340"/>
+                    <a:pt x="3326548" y="8602"/>
+                  </a:lnTo>
+                  <a:lnTo>
+                    <a:pt x="3252788" y="17115"/>
+                  </a:lnTo>
+                  <a:lnTo>
+                    <a:pt x="3179028" y="25539"/>
+                  </a:lnTo>
+                  <a:lnTo>
+                    <a:pt x="3105268" y="33876"/>
+                  </a:lnTo>
+                  <a:lnTo>
+                    <a:pt x="3031508" y="42124"/>
+                  </a:lnTo>
+                  <a:lnTo>
+                    <a:pt x="2957748" y="50287"/>
+                  </a:lnTo>
+                  <a:lnTo>
+                    <a:pt x="2883988" y="58365"/>
+                  </a:lnTo>
+                  <a:lnTo>
+                    <a:pt x="2810228" y="66358"/>
+                  </a:lnTo>
+                  <a:lnTo>
+                    <a:pt x="2736468" y="74267"/>
+                  </a:lnTo>
+                  <a:lnTo>
+                    <a:pt x="2662708" y="82094"/>
+                  </a:lnTo>
+                  <a:lnTo>
+                    <a:pt x="2588948" y="89840"/>
+                  </a:lnTo>
+                  <a:lnTo>
+                    <a:pt x="2515188" y="97504"/>
+                  </a:lnTo>
+                  <a:lnTo>
+                    <a:pt x="2441428" y="105088"/>
+                  </a:lnTo>
+                  <a:lnTo>
+                    <a:pt x="2367668" y="112593"/>
+                  </a:lnTo>
+                  <a:lnTo>
+                    <a:pt x="2293908" y="120019"/>
+                  </a:lnTo>
+                  <a:lnTo>
+                    <a:pt x="2220148" y="127368"/>
+                  </a:lnTo>
+                  <a:lnTo>
+                    <a:pt x="2146388" y="134641"/>
+                  </a:lnTo>
+                  <a:lnTo>
+                    <a:pt x="2072628" y="141837"/>
+                  </a:lnTo>
+                  <a:lnTo>
+                    <a:pt x="1998868" y="148958"/>
+                  </a:lnTo>
+                  <a:lnTo>
+                    <a:pt x="1925108" y="156004"/>
+                  </a:lnTo>
+                  <a:lnTo>
+                    <a:pt x="1851348" y="162977"/>
+                  </a:lnTo>
+                  <a:lnTo>
+                    <a:pt x="1777588" y="169878"/>
+                  </a:lnTo>
+                  <a:lnTo>
+                    <a:pt x="1703828" y="176706"/>
+                  </a:lnTo>
+                  <a:lnTo>
+                    <a:pt x="1630068" y="183462"/>
+                  </a:lnTo>
+                  <a:lnTo>
+                    <a:pt x="1556308" y="190148"/>
+                  </a:lnTo>
+                  <a:lnTo>
+                    <a:pt x="1482548" y="196765"/>
+                  </a:lnTo>
+                  <a:lnTo>
+                    <a:pt x="1408788" y="203312"/>
+                  </a:lnTo>
+                  <a:lnTo>
+                    <a:pt x="1335028" y="209791"/>
+                  </a:lnTo>
+                  <a:lnTo>
+                    <a:pt x="1261268" y="216202"/>
+                  </a:lnTo>
+                  <a:lnTo>
+                    <a:pt x="1187508" y="222546"/>
+                  </a:lnTo>
+                  <a:lnTo>
+                    <a:pt x="1113747" y="228823"/>
+                  </a:lnTo>
+                  <a:lnTo>
+                    <a:pt x="1039987" y="235036"/>
+                  </a:lnTo>
+                  <a:lnTo>
+                    <a:pt x="966227" y="241183"/>
+                  </a:lnTo>
+                  <a:lnTo>
+                    <a:pt x="892467" y="247266"/>
+                  </a:lnTo>
+                  <a:lnTo>
+                    <a:pt x="818707" y="253286"/>
+                  </a:lnTo>
+                  <a:lnTo>
+                    <a:pt x="744947" y="259242"/>
+                  </a:lnTo>
+                  <a:lnTo>
+                    <a:pt x="671187" y="265137"/>
+                  </a:lnTo>
+                  <a:lnTo>
+                    <a:pt x="597427" y="270969"/>
+                  </a:lnTo>
+                  <a:lnTo>
+                    <a:pt x="523667" y="276741"/>
+                  </a:lnTo>
+                  <a:lnTo>
+                    <a:pt x="449907" y="282453"/>
+                  </a:lnTo>
+                  <a:lnTo>
+                    <a:pt x="376147" y="288105"/>
+                  </a:lnTo>
+                  <a:lnTo>
+                    <a:pt x="302387" y="293698"/>
+                  </a:lnTo>
+                  <a:lnTo>
+                    <a:pt x="228627" y="299232"/>
+                  </a:lnTo>
+                  <a:lnTo>
+                    <a:pt x="154867" y="304709"/>
+                  </a:lnTo>
+                  <a:lnTo>
+                    <a:pt x="81107" y="310128"/>
+                  </a:lnTo>
+                  <a:lnTo>
+                    <a:pt x="7347" y="315491"/>
+                  </a:lnTo>
+                  <a:lnTo>
+                    <a:pt x="0" y="316019"/>
                   </a:lnTo>
                 </a:path>
               </a:pathLst>
@@ -4193,312 +4193,312 @@
           </p:nvSpPr>
           <p:spPr>
             <a:xfrm>
-              <a:off x="817517" y="3647202"/>
-              <a:ext cx="7235830" cy="1533224"/>
+              <a:off x="817517" y="3743193"/>
+              <a:ext cx="7235830" cy="1462328"/>
             </a:xfrm>
             <a:custGeom>
               <a:avLst/>
               <a:pathLst>
-                <a:path w="7235830" h="1533224">
+                <a:path w="7235830" h="1462328">
                   <a:moveTo>
                     <a:pt x="0" y="0"/>
                   </a:moveTo>
                   <a:lnTo>
-                    <a:pt x="7347" y="3189"/>
-                  </a:lnTo>
-                  <a:lnTo>
-                    <a:pt x="81107" y="34678"/>
-                  </a:lnTo>
-                  <a:lnTo>
-                    <a:pt x="154867" y="65644"/>
-                  </a:lnTo>
-                  <a:lnTo>
-                    <a:pt x="228627" y="96097"/>
-                  </a:lnTo>
-                  <a:lnTo>
-                    <a:pt x="302387" y="126045"/>
-                  </a:lnTo>
-                  <a:lnTo>
-                    <a:pt x="376147" y="155496"/>
-                  </a:lnTo>
-                  <a:lnTo>
-                    <a:pt x="449907" y="184459"/>
-                  </a:lnTo>
-                  <a:lnTo>
-                    <a:pt x="523667" y="212941"/>
-                  </a:lnTo>
-                  <a:lnTo>
-                    <a:pt x="597427" y="240951"/>
-                  </a:lnTo>
-                  <a:lnTo>
-                    <a:pt x="671187" y="268497"/>
-                  </a:lnTo>
-                  <a:lnTo>
-                    <a:pt x="744947" y="295586"/>
-                  </a:lnTo>
-                  <a:lnTo>
-                    <a:pt x="818707" y="322226"/>
-                  </a:lnTo>
-                  <a:lnTo>
-                    <a:pt x="892467" y="348423"/>
-                  </a:lnTo>
-                  <a:lnTo>
-                    <a:pt x="966227" y="374187"/>
-                  </a:lnTo>
-                  <a:lnTo>
-                    <a:pt x="1039987" y="399523"/>
-                  </a:lnTo>
-                  <a:lnTo>
-                    <a:pt x="1113747" y="424439"/>
-                  </a:lnTo>
-                  <a:lnTo>
-                    <a:pt x="1187508" y="448942"/>
-                  </a:lnTo>
-                  <a:lnTo>
-                    <a:pt x="1261268" y="473038"/>
-                  </a:lnTo>
-                  <a:lnTo>
-                    <a:pt x="1335028" y="496735"/>
-                  </a:lnTo>
-                  <a:lnTo>
-                    <a:pt x="1408788" y="520039"/>
-                  </a:lnTo>
-                  <a:lnTo>
-                    <a:pt x="1482548" y="542957"/>
-                  </a:lnTo>
-                  <a:lnTo>
-                    <a:pt x="1556308" y="565494"/>
-                  </a:lnTo>
-                  <a:lnTo>
-                    <a:pt x="1630068" y="587658"/>
-                  </a:lnTo>
-                  <a:lnTo>
-                    <a:pt x="1703828" y="609454"/>
-                  </a:lnTo>
-                  <a:lnTo>
-                    <a:pt x="1777588" y="630889"/>
-                  </a:lnTo>
-                  <a:lnTo>
-                    <a:pt x="1851348" y="651968"/>
-                  </a:lnTo>
-                  <a:lnTo>
-                    <a:pt x="1925108" y="672698"/>
-                  </a:lnTo>
-                  <a:lnTo>
-                    <a:pt x="1998868" y="693083"/>
-                  </a:lnTo>
-                  <a:lnTo>
-                    <a:pt x="2072628" y="713131"/>
-                  </a:lnTo>
-                  <a:lnTo>
-                    <a:pt x="2146388" y="732847"/>
-                  </a:lnTo>
-                  <a:lnTo>
-                    <a:pt x="2220148" y="752235"/>
-                  </a:lnTo>
-                  <a:lnTo>
-                    <a:pt x="2293908" y="771302"/>
-                  </a:lnTo>
-                  <a:lnTo>
-                    <a:pt x="2367668" y="790053"/>
-                  </a:lnTo>
-                  <a:lnTo>
-                    <a:pt x="2441428" y="808493"/>
-                  </a:lnTo>
-                  <a:lnTo>
-                    <a:pt x="2515188" y="826627"/>
-                  </a:lnTo>
-                  <a:lnTo>
-                    <a:pt x="2588948" y="844460"/>
-                  </a:lnTo>
-                  <a:lnTo>
-                    <a:pt x="2662708" y="861997"/>
-                  </a:lnTo>
-                  <a:lnTo>
-                    <a:pt x="2736468" y="879244"/>
-                  </a:lnTo>
-                  <a:lnTo>
-                    <a:pt x="2810228" y="896205"/>
-                  </a:lnTo>
-                  <a:lnTo>
-                    <a:pt x="2883988" y="912884"/>
-                  </a:lnTo>
-                  <a:lnTo>
-                    <a:pt x="2957748" y="929287"/>
-                  </a:lnTo>
-                  <a:lnTo>
-                    <a:pt x="3031508" y="945418"/>
-                  </a:lnTo>
-                  <a:lnTo>
-                    <a:pt x="3105268" y="961281"/>
-                  </a:lnTo>
-                  <a:lnTo>
-                    <a:pt x="3179028" y="976881"/>
-                  </a:lnTo>
-                  <a:lnTo>
-                    <a:pt x="3252788" y="992223"/>
-                  </a:lnTo>
-                  <a:lnTo>
-                    <a:pt x="3326548" y="1007310"/>
-                  </a:lnTo>
-                  <a:lnTo>
-                    <a:pt x="3400308" y="1022147"/>
-                  </a:lnTo>
-                  <a:lnTo>
-                    <a:pt x="3474068" y="1036738"/>
-                  </a:lnTo>
-                  <a:lnTo>
-                    <a:pt x="3547828" y="1051087"/>
-                  </a:lnTo>
-                  <a:lnTo>
-                    <a:pt x="3621588" y="1065198"/>
-                  </a:lnTo>
-                  <a:lnTo>
-                    <a:pt x="3695348" y="1079075"/>
-                  </a:lnTo>
-                  <a:lnTo>
-                    <a:pt x="3769108" y="1092722"/>
-                  </a:lnTo>
-                  <a:lnTo>
-                    <a:pt x="3842868" y="1106142"/>
-                  </a:lnTo>
-                  <a:lnTo>
-                    <a:pt x="3916628" y="1119340"/>
-                  </a:lnTo>
-                  <a:lnTo>
-                    <a:pt x="3990388" y="1132319"/>
-                  </a:lnTo>
-                  <a:lnTo>
-                    <a:pt x="4064149" y="1145083"/>
-                  </a:lnTo>
-                  <a:lnTo>
-                    <a:pt x="4137909" y="1157635"/>
-                  </a:lnTo>
-                  <a:lnTo>
-                    <a:pt x="4211669" y="1169979"/>
-                  </a:lnTo>
-                  <a:lnTo>
-                    <a:pt x="4285429" y="1182119"/>
-                  </a:lnTo>
-                  <a:lnTo>
-                    <a:pt x="4359189" y="1194057"/>
-                  </a:lnTo>
-                  <a:lnTo>
-                    <a:pt x="4432949" y="1205797"/>
-                  </a:lnTo>
-                  <a:lnTo>
-                    <a:pt x="4506709" y="1217342"/>
-                  </a:lnTo>
-                  <a:lnTo>
-                    <a:pt x="4580469" y="1228696"/>
-                  </a:lnTo>
-                  <a:lnTo>
-                    <a:pt x="4654229" y="1239862"/>
-                  </a:lnTo>
-                  <a:lnTo>
-                    <a:pt x="4727989" y="1250842"/>
-                  </a:lnTo>
-                  <a:lnTo>
-                    <a:pt x="4801749" y="1261641"/>
-                  </a:lnTo>
-                  <a:lnTo>
-                    <a:pt x="4875509" y="1272260"/>
-                  </a:lnTo>
-                  <a:lnTo>
-                    <a:pt x="4949269" y="1282703"/>
-                  </a:lnTo>
-                  <a:lnTo>
-                    <a:pt x="5023029" y="1292973"/>
-                  </a:lnTo>
-                  <a:lnTo>
-                    <a:pt x="5096789" y="1303073"/>
-                  </a:lnTo>
-                  <a:lnTo>
-                    <a:pt x="5170549" y="1313005"/>
-                  </a:lnTo>
-                  <a:lnTo>
-                    <a:pt x="5244309" y="1322773"/>
-                  </a:lnTo>
-                  <a:lnTo>
-                    <a:pt x="5318069" y="1332378"/>
-                  </a:lnTo>
-                  <a:lnTo>
-                    <a:pt x="5391829" y="1341824"/>
-                  </a:lnTo>
-                  <a:lnTo>
-                    <a:pt x="5465589" y="1351114"/>
-                  </a:lnTo>
-                  <a:lnTo>
-                    <a:pt x="5539349" y="1360250"/>
-                  </a:lnTo>
-                  <a:lnTo>
-                    <a:pt x="5613109" y="1369234"/>
-                  </a:lnTo>
-                  <a:lnTo>
-                    <a:pt x="5686869" y="1378069"/>
-                  </a:lnTo>
-                  <a:lnTo>
-                    <a:pt x="5760629" y="1386757"/>
-                  </a:lnTo>
-                  <a:lnTo>
-                    <a:pt x="5834389" y="1395302"/>
-                  </a:lnTo>
-                  <a:lnTo>
-                    <a:pt x="5908149" y="1403704"/>
-                  </a:lnTo>
-                  <a:lnTo>
-                    <a:pt x="5981909" y="1411968"/>
-                  </a:lnTo>
-                  <a:lnTo>
-                    <a:pt x="6055669" y="1420094"/>
-                  </a:lnTo>
-                  <a:lnTo>
-                    <a:pt x="6129429" y="1428086"/>
-                  </a:lnTo>
-                  <a:lnTo>
-                    <a:pt x="6203189" y="1435945"/>
-                  </a:lnTo>
-                  <a:lnTo>
-                    <a:pt x="6276949" y="1443674"/>
-                  </a:lnTo>
-                  <a:lnTo>
-                    <a:pt x="6350709" y="1451274"/>
-                  </a:lnTo>
-                  <a:lnTo>
-                    <a:pt x="6424469" y="1458749"/>
-                  </a:lnTo>
-                  <a:lnTo>
-                    <a:pt x="6498229" y="1466100"/>
-                  </a:lnTo>
-                  <a:lnTo>
-                    <a:pt x="6571989" y="1473328"/>
-                  </a:lnTo>
-                  <a:lnTo>
-                    <a:pt x="6645749" y="1480437"/>
-                  </a:lnTo>
-                  <a:lnTo>
-                    <a:pt x="6719509" y="1487428"/>
-                  </a:lnTo>
-                  <a:lnTo>
-                    <a:pt x="6793269" y="1494303"/>
-                  </a:lnTo>
-                  <a:lnTo>
-                    <a:pt x="6867029" y="1501064"/>
-                  </a:lnTo>
-                  <a:lnTo>
-                    <a:pt x="6940789" y="1507713"/>
-                  </a:lnTo>
-                  <a:lnTo>
-                    <a:pt x="7014550" y="1514252"/>
-                  </a:lnTo>
-                  <a:lnTo>
-                    <a:pt x="7088310" y="1520682"/>
-                  </a:lnTo>
-                  <a:lnTo>
-                    <a:pt x="7162070" y="1527005"/>
-                  </a:lnTo>
-                  <a:lnTo>
-                    <a:pt x="7235830" y="1533224"/>
+                    <a:pt x="7347" y="3042"/>
+                  </a:lnTo>
+                  <a:lnTo>
+                    <a:pt x="81107" y="33074"/>
+                  </a:lnTo>
+                  <a:lnTo>
+                    <a:pt x="154867" y="62609"/>
+                  </a:lnTo>
+                  <a:lnTo>
+                    <a:pt x="228627" y="91653"/>
+                  </a:lnTo>
+                  <a:lnTo>
+                    <a:pt x="302387" y="120216"/>
+                  </a:lnTo>
+                  <a:lnTo>
+                    <a:pt x="376147" y="148306"/>
+                  </a:lnTo>
+                  <a:lnTo>
+                    <a:pt x="449907" y="175929"/>
+                  </a:lnTo>
+                  <a:lnTo>
+                    <a:pt x="523667" y="203095"/>
+                  </a:lnTo>
+                  <a:lnTo>
+                    <a:pt x="597427" y="229810"/>
+                  </a:lnTo>
+                  <a:lnTo>
+                    <a:pt x="671187" y="256082"/>
+                  </a:lnTo>
+                  <a:lnTo>
+                    <a:pt x="744947" y="281918"/>
+                  </a:lnTo>
+                  <a:lnTo>
+                    <a:pt x="818707" y="307326"/>
+                  </a:lnTo>
+                  <a:lnTo>
+                    <a:pt x="892467" y="332312"/>
+                  </a:lnTo>
+                  <a:lnTo>
+                    <a:pt x="966227" y="356885"/>
+                  </a:lnTo>
+                  <a:lnTo>
+                    <a:pt x="1039987" y="381049"/>
+                  </a:lnTo>
+                  <a:lnTo>
+                    <a:pt x="1113747" y="404813"/>
+                  </a:lnTo>
+                  <a:lnTo>
+                    <a:pt x="1187508" y="428183"/>
+                  </a:lnTo>
+                  <a:lnTo>
+                    <a:pt x="1261268" y="451165"/>
+                  </a:lnTo>
+                  <a:lnTo>
+                    <a:pt x="1335028" y="473766"/>
+                  </a:lnTo>
+                  <a:lnTo>
+                    <a:pt x="1408788" y="495993"/>
+                  </a:lnTo>
+                  <a:lnTo>
+                    <a:pt x="1482548" y="517851"/>
+                  </a:lnTo>
+                  <a:lnTo>
+                    <a:pt x="1556308" y="539346"/>
+                  </a:lnTo>
+                  <a:lnTo>
+                    <a:pt x="1630068" y="560485"/>
+                  </a:lnTo>
+                  <a:lnTo>
+                    <a:pt x="1703828" y="581273"/>
+                  </a:lnTo>
+                  <a:lnTo>
+                    <a:pt x="1777588" y="601717"/>
+                  </a:lnTo>
+                  <a:lnTo>
+                    <a:pt x="1851348" y="621821"/>
+                  </a:lnTo>
+                  <a:lnTo>
+                    <a:pt x="1925108" y="641592"/>
+                  </a:lnTo>
+                  <a:lnTo>
+                    <a:pt x="1998868" y="661036"/>
+                  </a:lnTo>
+                  <a:lnTo>
+                    <a:pt x="2072628" y="680156"/>
+                  </a:lnTo>
+                  <a:lnTo>
+                    <a:pt x="2146388" y="698960"/>
+                  </a:lnTo>
+                  <a:lnTo>
+                    <a:pt x="2220148" y="717452"/>
+                  </a:lnTo>
+                  <a:lnTo>
+                    <a:pt x="2293908" y="735637"/>
+                  </a:lnTo>
+                  <a:lnTo>
+                    <a:pt x="2367668" y="753521"/>
+                  </a:lnTo>
+                  <a:lnTo>
+                    <a:pt x="2441428" y="771108"/>
+                  </a:lnTo>
+                  <a:lnTo>
+                    <a:pt x="2515188" y="788404"/>
+                  </a:lnTo>
+                  <a:lnTo>
+                    <a:pt x="2588948" y="805412"/>
+                  </a:lnTo>
+                  <a:lnTo>
+                    <a:pt x="2662708" y="822139"/>
+                  </a:lnTo>
+                  <a:lnTo>
+                    <a:pt x="2736468" y="838588"/>
+                  </a:lnTo>
+                  <a:lnTo>
+                    <a:pt x="2810228" y="854764"/>
+                  </a:lnTo>
+                  <a:lnTo>
+                    <a:pt x="2883988" y="870673"/>
+                  </a:lnTo>
+                  <a:lnTo>
+                    <a:pt x="2957748" y="886317"/>
+                  </a:lnTo>
+                  <a:lnTo>
+                    <a:pt x="3031508" y="901702"/>
+                  </a:lnTo>
+                  <a:lnTo>
+                    <a:pt x="3105268" y="916832"/>
+                  </a:lnTo>
+                  <a:lnTo>
+                    <a:pt x="3179028" y="931711"/>
+                  </a:lnTo>
+                  <a:lnTo>
+                    <a:pt x="3252788" y="946343"/>
+                  </a:lnTo>
+                  <a:lnTo>
+                    <a:pt x="3326548" y="960732"/>
+                  </a:lnTo>
+                  <a:lnTo>
+                    <a:pt x="3400308" y="974883"/>
+                  </a:lnTo>
+                  <a:lnTo>
+                    <a:pt x="3474068" y="988799"/>
+                  </a:lnTo>
+                  <a:lnTo>
+                    <a:pt x="3547828" y="1002485"/>
+                  </a:lnTo>
+                  <a:lnTo>
+                    <a:pt x="3621588" y="1015943"/>
+                  </a:lnTo>
+                  <a:lnTo>
+                    <a:pt x="3695348" y="1029179"/>
+                  </a:lnTo>
+                  <a:lnTo>
+                    <a:pt x="3769108" y="1042195"/>
+                  </a:lnTo>
+                  <a:lnTo>
+                    <a:pt x="3842868" y="1054994"/>
+                  </a:lnTo>
+                  <a:lnTo>
+                    <a:pt x="3916628" y="1067582"/>
+                  </a:lnTo>
+                  <a:lnTo>
+                    <a:pt x="3990388" y="1079961"/>
+                  </a:lnTo>
+                  <a:lnTo>
+                    <a:pt x="4064149" y="1092135"/>
+                  </a:lnTo>
+                  <a:lnTo>
+                    <a:pt x="4137909" y="1104107"/>
+                  </a:lnTo>
+                  <a:lnTo>
+                    <a:pt x="4211669" y="1115880"/>
+                  </a:lnTo>
+                  <a:lnTo>
+                    <a:pt x="4285429" y="1127458"/>
+                  </a:lnTo>
+                  <a:lnTo>
+                    <a:pt x="4359189" y="1138844"/>
+                  </a:lnTo>
+                  <a:lnTo>
+                    <a:pt x="4432949" y="1150041"/>
+                  </a:lnTo>
+                  <a:lnTo>
+                    <a:pt x="4506709" y="1161053"/>
+                  </a:lnTo>
+                  <a:lnTo>
+                    <a:pt x="4580469" y="1171882"/>
+                  </a:lnTo>
+                  <a:lnTo>
+                    <a:pt x="4654229" y="1182531"/>
+                  </a:lnTo>
+                  <a:lnTo>
+                    <a:pt x="4727989" y="1193004"/>
+                  </a:lnTo>
+                  <a:lnTo>
+                    <a:pt x="4801749" y="1203303"/>
+                  </a:lnTo>
+                  <a:lnTo>
+                    <a:pt x="4875509" y="1213431"/>
+                  </a:lnTo>
+                  <a:lnTo>
+                    <a:pt x="4949269" y="1223391"/>
+                  </a:lnTo>
+                  <a:lnTo>
+                    <a:pt x="5023029" y="1233187"/>
+                  </a:lnTo>
+                  <a:lnTo>
+                    <a:pt x="5096789" y="1242819"/>
+                  </a:lnTo>
+                  <a:lnTo>
+                    <a:pt x="5170549" y="1252292"/>
+                  </a:lnTo>
+                  <a:lnTo>
+                    <a:pt x="5244309" y="1261608"/>
+                  </a:lnTo>
+                  <a:lnTo>
+                    <a:pt x="5318069" y="1270769"/>
+                  </a:lnTo>
+                  <a:lnTo>
+                    <a:pt x="5391829" y="1279779"/>
+                  </a:lnTo>
+                  <a:lnTo>
+                    <a:pt x="5465589" y="1288639"/>
+                  </a:lnTo>
+                  <a:lnTo>
+                    <a:pt x="5539349" y="1297352"/>
+                  </a:lnTo>
+                  <a:lnTo>
+                    <a:pt x="5613109" y="1305921"/>
+                  </a:lnTo>
+                  <a:lnTo>
+                    <a:pt x="5686869" y="1314347"/>
+                  </a:lnTo>
+                  <a:lnTo>
+                    <a:pt x="5760629" y="1322634"/>
+                  </a:lnTo>
+                  <a:lnTo>
+                    <a:pt x="5834389" y="1330783"/>
+                  </a:lnTo>
+                  <a:lnTo>
+                    <a:pt x="5908149" y="1338798"/>
+                  </a:lnTo>
+                  <a:lnTo>
+                    <a:pt x="5981909" y="1346679"/>
+                  </a:lnTo>
+                  <a:lnTo>
+                    <a:pt x="6055669" y="1354430"/>
+                  </a:lnTo>
+                  <a:lnTo>
+                    <a:pt x="6129429" y="1362052"/>
+                  </a:lnTo>
+                  <a:lnTo>
+                    <a:pt x="6203189" y="1369547"/>
+                  </a:lnTo>
+                  <a:lnTo>
+                    <a:pt x="6276949" y="1376919"/>
+                  </a:lnTo>
+                  <a:lnTo>
+                    <a:pt x="6350709" y="1384168"/>
+                  </a:lnTo>
+                  <a:lnTo>
+                    <a:pt x="6424469" y="1391297"/>
+                  </a:lnTo>
+                  <a:lnTo>
+                    <a:pt x="6498229" y="1398308"/>
+                  </a:lnTo>
+                  <a:lnTo>
+                    <a:pt x="6571989" y="1405202"/>
+                  </a:lnTo>
+                  <a:lnTo>
+                    <a:pt x="6645749" y="1411982"/>
+                  </a:lnTo>
+                  <a:lnTo>
+                    <a:pt x="6719509" y="1418650"/>
+                  </a:lnTo>
+                  <a:lnTo>
+                    <a:pt x="6793269" y="1425207"/>
+                  </a:lnTo>
+                  <a:lnTo>
+                    <a:pt x="6867029" y="1431655"/>
+                  </a:lnTo>
+                  <a:lnTo>
+                    <a:pt x="6940789" y="1437997"/>
+                  </a:lnTo>
+                  <a:lnTo>
+                    <a:pt x="7014550" y="1444233"/>
+                  </a:lnTo>
+                  <a:lnTo>
+                    <a:pt x="7088310" y="1450366"/>
+                  </a:lnTo>
+                  <a:lnTo>
+                    <a:pt x="7162070" y="1456397"/>
+                  </a:lnTo>
+                  <a:lnTo>
+                    <a:pt x="7235830" y="1462328"/>
                   </a:lnTo>
                 </a:path>
               </a:pathLst>
@@ -4527,7 +4527,7 @@
           </p:nvSpPr>
           <p:spPr>
             <a:xfrm>
-              <a:off x="817517" y="4679530"/>
+              <a:off x="817517" y="4727786"/>
               <a:ext cx="7799693" cy="0"/>
             </a:xfrm>
             <a:custGeom>
@@ -4570,15 +4570,15 @@
           </p:nvSpPr>
           <p:spPr>
             <a:xfrm>
-              <a:off x="4269157" y="1896563"/>
-              <a:ext cx="0" cy="3826579"/>
+              <a:off x="4269157" y="2073503"/>
+              <a:ext cx="0" cy="3649639"/>
             </a:xfrm>
             <a:custGeom>
               <a:avLst/>
               <a:pathLst>
-                <a:path w="0" h="3826579">
+                <a:path w="0" h="3649639">
                   <a:moveTo>
-                    <a:pt x="0" y="3826579"/>
+                    <a:pt x="0" y="3649639"/>
                   </a:moveTo>
                   <a:lnTo>
                     <a:pt x="0" y="0"/>
@@ -4613,7 +4613,7 @@
           </p:nvSpPr>
           <p:spPr>
             <a:xfrm>
-              <a:off x="692708" y="5509156"/>
+              <a:off x="692708" y="5517199"/>
               <a:ext cx="62179" cy="80101"/>
             </a:xfrm>
             <a:prstGeom prst="rect">
@@ -4659,7 +4659,7 @@
           </p:nvSpPr>
           <p:spPr>
             <a:xfrm>
-              <a:off x="692708" y="4639479"/>
+              <a:off x="692708" y="4687735"/>
               <a:ext cx="62179" cy="80101"/>
             </a:xfrm>
             <a:prstGeom prst="rect">
@@ -4705,7 +4705,7 @@
           </p:nvSpPr>
           <p:spPr>
             <a:xfrm>
-              <a:off x="692708" y="3769802"/>
+              <a:off x="692708" y="3858272"/>
               <a:ext cx="62179" cy="80101"/>
             </a:xfrm>
             <a:prstGeom prst="rect">
@@ -4751,7 +4751,7 @@
           </p:nvSpPr>
           <p:spPr>
             <a:xfrm>
-              <a:off x="692708" y="2900125"/>
+              <a:off x="692708" y="3028808"/>
               <a:ext cx="62179" cy="80101"/>
             </a:xfrm>
             <a:prstGeom prst="rect">
@@ -4797,7 +4797,7 @@
           </p:nvSpPr>
           <p:spPr>
             <a:xfrm>
-              <a:off x="692708" y="2030448"/>
+              <a:off x="692708" y="2199345"/>
               <a:ext cx="62179" cy="80101"/>
             </a:xfrm>
             <a:prstGeom prst="rect">
@@ -5073,7 +5073,7 @@
           </p:nvSpPr>
           <p:spPr>
             <a:xfrm rot="-5400000">
-              <a:off x="68446" y="3759743"/>
+              <a:off x="68446" y="3848213"/>
               <a:ext cx="1016904" cy="100218"/>
             </a:xfrm>
             <a:prstGeom prst="rect">
@@ -5114,6 +5114,52 @@
         <p:sp>
           <p:nvSpPr>
             <p:cNvPr id="38" name="tx38"/>
+            <p:cNvSpPr/>
+            <p:nvPr/>
+          </p:nvSpPr>
+          <p:spPr>
+            <a:xfrm>
+              <a:off x="817517" y="1896563"/>
+              <a:ext cx="5626211" cy="82021"/>
+            </a:xfrm>
+            <a:prstGeom prst="rect">
+              <a:avLst/>
+            </a:prstGeom>
+            <a:noFill/>
+          </p:spPr>
+          <p:txBody>
+            <a:bodyPr lIns="0" rIns="0" tIns="0" bIns="0" anchorCtr="1" anchor="ctr" wrap="none"/>
+            <a:lstStyle/>
+            <a:p>
+              <a:pPr algn="l" marL="0" marR="0" indent="0">
+                <a:lnSpc>
+                  <a:spcPts val="900"/>
+                </a:lnSpc>
+                <a:spcBef>
+                  <a:spcPts val="0"/>
+                </a:spcBef>
+                <a:spcAft>
+                  <a:spcPts val="0"/>
+                </a:spcAft>
+              </a:pPr>
+              <a:r>
+                <a:rPr sz="900">
+                  <a:solidFill>
+                    <a:srgbClr val="404040">
+                      <a:alpha val="100000"/>
+                    </a:srgbClr>
+                  </a:solidFill>
+                  <a:latin typeface="Helvetica"/>
+                  <a:cs typeface="Helvetica"/>
+                </a:rPr>
+                <a:t>subHR per 0.1 ratio decline: 1.22 (0.88-1.70)  |  per IQR decline (Δ = 0.29): 1.80 (0.69-4.69)  |  IQR: [0.85, 1.15]</a:t>
+              </a:r>
+            </a:p>
+          </p:txBody>
+        </p:sp>
+        <p:sp>
+          <p:nvSpPr>
+            <p:cNvPr id="39" name="tx39"/>
             <p:cNvSpPr/>
             <p:nvPr/>
           </p:nvSpPr>

--- a/docs/pptx/whole/jx-linsubhr-ratio-hosp6.pptx
+++ b/docs/pptx/whole/jx-linsubhr-ratio-hosp6.pptx
@@ -5120,7 +5120,7 @@
           <p:spPr>
             <a:xfrm>
               <a:off x="817517" y="1896563"/>
-              <a:ext cx="5626211" cy="82021"/>
+              <a:ext cx="6169365" cy="82021"/>
             </a:xfrm>
             <a:prstGeom prst="rect">
               <a:avLst/>
@@ -5152,7 +5152,7 @@
                   <a:latin typeface="Helvetica"/>
                   <a:cs typeface="Helvetica"/>
                 </a:rPr>
-                <a:t>subHR per 0.1 ratio decline: 1.22 (0.88-1.70)  |  per IQR decline (Δ = 0.29): 1.80 (0.69-4.69)  |  IQR: [0.85, 1.15]</a:t>
+                <a:t>subHR per 0.1 ratio decline: 1.22 (0.88-1.70), p = 0.229  |  per IQR decline (Δ = 0.29): 1.80 (0.69-4.69)  |  IQR: [0.85, 1.15]</a:t>
               </a:r>
             </a:p>
           </p:txBody>

--- a/docs/pptx/whole/jx-linsubhr-ratio-hosp6.pptx
+++ b/docs/pptx/whole/jx-linsubhr-ratio-hosp6.pptx
@@ -2443,7 +2443,7 @@
           </p:nvSpPr>
           <p:spPr>
             <a:xfrm>
-              <a:off x="1615213" y="2073503"/>
+              <a:off x="1365633" y="2073503"/>
               <a:ext cx="0" cy="3649639"/>
             </a:xfrm>
             <a:custGeom>
@@ -2486,7 +2486,7 @@
           </p:nvSpPr>
           <p:spPr>
             <a:xfrm>
-              <a:off x="3387871" y="2073503"/>
+              <a:off x="3517243" y="2073503"/>
               <a:ext cx="0" cy="3649639"/>
             </a:xfrm>
             <a:custGeom>
@@ -2529,7 +2529,7 @@
           </p:nvSpPr>
           <p:spPr>
             <a:xfrm>
-              <a:off x="5160528" y="2073503"/>
+              <a:off x="5668852" y="2073503"/>
               <a:ext cx="0" cy="3649639"/>
             </a:xfrm>
             <a:custGeom>
@@ -2572,7 +2572,7 @@
           </p:nvSpPr>
           <p:spPr>
             <a:xfrm>
-              <a:off x="6933186" y="2073503"/>
+              <a:off x="7820461" y="2073503"/>
               <a:ext cx="0" cy="3649639"/>
             </a:xfrm>
             <a:custGeom>
@@ -2830,7 +2830,7 @@
           </p:nvSpPr>
           <p:spPr>
             <a:xfrm>
-              <a:off x="2501542" y="2073503"/>
+              <a:off x="2441438" y="2073503"/>
               <a:ext cx="0" cy="3649639"/>
             </a:xfrm>
             <a:custGeom>
@@ -2873,7 +2873,7 @@
           </p:nvSpPr>
           <p:spPr>
             <a:xfrm>
-              <a:off x="4274200" y="2073503"/>
+              <a:off x="4593047" y="2073503"/>
               <a:ext cx="0" cy="3649639"/>
             </a:xfrm>
             <a:custGeom>
@@ -2916,7 +2916,7 @@
           </p:nvSpPr>
           <p:spPr>
             <a:xfrm>
-              <a:off x="6046857" y="2073503"/>
+              <a:off x="6744657" y="2073503"/>
               <a:ext cx="0" cy="3649639"/>
             </a:xfrm>
             <a:custGeom>
@@ -2953,616 +2953,573 @@
         </p:sp>
         <p:sp>
           <p:nvSpPr>
-            <p:cNvPr id="20" name="pl20"/>
+            <p:cNvPr id="20" name="pg20"/>
             <p:cNvSpPr/>
             <p:nvPr/>
           </p:nvSpPr>
           <p:spPr>
             <a:xfrm>
-              <a:off x="7819515" y="2073503"/>
-              <a:ext cx="0" cy="3649639"/>
+              <a:off x="1172049" y="2073503"/>
+              <a:ext cx="7090630" cy="3396729"/>
             </a:xfrm>
             <a:custGeom>
               <a:avLst/>
               <a:pathLst>
-                <a:path w="0" h="3649639">
+                <a:path w="7090630" h="3396729">
                   <a:moveTo>
-                    <a:pt x="0" y="3649639"/>
+                    <a:pt x="1077353" y="0"/>
                   </a:moveTo>
                   <a:lnTo>
-                    <a:pt x="0" y="0"/>
-                  </a:lnTo>
-                  <a:lnTo>
-                    <a:pt x="0" y="0"/>
-                  </a:lnTo>
-                </a:path>
-              </a:pathLst>
-            </a:custGeom>
-            <a:ln w="13550" cap="flat">
-              <a:solidFill>
-                <a:srgbClr val="EBEBEB">
-                  <a:alpha val="100000"/>
-                </a:srgbClr>
-              </a:solidFill>
-              <a:prstDash val="solid"/>
-              <a:round/>
-            </a:ln>
-          </p:spPr>
-          <p:txBody>
-            <a:bodyPr/>
-            <a:lstStyle/>
-            <a:p/>
-          </p:txBody>
-        </p:sp>
-        <p:sp>
-          <p:nvSpPr>
-            <p:cNvPr id="21" name="pg21"/>
-            <p:cNvSpPr/>
-            <p:nvPr/>
-          </p:nvSpPr>
-          <p:spPr>
-            <a:xfrm>
-              <a:off x="817517" y="2073503"/>
-              <a:ext cx="7235830" cy="3396729"/>
-            </a:xfrm>
-            <a:custGeom>
-              <a:avLst/>
-              <a:pathLst>
-                <a:path w="7235830" h="3396729">
-                  <a:moveTo>
-                    <a:pt x="1043093" y="0"/>
-                  </a:moveTo>
-                  <a:lnTo>
-                    <a:pt x="1113747" y="143739"/>
-                  </a:lnTo>
-                  <a:lnTo>
-                    <a:pt x="1187508" y="287345"/>
-                  </a:lnTo>
-                  <a:lnTo>
-                    <a:pt x="1261268" y="424776"/>
-                  </a:lnTo>
-                  <a:lnTo>
-                    <a:pt x="1335028" y="556298"/>
-                  </a:lnTo>
-                  <a:lnTo>
-                    <a:pt x="1408788" y="682165"/>
-                  </a:lnTo>
-                  <a:lnTo>
-                    <a:pt x="1482548" y="802621"/>
-                  </a:lnTo>
-                  <a:lnTo>
-                    <a:pt x="1556308" y="917897"/>
-                  </a:lnTo>
-                  <a:lnTo>
-                    <a:pt x="1630068" y="1028218"/>
-                  </a:lnTo>
-                  <a:lnTo>
-                    <a:pt x="1703828" y="1133795"/>
-                  </a:lnTo>
-                  <a:lnTo>
-                    <a:pt x="1777588" y="1234832"/>
-                  </a:lnTo>
-                  <a:lnTo>
-                    <a:pt x="1851348" y="1331525"/>
-                  </a:lnTo>
-                  <a:lnTo>
-                    <a:pt x="1925108" y="1424061"/>
-                  </a:lnTo>
-                  <a:lnTo>
-                    <a:pt x="1998868" y="1512619"/>
-                  </a:lnTo>
-                  <a:lnTo>
-                    <a:pt x="2072628" y="1597369"/>
-                  </a:lnTo>
-                  <a:lnTo>
-                    <a:pt x="2146388" y="1678474"/>
-                  </a:lnTo>
-                  <a:lnTo>
-                    <a:pt x="2220148" y="1756093"/>
-                  </a:lnTo>
-                  <a:lnTo>
-                    <a:pt x="2293908" y="1830375"/>
-                  </a:lnTo>
-                  <a:lnTo>
-                    <a:pt x="2367668" y="1901462"/>
-                  </a:lnTo>
-                  <a:lnTo>
-                    <a:pt x="2441428" y="1969494"/>
-                  </a:lnTo>
-                  <a:lnTo>
-                    <a:pt x="2515188" y="2034600"/>
-                  </a:lnTo>
-                  <a:lnTo>
-                    <a:pt x="2588948" y="2096907"/>
-                  </a:lnTo>
-                  <a:lnTo>
-                    <a:pt x="2662708" y="2156535"/>
-                  </a:lnTo>
-                  <a:lnTo>
-                    <a:pt x="2736468" y="2213599"/>
-                  </a:lnTo>
-                  <a:lnTo>
-                    <a:pt x="2810228" y="2268210"/>
-                  </a:lnTo>
-                  <a:lnTo>
-                    <a:pt x="2883988" y="2320472"/>
-                  </a:lnTo>
-                  <a:lnTo>
-                    <a:pt x="2957748" y="2370488"/>
-                  </a:lnTo>
-                  <a:lnTo>
-                    <a:pt x="3031508" y="2418353"/>
-                  </a:lnTo>
-                  <a:lnTo>
-                    <a:pt x="3105268" y="2464160"/>
-                  </a:lnTo>
-                  <a:lnTo>
-                    <a:pt x="3179028" y="2507998"/>
-                  </a:lnTo>
-                  <a:lnTo>
-                    <a:pt x="3252788" y="2549951"/>
-                  </a:lnTo>
-                  <a:lnTo>
-                    <a:pt x="3326548" y="2590100"/>
-                  </a:lnTo>
-                  <a:lnTo>
-                    <a:pt x="3400308" y="2628523"/>
-                  </a:lnTo>
-                  <a:lnTo>
-                    <a:pt x="3474068" y="2651630"/>
-                  </a:lnTo>
-                  <a:lnTo>
-                    <a:pt x="3547828" y="2642844"/>
-                  </a:lnTo>
-                  <a:lnTo>
-                    <a:pt x="3621588" y="2633966"/>
-                  </a:lnTo>
-                  <a:lnTo>
-                    <a:pt x="3695348" y="2624994"/>
-                  </a:lnTo>
-                  <a:lnTo>
-                    <a:pt x="3769108" y="2615927"/>
-                  </a:lnTo>
-                  <a:lnTo>
-                    <a:pt x="3842868" y="2606765"/>
-                  </a:lnTo>
-                  <a:lnTo>
-                    <a:pt x="3916628" y="2597505"/>
-                  </a:lnTo>
-                  <a:lnTo>
-                    <a:pt x="3990388" y="2588149"/>
-                  </a:lnTo>
-                  <a:lnTo>
-                    <a:pt x="4064149" y="2578693"/>
-                  </a:lnTo>
-                  <a:lnTo>
-                    <a:pt x="4137909" y="2569137"/>
-                  </a:lnTo>
-                  <a:lnTo>
-                    <a:pt x="4211669" y="2559481"/>
-                  </a:lnTo>
-                  <a:lnTo>
-                    <a:pt x="4285429" y="2549722"/>
-                  </a:lnTo>
-                  <a:lnTo>
-                    <a:pt x="4359189" y="2539861"/>
-                  </a:lnTo>
-                  <a:lnTo>
-                    <a:pt x="4432949" y="2529895"/>
-                  </a:lnTo>
-                  <a:lnTo>
-                    <a:pt x="4506709" y="2519825"/>
-                  </a:lnTo>
-                  <a:lnTo>
-                    <a:pt x="4580469" y="2509647"/>
-                  </a:lnTo>
-                  <a:lnTo>
-                    <a:pt x="4654229" y="2499363"/>
-                  </a:lnTo>
-                  <a:lnTo>
-                    <a:pt x="4727989" y="2488970"/>
-                  </a:lnTo>
-                  <a:lnTo>
-                    <a:pt x="4801749" y="2478467"/>
-                  </a:lnTo>
-                  <a:lnTo>
-                    <a:pt x="4875509" y="2467853"/>
-                  </a:lnTo>
-                  <a:lnTo>
-                    <a:pt x="4949269" y="2457127"/>
-                  </a:lnTo>
-                  <a:lnTo>
-                    <a:pt x="5023029" y="2446288"/>
-                  </a:lnTo>
-                  <a:lnTo>
-                    <a:pt x="5096789" y="2435335"/>
-                  </a:lnTo>
-                  <a:lnTo>
-                    <a:pt x="5170549" y="2424266"/>
-                  </a:lnTo>
-                  <a:lnTo>
-                    <a:pt x="5244309" y="2413080"/>
-                  </a:lnTo>
-                  <a:lnTo>
-                    <a:pt x="5318069" y="2401776"/>
-                  </a:lnTo>
-                  <a:lnTo>
-                    <a:pt x="5391829" y="2390352"/>
-                  </a:lnTo>
-                  <a:lnTo>
-                    <a:pt x="5465589" y="2378808"/>
-                  </a:lnTo>
-                  <a:lnTo>
-                    <a:pt x="5539349" y="2367142"/>
-                  </a:lnTo>
-                  <a:lnTo>
-                    <a:pt x="5613109" y="2355353"/>
-                  </a:lnTo>
-                  <a:lnTo>
-                    <a:pt x="5686869" y="2343439"/>
-                  </a:lnTo>
-                  <a:lnTo>
-                    <a:pt x="5760629" y="2331400"/>
-                  </a:lnTo>
-                  <a:lnTo>
-                    <a:pt x="5834389" y="2319233"/>
-                  </a:lnTo>
-                  <a:lnTo>
-                    <a:pt x="5908149" y="2306938"/>
-                  </a:lnTo>
-                  <a:lnTo>
-                    <a:pt x="5981909" y="2294514"/>
-                  </a:lnTo>
-                  <a:lnTo>
-                    <a:pt x="6055669" y="2281958"/>
-                  </a:lnTo>
-                  <a:lnTo>
-                    <a:pt x="6129429" y="2269269"/>
-                  </a:lnTo>
-                  <a:lnTo>
-                    <a:pt x="6203189" y="2256447"/>
-                  </a:lnTo>
-                  <a:lnTo>
-                    <a:pt x="6276949" y="2243489"/>
-                  </a:lnTo>
-                  <a:lnTo>
-                    <a:pt x="6350709" y="2230394"/>
-                  </a:lnTo>
-                  <a:lnTo>
-                    <a:pt x="6424469" y="2217161"/>
-                  </a:lnTo>
-                  <a:lnTo>
-                    <a:pt x="6498229" y="2203789"/>
-                  </a:lnTo>
-                  <a:lnTo>
-                    <a:pt x="6571989" y="2190275"/>
-                  </a:lnTo>
-                  <a:lnTo>
-                    <a:pt x="6645749" y="2176618"/>
-                  </a:lnTo>
-                  <a:lnTo>
-                    <a:pt x="6719509" y="2162818"/>
-                  </a:lnTo>
-                  <a:lnTo>
-                    <a:pt x="6793269" y="2148871"/>
-                  </a:lnTo>
-                  <a:lnTo>
-                    <a:pt x="6867029" y="2134778"/>
-                  </a:lnTo>
-                  <a:lnTo>
-                    <a:pt x="6940789" y="2120535"/>
-                  </a:lnTo>
-                  <a:lnTo>
-                    <a:pt x="7014550" y="2106143"/>
-                  </a:lnTo>
-                  <a:lnTo>
-                    <a:pt x="7088310" y="2091598"/>
-                  </a:lnTo>
-                  <a:lnTo>
-                    <a:pt x="7162070" y="2076899"/>
-                  </a:lnTo>
-                  <a:lnTo>
-                    <a:pt x="7235830" y="2062046"/>
-                  </a:lnTo>
-                  <a:lnTo>
-                    <a:pt x="7235830" y="3396729"/>
-                  </a:lnTo>
-                  <a:lnTo>
-                    <a:pt x="7162070" y="3392820"/>
-                  </a:lnTo>
-                  <a:lnTo>
-                    <a:pt x="7088310" y="3388735"/>
-                  </a:lnTo>
-                  <a:lnTo>
-                    <a:pt x="7014550" y="3384466"/>
-                  </a:lnTo>
-                  <a:lnTo>
-                    <a:pt x="6940789" y="3380006"/>
-                  </a:lnTo>
-                  <a:lnTo>
-                    <a:pt x="6867029" y="3375345"/>
-                  </a:lnTo>
-                  <a:lnTo>
-                    <a:pt x="6793269" y="3370475"/>
-                  </a:lnTo>
-                  <a:lnTo>
-                    <a:pt x="6719509" y="3365386"/>
-                  </a:lnTo>
-                  <a:lnTo>
-                    <a:pt x="6645749" y="3360068"/>
-                  </a:lnTo>
-                  <a:lnTo>
-                    <a:pt x="6571989" y="3354512"/>
-                  </a:lnTo>
-                  <a:lnTo>
-                    <a:pt x="6498229" y="3348706"/>
-                  </a:lnTo>
-                  <a:lnTo>
-                    <a:pt x="6424469" y="3342639"/>
-                  </a:lnTo>
-                  <a:lnTo>
-                    <a:pt x="6350709" y="3336299"/>
-                  </a:lnTo>
-                  <a:lnTo>
-                    <a:pt x="6276949" y="3329674"/>
-                  </a:lnTo>
-                  <a:lnTo>
-                    <a:pt x="6203189" y="3322752"/>
-                  </a:lnTo>
-                  <a:lnTo>
-                    <a:pt x="6129429" y="3315519"/>
-                  </a:lnTo>
-                  <a:lnTo>
-                    <a:pt x="6055669" y="3307961"/>
-                  </a:lnTo>
-                  <a:lnTo>
-                    <a:pt x="5981909" y="3300064"/>
-                  </a:lnTo>
-                  <a:lnTo>
-                    <a:pt x="5908149" y="3291812"/>
-                  </a:lnTo>
-                  <a:lnTo>
-                    <a:pt x="5834389" y="3283188"/>
-                  </a:lnTo>
-                  <a:lnTo>
-                    <a:pt x="5760629" y="3274178"/>
-                  </a:lnTo>
-                  <a:lnTo>
-                    <a:pt x="5686869" y="3264763"/>
-                  </a:lnTo>
-                  <a:lnTo>
-                    <a:pt x="5613109" y="3254924"/>
-                  </a:lnTo>
-                  <a:lnTo>
-                    <a:pt x="5539349" y="3244644"/>
-                  </a:lnTo>
-                  <a:lnTo>
-                    <a:pt x="5465589" y="3233902"/>
-                  </a:lnTo>
-                  <a:lnTo>
-                    <a:pt x="5391829" y="3222677"/>
-                  </a:lnTo>
-                  <a:lnTo>
-                    <a:pt x="5318069" y="3210948"/>
-                  </a:lnTo>
-                  <a:lnTo>
-                    <a:pt x="5244309" y="3198692"/>
-                  </a:lnTo>
-                  <a:lnTo>
-                    <a:pt x="5170549" y="3185885"/>
-                  </a:lnTo>
-                  <a:lnTo>
-                    <a:pt x="5096789" y="3172503"/>
-                  </a:lnTo>
-                  <a:lnTo>
-                    <a:pt x="5023029" y="3158520"/>
-                  </a:lnTo>
-                  <a:lnTo>
-                    <a:pt x="4949269" y="3143908"/>
-                  </a:lnTo>
-                  <a:lnTo>
-                    <a:pt x="4875509" y="3128640"/>
-                  </a:lnTo>
-                  <a:lnTo>
-                    <a:pt x="4801749" y="3112686"/>
-                  </a:lnTo>
-                  <a:lnTo>
-                    <a:pt x="4727989" y="3096015"/>
-                  </a:lnTo>
-                  <a:lnTo>
-                    <a:pt x="4654229" y="3078596"/>
-                  </a:lnTo>
-                  <a:lnTo>
-                    <a:pt x="4580469" y="3060393"/>
-                  </a:lnTo>
-                  <a:lnTo>
-                    <a:pt x="4506709" y="3041373"/>
-                  </a:lnTo>
-                  <a:lnTo>
-                    <a:pt x="4432949" y="3021499"/>
-                  </a:lnTo>
-                  <a:lnTo>
-                    <a:pt x="4359189" y="3000731"/>
-                  </a:lnTo>
-                  <a:lnTo>
-                    <a:pt x="4285429" y="2979031"/>
-                  </a:lnTo>
-                  <a:lnTo>
-                    <a:pt x="4211669" y="2956355"/>
-                  </a:lnTo>
-                  <a:lnTo>
-                    <a:pt x="4137909" y="2932661"/>
-                  </a:lnTo>
-                  <a:lnTo>
-                    <a:pt x="4064149" y="2907902"/>
-                  </a:lnTo>
-                  <a:lnTo>
-                    <a:pt x="3990388" y="2882031"/>
-                  </a:lnTo>
-                  <a:lnTo>
-                    <a:pt x="3916628" y="2854997"/>
-                  </a:lnTo>
-                  <a:lnTo>
-                    <a:pt x="3842868" y="2826749"/>
-                  </a:lnTo>
-                  <a:lnTo>
-                    <a:pt x="3769108" y="2797232"/>
-                  </a:lnTo>
-                  <a:lnTo>
-                    <a:pt x="3695348" y="2766389"/>
-                  </a:lnTo>
-                  <a:lnTo>
-                    <a:pt x="3621588" y="2734160"/>
-                  </a:lnTo>
-                  <a:lnTo>
-                    <a:pt x="3547828" y="2700484"/>
-                  </a:lnTo>
-                  <a:lnTo>
-                    <a:pt x="3474068" y="2665294"/>
-                  </a:lnTo>
-                  <a:lnTo>
-                    <a:pt x="3400308" y="2660323"/>
-                  </a:lnTo>
-                  <a:lnTo>
-                    <a:pt x="3326548" y="2668926"/>
-                  </a:lnTo>
-                  <a:lnTo>
-                    <a:pt x="3252788" y="2677439"/>
-                  </a:lnTo>
-                  <a:lnTo>
-                    <a:pt x="3179028" y="2685863"/>
-                  </a:lnTo>
-                  <a:lnTo>
-                    <a:pt x="3105268" y="2694199"/>
-                  </a:lnTo>
-                  <a:lnTo>
-                    <a:pt x="3031508" y="2702448"/>
-                  </a:lnTo>
-                  <a:lnTo>
-                    <a:pt x="2957748" y="2710611"/>
-                  </a:lnTo>
-                  <a:lnTo>
-                    <a:pt x="2883988" y="2718689"/>
-                  </a:lnTo>
-                  <a:lnTo>
-                    <a:pt x="2810228" y="2726682"/>
-                  </a:lnTo>
-                  <a:lnTo>
-                    <a:pt x="2736468" y="2734591"/>
-                  </a:lnTo>
-                  <a:lnTo>
-                    <a:pt x="2662708" y="2742418"/>
-                  </a:lnTo>
-                  <a:lnTo>
-                    <a:pt x="2588948" y="2750163"/>
-                  </a:lnTo>
-                  <a:lnTo>
-                    <a:pt x="2515188" y="2757828"/>
-                  </a:lnTo>
-                  <a:lnTo>
-                    <a:pt x="2441428" y="2765412"/>
-                  </a:lnTo>
-                  <a:lnTo>
-                    <a:pt x="2367668" y="2772917"/>
-                  </a:lnTo>
-                  <a:lnTo>
-                    <a:pt x="2293908" y="2780343"/>
-                  </a:lnTo>
-                  <a:lnTo>
-                    <a:pt x="2220148" y="2787692"/>
-                  </a:lnTo>
-                  <a:lnTo>
-                    <a:pt x="2146388" y="2794964"/>
-                  </a:lnTo>
-                  <a:lnTo>
-                    <a:pt x="2072628" y="2802161"/>
-                  </a:lnTo>
-                  <a:lnTo>
-                    <a:pt x="1998868" y="2809282"/>
-                  </a:lnTo>
-                  <a:lnTo>
-                    <a:pt x="1925108" y="2816328"/>
-                  </a:lnTo>
-                  <a:lnTo>
-                    <a:pt x="1851348" y="2823301"/>
-                  </a:lnTo>
-                  <a:lnTo>
-                    <a:pt x="1777588" y="2830201"/>
-                  </a:lnTo>
-                  <a:lnTo>
-                    <a:pt x="1703828" y="2837029"/>
-                  </a:lnTo>
-                  <a:lnTo>
-                    <a:pt x="1630068" y="2843786"/>
-                  </a:lnTo>
-                  <a:lnTo>
-                    <a:pt x="1556308" y="2850472"/>
-                  </a:lnTo>
-                  <a:lnTo>
-                    <a:pt x="1482548" y="2857089"/>
-                  </a:lnTo>
-                  <a:lnTo>
-                    <a:pt x="1408788" y="2863636"/>
-                  </a:lnTo>
-                  <a:lnTo>
-                    <a:pt x="1335028" y="2870114"/>
-                  </a:lnTo>
-                  <a:lnTo>
-                    <a:pt x="1261268" y="2876525"/>
-                  </a:lnTo>
-                  <a:lnTo>
-                    <a:pt x="1187508" y="2882870"/>
-                  </a:lnTo>
-                  <a:lnTo>
-                    <a:pt x="1113747" y="2889147"/>
-                  </a:lnTo>
-                  <a:lnTo>
-                    <a:pt x="1039987" y="2895359"/>
-                  </a:lnTo>
-                  <a:lnTo>
-                    <a:pt x="966227" y="2901507"/>
-                  </a:lnTo>
-                  <a:lnTo>
-                    <a:pt x="892467" y="2907590"/>
-                  </a:lnTo>
-                  <a:lnTo>
-                    <a:pt x="818707" y="2913609"/>
-                  </a:lnTo>
-                  <a:lnTo>
-                    <a:pt x="744947" y="2919566"/>
-                  </a:lnTo>
-                  <a:lnTo>
-                    <a:pt x="671187" y="2925460"/>
-                  </a:lnTo>
-                  <a:lnTo>
-                    <a:pt x="597427" y="2931293"/>
-                  </a:lnTo>
-                  <a:lnTo>
-                    <a:pt x="523667" y="2937065"/>
-                  </a:lnTo>
-                  <a:lnTo>
-                    <a:pt x="449907" y="2942777"/>
-                  </a:lnTo>
-                  <a:lnTo>
-                    <a:pt x="376147" y="2948429"/>
-                  </a:lnTo>
-                  <a:lnTo>
-                    <a:pt x="302387" y="2954021"/>
-                  </a:lnTo>
-                  <a:lnTo>
-                    <a:pt x="228627" y="2959556"/>
-                  </a:lnTo>
-                  <a:lnTo>
-                    <a:pt x="154867" y="2965032"/>
-                  </a:lnTo>
-                  <a:lnTo>
-                    <a:pt x="81107" y="2970452"/>
-                  </a:lnTo>
-                  <a:lnTo>
-                    <a:pt x="7347" y="2975815"/>
-                  </a:lnTo>
-                  <a:lnTo>
-                    <a:pt x="0" y="2976343"/>
+                    <a:pt x="1145960" y="143739"/>
+                  </a:lnTo>
+                  <a:lnTo>
+                    <a:pt x="1217582" y="287345"/>
+                  </a:lnTo>
+                  <a:lnTo>
+                    <a:pt x="1289205" y="424776"/>
+                  </a:lnTo>
+                  <a:lnTo>
+                    <a:pt x="1360827" y="556298"/>
+                  </a:lnTo>
+                  <a:lnTo>
+                    <a:pt x="1432450" y="682165"/>
+                  </a:lnTo>
+                  <a:lnTo>
+                    <a:pt x="1504073" y="802621"/>
+                  </a:lnTo>
+                  <a:lnTo>
+                    <a:pt x="1575695" y="917897"/>
+                  </a:lnTo>
+                  <a:lnTo>
+                    <a:pt x="1647318" y="1028218"/>
+                  </a:lnTo>
+                  <a:lnTo>
+                    <a:pt x="1718940" y="1133795"/>
+                  </a:lnTo>
+                  <a:lnTo>
+                    <a:pt x="1790563" y="1234832"/>
+                  </a:lnTo>
+                  <a:lnTo>
+                    <a:pt x="1862185" y="1331525"/>
+                  </a:lnTo>
+                  <a:lnTo>
+                    <a:pt x="1933808" y="1424061"/>
+                  </a:lnTo>
+                  <a:lnTo>
+                    <a:pt x="2005430" y="1512619"/>
+                  </a:lnTo>
+                  <a:lnTo>
+                    <a:pt x="2077053" y="1597369"/>
+                  </a:lnTo>
+                  <a:lnTo>
+                    <a:pt x="2148675" y="1678474"/>
+                  </a:lnTo>
+                  <a:lnTo>
+                    <a:pt x="2220298" y="1756093"/>
+                  </a:lnTo>
+                  <a:lnTo>
+                    <a:pt x="2291920" y="1830375"/>
+                  </a:lnTo>
+                  <a:lnTo>
+                    <a:pt x="2363543" y="1901462"/>
+                  </a:lnTo>
+                  <a:lnTo>
+                    <a:pt x="2435165" y="1969494"/>
+                  </a:lnTo>
+                  <a:lnTo>
+                    <a:pt x="2506788" y="2034600"/>
+                  </a:lnTo>
+                  <a:lnTo>
+                    <a:pt x="2578410" y="2096907"/>
+                  </a:lnTo>
+                  <a:lnTo>
+                    <a:pt x="2650033" y="2156535"/>
+                  </a:lnTo>
+                  <a:lnTo>
+                    <a:pt x="2721655" y="2213599"/>
+                  </a:lnTo>
+                  <a:lnTo>
+                    <a:pt x="2793278" y="2268210"/>
+                  </a:lnTo>
+                  <a:lnTo>
+                    <a:pt x="2864901" y="2320472"/>
+                  </a:lnTo>
+                  <a:lnTo>
+                    <a:pt x="2936523" y="2370488"/>
+                  </a:lnTo>
+                  <a:lnTo>
+                    <a:pt x="3008146" y="2418353"/>
+                  </a:lnTo>
+                  <a:lnTo>
+                    <a:pt x="3079768" y="2464160"/>
+                  </a:lnTo>
+                  <a:lnTo>
+                    <a:pt x="3151391" y="2507998"/>
+                  </a:lnTo>
+                  <a:lnTo>
+                    <a:pt x="3223013" y="2549951"/>
+                  </a:lnTo>
+                  <a:lnTo>
+                    <a:pt x="3294636" y="2590100"/>
+                  </a:lnTo>
+                  <a:lnTo>
+                    <a:pt x="3366258" y="2628523"/>
+                  </a:lnTo>
+                  <a:lnTo>
+                    <a:pt x="3437881" y="2651630"/>
+                  </a:lnTo>
+                  <a:lnTo>
+                    <a:pt x="3509503" y="2642844"/>
+                  </a:lnTo>
+                  <a:lnTo>
+                    <a:pt x="3581126" y="2633966"/>
+                  </a:lnTo>
+                  <a:lnTo>
+                    <a:pt x="3652748" y="2624994"/>
+                  </a:lnTo>
+                  <a:lnTo>
+                    <a:pt x="3724371" y="2615927"/>
+                  </a:lnTo>
+                  <a:lnTo>
+                    <a:pt x="3795993" y="2606765"/>
+                  </a:lnTo>
+                  <a:lnTo>
+                    <a:pt x="3867616" y="2597505"/>
+                  </a:lnTo>
+                  <a:lnTo>
+                    <a:pt x="3939238" y="2588149"/>
+                  </a:lnTo>
+                  <a:lnTo>
+                    <a:pt x="4010861" y="2578693"/>
+                  </a:lnTo>
+                  <a:lnTo>
+                    <a:pt x="4082483" y="2569137"/>
+                  </a:lnTo>
+                  <a:lnTo>
+                    <a:pt x="4154106" y="2559481"/>
+                  </a:lnTo>
+                  <a:lnTo>
+                    <a:pt x="4225729" y="2549722"/>
+                  </a:lnTo>
+                  <a:lnTo>
+                    <a:pt x="4297351" y="2539861"/>
+                  </a:lnTo>
+                  <a:lnTo>
+                    <a:pt x="4368974" y="2529895"/>
+                  </a:lnTo>
+                  <a:lnTo>
+                    <a:pt x="4440596" y="2519825"/>
+                  </a:lnTo>
+                  <a:lnTo>
+                    <a:pt x="4512219" y="2509647"/>
+                  </a:lnTo>
+                  <a:lnTo>
+                    <a:pt x="4583841" y="2499363"/>
+                  </a:lnTo>
+                  <a:lnTo>
+                    <a:pt x="4655464" y="2488970"/>
+                  </a:lnTo>
+                  <a:lnTo>
+                    <a:pt x="4727086" y="2478467"/>
+                  </a:lnTo>
+                  <a:lnTo>
+                    <a:pt x="4798709" y="2467853"/>
+                  </a:lnTo>
+                  <a:lnTo>
+                    <a:pt x="4870331" y="2457127"/>
+                  </a:lnTo>
+                  <a:lnTo>
+                    <a:pt x="4941954" y="2446288"/>
+                  </a:lnTo>
+                  <a:lnTo>
+                    <a:pt x="5013576" y="2435335"/>
+                  </a:lnTo>
+                  <a:lnTo>
+                    <a:pt x="5085199" y="2424266"/>
+                  </a:lnTo>
+                  <a:lnTo>
+                    <a:pt x="5156821" y="2413080"/>
+                  </a:lnTo>
+                  <a:lnTo>
+                    <a:pt x="5228444" y="2401776"/>
+                  </a:lnTo>
+                  <a:lnTo>
+                    <a:pt x="5300066" y="2390352"/>
+                  </a:lnTo>
+                  <a:lnTo>
+                    <a:pt x="5371689" y="2378808"/>
+                  </a:lnTo>
+                  <a:lnTo>
+                    <a:pt x="5443311" y="2367142"/>
+                  </a:lnTo>
+                  <a:lnTo>
+                    <a:pt x="5514934" y="2355353"/>
+                  </a:lnTo>
+                  <a:lnTo>
+                    <a:pt x="5586557" y="2343439"/>
+                  </a:lnTo>
+                  <a:lnTo>
+                    <a:pt x="5658179" y="2331400"/>
+                  </a:lnTo>
+                  <a:lnTo>
+                    <a:pt x="5729802" y="2319233"/>
+                  </a:lnTo>
+                  <a:lnTo>
+                    <a:pt x="5801424" y="2306938"/>
+                  </a:lnTo>
+                  <a:lnTo>
+                    <a:pt x="5873047" y="2294514"/>
+                  </a:lnTo>
+                  <a:lnTo>
+                    <a:pt x="5944669" y="2281958"/>
+                  </a:lnTo>
+                  <a:lnTo>
+                    <a:pt x="6016292" y="2269269"/>
+                  </a:lnTo>
+                  <a:lnTo>
+                    <a:pt x="6087914" y="2256447"/>
+                  </a:lnTo>
+                  <a:lnTo>
+                    <a:pt x="6159537" y="2243489"/>
+                  </a:lnTo>
+                  <a:lnTo>
+                    <a:pt x="6231159" y="2230394"/>
+                  </a:lnTo>
+                  <a:lnTo>
+                    <a:pt x="6302782" y="2217161"/>
+                  </a:lnTo>
+                  <a:lnTo>
+                    <a:pt x="6374404" y="2203789"/>
+                  </a:lnTo>
+                  <a:lnTo>
+                    <a:pt x="6446027" y="2190275"/>
+                  </a:lnTo>
+                  <a:lnTo>
+                    <a:pt x="6517649" y="2176618"/>
+                  </a:lnTo>
+                  <a:lnTo>
+                    <a:pt x="6589272" y="2162818"/>
+                  </a:lnTo>
+                  <a:lnTo>
+                    <a:pt x="6660894" y="2148871"/>
+                  </a:lnTo>
+                  <a:lnTo>
+                    <a:pt x="6732517" y="2134778"/>
+                  </a:lnTo>
+                  <a:lnTo>
+                    <a:pt x="6804139" y="2120535"/>
+                  </a:lnTo>
+                  <a:lnTo>
+                    <a:pt x="6875762" y="2106143"/>
+                  </a:lnTo>
+                  <a:lnTo>
+                    <a:pt x="6947385" y="2091598"/>
+                  </a:lnTo>
+                  <a:lnTo>
+                    <a:pt x="7019007" y="2076899"/>
+                  </a:lnTo>
+                  <a:lnTo>
+                    <a:pt x="7090630" y="2062046"/>
+                  </a:lnTo>
+                  <a:lnTo>
+                    <a:pt x="7090630" y="3396729"/>
+                  </a:lnTo>
+                  <a:lnTo>
+                    <a:pt x="7019007" y="3392820"/>
+                  </a:lnTo>
+                  <a:lnTo>
+                    <a:pt x="6947385" y="3388735"/>
+                  </a:lnTo>
+                  <a:lnTo>
+                    <a:pt x="6875762" y="3384466"/>
+                  </a:lnTo>
+                  <a:lnTo>
+                    <a:pt x="6804139" y="3380006"/>
+                  </a:lnTo>
+                  <a:lnTo>
+                    <a:pt x="6732517" y="3375345"/>
+                  </a:lnTo>
+                  <a:lnTo>
+                    <a:pt x="6660894" y="3370475"/>
+                  </a:lnTo>
+                  <a:lnTo>
+                    <a:pt x="6589272" y="3365386"/>
+                  </a:lnTo>
+                  <a:lnTo>
+                    <a:pt x="6517649" y="3360068"/>
+                  </a:lnTo>
+                  <a:lnTo>
+                    <a:pt x="6446027" y="3354512"/>
+                  </a:lnTo>
+                  <a:lnTo>
+                    <a:pt x="6374404" y="3348706"/>
+                  </a:lnTo>
+                  <a:lnTo>
+                    <a:pt x="6302782" y="3342639"/>
+                  </a:lnTo>
+                  <a:lnTo>
+                    <a:pt x="6231159" y="3336299"/>
+                  </a:lnTo>
+                  <a:lnTo>
+                    <a:pt x="6159537" y="3329674"/>
+                  </a:lnTo>
+                  <a:lnTo>
+                    <a:pt x="6087914" y="3322752"/>
+                  </a:lnTo>
+                  <a:lnTo>
+                    <a:pt x="6016292" y="3315519"/>
+                  </a:lnTo>
+                  <a:lnTo>
+                    <a:pt x="5944669" y="3307961"/>
+                  </a:lnTo>
+                  <a:lnTo>
+                    <a:pt x="5873047" y="3300064"/>
+                  </a:lnTo>
+                  <a:lnTo>
+                    <a:pt x="5801424" y="3291812"/>
+                  </a:lnTo>
+                  <a:lnTo>
+                    <a:pt x="5729802" y="3283188"/>
+                  </a:lnTo>
+                  <a:lnTo>
+                    <a:pt x="5658179" y="3274178"/>
+                  </a:lnTo>
+                  <a:lnTo>
+                    <a:pt x="5586557" y="3264763"/>
+                  </a:lnTo>
+                  <a:lnTo>
+                    <a:pt x="5514934" y="3254924"/>
+                  </a:lnTo>
+                  <a:lnTo>
+                    <a:pt x="5443311" y="3244644"/>
+                  </a:lnTo>
+                  <a:lnTo>
+                    <a:pt x="5371689" y="3233902"/>
+                  </a:lnTo>
+                  <a:lnTo>
+                    <a:pt x="5300066" y="3222677"/>
+                  </a:lnTo>
+                  <a:lnTo>
+                    <a:pt x="5228444" y="3210948"/>
+                  </a:lnTo>
+                  <a:lnTo>
+                    <a:pt x="5156821" y="3198692"/>
+                  </a:lnTo>
+                  <a:lnTo>
+                    <a:pt x="5085199" y="3185885"/>
+                  </a:lnTo>
+                  <a:lnTo>
+                    <a:pt x="5013576" y="3172503"/>
+                  </a:lnTo>
+                  <a:lnTo>
+                    <a:pt x="4941954" y="3158520"/>
+                  </a:lnTo>
+                  <a:lnTo>
+                    <a:pt x="4870331" y="3143908"/>
+                  </a:lnTo>
+                  <a:lnTo>
+                    <a:pt x="4798709" y="3128640"/>
+                  </a:lnTo>
+                  <a:lnTo>
+                    <a:pt x="4727086" y="3112686"/>
+                  </a:lnTo>
+                  <a:lnTo>
+                    <a:pt x="4655464" y="3096015"/>
+                  </a:lnTo>
+                  <a:lnTo>
+                    <a:pt x="4583841" y="3078596"/>
+                  </a:lnTo>
+                  <a:lnTo>
+                    <a:pt x="4512219" y="3060393"/>
+                  </a:lnTo>
+                  <a:lnTo>
+                    <a:pt x="4440596" y="3041373"/>
+                  </a:lnTo>
+                  <a:lnTo>
+                    <a:pt x="4368974" y="3021499"/>
+                  </a:lnTo>
+                  <a:lnTo>
+                    <a:pt x="4297351" y="3000731"/>
+                  </a:lnTo>
+                  <a:lnTo>
+                    <a:pt x="4225729" y="2979031"/>
+                  </a:lnTo>
+                  <a:lnTo>
+                    <a:pt x="4154106" y="2956355"/>
+                  </a:lnTo>
+                  <a:lnTo>
+                    <a:pt x="4082483" y="2932661"/>
+                  </a:lnTo>
+                  <a:lnTo>
+                    <a:pt x="4010861" y="2907902"/>
+                  </a:lnTo>
+                  <a:lnTo>
+                    <a:pt x="3939238" y="2882031"/>
+                  </a:lnTo>
+                  <a:lnTo>
+                    <a:pt x="3867616" y="2854997"/>
+                  </a:lnTo>
+                  <a:lnTo>
+                    <a:pt x="3795993" y="2826749"/>
+                  </a:lnTo>
+                  <a:lnTo>
+                    <a:pt x="3724371" y="2797232"/>
+                  </a:lnTo>
+                  <a:lnTo>
+                    <a:pt x="3652748" y="2766389"/>
+                  </a:lnTo>
+                  <a:lnTo>
+                    <a:pt x="3581126" y="2734160"/>
+                  </a:lnTo>
+                  <a:lnTo>
+                    <a:pt x="3509503" y="2700484"/>
+                  </a:lnTo>
+                  <a:lnTo>
+                    <a:pt x="3437881" y="2665294"/>
+                  </a:lnTo>
+                  <a:lnTo>
+                    <a:pt x="3366258" y="2660323"/>
+                  </a:lnTo>
+                  <a:lnTo>
+                    <a:pt x="3294636" y="2668926"/>
+                  </a:lnTo>
+                  <a:lnTo>
+                    <a:pt x="3223013" y="2677439"/>
+                  </a:lnTo>
+                  <a:lnTo>
+                    <a:pt x="3151391" y="2685863"/>
+                  </a:lnTo>
+                  <a:lnTo>
+                    <a:pt x="3079768" y="2694199"/>
+                  </a:lnTo>
+                  <a:lnTo>
+                    <a:pt x="3008146" y="2702448"/>
+                  </a:lnTo>
+                  <a:lnTo>
+                    <a:pt x="2936523" y="2710611"/>
+                  </a:lnTo>
+                  <a:lnTo>
+                    <a:pt x="2864901" y="2718689"/>
+                  </a:lnTo>
+                  <a:lnTo>
+                    <a:pt x="2793278" y="2726682"/>
+                  </a:lnTo>
+                  <a:lnTo>
+                    <a:pt x="2721655" y="2734591"/>
+                  </a:lnTo>
+                  <a:lnTo>
+                    <a:pt x="2650033" y="2742418"/>
+                  </a:lnTo>
+                  <a:lnTo>
+                    <a:pt x="2578410" y="2750163"/>
+                  </a:lnTo>
+                  <a:lnTo>
+                    <a:pt x="2506788" y="2757828"/>
+                  </a:lnTo>
+                  <a:lnTo>
+                    <a:pt x="2435165" y="2765412"/>
+                  </a:lnTo>
+                  <a:lnTo>
+                    <a:pt x="2363543" y="2772917"/>
+                  </a:lnTo>
+                  <a:lnTo>
+                    <a:pt x="2291920" y="2780343"/>
+                  </a:lnTo>
+                  <a:lnTo>
+                    <a:pt x="2220298" y="2787692"/>
+                  </a:lnTo>
+                  <a:lnTo>
+                    <a:pt x="2148675" y="2794964"/>
+                  </a:lnTo>
+                  <a:lnTo>
+                    <a:pt x="2077053" y="2802161"/>
+                  </a:lnTo>
+                  <a:lnTo>
+                    <a:pt x="2005430" y="2809282"/>
+                  </a:lnTo>
+                  <a:lnTo>
+                    <a:pt x="1933808" y="2816328"/>
+                  </a:lnTo>
+                  <a:lnTo>
+                    <a:pt x="1862185" y="2823301"/>
+                  </a:lnTo>
+                  <a:lnTo>
+                    <a:pt x="1790563" y="2830201"/>
+                  </a:lnTo>
+                  <a:lnTo>
+                    <a:pt x="1718940" y="2837029"/>
+                  </a:lnTo>
+                  <a:lnTo>
+                    <a:pt x="1647318" y="2843786"/>
+                  </a:lnTo>
+                  <a:lnTo>
+                    <a:pt x="1575695" y="2850472"/>
+                  </a:lnTo>
+                  <a:lnTo>
+                    <a:pt x="1504073" y="2857089"/>
+                  </a:lnTo>
+                  <a:lnTo>
+                    <a:pt x="1432450" y="2863636"/>
+                  </a:lnTo>
+                  <a:lnTo>
+                    <a:pt x="1360827" y="2870114"/>
+                  </a:lnTo>
+                  <a:lnTo>
+                    <a:pt x="1289205" y="2876525"/>
+                  </a:lnTo>
+                  <a:lnTo>
+                    <a:pt x="1217582" y="2882870"/>
+                  </a:lnTo>
+                  <a:lnTo>
+                    <a:pt x="1145960" y="2889147"/>
+                  </a:lnTo>
+                  <a:lnTo>
+                    <a:pt x="1074337" y="2895359"/>
+                  </a:lnTo>
+                  <a:lnTo>
+                    <a:pt x="1002715" y="2901507"/>
+                  </a:lnTo>
+                  <a:lnTo>
+                    <a:pt x="931092" y="2907590"/>
+                  </a:lnTo>
+                  <a:lnTo>
+                    <a:pt x="859470" y="2913609"/>
+                  </a:lnTo>
+                  <a:lnTo>
+                    <a:pt x="787847" y="2919566"/>
+                  </a:lnTo>
+                  <a:lnTo>
+                    <a:pt x="716225" y="2925460"/>
+                  </a:lnTo>
+                  <a:lnTo>
+                    <a:pt x="644602" y="2931293"/>
+                  </a:lnTo>
+                  <a:lnTo>
+                    <a:pt x="572980" y="2937065"/>
+                  </a:lnTo>
+                  <a:lnTo>
+                    <a:pt x="501357" y="2942777"/>
+                  </a:lnTo>
+                  <a:lnTo>
+                    <a:pt x="429735" y="2948429"/>
+                  </a:lnTo>
+                  <a:lnTo>
+                    <a:pt x="358112" y="2954021"/>
+                  </a:lnTo>
+                  <a:lnTo>
+                    <a:pt x="286490" y="2959556"/>
+                  </a:lnTo>
+                  <a:lnTo>
+                    <a:pt x="214867" y="2965032"/>
+                  </a:lnTo>
+                  <a:lnTo>
+                    <a:pt x="143245" y="2970452"/>
+                  </a:lnTo>
+                  <a:lnTo>
+                    <a:pt x="71622" y="2975815"/>
+                  </a:lnTo>
+                  <a:lnTo>
+                    <a:pt x="0" y="2981121"/>
                   </a:lnTo>
                   <a:close/>
                 </a:path>
@@ -3582,273 +3539,598 @@
         </p:sp>
         <p:sp>
           <p:nvSpPr>
+            <p:cNvPr id="21" name="pl21"/>
+            <p:cNvSpPr/>
+            <p:nvPr/>
+          </p:nvSpPr>
+          <p:spPr>
+            <a:xfrm>
+              <a:off x="2249402" y="2073503"/>
+              <a:ext cx="6013276" cy="2651630"/>
+            </a:xfrm>
+            <a:custGeom>
+              <a:avLst/>
+              <a:pathLst>
+                <a:path w="6013276" h="2651630">
+                  <a:moveTo>
+                    <a:pt x="0" y="0"/>
+                  </a:moveTo>
+                  <a:lnTo>
+                    <a:pt x="68607" y="143739"/>
+                  </a:lnTo>
+                  <a:lnTo>
+                    <a:pt x="140229" y="287345"/>
+                  </a:lnTo>
+                  <a:lnTo>
+                    <a:pt x="211852" y="424776"/>
+                  </a:lnTo>
+                  <a:lnTo>
+                    <a:pt x="283474" y="556298"/>
+                  </a:lnTo>
+                  <a:lnTo>
+                    <a:pt x="355097" y="682165"/>
+                  </a:lnTo>
+                  <a:lnTo>
+                    <a:pt x="426719" y="802621"/>
+                  </a:lnTo>
+                  <a:lnTo>
+                    <a:pt x="498342" y="917897"/>
+                  </a:lnTo>
+                  <a:lnTo>
+                    <a:pt x="569964" y="1028218"/>
+                  </a:lnTo>
+                  <a:lnTo>
+                    <a:pt x="641587" y="1133795"/>
+                  </a:lnTo>
+                  <a:lnTo>
+                    <a:pt x="713209" y="1234832"/>
+                  </a:lnTo>
+                  <a:lnTo>
+                    <a:pt x="784832" y="1331525"/>
+                  </a:lnTo>
+                  <a:lnTo>
+                    <a:pt x="856454" y="1424061"/>
+                  </a:lnTo>
+                  <a:lnTo>
+                    <a:pt x="928077" y="1512619"/>
+                  </a:lnTo>
+                  <a:lnTo>
+                    <a:pt x="999699" y="1597369"/>
+                  </a:lnTo>
+                  <a:lnTo>
+                    <a:pt x="1071322" y="1678474"/>
+                  </a:lnTo>
+                  <a:lnTo>
+                    <a:pt x="1142944" y="1756093"/>
+                  </a:lnTo>
+                  <a:lnTo>
+                    <a:pt x="1214567" y="1830375"/>
+                  </a:lnTo>
+                  <a:lnTo>
+                    <a:pt x="1286189" y="1901462"/>
+                  </a:lnTo>
+                  <a:lnTo>
+                    <a:pt x="1357812" y="1969494"/>
+                  </a:lnTo>
+                  <a:lnTo>
+                    <a:pt x="1429435" y="2034600"/>
+                  </a:lnTo>
+                  <a:lnTo>
+                    <a:pt x="1501057" y="2096907"/>
+                  </a:lnTo>
+                  <a:lnTo>
+                    <a:pt x="1572680" y="2156535"/>
+                  </a:lnTo>
+                  <a:lnTo>
+                    <a:pt x="1644302" y="2213599"/>
+                  </a:lnTo>
+                  <a:lnTo>
+                    <a:pt x="1715925" y="2268210"/>
+                  </a:lnTo>
+                  <a:lnTo>
+                    <a:pt x="1787547" y="2320472"/>
+                  </a:lnTo>
+                  <a:lnTo>
+                    <a:pt x="1859170" y="2370488"/>
+                  </a:lnTo>
+                  <a:lnTo>
+                    <a:pt x="1930792" y="2418353"/>
+                  </a:lnTo>
+                  <a:lnTo>
+                    <a:pt x="2002415" y="2464160"/>
+                  </a:lnTo>
+                  <a:lnTo>
+                    <a:pt x="2074037" y="2507998"/>
+                  </a:lnTo>
+                  <a:lnTo>
+                    <a:pt x="2145660" y="2549951"/>
+                  </a:lnTo>
+                  <a:lnTo>
+                    <a:pt x="2217282" y="2590100"/>
+                  </a:lnTo>
+                  <a:lnTo>
+                    <a:pt x="2288905" y="2628523"/>
+                  </a:lnTo>
+                  <a:lnTo>
+                    <a:pt x="2360527" y="2651630"/>
+                  </a:lnTo>
+                  <a:lnTo>
+                    <a:pt x="2432150" y="2642844"/>
+                  </a:lnTo>
+                  <a:lnTo>
+                    <a:pt x="2503772" y="2633966"/>
+                  </a:lnTo>
+                  <a:lnTo>
+                    <a:pt x="2575395" y="2624994"/>
+                  </a:lnTo>
+                  <a:lnTo>
+                    <a:pt x="2647017" y="2615927"/>
+                  </a:lnTo>
+                  <a:lnTo>
+                    <a:pt x="2718640" y="2606765"/>
+                  </a:lnTo>
+                  <a:lnTo>
+                    <a:pt x="2790263" y="2597505"/>
+                  </a:lnTo>
+                  <a:lnTo>
+                    <a:pt x="2861885" y="2588149"/>
+                  </a:lnTo>
+                  <a:lnTo>
+                    <a:pt x="2933508" y="2578693"/>
+                  </a:lnTo>
+                  <a:lnTo>
+                    <a:pt x="3005130" y="2569137"/>
+                  </a:lnTo>
+                  <a:lnTo>
+                    <a:pt x="3076753" y="2559481"/>
+                  </a:lnTo>
+                  <a:lnTo>
+                    <a:pt x="3148375" y="2549722"/>
+                  </a:lnTo>
+                  <a:lnTo>
+                    <a:pt x="3219998" y="2539861"/>
+                  </a:lnTo>
+                  <a:lnTo>
+                    <a:pt x="3291620" y="2529895"/>
+                  </a:lnTo>
+                  <a:lnTo>
+                    <a:pt x="3363243" y="2519825"/>
+                  </a:lnTo>
+                  <a:lnTo>
+                    <a:pt x="3434865" y="2509647"/>
+                  </a:lnTo>
+                  <a:lnTo>
+                    <a:pt x="3506488" y="2499363"/>
+                  </a:lnTo>
+                  <a:lnTo>
+                    <a:pt x="3578110" y="2488970"/>
+                  </a:lnTo>
+                  <a:lnTo>
+                    <a:pt x="3649733" y="2478467"/>
+                  </a:lnTo>
+                  <a:lnTo>
+                    <a:pt x="3721355" y="2467853"/>
+                  </a:lnTo>
+                  <a:lnTo>
+                    <a:pt x="3792978" y="2457127"/>
+                  </a:lnTo>
+                  <a:lnTo>
+                    <a:pt x="3864600" y="2446288"/>
+                  </a:lnTo>
+                  <a:lnTo>
+                    <a:pt x="3936223" y="2435335"/>
+                  </a:lnTo>
+                  <a:lnTo>
+                    <a:pt x="4007845" y="2424266"/>
+                  </a:lnTo>
+                  <a:lnTo>
+                    <a:pt x="4079468" y="2413080"/>
+                  </a:lnTo>
+                  <a:lnTo>
+                    <a:pt x="4151091" y="2401776"/>
+                  </a:lnTo>
+                  <a:lnTo>
+                    <a:pt x="4222713" y="2390352"/>
+                  </a:lnTo>
+                  <a:lnTo>
+                    <a:pt x="4294336" y="2378808"/>
+                  </a:lnTo>
+                  <a:lnTo>
+                    <a:pt x="4365958" y="2367142"/>
+                  </a:lnTo>
+                  <a:lnTo>
+                    <a:pt x="4437581" y="2355353"/>
+                  </a:lnTo>
+                  <a:lnTo>
+                    <a:pt x="4509203" y="2343439"/>
+                  </a:lnTo>
+                  <a:lnTo>
+                    <a:pt x="4580826" y="2331400"/>
+                  </a:lnTo>
+                  <a:lnTo>
+                    <a:pt x="4652448" y="2319233"/>
+                  </a:lnTo>
+                  <a:lnTo>
+                    <a:pt x="4724071" y="2306938"/>
+                  </a:lnTo>
+                  <a:lnTo>
+                    <a:pt x="4795693" y="2294514"/>
+                  </a:lnTo>
+                  <a:lnTo>
+                    <a:pt x="4867316" y="2281958"/>
+                  </a:lnTo>
+                  <a:lnTo>
+                    <a:pt x="4938938" y="2269269"/>
+                  </a:lnTo>
+                  <a:lnTo>
+                    <a:pt x="5010561" y="2256447"/>
+                  </a:lnTo>
+                  <a:lnTo>
+                    <a:pt x="5082183" y="2243489"/>
+                  </a:lnTo>
+                  <a:lnTo>
+                    <a:pt x="5153806" y="2230394"/>
+                  </a:lnTo>
+                  <a:lnTo>
+                    <a:pt x="5225428" y="2217161"/>
+                  </a:lnTo>
+                  <a:lnTo>
+                    <a:pt x="5297051" y="2203789"/>
+                  </a:lnTo>
+                  <a:lnTo>
+                    <a:pt x="5368673" y="2190275"/>
+                  </a:lnTo>
+                  <a:lnTo>
+                    <a:pt x="5440296" y="2176618"/>
+                  </a:lnTo>
+                  <a:lnTo>
+                    <a:pt x="5511919" y="2162818"/>
+                  </a:lnTo>
+                  <a:lnTo>
+                    <a:pt x="5583541" y="2148871"/>
+                  </a:lnTo>
+                  <a:lnTo>
+                    <a:pt x="5655164" y="2134778"/>
+                  </a:lnTo>
+                  <a:lnTo>
+                    <a:pt x="5726786" y="2120535"/>
+                  </a:lnTo>
+                  <a:lnTo>
+                    <a:pt x="5798409" y="2106143"/>
+                  </a:lnTo>
+                  <a:lnTo>
+                    <a:pt x="5870031" y="2091598"/>
+                  </a:lnTo>
+                  <a:lnTo>
+                    <a:pt x="5941654" y="2076899"/>
+                  </a:lnTo>
+                  <a:lnTo>
+                    <a:pt x="6013276" y="2062046"/>
+                  </a:lnTo>
+                </a:path>
+              </a:pathLst>
+            </a:custGeom>
+          </p:spPr>
+          <p:txBody>
+            <a:bodyPr/>
+            <a:lstStyle/>
+            <a:p/>
+          </p:txBody>
+        </p:sp>
+        <p:sp>
+          <p:nvSpPr>
             <p:cNvPr id="22" name="pl22"/>
             <p:cNvSpPr/>
             <p:nvPr/>
           </p:nvSpPr>
           <p:spPr>
             <a:xfrm>
-              <a:off x="1860611" y="2073503"/>
-              <a:ext cx="6192736" cy="2651630"/>
+              <a:off x="1172049" y="4733826"/>
+              <a:ext cx="7090630" cy="736405"/>
             </a:xfrm>
             <a:custGeom>
               <a:avLst/>
               <a:pathLst>
-                <a:path w="6192736" h="2651630">
+                <a:path w="7090630" h="736405">
                   <a:moveTo>
-                    <a:pt x="0" y="0"/>
+                    <a:pt x="7090630" y="736405"/>
                   </a:moveTo>
                   <a:lnTo>
-                    <a:pt x="70654" y="143739"/>
-                  </a:lnTo>
-                  <a:lnTo>
-                    <a:pt x="144414" y="287345"/>
-                  </a:lnTo>
-                  <a:lnTo>
-                    <a:pt x="218174" y="424776"/>
-                  </a:lnTo>
-                  <a:lnTo>
-                    <a:pt x="291934" y="556298"/>
-                  </a:lnTo>
-                  <a:lnTo>
-                    <a:pt x="365694" y="682165"/>
-                  </a:lnTo>
-                  <a:lnTo>
-                    <a:pt x="439454" y="802621"/>
-                  </a:lnTo>
-                  <a:lnTo>
-                    <a:pt x="513214" y="917897"/>
-                  </a:lnTo>
-                  <a:lnTo>
-                    <a:pt x="586974" y="1028218"/>
-                  </a:lnTo>
-                  <a:lnTo>
-                    <a:pt x="660734" y="1133795"/>
-                  </a:lnTo>
-                  <a:lnTo>
-                    <a:pt x="734494" y="1234832"/>
-                  </a:lnTo>
-                  <a:lnTo>
-                    <a:pt x="808254" y="1331525"/>
-                  </a:lnTo>
-                  <a:lnTo>
-                    <a:pt x="882014" y="1424061"/>
-                  </a:lnTo>
-                  <a:lnTo>
-                    <a:pt x="955774" y="1512619"/>
-                  </a:lnTo>
-                  <a:lnTo>
-                    <a:pt x="1029534" y="1597369"/>
-                  </a:lnTo>
-                  <a:lnTo>
-                    <a:pt x="1103294" y="1678474"/>
-                  </a:lnTo>
-                  <a:lnTo>
-                    <a:pt x="1177054" y="1756093"/>
-                  </a:lnTo>
-                  <a:lnTo>
-                    <a:pt x="1250814" y="1830375"/>
-                  </a:lnTo>
-                  <a:lnTo>
-                    <a:pt x="1324574" y="1901462"/>
-                  </a:lnTo>
-                  <a:lnTo>
-                    <a:pt x="1398334" y="1969494"/>
-                  </a:lnTo>
-                  <a:lnTo>
-                    <a:pt x="1472095" y="2034600"/>
-                  </a:lnTo>
-                  <a:lnTo>
-                    <a:pt x="1545855" y="2096907"/>
-                  </a:lnTo>
-                  <a:lnTo>
-                    <a:pt x="1619615" y="2156535"/>
-                  </a:lnTo>
-                  <a:lnTo>
-                    <a:pt x="1693375" y="2213599"/>
-                  </a:lnTo>
-                  <a:lnTo>
-                    <a:pt x="1767135" y="2268210"/>
-                  </a:lnTo>
-                  <a:lnTo>
-                    <a:pt x="1840895" y="2320472"/>
-                  </a:lnTo>
-                  <a:lnTo>
-                    <a:pt x="1914655" y="2370488"/>
-                  </a:lnTo>
-                  <a:lnTo>
-                    <a:pt x="1988415" y="2418353"/>
-                  </a:lnTo>
-                  <a:lnTo>
-                    <a:pt x="2062175" y="2464160"/>
-                  </a:lnTo>
-                  <a:lnTo>
-                    <a:pt x="2135935" y="2507998"/>
-                  </a:lnTo>
-                  <a:lnTo>
-                    <a:pt x="2209695" y="2549951"/>
-                  </a:lnTo>
-                  <a:lnTo>
-                    <a:pt x="2283455" y="2590100"/>
-                  </a:lnTo>
-                  <a:lnTo>
-                    <a:pt x="2357215" y="2628523"/>
-                  </a:lnTo>
-                  <a:lnTo>
-                    <a:pt x="2430975" y="2651630"/>
-                  </a:lnTo>
-                  <a:lnTo>
-                    <a:pt x="2504735" y="2642844"/>
-                  </a:lnTo>
-                  <a:lnTo>
-                    <a:pt x="2578495" y="2633966"/>
-                  </a:lnTo>
-                  <a:lnTo>
-                    <a:pt x="2652255" y="2624994"/>
-                  </a:lnTo>
-                  <a:lnTo>
-                    <a:pt x="2726015" y="2615927"/>
-                  </a:lnTo>
-                  <a:lnTo>
-                    <a:pt x="2799775" y="2606765"/>
-                  </a:lnTo>
-                  <a:lnTo>
-                    <a:pt x="2873535" y="2597505"/>
-                  </a:lnTo>
-                  <a:lnTo>
-                    <a:pt x="2947295" y="2588149"/>
-                  </a:lnTo>
-                  <a:lnTo>
-                    <a:pt x="3021055" y="2578693"/>
-                  </a:lnTo>
-                  <a:lnTo>
-                    <a:pt x="3094815" y="2569137"/>
-                  </a:lnTo>
-                  <a:lnTo>
-                    <a:pt x="3168575" y="2559481"/>
-                  </a:lnTo>
-                  <a:lnTo>
-                    <a:pt x="3242335" y="2549722"/>
-                  </a:lnTo>
-                  <a:lnTo>
-                    <a:pt x="3316095" y="2539861"/>
-                  </a:lnTo>
-                  <a:lnTo>
-                    <a:pt x="3389855" y="2529895"/>
-                  </a:lnTo>
-                  <a:lnTo>
-                    <a:pt x="3463615" y="2519825"/>
-                  </a:lnTo>
-                  <a:lnTo>
-                    <a:pt x="3537375" y="2509647"/>
-                  </a:lnTo>
-                  <a:lnTo>
-                    <a:pt x="3611135" y="2499363"/>
-                  </a:lnTo>
-                  <a:lnTo>
-                    <a:pt x="3684895" y="2488970"/>
-                  </a:lnTo>
-                  <a:lnTo>
-                    <a:pt x="3758655" y="2478467"/>
-                  </a:lnTo>
-                  <a:lnTo>
-                    <a:pt x="3832415" y="2467853"/>
-                  </a:lnTo>
-                  <a:lnTo>
-                    <a:pt x="3906175" y="2457127"/>
-                  </a:lnTo>
-                  <a:lnTo>
-                    <a:pt x="3979935" y="2446288"/>
-                  </a:lnTo>
-                  <a:lnTo>
-                    <a:pt x="4053695" y="2435335"/>
-                  </a:lnTo>
-                  <a:lnTo>
-                    <a:pt x="4127455" y="2424266"/>
-                  </a:lnTo>
-                  <a:lnTo>
-                    <a:pt x="4201215" y="2413080"/>
-                  </a:lnTo>
-                  <a:lnTo>
-                    <a:pt x="4274975" y="2401776"/>
-                  </a:lnTo>
-                  <a:lnTo>
-                    <a:pt x="4348735" y="2390352"/>
-                  </a:lnTo>
-                  <a:lnTo>
-                    <a:pt x="4422496" y="2378808"/>
-                  </a:lnTo>
-                  <a:lnTo>
-                    <a:pt x="4496256" y="2367142"/>
-                  </a:lnTo>
-                  <a:lnTo>
-                    <a:pt x="4570016" y="2355353"/>
-                  </a:lnTo>
-                  <a:lnTo>
-                    <a:pt x="4643776" y="2343439"/>
-                  </a:lnTo>
-                  <a:lnTo>
-                    <a:pt x="4717536" y="2331400"/>
-                  </a:lnTo>
-                  <a:lnTo>
-                    <a:pt x="4791296" y="2319233"/>
-                  </a:lnTo>
-                  <a:lnTo>
-                    <a:pt x="4865056" y="2306938"/>
-                  </a:lnTo>
-                  <a:lnTo>
-                    <a:pt x="4938816" y="2294514"/>
-                  </a:lnTo>
-                  <a:lnTo>
-                    <a:pt x="5012576" y="2281958"/>
-                  </a:lnTo>
-                  <a:lnTo>
-                    <a:pt x="5086336" y="2269269"/>
-                  </a:lnTo>
-                  <a:lnTo>
-                    <a:pt x="5160096" y="2256447"/>
-                  </a:lnTo>
-                  <a:lnTo>
-                    <a:pt x="5233856" y="2243489"/>
-                  </a:lnTo>
-                  <a:lnTo>
-                    <a:pt x="5307616" y="2230394"/>
-                  </a:lnTo>
-                  <a:lnTo>
-                    <a:pt x="5381376" y="2217161"/>
-                  </a:lnTo>
-                  <a:lnTo>
-                    <a:pt x="5455136" y="2203789"/>
-                  </a:lnTo>
-                  <a:lnTo>
-                    <a:pt x="5528896" y="2190275"/>
-                  </a:lnTo>
-                  <a:lnTo>
-                    <a:pt x="5602656" y="2176618"/>
-                  </a:lnTo>
-                  <a:lnTo>
-                    <a:pt x="5676416" y="2162818"/>
-                  </a:lnTo>
-                  <a:lnTo>
-                    <a:pt x="5750176" y="2148871"/>
-                  </a:lnTo>
-                  <a:lnTo>
-                    <a:pt x="5823936" y="2134778"/>
-                  </a:lnTo>
-                  <a:lnTo>
-                    <a:pt x="5897696" y="2120535"/>
-                  </a:lnTo>
-                  <a:lnTo>
-                    <a:pt x="5971456" y="2106143"/>
-                  </a:lnTo>
-                  <a:lnTo>
-                    <a:pt x="6045216" y="2091598"/>
-                  </a:lnTo>
-                  <a:lnTo>
-                    <a:pt x="6118976" y="2076899"/>
-                  </a:lnTo>
-                  <a:lnTo>
-                    <a:pt x="6192736" y="2062046"/>
+                    <a:pt x="7019007" y="732496"/>
+                  </a:lnTo>
+                  <a:lnTo>
+                    <a:pt x="6947385" y="728411"/>
+                  </a:lnTo>
+                  <a:lnTo>
+                    <a:pt x="6875762" y="724142"/>
+                  </a:lnTo>
+                  <a:lnTo>
+                    <a:pt x="6804139" y="719682"/>
+                  </a:lnTo>
+                  <a:lnTo>
+                    <a:pt x="6732517" y="715021"/>
+                  </a:lnTo>
+                  <a:lnTo>
+                    <a:pt x="6660894" y="710151"/>
+                  </a:lnTo>
+                  <a:lnTo>
+                    <a:pt x="6589272" y="705062"/>
+                  </a:lnTo>
+                  <a:lnTo>
+                    <a:pt x="6517649" y="699744"/>
+                  </a:lnTo>
+                  <a:lnTo>
+                    <a:pt x="6446027" y="694188"/>
+                  </a:lnTo>
+                  <a:lnTo>
+                    <a:pt x="6374404" y="688382"/>
+                  </a:lnTo>
+                  <a:lnTo>
+                    <a:pt x="6302782" y="682315"/>
+                  </a:lnTo>
+                  <a:lnTo>
+                    <a:pt x="6231159" y="675975"/>
+                  </a:lnTo>
+                  <a:lnTo>
+                    <a:pt x="6159537" y="669351"/>
+                  </a:lnTo>
+                  <a:lnTo>
+                    <a:pt x="6087914" y="662429"/>
+                  </a:lnTo>
+                  <a:lnTo>
+                    <a:pt x="6016292" y="655196"/>
+                  </a:lnTo>
+                  <a:lnTo>
+                    <a:pt x="5944669" y="647638"/>
+                  </a:lnTo>
+                  <a:lnTo>
+                    <a:pt x="5873047" y="639740"/>
+                  </a:lnTo>
+                  <a:lnTo>
+                    <a:pt x="5801424" y="631488"/>
+                  </a:lnTo>
+                  <a:lnTo>
+                    <a:pt x="5729802" y="622865"/>
+                  </a:lnTo>
+                  <a:lnTo>
+                    <a:pt x="5658179" y="613854"/>
+                  </a:lnTo>
+                  <a:lnTo>
+                    <a:pt x="5586557" y="604439"/>
+                  </a:lnTo>
+                  <a:lnTo>
+                    <a:pt x="5514934" y="594600"/>
+                  </a:lnTo>
+                  <a:lnTo>
+                    <a:pt x="5443311" y="584320"/>
+                  </a:lnTo>
+                  <a:lnTo>
+                    <a:pt x="5371689" y="573578"/>
+                  </a:lnTo>
+                  <a:lnTo>
+                    <a:pt x="5300066" y="562353"/>
+                  </a:lnTo>
+                  <a:lnTo>
+                    <a:pt x="5228444" y="550624"/>
+                  </a:lnTo>
+                  <a:lnTo>
+                    <a:pt x="5156821" y="538368"/>
+                  </a:lnTo>
+                  <a:lnTo>
+                    <a:pt x="5085199" y="525561"/>
+                  </a:lnTo>
+                  <a:lnTo>
+                    <a:pt x="5013576" y="512179"/>
+                  </a:lnTo>
+                  <a:lnTo>
+                    <a:pt x="4941954" y="498196"/>
+                  </a:lnTo>
+                  <a:lnTo>
+                    <a:pt x="4870331" y="483584"/>
+                  </a:lnTo>
+                  <a:lnTo>
+                    <a:pt x="4798709" y="468316"/>
+                  </a:lnTo>
+                  <a:lnTo>
+                    <a:pt x="4727086" y="452362"/>
+                  </a:lnTo>
+                  <a:lnTo>
+                    <a:pt x="4655464" y="435691"/>
+                  </a:lnTo>
+                  <a:lnTo>
+                    <a:pt x="4583841" y="418272"/>
+                  </a:lnTo>
+                  <a:lnTo>
+                    <a:pt x="4512219" y="400069"/>
+                  </a:lnTo>
+                  <a:lnTo>
+                    <a:pt x="4440596" y="381049"/>
+                  </a:lnTo>
+                  <a:lnTo>
+                    <a:pt x="4368974" y="361175"/>
+                  </a:lnTo>
+                  <a:lnTo>
+                    <a:pt x="4297351" y="340407"/>
+                  </a:lnTo>
+                  <a:lnTo>
+                    <a:pt x="4225729" y="318707"/>
+                  </a:lnTo>
+                  <a:lnTo>
+                    <a:pt x="4154106" y="296031"/>
+                  </a:lnTo>
+                  <a:lnTo>
+                    <a:pt x="4082483" y="272337"/>
+                  </a:lnTo>
+                  <a:lnTo>
+                    <a:pt x="4010861" y="247578"/>
+                  </a:lnTo>
+                  <a:lnTo>
+                    <a:pt x="3939238" y="221707"/>
+                  </a:lnTo>
+                  <a:lnTo>
+                    <a:pt x="3867616" y="194674"/>
+                  </a:lnTo>
+                  <a:lnTo>
+                    <a:pt x="3795993" y="166426"/>
+                  </a:lnTo>
+                  <a:lnTo>
+                    <a:pt x="3724371" y="136909"/>
+                  </a:lnTo>
+                  <a:lnTo>
+                    <a:pt x="3652748" y="106065"/>
+                  </a:lnTo>
+                  <a:lnTo>
+                    <a:pt x="3581126" y="73837"/>
+                  </a:lnTo>
+                  <a:lnTo>
+                    <a:pt x="3509503" y="40160"/>
+                  </a:lnTo>
+                  <a:lnTo>
+                    <a:pt x="3437881" y="4970"/>
+                  </a:lnTo>
+                  <a:lnTo>
+                    <a:pt x="3366258" y="0"/>
+                  </a:lnTo>
+                  <a:lnTo>
+                    <a:pt x="3294636" y="8602"/>
+                  </a:lnTo>
+                  <a:lnTo>
+                    <a:pt x="3223013" y="17115"/>
+                  </a:lnTo>
+                  <a:lnTo>
+                    <a:pt x="3151391" y="25539"/>
+                  </a:lnTo>
+                  <a:lnTo>
+                    <a:pt x="3079768" y="33876"/>
+                  </a:lnTo>
+                  <a:lnTo>
+                    <a:pt x="3008146" y="42124"/>
+                  </a:lnTo>
+                  <a:lnTo>
+                    <a:pt x="2936523" y="50287"/>
+                  </a:lnTo>
+                  <a:lnTo>
+                    <a:pt x="2864901" y="58365"/>
+                  </a:lnTo>
+                  <a:lnTo>
+                    <a:pt x="2793278" y="66358"/>
+                  </a:lnTo>
+                  <a:lnTo>
+                    <a:pt x="2721655" y="74267"/>
+                  </a:lnTo>
+                  <a:lnTo>
+                    <a:pt x="2650033" y="82094"/>
+                  </a:lnTo>
+                  <a:lnTo>
+                    <a:pt x="2578410" y="89840"/>
+                  </a:lnTo>
+                  <a:lnTo>
+                    <a:pt x="2506788" y="97504"/>
+                  </a:lnTo>
+                  <a:lnTo>
+                    <a:pt x="2435165" y="105088"/>
+                  </a:lnTo>
+                  <a:lnTo>
+                    <a:pt x="2363543" y="112593"/>
+                  </a:lnTo>
+                  <a:lnTo>
+                    <a:pt x="2291920" y="120019"/>
+                  </a:lnTo>
+                  <a:lnTo>
+                    <a:pt x="2220298" y="127368"/>
+                  </a:lnTo>
+                  <a:lnTo>
+                    <a:pt x="2148675" y="134641"/>
+                  </a:lnTo>
+                  <a:lnTo>
+                    <a:pt x="2077053" y="141837"/>
+                  </a:lnTo>
+                  <a:lnTo>
+                    <a:pt x="2005430" y="148958"/>
+                  </a:lnTo>
+                  <a:lnTo>
+                    <a:pt x="1933808" y="156004"/>
+                  </a:lnTo>
+                  <a:lnTo>
+                    <a:pt x="1862185" y="162977"/>
+                  </a:lnTo>
+                  <a:lnTo>
+                    <a:pt x="1790563" y="169878"/>
+                  </a:lnTo>
+                  <a:lnTo>
+                    <a:pt x="1718940" y="176706"/>
+                  </a:lnTo>
+                  <a:lnTo>
+                    <a:pt x="1647318" y="183462"/>
+                  </a:lnTo>
+                  <a:lnTo>
+                    <a:pt x="1575695" y="190148"/>
+                  </a:lnTo>
+                  <a:lnTo>
+                    <a:pt x="1504073" y="196765"/>
+                  </a:lnTo>
+                  <a:lnTo>
+                    <a:pt x="1432450" y="203312"/>
+                  </a:lnTo>
+                  <a:lnTo>
+                    <a:pt x="1360827" y="209791"/>
+                  </a:lnTo>
+                  <a:lnTo>
+                    <a:pt x="1289205" y="216202"/>
+                  </a:lnTo>
+                  <a:lnTo>
+                    <a:pt x="1217582" y="222546"/>
+                  </a:lnTo>
+                  <a:lnTo>
+                    <a:pt x="1145960" y="228823"/>
+                  </a:lnTo>
+                  <a:lnTo>
+                    <a:pt x="1074337" y="235036"/>
+                  </a:lnTo>
+                  <a:lnTo>
+                    <a:pt x="1002715" y="241183"/>
+                  </a:lnTo>
+                  <a:lnTo>
+                    <a:pt x="931092" y="247266"/>
+                  </a:lnTo>
+                  <a:lnTo>
+                    <a:pt x="859470" y="253286"/>
+                  </a:lnTo>
+                  <a:lnTo>
+                    <a:pt x="787847" y="259242"/>
+                  </a:lnTo>
+                  <a:lnTo>
+                    <a:pt x="716225" y="265137"/>
+                  </a:lnTo>
+                  <a:lnTo>
+                    <a:pt x="644602" y="270969"/>
+                  </a:lnTo>
+                  <a:lnTo>
+                    <a:pt x="572980" y="276741"/>
+                  </a:lnTo>
+                  <a:lnTo>
+                    <a:pt x="501357" y="282453"/>
+                  </a:lnTo>
+                  <a:lnTo>
+                    <a:pt x="429735" y="288105"/>
+                  </a:lnTo>
+                  <a:lnTo>
+                    <a:pt x="358112" y="293698"/>
+                  </a:lnTo>
+                  <a:lnTo>
+                    <a:pt x="286490" y="299232"/>
+                  </a:lnTo>
+                  <a:lnTo>
+                    <a:pt x="214867" y="304709"/>
+                  </a:lnTo>
+                  <a:lnTo>
+                    <a:pt x="143245" y="310128"/>
+                  </a:lnTo>
+                  <a:lnTo>
+                    <a:pt x="71622" y="315491"/>
+                  </a:lnTo>
+                  <a:lnTo>
+                    <a:pt x="0" y="320797"/>
                   </a:lnTo>
                 </a:path>
               </a:pathLst>
@@ -3868,637 +4150,312 @@
           </p:nvSpPr>
           <p:spPr>
             <a:xfrm>
-              <a:off x="817517" y="4733826"/>
-              <a:ext cx="7235830" cy="736405"/>
+              <a:off x="1172049" y="3715696"/>
+              <a:ext cx="7090630" cy="1489825"/>
             </a:xfrm>
             <a:custGeom>
               <a:avLst/>
               <a:pathLst>
-                <a:path w="7235830" h="736405">
-                  <a:moveTo>
-                    <a:pt x="7235830" y="736405"/>
-                  </a:moveTo>
-                  <a:lnTo>
-                    <a:pt x="7162070" y="732496"/>
-                  </a:lnTo>
-                  <a:lnTo>
-                    <a:pt x="7088310" y="728411"/>
-                  </a:lnTo>
-                  <a:lnTo>
-                    <a:pt x="7014550" y="724142"/>
-                  </a:lnTo>
-                  <a:lnTo>
-                    <a:pt x="6940789" y="719682"/>
-                  </a:lnTo>
-                  <a:lnTo>
-                    <a:pt x="6867029" y="715021"/>
-                  </a:lnTo>
-                  <a:lnTo>
-                    <a:pt x="6793269" y="710151"/>
-                  </a:lnTo>
-                  <a:lnTo>
-                    <a:pt x="6719509" y="705062"/>
-                  </a:lnTo>
-                  <a:lnTo>
-                    <a:pt x="6645749" y="699744"/>
-                  </a:lnTo>
-                  <a:lnTo>
-                    <a:pt x="6571989" y="694188"/>
-                  </a:lnTo>
-                  <a:lnTo>
-                    <a:pt x="6498229" y="688382"/>
-                  </a:lnTo>
-                  <a:lnTo>
-                    <a:pt x="6424469" y="682315"/>
-                  </a:lnTo>
-                  <a:lnTo>
-                    <a:pt x="6350709" y="675975"/>
-                  </a:lnTo>
-                  <a:lnTo>
-                    <a:pt x="6276949" y="669351"/>
-                  </a:lnTo>
-                  <a:lnTo>
-                    <a:pt x="6203189" y="662429"/>
-                  </a:lnTo>
-                  <a:lnTo>
-                    <a:pt x="6129429" y="655196"/>
-                  </a:lnTo>
-                  <a:lnTo>
-                    <a:pt x="6055669" y="647638"/>
-                  </a:lnTo>
-                  <a:lnTo>
-                    <a:pt x="5981909" y="639740"/>
-                  </a:lnTo>
-                  <a:lnTo>
-                    <a:pt x="5908149" y="631488"/>
-                  </a:lnTo>
-                  <a:lnTo>
-                    <a:pt x="5834389" y="622865"/>
-                  </a:lnTo>
-                  <a:lnTo>
-                    <a:pt x="5760629" y="613854"/>
-                  </a:lnTo>
-                  <a:lnTo>
-                    <a:pt x="5686869" y="604439"/>
-                  </a:lnTo>
-                  <a:lnTo>
-                    <a:pt x="5613109" y="594600"/>
-                  </a:lnTo>
-                  <a:lnTo>
-                    <a:pt x="5539349" y="584320"/>
-                  </a:lnTo>
-                  <a:lnTo>
-                    <a:pt x="5465589" y="573578"/>
-                  </a:lnTo>
-                  <a:lnTo>
-                    <a:pt x="5391829" y="562353"/>
-                  </a:lnTo>
-                  <a:lnTo>
-                    <a:pt x="5318069" y="550624"/>
-                  </a:lnTo>
-                  <a:lnTo>
-                    <a:pt x="5244309" y="538368"/>
-                  </a:lnTo>
-                  <a:lnTo>
-                    <a:pt x="5170549" y="525561"/>
-                  </a:lnTo>
-                  <a:lnTo>
-                    <a:pt x="5096789" y="512179"/>
-                  </a:lnTo>
-                  <a:lnTo>
-                    <a:pt x="5023029" y="498196"/>
-                  </a:lnTo>
-                  <a:lnTo>
-                    <a:pt x="4949269" y="483584"/>
-                  </a:lnTo>
-                  <a:lnTo>
-                    <a:pt x="4875509" y="468316"/>
-                  </a:lnTo>
-                  <a:lnTo>
-                    <a:pt x="4801749" y="452362"/>
-                  </a:lnTo>
-                  <a:lnTo>
-                    <a:pt x="4727989" y="435691"/>
-                  </a:lnTo>
-                  <a:lnTo>
-                    <a:pt x="4654229" y="418272"/>
-                  </a:lnTo>
-                  <a:lnTo>
-                    <a:pt x="4580469" y="400069"/>
-                  </a:lnTo>
-                  <a:lnTo>
-                    <a:pt x="4506709" y="381049"/>
-                  </a:lnTo>
-                  <a:lnTo>
-                    <a:pt x="4432949" y="361175"/>
-                  </a:lnTo>
-                  <a:lnTo>
-                    <a:pt x="4359189" y="340407"/>
-                  </a:lnTo>
-                  <a:lnTo>
-                    <a:pt x="4285429" y="318707"/>
-                  </a:lnTo>
-                  <a:lnTo>
-                    <a:pt x="4211669" y="296031"/>
-                  </a:lnTo>
-                  <a:lnTo>
-                    <a:pt x="4137909" y="272337"/>
-                  </a:lnTo>
-                  <a:lnTo>
-                    <a:pt x="4064149" y="247578"/>
-                  </a:lnTo>
-                  <a:lnTo>
-                    <a:pt x="3990388" y="221707"/>
-                  </a:lnTo>
-                  <a:lnTo>
-                    <a:pt x="3916628" y="194674"/>
-                  </a:lnTo>
-                  <a:lnTo>
-                    <a:pt x="3842868" y="166426"/>
-                  </a:lnTo>
-                  <a:lnTo>
-                    <a:pt x="3769108" y="136909"/>
-                  </a:lnTo>
-                  <a:lnTo>
-                    <a:pt x="3695348" y="106065"/>
-                  </a:lnTo>
-                  <a:lnTo>
-                    <a:pt x="3621588" y="73837"/>
-                  </a:lnTo>
-                  <a:lnTo>
-                    <a:pt x="3547828" y="40160"/>
-                  </a:lnTo>
-                  <a:lnTo>
-                    <a:pt x="3474068" y="4970"/>
-                  </a:lnTo>
-                  <a:lnTo>
-                    <a:pt x="3400308" y="0"/>
-                  </a:lnTo>
-                  <a:lnTo>
-                    <a:pt x="3326548" y="8602"/>
-                  </a:lnTo>
-                  <a:lnTo>
-                    <a:pt x="3252788" y="17115"/>
-                  </a:lnTo>
-                  <a:lnTo>
-                    <a:pt x="3179028" y="25539"/>
-                  </a:lnTo>
-                  <a:lnTo>
-                    <a:pt x="3105268" y="33876"/>
-                  </a:lnTo>
-                  <a:lnTo>
-                    <a:pt x="3031508" y="42124"/>
-                  </a:lnTo>
-                  <a:lnTo>
-                    <a:pt x="2957748" y="50287"/>
-                  </a:lnTo>
-                  <a:lnTo>
-                    <a:pt x="2883988" y="58365"/>
-                  </a:lnTo>
-                  <a:lnTo>
-                    <a:pt x="2810228" y="66358"/>
-                  </a:lnTo>
-                  <a:lnTo>
-                    <a:pt x="2736468" y="74267"/>
-                  </a:lnTo>
-                  <a:lnTo>
-                    <a:pt x="2662708" y="82094"/>
-                  </a:lnTo>
-                  <a:lnTo>
-                    <a:pt x="2588948" y="89840"/>
-                  </a:lnTo>
-                  <a:lnTo>
-                    <a:pt x="2515188" y="97504"/>
-                  </a:lnTo>
-                  <a:lnTo>
-                    <a:pt x="2441428" y="105088"/>
-                  </a:lnTo>
-                  <a:lnTo>
-                    <a:pt x="2367668" y="112593"/>
-                  </a:lnTo>
-                  <a:lnTo>
-                    <a:pt x="2293908" y="120019"/>
-                  </a:lnTo>
-                  <a:lnTo>
-                    <a:pt x="2220148" y="127368"/>
-                  </a:lnTo>
-                  <a:lnTo>
-                    <a:pt x="2146388" y="134641"/>
-                  </a:lnTo>
-                  <a:lnTo>
-                    <a:pt x="2072628" y="141837"/>
-                  </a:lnTo>
-                  <a:lnTo>
-                    <a:pt x="1998868" y="148958"/>
-                  </a:lnTo>
-                  <a:lnTo>
-                    <a:pt x="1925108" y="156004"/>
-                  </a:lnTo>
-                  <a:lnTo>
-                    <a:pt x="1851348" y="162977"/>
-                  </a:lnTo>
-                  <a:lnTo>
-                    <a:pt x="1777588" y="169878"/>
-                  </a:lnTo>
-                  <a:lnTo>
-                    <a:pt x="1703828" y="176706"/>
-                  </a:lnTo>
-                  <a:lnTo>
-                    <a:pt x="1630068" y="183462"/>
-                  </a:lnTo>
-                  <a:lnTo>
-                    <a:pt x="1556308" y="190148"/>
-                  </a:lnTo>
-                  <a:lnTo>
-                    <a:pt x="1482548" y="196765"/>
-                  </a:lnTo>
-                  <a:lnTo>
-                    <a:pt x="1408788" y="203312"/>
-                  </a:lnTo>
-                  <a:lnTo>
-                    <a:pt x="1335028" y="209791"/>
-                  </a:lnTo>
-                  <a:lnTo>
-                    <a:pt x="1261268" y="216202"/>
-                  </a:lnTo>
-                  <a:lnTo>
-                    <a:pt x="1187508" y="222546"/>
-                  </a:lnTo>
-                  <a:lnTo>
-                    <a:pt x="1113747" y="228823"/>
-                  </a:lnTo>
-                  <a:lnTo>
-                    <a:pt x="1039987" y="235036"/>
-                  </a:lnTo>
-                  <a:lnTo>
-                    <a:pt x="966227" y="241183"/>
-                  </a:lnTo>
-                  <a:lnTo>
-                    <a:pt x="892467" y="247266"/>
-                  </a:lnTo>
-                  <a:lnTo>
-                    <a:pt x="818707" y="253286"/>
-                  </a:lnTo>
-                  <a:lnTo>
-                    <a:pt x="744947" y="259242"/>
-                  </a:lnTo>
-                  <a:lnTo>
-                    <a:pt x="671187" y="265137"/>
-                  </a:lnTo>
-                  <a:lnTo>
-                    <a:pt x="597427" y="270969"/>
-                  </a:lnTo>
-                  <a:lnTo>
-                    <a:pt x="523667" y="276741"/>
-                  </a:lnTo>
-                  <a:lnTo>
-                    <a:pt x="449907" y="282453"/>
-                  </a:lnTo>
-                  <a:lnTo>
-                    <a:pt x="376147" y="288105"/>
-                  </a:lnTo>
-                  <a:lnTo>
-                    <a:pt x="302387" y="293698"/>
-                  </a:lnTo>
-                  <a:lnTo>
-                    <a:pt x="228627" y="299232"/>
-                  </a:lnTo>
-                  <a:lnTo>
-                    <a:pt x="154867" y="304709"/>
-                  </a:lnTo>
-                  <a:lnTo>
-                    <a:pt x="81107" y="310128"/>
-                  </a:lnTo>
-                  <a:lnTo>
-                    <a:pt x="7347" y="315491"/>
-                  </a:lnTo>
-                  <a:lnTo>
-                    <a:pt x="0" y="316019"/>
-                  </a:lnTo>
-                </a:path>
-              </a:pathLst>
-            </a:custGeom>
-          </p:spPr>
-          <p:txBody>
-            <a:bodyPr/>
-            <a:lstStyle/>
-            <a:p/>
-          </p:txBody>
-        </p:sp>
-        <p:sp>
-          <p:nvSpPr>
-            <p:cNvPr id="24" name="pl24"/>
-            <p:cNvSpPr/>
-            <p:nvPr/>
-          </p:nvSpPr>
-          <p:spPr>
-            <a:xfrm>
-              <a:off x="817517" y="3743193"/>
-              <a:ext cx="7235830" cy="1462328"/>
-            </a:xfrm>
-            <a:custGeom>
-              <a:avLst/>
-              <a:pathLst>
-                <a:path w="7235830" h="1462328">
+                <a:path w="7090630" h="1489825">
                   <a:moveTo>
                     <a:pt x="0" y="0"/>
                   </a:moveTo>
                   <a:lnTo>
-                    <a:pt x="7347" y="3042"/>
-                  </a:lnTo>
-                  <a:lnTo>
-                    <a:pt x="81107" y="33074"/>
-                  </a:lnTo>
-                  <a:lnTo>
-                    <a:pt x="154867" y="62609"/>
-                  </a:lnTo>
-                  <a:lnTo>
-                    <a:pt x="228627" y="91653"/>
-                  </a:lnTo>
-                  <a:lnTo>
-                    <a:pt x="302387" y="120216"/>
-                  </a:lnTo>
-                  <a:lnTo>
-                    <a:pt x="376147" y="148306"/>
-                  </a:lnTo>
-                  <a:lnTo>
-                    <a:pt x="449907" y="175929"/>
-                  </a:lnTo>
-                  <a:lnTo>
-                    <a:pt x="523667" y="203095"/>
-                  </a:lnTo>
-                  <a:lnTo>
-                    <a:pt x="597427" y="229810"/>
-                  </a:lnTo>
-                  <a:lnTo>
-                    <a:pt x="671187" y="256082"/>
-                  </a:lnTo>
-                  <a:lnTo>
-                    <a:pt x="744947" y="281918"/>
-                  </a:lnTo>
-                  <a:lnTo>
-                    <a:pt x="818707" y="307326"/>
-                  </a:lnTo>
-                  <a:lnTo>
-                    <a:pt x="892467" y="332312"/>
-                  </a:lnTo>
-                  <a:lnTo>
-                    <a:pt x="966227" y="356885"/>
-                  </a:lnTo>
-                  <a:lnTo>
-                    <a:pt x="1039987" y="381049"/>
-                  </a:lnTo>
-                  <a:lnTo>
-                    <a:pt x="1113747" y="404813"/>
-                  </a:lnTo>
-                  <a:lnTo>
-                    <a:pt x="1187508" y="428183"/>
-                  </a:lnTo>
-                  <a:lnTo>
-                    <a:pt x="1261268" y="451165"/>
-                  </a:lnTo>
-                  <a:lnTo>
-                    <a:pt x="1335028" y="473766"/>
-                  </a:lnTo>
-                  <a:lnTo>
-                    <a:pt x="1408788" y="495993"/>
-                  </a:lnTo>
-                  <a:lnTo>
-                    <a:pt x="1482548" y="517851"/>
-                  </a:lnTo>
-                  <a:lnTo>
-                    <a:pt x="1556308" y="539346"/>
-                  </a:lnTo>
-                  <a:lnTo>
-                    <a:pt x="1630068" y="560485"/>
-                  </a:lnTo>
-                  <a:lnTo>
-                    <a:pt x="1703828" y="581273"/>
-                  </a:lnTo>
-                  <a:lnTo>
-                    <a:pt x="1777588" y="601717"/>
-                  </a:lnTo>
-                  <a:lnTo>
-                    <a:pt x="1851348" y="621821"/>
-                  </a:lnTo>
-                  <a:lnTo>
-                    <a:pt x="1925108" y="641592"/>
-                  </a:lnTo>
-                  <a:lnTo>
-                    <a:pt x="1998868" y="661036"/>
-                  </a:lnTo>
-                  <a:lnTo>
-                    <a:pt x="2072628" y="680156"/>
-                  </a:lnTo>
-                  <a:lnTo>
-                    <a:pt x="2146388" y="698960"/>
-                  </a:lnTo>
-                  <a:lnTo>
-                    <a:pt x="2220148" y="717452"/>
-                  </a:lnTo>
-                  <a:lnTo>
-                    <a:pt x="2293908" y="735637"/>
-                  </a:lnTo>
-                  <a:lnTo>
-                    <a:pt x="2367668" y="753521"/>
-                  </a:lnTo>
-                  <a:lnTo>
-                    <a:pt x="2441428" y="771108"/>
-                  </a:lnTo>
-                  <a:lnTo>
-                    <a:pt x="2515188" y="788404"/>
-                  </a:lnTo>
-                  <a:lnTo>
-                    <a:pt x="2588948" y="805412"/>
-                  </a:lnTo>
-                  <a:lnTo>
-                    <a:pt x="2662708" y="822139"/>
-                  </a:lnTo>
-                  <a:lnTo>
-                    <a:pt x="2736468" y="838588"/>
-                  </a:lnTo>
-                  <a:lnTo>
-                    <a:pt x="2810228" y="854764"/>
-                  </a:lnTo>
-                  <a:lnTo>
-                    <a:pt x="2883988" y="870673"/>
-                  </a:lnTo>
-                  <a:lnTo>
-                    <a:pt x="2957748" y="886317"/>
-                  </a:lnTo>
-                  <a:lnTo>
-                    <a:pt x="3031508" y="901702"/>
-                  </a:lnTo>
-                  <a:lnTo>
-                    <a:pt x="3105268" y="916832"/>
-                  </a:lnTo>
-                  <a:lnTo>
-                    <a:pt x="3179028" y="931711"/>
-                  </a:lnTo>
-                  <a:lnTo>
-                    <a:pt x="3252788" y="946343"/>
-                  </a:lnTo>
-                  <a:lnTo>
-                    <a:pt x="3326548" y="960732"/>
-                  </a:lnTo>
-                  <a:lnTo>
-                    <a:pt x="3400308" y="974883"/>
-                  </a:lnTo>
-                  <a:lnTo>
-                    <a:pt x="3474068" y="988799"/>
-                  </a:lnTo>
-                  <a:lnTo>
-                    <a:pt x="3547828" y="1002485"/>
-                  </a:lnTo>
-                  <a:lnTo>
-                    <a:pt x="3621588" y="1015943"/>
-                  </a:lnTo>
-                  <a:lnTo>
-                    <a:pt x="3695348" y="1029179"/>
-                  </a:lnTo>
-                  <a:lnTo>
-                    <a:pt x="3769108" y="1042195"/>
-                  </a:lnTo>
-                  <a:lnTo>
-                    <a:pt x="3842868" y="1054994"/>
-                  </a:lnTo>
-                  <a:lnTo>
-                    <a:pt x="3916628" y="1067582"/>
-                  </a:lnTo>
-                  <a:lnTo>
-                    <a:pt x="3990388" y="1079961"/>
-                  </a:lnTo>
-                  <a:lnTo>
-                    <a:pt x="4064149" y="1092135"/>
-                  </a:lnTo>
-                  <a:lnTo>
-                    <a:pt x="4137909" y="1104107"/>
-                  </a:lnTo>
-                  <a:lnTo>
-                    <a:pt x="4211669" y="1115880"/>
-                  </a:lnTo>
-                  <a:lnTo>
-                    <a:pt x="4285429" y="1127458"/>
-                  </a:lnTo>
-                  <a:lnTo>
-                    <a:pt x="4359189" y="1138844"/>
-                  </a:lnTo>
-                  <a:lnTo>
-                    <a:pt x="4432949" y="1150041"/>
-                  </a:lnTo>
-                  <a:lnTo>
-                    <a:pt x="4506709" y="1161053"/>
-                  </a:lnTo>
-                  <a:lnTo>
-                    <a:pt x="4580469" y="1171882"/>
-                  </a:lnTo>
-                  <a:lnTo>
-                    <a:pt x="4654229" y="1182531"/>
-                  </a:lnTo>
-                  <a:lnTo>
-                    <a:pt x="4727989" y="1193004"/>
-                  </a:lnTo>
-                  <a:lnTo>
-                    <a:pt x="4801749" y="1203303"/>
-                  </a:lnTo>
-                  <a:lnTo>
-                    <a:pt x="4875509" y="1213431"/>
-                  </a:lnTo>
-                  <a:lnTo>
-                    <a:pt x="4949269" y="1223391"/>
-                  </a:lnTo>
-                  <a:lnTo>
-                    <a:pt x="5023029" y="1233187"/>
-                  </a:lnTo>
-                  <a:lnTo>
-                    <a:pt x="5096789" y="1242819"/>
-                  </a:lnTo>
-                  <a:lnTo>
-                    <a:pt x="5170549" y="1252292"/>
-                  </a:lnTo>
-                  <a:lnTo>
-                    <a:pt x="5244309" y="1261608"/>
-                  </a:lnTo>
-                  <a:lnTo>
-                    <a:pt x="5318069" y="1270769"/>
-                  </a:lnTo>
-                  <a:lnTo>
-                    <a:pt x="5391829" y="1279779"/>
-                  </a:lnTo>
-                  <a:lnTo>
-                    <a:pt x="5465589" y="1288639"/>
-                  </a:lnTo>
-                  <a:lnTo>
-                    <a:pt x="5539349" y="1297352"/>
-                  </a:lnTo>
-                  <a:lnTo>
-                    <a:pt x="5613109" y="1305921"/>
-                  </a:lnTo>
-                  <a:lnTo>
-                    <a:pt x="5686869" y="1314347"/>
-                  </a:lnTo>
-                  <a:lnTo>
-                    <a:pt x="5760629" y="1322634"/>
-                  </a:lnTo>
-                  <a:lnTo>
-                    <a:pt x="5834389" y="1330783"/>
-                  </a:lnTo>
-                  <a:lnTo>
-                    <a:pt x="5908149" y="1338798"/>
-                  </a:lnTo>
-                  <a:lnTo>
-                    <a:pt x="5981909" y="1346679"/>
-                  </a:lnTo>
-                  <a:lnTo>
-                    <a:pt x="6055669" y="1354430"/>
-                  </a:lnTo>
-                  <a:lnTo>
-                    <a:pt x="6129429" y="1362052"/>
-                  </a:lnTo>
-                  <a:lnTo>
-                    <a:pt x="6203189" y="1369547"/>
-                  </a:lnTo>
-                  <a:lnTo>
-                    <a:pt x="6276949" y="1376919"/>
-                  </a:lnTo>
-                  <a:lnTo>
-                    <a:pt x="6350709" y="1384168"/>
-                  </a:lnTo>
-                  <a:lnTo>
-                    <a:pt x="6424469" y="1391297"/>
-                  </a:lnTo>
-                  <a:lnTo>
-                    <a:pt x="6498229" y="1398308"/>
-                  </a:lnTo>
-                  <a:lnTo>
-                    <a:pt x="6571989" y="1405202"/>
-                  </a:lnTo>
-                  <a:lnTo>
-                    <a:pt x="6645749" y="1411982"/>
-                  </a:lnTo>
-                  <a:lnTo>
-                    <a:pt x="6719509" y="1418650"/>
-                  </a:lnTo>
-                  <a:lnTo>
-                    <a:pt x="6793269" y="1425207"/>
-                  </a:lnTo>
-                  <a:lnTo>
-                    <a:pt x="6867029" y="1431655"/>
-                  </a:lnTo>
-                  <a:lnTo>
-                    <a:pt x="6940789" y="1437997"/>
-                  </a:lnTo>
-                  <a:lnTo>
-                    <a:pt x="7014550" y="1444233"/>
-                  </a:lnTo>
-                  <a:lnTo>
-                    <a:pt x="7088310" y="1450366"/>
-                  </a:lnTo>
-                  <a:lnTo>
-                    <a:pt x="7162070" y="1456397"/>
-                  </a:lnTo>
-                  <a:lnTo>
-                    <a:pt x="7235830" y="1462328"/>
+                    <a:pt x="71622" y="30538"/>
+                  </a:lnTo>
+                  <a:lnTo>
+                    <a:pt x="143245" y="60571"/>
+                  </a:lnTo>
+                  <a:lnTo>
+                    <a:pt x="214867" y="90105"/>
+                  </a:lnTo>
+                  <a:lnTo>
+                    <a:pt x="286490" y="119150"/>
+                  </a:lnTo>
+                  <a:lnTo>
+                    <a:pt x="358112" y="147713"/>
+                  </a:lnTo>
+                  <a:lnTo>
+                    <a:pt x="429735" y="175803"/>
+                  </a:lnTo>
+                  <a:lnTo>
+                    <a:pt x="501357" y="203426"/>
+                  </a:lnTo>
+                  <a:lnTo>
+                    <a:pt x="572980" y="230592"/>
+                  </a:lnTo>
+                  <a:lnTo>
+                    <a:pt x="644602" y="257307"/>
+                  </a:lnTo>
+                  <a:lnTo>
+                    <a:pt x="716225" y="283579"/>
+                  </a:lnTo>
+                  <a:lnTo>
+                    <a:pt x="787847" y="309415"/>
+                  </a:lnTo>
+                  <a:lnTo>
+                    <a:pt x="859470" y="334823"/>
+                  </a:lnTo>
+                  <a:lnTo>
+                    <a:pt x="931092" y="359809"/>
+                  </a:lnTo>
+                  <a:lnTo>
+                    <a:pt x="1002715" y="384381"/>
+                  </a:lnTo>
+                  <a:lnTo>
+                    <a:pt x="1074337" y="408546"/>
+                  </a:lnTo>
+                  <a:lnTo>
+                    <a:pt x="1145960" y="432310"/>
+                  </a:lnTo>
+                  <a:lnTo>
+                    <a:pt x="1217582" y="455680"/>
+                  </a:lnTo>
+                  <a:lnTo>
+                    <a:pt x="1289205" y="478662"/>
+                  </a:lnTo>
+                  <a:lnTo>
+                    <a:pt x="1360827" y="501263"/>
+                  </a:lnTo>
+                  <a:lnTo>
+                    <a:pt x="1432450" y="523490"/>
+                  </a:lnTo>
+                  <a:lnTo>
+                    <a:pt x="1504073" y="545347"/>
+                  </a:lnTo>
+                  <a:lnTo>
+                    <a:pt x="1575695" y="566843"/>
+                  </a:lnTo>
+                  <a:lnTo>
+                    <a:pt x="1647318" y="587982"/>
+                  </a:lnTo>
+                  <a:lnTo>
+                    <a:pt x="1718940" y="608770"/>
+                  </a:lnTo>
+                  <a:lnTo>
+                    <a:pt x="1790563" y="629213"/>
+                  </a:lnTo>
+                  <a:lnTo>
+                    <a:pt x="1862185" y="649318"/>
+                  </a:lnTo>
+                  <a:lnTo>
+                    <a:pt x="1933808" y="669089"/>
+                  </a:lnTo>
+                  <a:lnTo>
+                    <a:pt x="2005430" y="688532"/>
+                  </a:lnTo>
+                  <a:lnTo>
+                    <a:pt x="2077053" y="707653"/>
+                  </a:lnTo>
+                  <a:lnTo>
+                    <a:pt x="2148675" y="726457"/>
+                  </a:lnTo>
+                  <a:lnTo>
+                    <a:pt x="2220298" y="744949"/>
+                  </a:lnTo>
+                  <a:lnTo>
+                    <a:pt x="2291920" y="763134"/>
+                  </a:lnTo>
+                  <a:lnTo>
+                    <a:pt x="2363543" y="781018"/>
+                  </a:lnTo>
+                  <a:lnTo>
+                    <a:pt x="2435165" y="798605"/>
+                  </a:lnTo>
+                  <a:lnTo>
+                    <a:pt x="2506788" y="815900"/>
+                  </a:lnTo>
+                  <a:lnTo>
+                    <a:pt x="2578410" y="832909"/>
+                  </a:lnTo>
+                  <a:lnTo>
+                    <a:pt x="2650033" y="849636"/>
+                  </a:lnTo>
+                  <a:lnTo>
+                    <a:pt x="2721655" y="866085"/>
+                  </a:lnTo>
+                  <a:lnTo>
+                    <a:pt x="2793278" y="882261"/>
+                  </a:lnTo>
+                  <a:lnTo>
+                    <a:pt x="2864901" y="898169"/>
+                  </a:lnTo>
+                  <a:lnTo>
+                    <a:pt x="2936523" y="913814"/>
+                  </a:lnTo>
+                  <a:lnTo>
+                    <a:pt x="3008146" y="929199"/>
+                  </a:lnTo>
+                  <a:lnTo>
+                    <a:pt x="3079768" y="944329"/>
+                  </a:lnTo>
+                  <a:lnTo>
+                    <a:pt x="3151391" y="959207"/>
+                  </a:lnTo>
+                  <a:lnTo>
+                    <a:pt x="3223013" y="973840"/>
+                  </a:lnTo>
+                  <a:lnTo>
+                    <a:pt x="3294636" y="988229"/>
+                  </a:lnTo>
+                  <a:lnTo>
+                    <a:pt x="3366258" y="1002380"/>
+                  </a:lnTo>
+                  <a:lnTo>
+                    <a:pt x="3437881" y="1016296"/>
+                  </a:lnTo>
+                  <a:lnTo>
+                    <a:pt x="3509503" y="1029982"/>
+                  </a:lnTo>
+                  <a:lnTo>
+                    <a:pt x="3581126" y="1043440"/>
+                  </a:lnTo>
+                  <a:lnTo>
+                    <a:pt x="3652748" y="1056676"/>
+                  </a:lnTo>
+                  <a:lnTo>
+                    <a:pt x="3724371" y="1069691"/>
+                  </a:lnTo>
+                  <a:lnTo>
+                    <a:pt x="3795993" y="1082491"/>
+                  </a:lnTo>
+                  <a:lnTo>
+                    <a:pt x="3867616" y="1095079"/>
+                  </a:lnTo>
+                  <a:lnTo>
+                    <a:pt x="3939238" y="1107458"/>
+                  </a:lnTo>
+                  <a:lnTo>
+                    <a:pt x="4010861" y="1119632"/>
+                  </a:lnTo>
+                  <a:lnTo>
+                    <a:pt x="4082483" y="1131603"/>
+                  </a:lnTo>
+                  <a:lnTo>
+                    <a:pt x="4154106" y="1143377"/>
+                  </a:lnTo>
+                  <a:lnTo>
+                    <a:pt x="4225729" y="1154955"/>
+                  </a:lnTo>
+                  <a:lnTo>
+                    <a:pt x="4297351" y="1166341"/>
+                  </a:lnTo>
+                  <a:lnTo>
+                    <a:pt x="4368974" y="1177538"/>
+                  </a:lnTo>
+                  <a:lnTo>
+                    <a:pt x="4440596" y="1188550"/>
+                  </a:lnTo>
+                  <a:lnTo>
+                    <a:pt x="4512219" y="1199378"/>
+                  </a:lnTo>
+                  <a:lnTo>
+                    <a:pt x="4583841" y="1210028"/>
+                  </a:lnTo>
+                  <a:lnTo>
+                    <a:pt x="4655464" y="1220501"/>
+                  </a:lnTo>
+                  <a:lnTo>
+                    <a:pt x="4727086" y="1230800"/>
+                  </a:lnTo>
+                  <a:lnTo>
+                    <a:pt x="4798709" y="1240928"/>
+                  </a:lnTo>
+                  <a:lnTo>
+                    <a:pt x="4870331" y="1250888"/>
+                  </a:lnTo>
+                  <a:lnTo>
+                    <a:pt x="4941954" y="1260683"/>
+                  </a:lnTo>
+                  <a:lnTo>
+                    <a:pt x="5013576" y="1270316"/>
+                  </a:lnTo>
+                  <a:lnTo>
+                    <a:pt x="5085199" y="1279789"/>
+                  </a:lnTo>
+                  <a:lnTo>
+                    <a:pt x="5156821" y="1289105"/>
+                  </a:lnTo>
+                  <a:lnTo>
+                    <a:pt x="5228444" y="1298266"/>
+                  </a:lnTo>
+                  <a:lnTo>
+                    <a:pt x="5300066" y="1307276"/>
+                  </a:lnTo>
+                  <a:lnTo>
+                    <a:pt x="5371689" y="1316136"/>
+                  </a:lnTo>
+                  <a:lnTo>
+                    <a:pt x="5443311" y="1324849"/>
+                  </a:lnTo>
+                  <a:lnTo>
+                    <a:pt x="5514934" y="1333418"/>
+                  </a:lnTo>
+                  <a:lnTo>
+                    <a:pt x="5586557" y="1341844"/>
+                  </a:lnTo>
+                  <a:lnTo>
+                    <a:pt x="5658179" y="1350131"/>
+                  </a:lnTo>
+                  <a:lnTo>
+                    <a:pt x="5729802" y="1358280"/>
+                  </a:lnTo>
+                  <a:lnTo>
+                    <a:pt x="5801424" y="1366295"/>
+                  </a:lnTo>
+                  <a:lnTo>
+                    <a:pt x="5873047" y="1374176"/>
+                  </a:lnTo>
+                  <a:lnTo>
+                    <a:pt x="5944669" y="1381926"/>
+                  </a:lnTo>
+                  <a:lnTo>
+                    <a:pt x="6016292" y="1389549"/>
+                  </a:lnTo>
+                  <a:lnTo>
+                    <a:pt x="6087914" y="1397044"/>
+                  </a:lnTo>
+                  <a:lnTo>
+                    <a:pt x="6159537" y="1404416"/>
+                  </a:lnTo>
+                  <a:lnTo>
+                    <a:pt x="6231159" y="1411665"/>
+                  </a:lnTo>
+                  <a:lnTo>
+                    <a:pt x="6302782" y="1418794"/>
+                  </a:lnTo>
+                  <a:lnTo>
+                    <a:pt x="6374404" y="1425804"/>
+                  </a:lnTo>
+                  <a:lnTo>
+                    <a:pt x="6446027" y="1432699"/>
+                  </a:lnTo>
+                  <a:lnTo>
+                    <a:pt x="6517649" y="1439479"/>
+                  </a:lnTo>
+                  <a:lnTo>
+                    <a:pt x="6589272" y="1446147"/>
+                  </a:lnTo>
+                  <a:lnTo>
+                    <a:pt x="6660894" y="1452704"/>
+                  </a:lnTo>
+                  <a:lnTo>
+                    <a:pt x="6732517" y="1459152"/>
+                  </a:lnTo>
+                  <a:lnTo>
+                    <a:pt x="6804139" y="1465494"/>
+                  </a:lnTo>
+                  <a:lnTo>
+                    <a:pt x="6875762" y="1471730"/>
+                  </a:lnTo>
+                  <a:lnTo>
+                    <a:pt x="6947385" y="1477863"/>
+                  </a:lnTo>
+                  <a:lnTo>
+                    <a:pt x="7019007" y="1483894"/>
+                  </a:lnTo>
+                  <a:lnTo>
+                    <a:pt x="7090630" y="1489825"/>
                   </a:lnTo>
                 </a:path>
               </a:pathLst>
@@ -4521,7 +4478,7 @@
         </p:sp>
         <p:sp>
           <p:nvSpPr>
-            <p:cNvPr id="25" name="pl25"/>
+            <p:cNvPr id="24" name="pl24"/>
             <p:cNvSpPr/>
             <p:nvPr/>
           </p:nvSpPr>
@@ -4564,13 +4521,13 @@
         </p:sp>
         <p:sp>
           <p:nvSpPr>
-            <p:cNvPr id="26" name="pl26"/>
+            <p:cNvPr id="25" name="pl25"/>
             <p:cNvSpPr/>
             <p:nvPr/>
           </p:nvSpPr>
           <p:spPr>
             <a:xfrm>
-              <a:off x="4269157" y="2073503"/>
+              <a:off x="4588151" y="2073503"/>
               <a:ext cx="0" cy="3649639"/>
             </a:xfrm>
             <a:custGeom>
@@ -4607,7 +4564,7 @@
         </p:sp>
         <p:sp>
           <p:nvSpPr>
-            <p:cNvPr id="27" name="tx27"/>
+            <p:cNvPr id="26" name="tx26"/>
             <p:cNvSpPr/>
             <p:nvPr/>
           </p:nvSpPr>
@@ -4653,7 +4610,7 @@
         </p:sp>
         <p:sp>
           <p:nvSpPr>
-            <p:cNvPr id="28" name="tx28"/>
+            <p:cNvPr id="27" name="tx27"/>
             <p:cNvSpPr/>
             <p:nvPr/>
           </p:nvSpPr>
@@ -4699,7 +4656,7 @@
         </p:sp>
         <p:sp>
           <p:nvSpPr>
-            <p:cNvPr id="29" name="tx29"/>
+            <p:cNvPr id="28" name="tx28"/>
             <p:cNvSpPr/>
             <p:nvPr/>
           </p:nvSpPr>
@@ -4745,7 +4702,7 @@
         </p:sp>
         <p:sp>
           <p:nvSpPr>
-            <p:cNvPr id="30" name="tx30"/>
+            <p:cNvPr id="29" name="tx29"/>
             <p:cNvSpPr/>
             <p:nvPr/>
           </p:nvSpPr>
@@ -4791,7 +4748,7 @@
         </p:sp>
         <p:sp>
           <p:nvSpPr>
-            <p:cNvPr id="31" name="tx31"/>
+            <p:cNvPr id="30" name="tx30"/>
             <p:cNvSpPr/>
             <p:nvPr/>
           </p:nvSpPr>
@@ -4837,14 +4794,14 @@
         </p:sp>
         <p:sp>
           <p:nvSpPr>
-            <p:cNvPr id="32" name="tx32"/>
+            <p:cNvPr id="31" name="tx31"/>
             <p:cNvSpPr/>
             <p:nvPr/>
           </p:nvSpPr>
           <p:spPr>
             <a:xfrm>
-              <a:off x="2423864" y="5785772"/>
-              <a:ext cx="155356" cy="80101"/>
+              <a:off x="2360651" y="5785772"/>
+              <a:ext cx="161574" cy="80101"/>
             </a:xfrm>
             <a:prstGeom prst="rect">
               <a:avLst/>
@@ -4876,21 +4833,21 @@
                   <a:latin typeface="Helvetica"/>
                   <a:cs typeface="Helvetica"/>
                 </a:rPr>
-                <a:t>0.8</a:t>
+                <a:t>-25</a:t>
               </a:r>
             </a:p>
           </p:txBody>
         </p:sp>
         <p:sp>
           <p:nvSpPr>
-            <p:cNvPr id="33" name="tx33"/>
+            <p:cNvPr id="32" name="tx32"/>
             <p:cNvSpPr/>
             <p:nvPr/>
           </p:nvSpPr>
           <p:spPr>
             <a:xfrm>
-              <a:off x="4196521" y="5785772"/>
-              <a:ext cx="155356" cy="80101"/>
+              <a:off x="4561958" y="5785772"/>
+              <a:ext cx="62179" cy="80101"/>
             </a:xfrm>
             <a:prstGeom prst="rect">
               <a:avLst/>
@@ -4922,21 +4879,21 @@
                   <a:latin typeface="Helvetica"/>
                   <a:cs typeface="Helvetica"/>
                 </a:rPr>
-                <a:t>1.0</a:t>
+                <a:t>0</a:t>
               </a:r>
             </a:p>
           </p:txBody>
         </p:sp>
         <p:sp>
           <p:nvSpPr>
-            <p:cNvPr id="34" name="tx34"/>
+            <p:cNvPr id="33" name="tx33"/>
             <p:cNvSpPr/>
             <p:nvPr/>
           </p:nvSpPr>
           <p:spPr>
             <a:xfrm>
-              <a:off x="5969179" y="5785772"/>
-              <a:ext cx="155356" cy="80101"/>
+              <a:off x="6682478" y="5785772"/>
+              <a:ext cx="124358" cy="80101"/>
             </a:xfrm>
             <a:prstGeom prst="rect">
               <a:avLst/>
@@ -4968,67 +4925,21 @@
                   <a:latin typeface="Helvetica"/>
                   <a:cs typeface="Helvetica"/>
                 </a:rPr>
-                <a:t>1.2</a:t>
+                <a:t>25</a:t>
               </a:r>
             </a:p>
           </p:txBody>
         </p:sp>
         <p:sp>
           <p:nvSpPr>
-            <p:cNvPr id="35" name="tx35"/>
+            <p:cNvPr id="34" name="tx34"/>
             <p:cNvSpPr/>
             <p:nvPr/>
           </p:nvSpPr>
           <p:spPr>
             <a:xfrm>
-              <a:off x="7741836" y="5785772"/>
-              <a:ext cx="155356" cy="80101"/>
-            </a:xfrm>
-            <a:prstGeom prst="rect">
-              <a:avLst/>
-            </a:prstGeom>
-            <a:noFill/>
-          </p:spPr>
-          <p:txBody>
-            <a:bodyPr lIns="0" rIns="0" tIns="0" bIns="0" anchorCtr="1" anchor="ctr" wrap="none"/>
-            <a:lstStyle/>
-            <a:p>
-              <a:pPr algn="l" marL="0" marR="0" indent="0">
-                <a:lnSpc>
-                  <a:spcPts val="880"/>
-                </a:lnSpc>
-                <a:spcBef>
-                  <a:spcPts val="0"/>
-                </a:spcBef>
-                <a:spcAft>
-                  <a:spcPts val="0"/>
-                </a:spcAft>
-              </a:pPr>
-              <a:r>
-                <a:rPr sz="880">
-                  <a:solidFill>
-                    <a:srgbClr val="4D4D4D">
-                      <a:alpha val="100000"/>
-                    </a:srgbClr>
-                  </a:solidFill>
-                  <a:latin typeface="Helvetica"/>
-                  <a:cs typeface="Helvetica"/>
-                </a:rPr>
-                <a:t>1.4</a:t>
-              </a:r>
-            </a:p>
-          </p:txBody>
-        </p:sp>
-        <p:sp>
-          <p:nvSpPr>
-            <p:cNvPr id="36" name="tx36"/>
-            <p:cNvSpPr/>
-            <p:nvPr/>
-          </p:nvSpPr>
-          <p:spPr>
-            <a:xfrm>
-              <a:off x="3879271" y="5925448"/>
-              <a:ext cx="1676186" cy="100218"/>
+              <a:off x="2928340" y="5925448"/>
+              <a:ext cx="3578047" cy="100218"/>
             </a:xfrm>
             <a:prstGeom prst="rect">
               <a:avLst/>
@@ -5060,14 +4971,14 @@
                   <a:latin typeface="Helvetica"/>
                   <a:cs typeface="Helvetica"/>
                 </a:rPr>
-                <a:t>CKD-EPI Cr-Cys / CG ratio</a:t>
+                <a:t>eGFR difference (%): 100 × (CKD-EPI Cr-Cys − CG) / CG</a:t>
               </a:r>
             </a:p>
           </p:txBody>
         </p:sp>
         <p:sp>
           <p:nvSpPr>
-            <p:cNvPr id="37" name="tx37"/>
+            <p:cNvPr id="35" name="tx35"/>
             <p:cNvSpPr/>
             <p:nvPr/>
           </p:nvSpPr>
@@ -5113,14 +5024,14 @@
         </p:sp>
         <p:sp>
           <p:nvSpPr>
-            <p:cNvPr id="38" name="tx38"/>
+            <p:cNvPr id="36" name="tx36"/>
             <p:cNvSpPr/>
             <p:nvPr/>
           </p:nvSpPr>
           <p:spPr>
             <a:xfrm>
               <a:off x="817517" y="1896563"/>
-              <a:ext cx="6169365" cy="82021"/>
+              <a:ext cx="6321612" cy="82021"/>
             </a:xfrm>
             <a:prstGeom prst="rect">
               <a:avLst/>
@@ -5152,14 +5063,14 @@
                   <a:latin typeface="Helvetica"/>
                   <a:cs typeface="Helvetica"/>
                 </a:rPr>
-                <a:t>subHR per 0.1 ratio decline: 1.22 (0.88-1.70), p = 0.229  |  per IQR decline (Δ = 0.29): 1.80 (0.69-4.69)  |  IQR: [0.85, 1.15]</a:t>
+                <a:t>subHR per 10 % decline: 1.22 (0.88-1.70), p = 0.229  |  per IQR decline (Δ = 29.3 %): 1.80 (0.69-4.69)  |  IQR: [-14.6, 14.7] %</a:t>
               </a:r>
             </a:p>
           </p:txBody>
         </p:sp>
         <p:sp>
           <p:nvSpPr>
-            <p:cNvPr id="39" name="tx39"/>
+            <p:cNvPr id="37" name="tx37"/>
             <p:cNvSpPr/>
             <p:nvPr/>
           </p:nvSpPr>

--- a/docs/pptx/whole/jx-linsubhr-ratio-hosp6.pptx
+++ b/docs/pptx/whole/jx-linsubhr-ratio-hosp6.pptx
@@ -2265,34 +2265,26 @@
         </p:sp>
         <p:sp>
           <p:nvSpPr>
-            <p:cNvPr id="4" name="pl4"/>
+            <p:cNvPr id="4" name="rc4"/>
             <p:cNvSpPr/>
             <p:nvPr/>
           </p:nvSpPr>
           <p:spPr>
             <a:xfrm>
-              <a:off x="817517" y="5142518"/>
-              <a:ext cx="7799693" cy="0"/>
+              <a:off x="457200" y="1600200"/>
+              <a:ext cx="8229600" cy="4525962"/>
             </a:xfrm>
-            <a:custGeom>
+            <a:prstGeom prst="rect">
               <a:avLst/>
-              <a:pathLst>
-                <a:path w="7799693" h="0">
-                  <a:moveTo>
-                    <a:pt x="0" y="0"/>
-                  </a:moveTo>
-                  <a:lnTo>
-                    <a:pt x="7799693" y="0"/>
-                  </a:lnTo>
-                  <a:lnTo>
-                    <a:pt x="7799693" y="0"/>
-                  </a:lnTo>
-                </a:path>
-              </a:pathLst>
-            </a:custGeom>
-            <a:ln w="6775" cap="flat">
+            </a:prstGeom>
+            <a:solidFill>
+              <a:srgbClr val="FFFFFF">
+                <a:alpha val="100000"/>
+              </a:srgbClr>
+            </a:solidFill>
+            <a:ln w="13550" cap="rnd">
               <a:solidFill>
-                <a:srgbClr val="EBEBEB">
+                <a:srgbClr val="FFFFFF">
                   <a:alpha val="100000"/>
                 </a:srgbClr>
               </a:solidFill>
@@ -2314,21 +2306,21 @@
           </p:nvSpPr>
           <p:spPr>
             <a:xfrm>
-              <a:off x="817517" y="4313054"/>
-              <a:ext cx="7799693" cy="0"/>
+              <a:off x="887106" y="3250627"/>
+              <a:ext cx="7660515" cy="0"/>
             </a:xfrm>
             <a:custGeom>
               <a:avLst/>
               <a:pathLst>
-                <a:path w="7799693" h="0">
+                <a:path w="7660515" h="0">
                   <a:moveTo>
                     <a:pt x="0" y="0"/>
                   </a:moveTo>
                   <a:lnTo>
-                    <a:pt x="7799693" y="0"/>
-                  </a:lnTo>
-                  <a:lnTo>
-                    <a:pt x="7799693" y="0"/>
+                    <a:pt x="7660515" y="0"/>
+                  </a:lnTo>
+                  <a:lnTo>
+                    <a:pt x="7660515" y="0"/>
                   </a:lnTo>
                 </a:path>
               </a:pathLst>
@@ -2357,21 +2349,21 @@
           </p:nvSpPr>
           <p:spPr>
             <a:xfrm>
-              <a:off x="817517" y="3483591"/>
-              <a:ext cx="7799693" cy="0"/>
+              <a:off x="887106" y="2951293"/>
+              <a:ext cx="7660515" cy="0"/>
             </a:xfrm>
             <a:custGeom>
               <a:avLst/>
               <a:pathLst>
-                <a:path w="7799693" h="0">
+                <a:path w="7660515" h="0">
                   <a:moveTo>
                     <a:pt x="0" y="0"/>
                   </a:moveTo>
                   <a:lnTo>
-                    <a:pt x="7799693" y="0"/>
-                  </a:lnTo>
-                  <a:lnTo>
-                    <a:pt x="7799693" y="0"/>
+                    <a:pt x="7660515" y="0"/>
+                  </a:lnTo>
+                  <a:lnTo>
+                    <a:pt x="7660515" y="0"/>
                   </a:lnTo>
                 </a:path>
               </a:pathLst>
@@ -2400,21 +2392,21 @@
           </p:nvSpPr>
           <p:spPr>
             <a:xfrm>
-              <a:off x="817517" y="2654127"/>
-              <a:ext cx="7799693" cy="0"/>
+              <a:off x="887106" y="2651959"/>
+              <a:ext cx="7660515" cy="0"/>
             </a:xfrm>
             <a:custGeom>
               <a:avLst/>
               <a:pathLst>
-                <a:path w="7799693" h="0">
+                <a:path w="7660515" h="0">
                   <a:moveTo>
                     <a:pt x="0" y="0"/>
                   </a:moveTo>
                   <a:lnTo>
-                    <a:pt x="7799693" y="0"/>
-                  </a:lnTo>
-                  <a:lnTo>
-                    <a:pt x="7799693" y="0"/>
+                    <a:pt x="7660515" y="0"/>
+                  </a:lnTo>
+                  <a:lnTo>
+                    <a:pt x="7660515" y="0"/>
                   </a:lnTo>
                 </a:path>
               </a:pathLst>
@@ -2443,21 +2435,21 @@
           </p:nvSpPr>
           <p:spPr>
             <a:xfrm>
-              <a:off x="1365633" y="2073503"/>
-              <a:ext cx="0" cy="3649639"/>
+              <a:off x="887106" y="2352625"/>
+              <a:ext cx="7660515" cy="0"/>
             </a:xfrm>
             <a:custGeom>
               <a:avLst/>
               <a:pathLst>
-                <a:path w="0" h="3649639">
+                <a:path w="7660515" h="0">
                   <a:moveTo>
-                    <a:pt x="0" y="3649639"/>
+                    <a:pt x="0" y="0"/>
                   </a:moveTo>
                   <a:lnTo>
-                    <a:pt x="0" y="0"/>
-                  </a:lnTo>
-                  <a:lnTo>
-                    <a:pt x="0" y="0"/>
+                    <a:pt x="7660515" y="0"/>
+                  </a:lnTo>
+                  <a:lnTo>
+                    <a:pt x="7660515" y="0"/>
                   </a:lnTo>
                 </a:path>
               </a:pathLst>
@@ -2486,15 +2478,15 @@
           </p:nvSpPr>
           <p:spPr>
             <a:xfrm>
-              <a:off x="3517243" y="2073503"/>
-              <a:ext cx="0" cy="3649639"/>
+              <a:off x="1425442" y="2143092"/>
+              <a:ext cx="0" cy="1317069"/>
             </a:xfrm>
             <a:custGeom>
               <a:avLst/>
               <a:pathLst>
-                <a:path w="0" h="3649639">
+                <a:path w="0" h="1317069">
                   <a:moveTo>
-                    <a:pt x="0" y="3649639"/>
+                    <a:pt x="0" y="1317069"/>
                   </a:moveTo>
                   <a:lnTo>
                     <a:pt x="0" y="0"/>
@@ -2529,15 +2521,15 @@
           </p:nvSpPr>
           <p:spPr>
             <a:xfrm>
-              <a:off x="5668852" y="2073503"/>
-              <a:ext cx="0" cy="3649639"/>
+              <a:off x="3538658" y="2143092"/>
+              <a:ext cx="0" cy="1317069"/>
             </a:xfrm>
             <a:custGeom>
               <a:avLst/>
               <a:pathLst>
-                <a:path w="0" h="3649639">
+                <a:path w="0" h="1317069">
                   <a:moveTo>
-                    <a:pt x="0" y="3649639"/>
+                    <a:pt x="0" y="1317069"/>
                   </a:moveTo>
                   <a:lnTo>
                     <a:pt x="0" y="0"/>
@@ -2572,15 +2564,15 @@
           </p:nvSpPr>
           <p:spPr>
             <a:xfrm>
-              <a:off x="7820461" y="2073503"/>
-              <a:ext cx="0" cy="3649639"/>
+              <a:off x="5651874" y="2143092"/>
+              <a:ext cx="0" cy="1317069"/>
             </a:xfrm>
             <a:custGeom>
               <a:avLst/>
               <a:pathLst>
-                <a:path w="0" h="3649639">
+                <a:path w="0" h="1317069">
                   <a:moveTo>
-                    <a:pt x="0" y="3649639"/>
+                    <a:pt x="0" y="1317069"/>
                   </a:moveTo>
                   <a:lnTo>
                     <a:pt x="0" y="0"/>
@@ -2615,26 +2607,26 @@
           </p:nvSpPr>
           <p:spPr>
             <a:xfrm>
-              <a:off x="817517" y="5557249"/>
-              <a:ext cx="7799693" cy="0"/>
+              <a:off x="7765090" y="2143092"/>
+              <a:ext cx="0" cy="1317069"/>
             </a:xfrm>
             <a:custGeom>
               <a:avLst/>
               <a:pathLst>
-                <a:path w="7799693" h="0">
+                <a:path w="0" h="1317069">
                   <a:moveTo>
+                    <a:pt x="0" y="1317069"/>
+                  </a:moveTo>
+                  <a:lnTo>
                     <a:pt x="0" y="0"/>
-                  </a:moveTo>
-                  <a:lnTo>
-                    <a:pt x="7799693" y="0"/>
-                  </a:lnTo>
-                  <a:lnTo>
-                    <a:pt x="7799693" y="0"/>
+                  </a:lnTo>
+                  <a:lnTo>
+                    <a:pt x="0" y="0"/>
                   </a:lnTo>
                 </a:path>
               </a:pathLst>
             </a:custGeom>
-            <a:ln w="13550" cap="flat">
+            <a:ln w="6775" cap="flat">
               <a:solidFill>
                 <a:srgbClr val="EBEBEB">
                   <a:alpha val="100000"/>
@@ -2658,21 +2650,21 @@
           </p:nvSpPr>
           <p:spPr>
             <a:xfrm>
-              <a:off x="817517" y="4727786"/>
-              <a:ext cx="7799693" cy="0"/>
+              <a:off x="887106" y="3400294"/>
+              <a:ext cx="7660515" cy="0"/>
             </a:xfrm>
             <a:custGeom>
               <a:avLst/>
               <a:pathLst>
-                <a:path w="7799693" h="0">
+                <a:path w="7660515" h="0">
                   <a:moveTo>
                     <a:pt x="0" y="0"/>
                   </a:moveTo>
                   <a:lnTo>
-                    <a:pt x="7799693" y="0"/>
-                  </a:lnTo>
-                  <a:lnTo>
-                    <a:pt x="7799693" y="0"/>
+                    <a:pt x="7660515" y="0"/>
+                  </a:lnTo>
+                  <a:lnTo>
+                    <a:pt x="7660515" y="0"/>
                   </a:lnTo>
                 </a:path>
               </a:pathLst>
@@ -2701,21 +2693,21 @@
           </p:nvSpPr>
           <p:spPr>
             <a:xfrm>
-              <a:off x="817517" y="3898322"/>
-              <a:ext cx="7799693" cy="0"/>
+              <a:off x="887106" y="3100960"/>
+              <a:ext cx="7660515" cy="0"/>
             </a:xfrm>
             <a:custGeom>
               <a:avLst/>
               <a:pathLst>
-                <a:path w="7799693" h="0">
+                <a:path w="7660515" h="0">
                   <a:moveTo>
                     <a:pt x="0" y="0"/>
                   </a:moveTo>
                   <a:lnTo>
-                    <a:pt x="7799693" y="0"/>
-                  </a:lnTo>
-                  <a:lnTo>
-                    <a:pt x="7799693" y="0"/>
+                    <a:pt x="7660515" y="0"/>
+                  </a:lnTo>
+                  <a:lnTo>
+                    <a:pt x="7660515" y="0"/>
                   </a:lnTo>
                 </a:path>
               </a:pathLst>
@@ -2744,21 +2736,21 @@
           </p:nvSpPr>
           <p:spPr>
             <a:xfrm>
-              <a:off x="817517" y="3068859"/>
-              <a:ext cx="7799693" cy="0"/>
+              <a:off x="887106" y="2801626"/>
+              <a:ext cx="7660515" cy="0"/>
             </a:xfrm>
             <a:custGeom>
               <a:avLst/>
               <a:pathLst>
-                <a:path w="7799693" h="0">
+                <a:path w="7660515" h="0">
                   <a:moveTo>
                     <a:pt x="0" y="0"/>
                   </a:moveTo>
                   <a:lnTo>
-                    <a:pt x="7799693" y="0"/>
-                  </a:lnTo>
-                  <a:lnTo>
-                    <a:pt x="7799693" y="0"/>
+                    <a:pt x="7660515" y="0"/>
+                  </a:lnTo>
+                  <a:lnTo>
+                    <a:pt x="7660515" y="0"/>
                   </a:lnTo>
                 </a:path>
               </a:pathLst>
@@ -2787,21 +2779,21 @@
           </p:nvSpPr>
           <p:spPr>
             <a:xfrm>
-              <a:off x="817517" y="2239395"/>
-              <a:ext cx="7799693" cy="0"/>
+              <a:off x="887106" y="2502292"/>
+              <a:ext cx="7660515" cy="0"/>
             </a:xfrm>
             <a:custGeom>
               <a:avLst/>
               <a:pathLst>
-                <a:path w="7799693" h="0">
+                <a:path w="7660515" h="0">
                   <a:moveTo>
                     <a:pt x="0" y="0"/>
                   </a:moveTo>
                   <a:lnTo>
-                    <a:pt x="7799693" y="0"/>
-                  </a:lnTo>
-                  <a:lnTo>
-                    <a:pt x="7799693" y="0"/>
+                    <a:pt x="7660515" y="0"/>
+                  </a:lnTo>
+                  <a:lnTo>
+                    <a:pt x="7660515" y="0"/>
                   </a:lnTo>
                 </a:path>
               </a:pathLst>
@@ -2830,21 +2822,21 @@
           </p:nvSpPr>
           <p:spPr>
             <a:xfrm>
-              <a:off x="2441438" y="2073503"/>
-              <a:ext cx="0" cy="3649639"/>
+              <a:off x="887106" y="2202958"/>
+              <a:ext cx="7660515" cy="0"/>
             </a:xfrm>
             <a:custGeom>
               <a:avLst/>
               <a:pathLst>
-                <a:path w="0" h="3649639">
+                <a:path w="7660515" h="0">
                   <a:moveTo>
-                    <a:pt x="0" y="3649639"/>
+                    <a:pt x="0" y="0"/>
                   </a:moveTo>
                   <a:lnTo>
-                    <a:pt x="0" y="0"/>
-                  </a:lnTo>
-                  <a:lnTo>
-                    <a:pt x="0" y="0"/>
+                    <a:pt x="7660515" y="0"/>
+                  </a:lnTo>
+                  <a:lnTo>
+                    <a:pt x="7660515" y="0"/>
                   </a:lnTo>
                 </a:path>
               </a:pathLst>
@@ -2873,15 +2865,15 @@
           </p:nvSpPr>
           <p:spPr>
             <a:xfrm>
-              <a:off x="4593047" y="2073503"/>
-              <a:ext cx="0" cy="3649639"/>
+              <a:off x="2482050" y="2143092"/>
+              <a:ext cx="0" cy="1317069"/>
             </a:xfrm>
             <a:custGeom>
               <a:avLst/>
               <a:pathLst>
-                <a:path w="0" h="3649639">
+                <a:path w="0" h="1317069">
                   <a:moveTo>
-                    <a:pt x="0" y="3649639"/>
+                    <a:pt x="0" y="1317069"/>
                   </a:moveTo>
                   <a:lnTo>
                     <a:pt x="0" y="0"/>
@@ -2916,15 +2908,15 @@
           </p:nvSpPr>
           <p:spPr>
             <a:xfrm>
-              <a:off x="6744657" y="2073503"/>
-              <a:ext cx="0" cy="3649639"/>
+              <a:off x="4595266" y="2143092"/>
+              <a:ext cx="0" cy="1317069"/>
             </a:xfrm>
             <a:custGeom>
               <a:avLst/>
               <a:pathLst>
-                <a:path w="0" h="3649639">
+                <a:path w="0" h="1317069">
                   <a:moveTo>
-                    <a:pt x="0" y="3649639"/>
+                    <a:pt x="0" y="1317069"/>
                   </a:moveTo>
                   <a:lnTo>
                     <a:pt x="0" y="0"/>
@@ -2953,573 +2945,616 @@
         </p:sp>
         <p:sp>
           <p:nvSpPr>
-            <p:cNvPr id="20" name="pg20"/>
+            <p:cNvPr id="20" name="pl20"/>
             <p:cNvSpPr/>
             <p:nvPr/>
           </p:nvSpPr>
           <p:spPr>
             <a:xfrm>
-              <a:off x="1172049" y="2073503"/>
-              <a:ext cx="7090630" cy="3396729"/>
+              <a:off x="6708482" y="2143092"/>
+              <a:ext cx="0" cy="1317069"/>
             </a:xfrm>
             <a:custGeom>
               <a:avLst/>
               <a:pathLst>
-                <a:path w="7090630" h="3396729">
+                <a:path w="0" h="1317069">
                   <a:moveTo>
-                    <a:pt x="1077353" y="0"/>
+                    <a:pt x="0" y="1317069"/>
                   </a:moveTo>
                   <a:lnTo>
-                    <a:pt x="1145960" y="143739"/>
-                  </a:lnTo>
-                  <a:lnTo>
-                    <a:pt x="1217582" y="287345"/>
-                  </a:lnTo>
-                  <a:lnTo>
-                    <a:pt x="1289205" y="424776"/>
-                  </a:lnTo>
-                  <a:lnTo>
-                    <a:pt x="1360827" y="556298"/>
-                  </a:lnTo>
-                  <a:lnTo>
-                    <a:pt x="1432450" y="682165"/>
-                  </a:lnTo>
-                  <a:lnTo>
-                    <a:pt x="1504073" y="802621"/>
-                  </a:lnTo>
-                  <a:lnTo>
-                    <a:pt x="1575695" y="917897"/>
-                  </a:lnTo>
-                  <a:lnTo>
-                    <a:pt x="1647318" y="1028218"/>
-                  </a:lnTo>
-                  <a:lnTo>
-                    <a:pt x="1718940" y="1133795"/>
-                  </a:lnTo>
-                  <a:lnTo>
-                    <a:pt x="1790563" y="1234832"/>
-                  </a:lnTo>
-                  <a:lnTo>
-                    <a:pt x="1862185" y="1331525"/>
-                  </a:lnTo>
-                  <a:lnTo>
-                    <a:pt x="1933808" y="1424061"/>
-                  </a:lnTo>
-                  <a:lnTo>
-                    <a:pt x="2005430" y="1512619"/>
-                  </a:lnTo>
-                  <a:lnTo>
-                    <a:pt x="2077053" y="1597369"/>
-                  </a:lnTo>
-                  <a:lnTo>
-                    <a:pt x="2148675" y="1678474"/>
-                  </a:lnTo>
-                  <a:lnTo>
-                    <a:pt x="2220298" y="1756093"/>
-                  </a:lnTo>
-                  <a:lnTo>
-                    <a:pt x="2291920" y="1830375"/>
-                  </a:lnTo>
-                  <a:lnTo>
-                    <a:pt x="2363543" y="1901462"/>
-                  </a:lnTo>
-                  <a:lnTo>
-                    <a:pt x="2435165" y="1969494"/>
-                  </a:lnTo>
-                  <a:lnTo>
-                    <a:pt x="2506788" y="2034600"/>
-                  </a:lnTo>
-                  <a:lnTo>
-                    <a:pt x="2578410" y="2096907"/>
-                  </a:lnTo>
-                  <a:lnTo>
-                    <a:pt x="2650033" y="2156535"/>
-                  </a:lnTo>
-                  <a:lnTo>
-                    <a:pt x="2721655" y="2213599"/>
-                  </a:lnTo>
-                  <a:lnTo>
-                    <a:pt x="2793278" y="2268210"/>
-                  </a:lnTo>
-                  <a:lnTo>
-                    <a:pt x="2864901" y="2320472"/>
-                  </a:lnTo>
-                  <a:lnTo>
-                    <a:pt x="2936523" y="2370488"/>
-                  </a:lnTo>
-                  <a:lnTo>
-                    <a:pt x="3008146" y="2418353"/>
-                  </a:lnTo>
-                  <a:lnTo>
-                    <a:pt x="3079768" y="2464160"/>
-                  </a:lnTo>
-                  <a:lnTo>
-                    <a:pt x="3151391" y="2507998"/>
-                  </a:lnTo>
-                  <a:lnTo>
-                    <a:pt x="3223013" y="2549951"/>
-                  </a:lnTo>
-                  <a:lnTo>
-                    <a:pt x="3294636" y="2590100"/>
-                  </a:lnTo>
-                  <a:lnTo>
-                    <a:pt x="3366258" y="2628523"/>
-                  </a:lnTo>
-                  <a:lnTo>
-                    <a:pt x="3437881" y="2651630"/>
-                  </a:lnTo>
-                  <a:lnTo>
-                    <a:pt x="3509503" y="2642844"/>
-                  </a:lnTo>
-                  <a:lnTo>
-                    <a:pt x="3581126" y="2633966"/>
-                  </a:lnTo>
-                  <a:lnTo>
-                    <a:pt x="3652748" y="2624994"/>
-                  </a:lnTo>
-                  <a:lnTo>
-                    <a:pt x="3724371" y="2615927"/>
-                  </a:lnTo>
-                  <a:lnTo>
-                    <a:pt x="3795993" y="2606765"/>
-                  </a:lnTo>
-                  <a:lnTo>
-                    <a:pt x="3867616" y="2597505"/>
-                  </a:lnTo>
-                  <a:lnTo>
-                    <a:pt x="3939238" y="2588149"/>
-                  </a:lnTo>
-                  <a:lnTo>
-                    <a:pt x="4010861" y="2578693"/>
-                  </a:lnTo>
-                  <a:lnTo>
-                    <a:pt x="4082483" y="2569137"/>
-                  </a:lnTo>
-                  <a:lnTo>
-                    <a:pt x="4154106" y="2559481"/>
-                  </a:lnTo>
-                  <a:lnTo>
-                    <a:pt x="4225729" y="2549722"/>
-                  </a:lnTo>
-                  <a:lnTo>
-                    <a:pt x="4297351" y="2539861"/>
-                  </a:lnTo>
-                  <a:lnTo>
-                    <a:pt x="4368974" y="2529895"/>
-                  </a:lnTo>
-                  <a:lnTo>
-                    <a:pt x="4440596" y="2519825"/>
-                  </a:lnTo>
-                  <a:lnTo>
-                    <a:pt x="4512219" y="2509647"/>
-                  </a:lnTo>
-                  <a:lnTo>
-                    <a:pt x="4583841" y="2499363"/>
-                  </a:lnTo>
-                  <a:lnTo>
-                    <a:pt x="4655464" y="2488970"/>
-                  </a:lnTo>
-                  <a:lnTo>
-                    <a:pt x="4727086" y="2478467"/>
-                  </a:lnTo>
-                  <a:lnTo>
-                    <a:pt x="4798709" y="2467853"/>
-                  </a:lnTo>
-                  <a:lnTo>
-                    <a:pt x="4870331" y="2457127"/>
-                  </a:lnTo>
-                  <a:lnTo>
-                    <a:pt x="4941954" y="2446288"/>
-                  </a:lnTo>
-                  <a:lnTo>
-                    <a:pt x="5013576" y="2435335"/>
-                  </a:lnTo>
-                  <a:lnTo>
-                    <a:pt x="5085199" y="2424266"/>
-                  </a:lnTo>
-                  <a:lnTo>
-                    <a:pt x="5156821" y="2413080"/>
-                  </a:lnTo>
-                  <a:lnTo>
-                    <a:pt x="5228444" y="2401776"/>
-                  </a:lnTo>
-                  <a:lnTo>
-                    <a:pt x="5300066" y="2390352"/>
-                  </a:lnTo>
-                  <a:lnTo>
-                    <a:pt x="5371689" y="2378808"/>
-                  </a:lnTo>
-                  <a:lnTo>
-                    <a:pt x="5443311" y="2367142"/>
-                  </a:lnTo>
-                  <a:lnTo>
-                    <a:pt x="5514934" y="2355353"/>
-                  </a:lnTo>
-                  <a:lnTo>
-                    <a:pt x="5586557" y="2343439"/>
-                  </a:lnTo>
-                  <a:lnTo>
-                    <a:pt x="5658179" y="2331400"/>
-                  </a:lnTo>
-                  <a:lnTo>
-                    <a:pt x="5729802" y="2319233"/>
-                  </a:lnTo>
-                  <a:lnTo>
-                    <a:pt x="5801424" y="2306938"/>
-                  </a:lnTo>
-                  <a:lnTo>
-                    <a:pt x="5873047" y="2294514"/>
-                  </a:lnTo>
-                  <a:lnTo>
-                    <a:pt x="5944669" y="2281958"/>
-                  </a:lnTo>
-                  <a:lnTo>
-                    <a:pt x="6016292" y="2269269"/>
-                  </a:lnTo>
-                  <a:lnTo>
-                    <a:pt x="6087914" y="2256447"/>
-                  </a:lnTo>
-                  <a:lnTo>
-                    <a:pt x="6159537" y="2243489"/>
-                  </a:lnTo>
-                  <a:lnTo>
-                    <a:pt x="6231159" y="2230394"/>
-                  </a:lnTo>
-                  <a:lnTo>
-                    <a:pt x="6302782" y="2217161"/>
-                  </a:lnTo>
-                  <a:lnTo>
-                    <a:pt x="6374404" y="2203789"/>
-                  </a:lnTo>
-                  <a:lnTo>
-                    <a:pt x="6446027" y="2190275"/>
-                  </a:lnTo>
-                  <a:lnTo>
-                    <a:pt x="6517649" y="2176618"/>
-                  </a:lnTo>
-                  <a:lnTo>
-                    <a:pt x="6589272" y="2162818"/>
-                  </a:lnTo>
-                  <a:lnTo>
-                    <a:pt x="6660894" y="2148871"/>
-                  </a:lnTo>
-                  <a:lnTo>
-                    <a:pt x="6732517" y="2134778"/>
-                  </a:lnTo>
-                  <a:lnTo>
-                    <a:pt x="6804139" y="2120535"/>
-                  </a:lnTo>
-                  <a:lnTo>
-                    <a:pt x="6875762" y="2106143"/>
-                  </a:lnTo>
-                  <a:lnTo>
-                    <a:pt x="6947385" y="2091598"/>
-                  </a:lnTo>
-                  <a:lnTo>
-                    <a:pt x="7019007" y="2076899"/>
-                  </a:lnTo>
-                  <a:lnTo>
-                    <a:pt x="7090630" y="2062046"/>
-                  </a:lnTo>
-                  <a:lnTo>
-                    <a:pt x="7090630" y="3396729"/>
-                  </a:lnTo>
-                  <a:lnTo>
-                    <a:pt x="7019007" y="3392820"/>
-                  </a:lnTo>
-                  <a:lnTo>
-                    <a:pt x="6947385" y="3388735"/>
-                  </a:lnTo>
-                  <a:lnTo>
-                    <a:pt x="6875762" y="3384466"/>
-                  </a:lnTo>
-                  <a:lnTo>
-                    <a:pt x="6804139" y="3380006"/>
-                  </a:lnTo>
-                  <a:lnTo>
-                    <a:pt x="6732517" y="3375345"/>
-                  </a:lnTo>
-                  <a:lnTo>
-                    <a:pt x="6660894" y="3370475"/>
-                  </a:lnTo>
-                  <a:lnTo>
-                    <a:pt x="6589272" y="3365386"/>
-                  </a:lnTo>
-                  <a:lnTo>
-                    <a:pt x="6517649" y="3360068"/>
-                  </a:lnTo>
-                  <a:lnTo>
-                    <a:pt x="6446027" y="3354512"/>
-                  </a:lnTo>
-                  <a:lnTo>
-                    <a:pt x="6374404" y="3348706"/>
-                  </a:lnTo>
-                  <a:lnTo>
-                    <a:pt x="6302782" y="3342639"/>
-                  </a:lnTo>
-                  <a:lnTo>
-                    <a:pt x="6231159" y="3336299"/>
-                  </a:lnTo>
-                  <a:lnTo>
-                    <a:pt x="6159537" y="3329674"/>
-                  </a:lnTo>
-                  <a:lnTo>
-                    <a:pt x="6087914" y="3322752"/>
-                  </a:lnTo>
-                  <a:lnTo>
-                    <a:pt x="6016292" y="3315519"/>
-                  </a:lnTo>
-                  <a:lnTo>
-                    <a:pt x="5944669" y="3307961"/>
-                  </a:lnTo>
-                  <a:lnTo>
-                    <a:pt x="5873047" y="3300064"/>
-                  </a:lnTo>
-                  <a:lnTo>
-                    <a:pt x="5801424" y="3291812"/>
-                  </a:lnTo>
-                  <a:lnTo>
-                    <a:pt x="5729802" y="3283188"/>
-                  </a:lnTo>
-                  <a:lnTo>
-                    <a:pt x="5658179" y="3274178"/>
-                  </a:lnTo>
-                  <a:lnTo>
-                    <a:pt x="5586557" y="3264763"/>
-                  </a:lnTo>
-                  <a:lnTo>
-                    <a:pt x="5514934" y="3254924"/>
-                  </a:lnTo>
-                  <a:lnTo>
-                    <a:pt x="5443311" y="3244644"/>
-                  </a:lnTo>
-                  <a:lnTo>
-                    <a:pt x="5371689" y="3233902"/>
-                  </a:lnTo>
-                  <a:lnTo>
-                    <a:pt x="5300066" y="3222677"/>
-                  </a:lnTo>
-                  <a:lnTo>
-                    <a:pt x="5228444" y="3210948"/>
-                  </a:lnTo>
-                  <a:lnTo>
-                    <a:pt x="5156821" y="3198692"/>
-                  </a:lnTo>
-                  <a:lnTo>
-                    <a:pt x="5085199" y="3185885"/>
-                  </a:lnTo>
-                  <a:lnTo>
-                    <a:pt x="5013576" y="3172503"/>
-                  </a:lnTo>
-                  <a:lnTo>
-                    <a:pt x="4941954" y="3158520"/>
-                  </a:lnTo>
-                  <a:lnTo>
-                    <a:pt x="4870331" y="3143908"/>
-                  </a:lnTo>
-                  <a:lnTo>
-                    <a:pt x="4798709" y="3128640"/>
-                  </a:lnTo>
-                  <a:lnTo>
-                    <a:pt x="4727086" y="3112686"/>
-                  </a:lnTo>
-                  <a:lnTo>
-                    <a:pt x="4655464" y="3096015"/>
-                  </a:lnTo>
-                  <a:lnTo>
-                    <a:pt x="4583841" y="3078596"/>
-                  </a:lnTo>
-                  <a:lnTo>
-                    <a:pt x="4512219" y="3060393"/>
-                  </a:lnTo>
-                  <a:lnTo>
-                    <a:pt x="4440596" y="3041373"/>
-                  </a:lnTo>
-                  <a:lnTo>
-                    <a:pt x="4368974" y="3021499"/>
-                  </a:lnTo>
-                  <a:lnTo>
-                    <a:pt x="4297351" y="3000731"/>
-                  </a:lnTo>
-                  <a:lnTo>
-                    <a:pt x="4225729" y="2979031"/>
-                  </a:lnTo>
-                  <a:lnTo>
-                    <a:pt x="4154106" y="2956355"/>
-                  </a:lnTo>
-                  <a:lnTo>
-                    <a:pt x="4082483" y="2932661"/>
-                  </a:lnTo>
-                  <a:lnTo>
-                    <a:pt x="4010861" y="2907902"/>
-                  </a:lnTo>
-                  <a:lnTo>
-                    <a:pt x="3939238" y="2882031"/>
-                  </a:lnTo>
-                  <a:lnTo>
-                    <a:pt x="3867616" y="2854997"/>
-                  </a:lnTo>
-                  <a:lnTo>
-                    <a:pt x="3795993" y="2826749"/>
-                  </a:lnTo>
-                  <a:lnTo>
-                    <a:pt x="3724371" y="2797232"/>
-                  </a:lnTo>
-                  <a:lnTo>
-                    <a:pt x="3652748" y="2766389"/>
-                  </a:lnTo>
-                  <a:lnTo>
-                    <a:pt x="3581126" y="2734160"/>
-                  </a:lnTo>
-                  <a:lnTo>
-                    <a:pt x="3509503" y="2700484"/>
-                  </a:lnTo>
-                  <a:lnTo>
-                    <a:pt x="3437881" y="2665294"/>
-                  </a:lnTo>
-                  <a:lnTo>
-                    <a:pt x="3366258" y="2660323"/>
-                  </a:lnTo>
-                  <a:lnTo>
-                    <a:pt x="3294636" y="2668926"/>
-                  </a:lnTo>
-                  <a:lnTo>
-                    <a:pt x="3223013" y="2677439"/>
-                  </a:lnTo>
-                  <a:lnTo>
-                    <a:pt x="3151391" y="2685863"/>
-                  </a:lnTo>
-                  <a:lnTo>
-                    <a:pt x="3079768" y="2694199"/>
-                  </a:lnTo>
-                  <a:lnTo>
-                    <a:pt x="3008146" y="2702448"/>
-                  </a:lnTo>
-                  <a:lnTo>
-                    <a:pt x="2936523" y="2710611"/>
-                  </a:lnTo>
-                  <a:lnTo>
-                    <a:pt x="2864901" y="2718689"/>
-                  </a:lnTo>
-                  <a:lnTo>
-                    <a:pt x="2793278" y="2726682"/>
-                  </a:lnTo>
-                  <a:lnTo>
-                    <a:pt x="2721655" y="2734591"/>
-                  </a:lnTo>
-                  <a:lnTo>
-                    <a:pt x="2650033" y="2742418"/>
-                  </a:lnTo>
-                  <a:lnTo>
-                    <a:pt x="2578410" y="2750163"/>
-                  </a:lnTo>
-                  <a:lnTo>
-                    <a:pt x="2506788" y="2757828"/>
-                  </a:lnTo>
-                  <a:lnTo>
-                    <a:pt x="2435165" y="2765412"/>
-                  </a:lnTo>
-                  <a:lnTo>
-                    <a:pt x="2363543" y="2772917"/>
-                  </a:lnTo>
-                  <a:lnTo>
-                    <a:pt x="2291920" y="2780343"/>
-                  </a:lnTo>
-                  <a:lnTo>
-                    <a:pt x="2220298" y="2787692"/>
-                  </a:lnTo>
-                  <a:lnTo>
-                    <a:pt x="2148675" y="2794964"/>
-                  </a:lnTo>
-                  <a:lnTo>
-                    <a:pt x="2077053" y="2802161"/>
-                  </a:lnTo>
-                  <a:lnTo>
-                    <a:pt x="2005430" y="2809282"/>
-                  </a:lnTo>
-                  <a:lnTo>
-                    <a:pt x="1933808" y="2816328"/>
-                  </a:lnTo>
-                  <a:lnTo>
-                    <a:pt x="1862185" y="2823301"/>
-                  </a:lnTo>
-                  <a:lnTo>
-                    <a:pt x="1790563" y="2830201"/>
-                  </a:lnTo>
-                  <a:lnTo>
-                    <a:pt x="1718940" y="2837029"/>
-                  </a:lnTo>
-                  <a:lnTo>
-                    <a:pt x="1647318" y="2843786"/>
-                  </a:lnTo>
-                  <a:lnTo>
-                    <a:pt x="1575695" y="2850472"/>
-                  </a:lnTo>
-                  <a:lnTo>
-                    <a:pt x="1504073" y="2857089"/>
-                  </a:lnTo>
-                  <a:lnTo>
-                    <a:pt x="1432450" y="2863636"/>
-                  </a:lnTo>
-                  <a:lnTo>
-                    <a:pt x="1360827" y="2870114"/>
-                  </a:lnTo>
-                  <a:lnTo>
-                    <a:pt x="1289205" y="2876525"/>
-                  </a:lnTo>
-                  <a:lnTo>
-                    <a:pt x="1217582" y="2882870"/>
-                  </a:lnTo>
-                  <a:lnTo>
-                    <a:pt x="1145960" y="2889147"/>
-                  </a:lnTo>
-                  <a:lnTo>
-                    <a:pt x="1074337" y="2895359"/>
-                  </a:lnTo>
-                  <a:lnTo>
-                    <a:pt x="1002715" y="2901507"/>
-                  </a:lnTo>
-                  <a:lnTo>
-                    <a:pt x="931092" y="2907590"/>
-                  </a:lnTo>
-                  <a:lnTo>
-                    <a:pt x="859470" y="2913609"/>
-                  </a:lnTo>
-                  <a:lnTo>
-                    <a:pt x="787847" y="2919566"/>
-                  </a:lnTo>
-                  <a:lnTo>
-                    <a:pt x="716225" y="2925460"/>
-                  </a:lnTo>
-                  <a:lnTo>
-                    <a:pt x="644602" y="2931293"/>
-                  </a:lnTo>
-                  <a:lnTo>
-                    <a:pt x="572980" y="2937065"/>
-                  </a:lnTo>
-                  <a:lnTo>
-                    <a:pt x="501357" y="2942777"/>
-                  </a:lnTo>
-                  <a:lnTo>
-                    <a:pt x="429735" y="2948429"/>
-                  </a:lnTo>
-                  <a:lnTo>
-                    <a:pt x="358112" y="2954021"/>
-                  </a:lnTo>
-                  <a:lnTo>
-                    <a:pt x="286490" y="2959556"/>
-                  </a:lnTo>
-                  <a:lnTo>
-                    <a:pt x="214867" y="2965032"/>
-                  </a:lnTo>
-                  <a:lnTo>
-                    <a:pt x="143245" y="2970452"/>
-                  </a:lnTo>
-                  <a:lnTo>
-                    <a:pt x="71622" y="2975815"/>
-                  </a:lnTo>
-                  <a:lnTo>
-                    <a:pt x="0" y="2981121"/>
+                    <a:pt x="0" y="0"/>
+                  </a:lnTo>
+                  <a:lnTo>
+                    <a:pt x="0" y="0"/>
+                  </a:lnTo>
+                </a:path>
+              </a:pathLst>
+            </a:custGeom>
+            <a:ln w="13550" cap="flat">
+              <a:solidFill>
+                <a:srgbClr val="EBEBEB">
+                  <a:alpha val="100000"/>
+                </a:srgbClr>
+              </a:solidFill>
+              <a:prstDash val="solid"/>
+              <a:round/>
+            </a:ln>
+          </p:spPr>
+          <p:txBody>
+            <a:bodyPr/>
+            <a:lstStyle/>
+            <a:p/>
+          </p:txBody>
+        </p:sp>
+        <p:sp>
+          <p:nvSpPr>
+            <p:cNvPr id="21" name="pg21"/>
+            <p:cNvSpPr/>
+            <p:nvPr/>
+          </p:nvSpPr>
+          <p:spPr>
+            <a:xfrm>
+              <a:off x="1235312" y="2143092"/>
+              <a:ext cx="6964104" cy="1225799"/>
+            </a:xfrm>
+            <a:custGeom>
+              <a:avLst/>
+              <a:pathLst>
+                <a:path w="6964104" h="1225799">
+                  <a:moveTo>
+                    <a:pt x="1058129" y="0"/>
+                  </a:moveTo>
+                  <a:lnTo>
+                    <a:pt x="1125511" y="51872"/>
+                  </a:lnTo>
+                  <a:lnTo>
+                    <a:pt x="1195856" y="103696"/>
+                  </a:lnTo>
+                  <a:lnTo>
+                    <a:pt x="1266200" y="153291"/>
+                  </a:lnTo>
+                  <a:lnTo>
+                    <a:pt x="1336545" y="200755"/>
+                  </a:lnTo>
+                  <a:lnTo>
+                    <a:pt x="1406889" y="246177"/>
+                  </a:lnTo>
+                  <a:lnTo>
+                    <a:pt x="1477234" y="289647"/>
+                  </a:lnTo>
+                  <a:lnTo>
+                    <a:pt x="1547578" y="331247"/>
+                  </a:lnTo>
+                  <a:lnTo>
+                    <a:pt x="1617923" y="371059"/>
+                  </a:lnTo>
+                  <a:lnTo>
+                    <a:pt x="1688267" y="409159"/>
+                  </a:lnTo>
+                  <a:lnTo>
+                    <a:pt x="1758612" y="445622"/>
+                  </a:lnTo>
+                  <a:lnTo>
+                    <a:pt x="1828956" y="480516"/>
+                  </a:lnTo>
+                  <a:lnTo>
+                    <a:pt x="1899301" y="513910"/>
+                  </a:lnTo>
+                  <a:lnTo>
+                    <a:pt x="1969645" y="545868"/>
+                  </a:lnTo>
+                  <a:lnTo>
+                    <a:pt x="2039990" y="576452"/>
+                  </a:lnTo>
+                  <a:lnTo>
+                    <a:pt x="2110334" y="605722"/>
+                  </a:lnTo>
+                  <a:lnTo>
+                    <a:pt x="2180679" y="633732"/>
+                  </a:lnTo>
+                  <a:lnTo>
+                    <a:pt x="2251023" y="660539"/>
+                  </a:lnTo>
+                  <a:lnTo>
+                    <a:pt x="2321368" y="686193"/>
+                  </a:lnTo>
+                  <a:lnTo>
+                    <a:pt x="2391712" y="710744"/>
+                  </a:lnTo>
+                  <a:lnTo>
+                    <a:pt x="2462057" y="734239"/>
+                  </a:lnTo>
+                  <a:lnTo>
+                    <a:pt x="2532401" y="756724"/>
+                  </a:lnTo>
+                  <a:lnTo>
+                    <a:pt x="2602746" y="778242"/>
+                  </a:lnTo>
+                  <a:lnTo>
+                    <a:pt x="2673090" y="798835"/>
+                  </a:lnTo>
+                  <a:lnTo>
+                    <a:pt x="2743435" y="818543"/>
+                  </a:lnTo>
+                  <a:lnTo>
+                    <a:pt x="2813779" y="837404"/>
+                  </a:lnTo>
+                  <a:lnTo>
+                    <a:pt x="2884124" y="855453"/>
+                  </a:lnTo>
+                  <a:lnTo>
+                    <a:pt x="2954468" y="872726"/>
+                  </a:lnTo>
+                  <a:lnTo>
+                    <a:pt x="3024813" y="889257"/>
+                  </a:lnTo>
+                  <a:lnTo>
+                    <a:pt x="3095157" y="905077"/>
+                  </a:lnTo>
+                  <a:lnTo>
+                    <a:pt x="3165502" y="920217"/>
+                  </a:lnTo>
+                  <a:lnTo>
+                    <a:pt x="3235846" y="934706"/>
+                  </a:lnTo>
+                  <a:lnTo>
+                    <a:pt x="3306191" y="948572"/>
+                  </a:lnTo>
+                  <a:lnTo>
+                    <a:pt x="3376535" y="956910"/>
+                  </a:lnTo>
+                  <a:lnTo>
+                    <a:pt x="3446880" y="953740"/>
+                  </a:lnTo>
+                  <a:lnTo>
+                    <a:pt x="3517224" y="950536"/>
+                  </a:lnTo>
+                  <a:lnTo>
+                    <a:pt x="3587569" y="947298"/>
+                  </a:lnTo>
+                  <a:lnTo>
+                    <a:pt x="3657913" y="944026"/>
+                  </a:lnTo>
+                  <a:lnTo>
+                    <a:pt x="3728257" y="940720"/>
+                  </a:lnTo>
+                  <a:lnTo>
+                    <a:pt x="3798602" y="937378"/>
+                  </a:lnTo>
+                  <a:lnTo>
+                    <a:pt x="3868946" y="934002"/>
+                  </a:lnTo>
+                  <a:lnTo>
+                    <a:pt x="3939291" y="930589"/>
+                  </a:lnTo>
+                  <a:lnTo>
+                    <a:pt x="4009635" y="927141"/>
+                  </a:lnTo>
+                  <a:lnTo>
+                    <a:pt x="4079980" y="923656"/>
+                  </a:lnTo>
+                  <a:lnTo>
+                    <a:pt x="4150324" y="920134"/>
+                  </a:lnTo>
+                  <a:lnTo>
+                    <a:pt x="4220669" y="916576"/>
+                  </a:lnTo>
+                  <a:lnTo>
+                    <a:pt x="4291013" y="912979"/>
+                  </a:lnTo>
+                  <a:lnTo>
+                    <a:pt x="4361358" y="909345"/>
+                  </a:lnTo>
+                  <a:lnTo>
+                    <a:pt x="4431702" y="905672"/>
+                  </a:lnTo>
+                  <a:lnTo>
+                    <a:pt x="4502047" y="901961"/>
+                  </a:lnTo>
+                  <a:lnTo>
+                    <a:pt x="4572391" y="898210"/>
+                  </a:lnTo>
+                  <a:lnTo>
+                    <a:pt x="4642736" y="894420"/>
+                  </a:lnTo>
+                  <a:lnTo>
+                    <a:pt x="4713080" y="890590"/>
+                  </a:lnTo>
+                  <a:lnTo>
+                    <a:pt x="4783425" y="886719"/>
+                  </a:lnTo>
+                  <a:lnTo>
+                    <a:pt x="4853769" y="882808"/>
+                  </a:lnTo>
+                  <a:lnTo>
+                    <a:pt x="4924114" y="878855"/>
+                  </a:lnTo>
+                  <a:lnTo>
+                    <a:pt x="4994458" y="874860"/>
+                  </a:lnTo>
+                  <a:lnTo>
+                    <a:pt x="5064803" y="870823"/>
+                  </a:lnTo>
+                  <a:lnTo>
+                    <a:pt x="5135147" y="866744"/>
+                  </a:lnTo>
+                  <a:lnTo>
+                    <a:pt x="5205492" y="862622"/>
+                  </a:lnTo>
+                  <a:lnTo>
+                    <a:pt x="5275836" y="858456"/>
+                  </a:lnTo>
+                  <a:lnTo>
+                    <a:pt x="5346181" y="854246"/>
+                  </a:lnTo>
+                  <a:lnTo>
+                    <a:pt x="5416525" y="849991"/>
+                  </a:lnTo>
+                  <a:lnTo>
+                    <a:pt x="5486870" y="845692"/>
+                  </a:lnTo>
+                  <a:lnTo>
+                    <a:pt x="5557214" y="841347"/>
+                  </a:lnTo>
+                  <a:lnTo>
+                    <a:pt x="5627559" y="836956"/>
+                  </a:lnTo>
+                  <a:lnTo>
+                    <a:pt x="5697903" y="832520"/>
+                  </a:lnTo>
+                  <a:lnTo>
+                    <a:pt x="5768248" y="828036"/>
+                  </a:lnTo>
+                  <a:lnTo>
+                    <a:pt x="5838592" y="823505"/>
+                  </a:lnTo>
+                  <a:lnTo>
+                    <a:pt x="5908937" y="818926"/>
+                  </a:lnTo>
+                  <a:lnTo>
+                    <a:pt x="5979281" y="814298"/>
+                  </a:lnTo>
+                  <a:lnTo>
+                    <a:pt x="6049626" y="809622"/>
+                  </a:lnTo>
+                  <a:lnTo>
+                    <a:pt x="6119970" y="804897"/>
+                  </a:lnTo>
+                  <a:lnTo>
+                    <a:pt x="6190315" y="800121"/>
+                  </a:lnTo>
+                  <a:lnTo>
+                    <a:pt x="6260659" y="795295"/>
+                  </a:lnTo>
+                  <a:lnTo>
+                    <a:pt x="6331004" y="790418"/>
+                  </a:lnTo>
+                  <a:lnTo>
+                    <a:pt x="6401348" y="785490"/>
+                  </a:lnTo>
+                  <a:lnTo>
+                    <a:pt x="6471693" y="780510"/>
+                  </a:lnTo>
+                  <a:lnTo>
+                    <a:pt x="6542037" y="775477"/>
+                  </a:lnTo>
+                  <a:lnTo>
+                    <a:pt x="6612382" y="770391"/>
+                  </a:lnTo>
+                  <a:lnTo>
+                    <a:pt x="6682726" y="765251"/>
+                  </a:lnTo>
+                  <a:lnTo>
+                    <a:pt x="6753071" y="760057"/>
+                  </a:lnTo>
+                  <a:lnTo>
+                    <a:pt x="6823415" y="754808"/>
+                  </a:lnTo>
+                  <a:lnTo>
+                    <a:pt x="6893760" y="749504"/>
+                  </a:lnTo>
+                  <a:lnTo>
+                    <a:pt x="6964104" y="744144"/>
+                  </a:lnTo>
+                  <a:lnTo>
+                    <a:pt x="6964104" y="1225799"/>
+                  </a:lnTo>
+                  <a:lnTo>
+                    <a:pt x="6893760" y="1224389"/>
+                  </a:lnTo>
+                  <a:lnTo>
+                    <a:pt x="6823415" y="1222914"/>
+                  </a:lnTo>
+                  <a:lnTo>
+                    <a:pt x="6753071" y="1221374"/>
+                  </a:lnTo>
+                  <a:lnTo>
+                    <a:pt x="6682726" y="1219764"/>
+                  </a:lnTo>
+                  <a:lnTo>
+                    <a:pt x="6612382" y="1218082"/>
+                  </a:lnTo>
+                  <a:lnTo>
+                    <a:pt x="6542037" y="1216325"/>
+                  </a:lnTo>
+                  <a:lnTo>
+                    <a:pt x="6471693" y="1214488"/>
+                  </a:lnTo>
+                  <a:lnTo>
+                    <a:pt x="6401348" y="1212569"/>
+                  </a:lnTo>
+                  <a:lnTo>
+                    <a:pt x="6331004" y="1210564"/>
+                  </a:lnTo>
+                  <a:lnTo>
+                    <a:pt x="6260659" y="1208469"/>
+                  </a:lnTo>
+                  <a:lnTo>
+                    <a:pt x="6190315" y="1206279"/>
+                  </a:lnTo>
+                  <a:lnTo>
+                    <a:pt x="6119970" y="1203991"/>
+                  </a:lnTo>
+                  <a:lnTo>
+                    <a:pt x="6049626" y="1201601"/>
+                  </a:lnTo>
+                  <a:lnTo>
+                    <a:pt x="5979281" y="1199103"/>
+                  </a:lnTo>
+                  <a:lnTo>
+                    <a:pt x="5908937" y="1196493"/>
+                  </a:lnTo>
+                  <a:lnTo>
+                    <a:pt x="5838592" y="1193765"/>
+                  </a:lnTo>
+                  <a:lnTo>
+                    <a:pt x="5768248" y="1190915"/>
+                  </a:lnTo>
+                  <a:lnTo>
+                    <a:pt x="5697903" y="1187937"/>
+                  </a:lnTo>
+                  <a:lnTo>
+                    <a:pt x="5627559" y="1184825"/>
+                  </a:lnTo>
+                  <a:lnTo>
+                    <a:pt x="5557214" y="1181573"/>
+                  </a:lnTo>
+                  <a:lnTo>
+                    <a:pt x="5486870" y="1178176"/>
+                  </a:lnTo>
+                  <a:lnTo>
+                    <a:pt x="5416525" y="1174625"/>
+                  </a:lnTo>
+                  <a:lnTo>
+                    <a:pt x="5346181" y="1170915"/>
+                  </a:lnTo>
+                  <a:lnTo>
+                    <a:pt x="5275836" y="1167039"/>
+                  </a:lnTo>
+                  <a:lnTo>
+                    <a:pt x="5205492" y="1162988"/>
+                  </a:lnTo>
+                  <a:lnTo>
+                    <a:pt x="5135147" y="1158755"/>
+                  </a:lnTo>
+                  <a:lnTo>
+                    <a:pt x="5064803" y="1154332"/>
+                  </a:lnTo>
+                  <a:lnTo>
+                    <a:pt x="4994458" y="1149711"/>
+                  </a:lnTo>
+                  <a:lnTo>
+                    <a:pt x="4924114" y="1144881"/>
+                  </a:lnTo>
+                  <a:lnTo>
+                    <a:pt x="4853769" y="1139835"/>
+                  </a:lnTo>
+                  <a:lnTo>
+                    <a:pt x="4783425" y="1134562"/>
+                  </a:lnTo>
+                  <a:lnTo>
+                    <a:pt x="4713080" y="1129052"/>
+                  </a:lnTo>
+                  <a:lnTo>
+                    <a:pt x="4642736" y="1123295"/>
+                  </a:lnTo>
+                  <a:lnTo>
+                    <a:pt x="4572391" y="1117279"/>
+                  </a:lnTo>
+                  <a:lnTo>
+                    <a:pt x="4502047" y="1110992"/>
+                  </a:lnTo>
+                  <a:lnTo>
+                    <a:pt x="4431702" y="1104424"/>
+                  </a:lnTo>
+                  <a:lnTo>
+                    <a:pt x="4361358" y="1097560"/>
+                  </a:lnTo>
+                  <a:lnTo>
+                    <a:pt x="4291013" y="1090387"/>
+                  </a:lnTo>
+                  <a:lnTo>
+                    <a:pt x="4220669" y="1082893"/>
+                  </a:lnTo>
+                  <a:lnTo>
+                    <a:pt x="4150324" y="1075062"/>
+                  </a:lnTo>
+                  <a:lnTo>
+                    <a:pt x="4079980" y="1066879"/>
+                  </a:lnTo>
+                  <a:lnTo>
+                    <a:pt x="4009635" y="1058328"/>
+                  </a:lnTo>
+                  <a:lnTo>
+                    <a:pt x="3939291" y="1049393"/>
+                  </a:lnTo>
+                  <a:lnTo>
+                    <a:pt x="3868946" y="1040057"/>
+                  </a:lnTo>
+                  <a:lnTo>
+                    <a:pt x="3798602" y="1030301"/>
+                  </a:lnTo>
+                  <a:lnTo>
+                    <a:pt x="3728257" y="1020107"/>
+                  </a:lnTo>
+                  <a:lnTo>
+                    <a:pt x="3657913" y="1009455"/>
+                  </a:lnTo>
+                  <a:lnTo>
+                    <a:pt x="3587569" y="998324"/>
+                  </a:lnTo>
+                  <a:lnTo>
+                    <a:pt x="3517224" y="986694"/>
+                  </a:lnTo>
+                  <a:lnTo>
+                    <a:pt x="3446880" y="974541"/>
+                  </a:lnTo>
+                  <a:lnTo>
+                    <a:pt x="3376535" y="961841"/>
+                  </a:lnTo>
+                  <a:lnTo>
+                    <a:pt x="3306191" y="960048"/>
+                  </a:lnTo>
+                  <a:lnTo>
+                    <a:pt x="3235846" y="963152"/>
+                  </a:lnTo>
+                  <a:lnTo>
+                    <a:pt x="3165502" y="966225"/>
+                  </a:lnTo>
+                  <a:lnTo>
+                    <a:pt x="3095157" y="969265"/>
+                  </a:lnTo>
+                  <a:lnTo>
+                    <a:pt x="3024813" y="972273"/>
+                  </a:lnTo>
+                  <a:lnTo>
+                    <a:pt x="2954468" y="975250"/>
+                  </a:lnTo>
+                  <a:lnTo>
+                    <a:pt x="2884124" y="978195"/>
+                  </a:lnTo>
+                  <a:lnTo>
+                    <a:pt x="2813779" y="981110"/>
+                  </a:lnTo>
+                  <a:lnTo>
+                    <a:pt x="2743435" y="983995"/>
+                  </a:lnTo>
+                  <a:lnTo>
+                    <a:pt x="2673090" y="986849"/>
+                  </a:lnTo>
+                  <a:lnTo>
+                    <a:pt x="2602746" y="989674"/>
+                  </a:lnTo>
+                  <a:lnTo>
+                    <a:pt x="2532401" y="992469"/>
+                  </a:lnTo>
+                  <a:lnTo>
+                    <a:pt x="2462057" y="995235"/>
+                  </a:lnTo>
+                  <a:lnTo>
+                    <a:pt x="2391712" y="997972"/>
+                  </a:lnTo>
+                  <a:lnTo>
+                    <a:pt x="2321368" y="1000680"/>
+                  </a:lnTo>
+                  <a:lnTo>
+                    <a:pt x="2251023" y="1003360"/>
+                  </a:lnTo>
+                  <a:lnTo>
+                    <a:pt x="2180679" y="1006012"/>
+                  </a:lnTo>
+                  <a:lnTo>
+                    <a:pt x="2110334" y="1008637"/>
+                  </a:lnTo>
+                  <a:lnTo>
+                    <a:pt x="2039990" y="1011234"/>
+                  </a:lnTo>
+                  <a:lnTo>
+                    <a:pt x="1969645" y="1013803"/>
+                  </a:lnTo>
+                  <a:lnTo>
+                    <a:pt x="1899301" y="1016346"/>
+                  </a:lnTo>
+                  <a:lnTo>
+                    <a:pt x="1828956" y="1018863"/>
+                  </a:lnTo>
+                  <a:lnTo>
+                    <a:pt x="1758612" y="1021353"/>
+                  </a:lnTo>
+                  <a:lnTo>
+                    <a:pt x="1688267" y="1023817"/>
+                  </a:lnTo>
+                  <a:lnTo>
+                    <a:pt x="1617923" y="1026255"/>
+                  </a:lnTo>
+                  <a:lnTo>
+                    <a:pt x="1547578" y="1028668"/>
+                  </a:lnTo>
+                  <a:lnTo>
+                    <a:pt x="1477234" y="1031056"/>
+                  </a:lnTo>
+                  <a:lnTo>
+                    <a:pt x="1406889" y="1033418"/>
+                  </a:lnTo>
+                  <a:lnTo>
+                    <a:pt x="1336545" y="1035756"/>
+                  </a:lnTo>
+                  <a:lnTo>
+                    <a:pt x="1266200" y="1038070"/>
+                  </a:lnTo>
+                  <a:lnTo>
+                    <a:pt x="1195856" y="1040359"/>
+                  </a:lnTo>
+                  <a:lnTo>
+                    <a:pt x="1125511" y="1042625"/>
+                  </a:lnTo>
+                  <a:lnTo>
+                    <a:pt x="1055167" y="1044867"/>
+                  </a:lnTo>
+                  <a:lnTo>
+                    <a:pt x="984822" y="1047085"/>
+                  </a:lnTo>
+                  <a:lnTo>
+                    <a:pt x="914478" y="1049280"/>
+                  </a:lnTo>
+                  <a:lnTo>
+                    <a:pt x="844133" y="1051453"/>
+                  </a:lnTo>
+                  <a:lnTo>
+                    <a:pt x="773789" y="1053602"/>
+                  </a:lnTo>
+                  <a:lnTo>
+                    <a:pt x="703444" y="1055730"/>
+                  </a:lnTo>
+                  <a:lnTo>
+                    <a:pt x="633100" y="1057834"/>
+                  </a:lnTo>
+                  <a:lnTo>
+                    <a:pt x="562755" y="1059917"/>
+                  </a:lnTo>
+                  <a:lnTo>
+                    <a:pt x="492411" y="1061979"/>
+                  </a:lnTo>
+                  <a:lnTo>
+                    <a:pt x="422066" y="1064018"/>
+                  </a:lnTo>
+                  <a:lnTo>
+                    <a:pt x="351722" y="1066037"/>
+                  </a:lnTo>
+                  <a:lnTo>
+                    <a:pt x="281377" y="1068034"/>
+                  </a:lnTo>
+                  <a:lnTo>
+                    <a:pt x="211033" y="1070010"/>
+                  </a:lnTo>
+                  <a:lnTo>
+                    <a:pt x="140688" y="1071966"/>
+                  </a:lnTo>
+                  <a:lnTo>
+                    <a:pt x="70344" y="1073901"/>
+                  </a:lnTo>
+                  <a:lnTo>
+                    <a:pt x="0" y="1075816"/>
                   </a:lnTo>
                   <a:close/>
                 </a:path>
@@ -3539,598 +3574,273 @@
         </p:sp>
         <p:sp>
           <p:nvSpPr>
-            <p:cNvPr id="21" name="pl21"/>
-            <p:cNvSpPr/>
-            <p:nvPr/>
-          </p:nvSpPr>
-          <p:spPr>
-            <a:xfrm>
-              <a:off x="2249402" y="2073503"/>
-              <a:ext cx="6013276" cy="2651630"/>
-            </a:xfrm>
-            <a:custGeom>
-              <a:avLst/>
-              <a:pathLst>
-                <a:path w="6013276" h="2651630">
-                  <a:moveTo>
-                    <a:pt x="0" y="0"/>
-                  </a:moveTo>
-                  <a:lnTo>
-                    <a:pt x="68607" y="143739"/>
-                  </a:lnTo>
-                  <a:lnTo>
-                    <a:pt x="140229" y="287345"/>
-                  </a:lnTo>
-                  <a:lnTo>
-                    <a:pt x="211852" y="424776"/>
-                  </a:lnTo>
-                  <a:lnTo>
-                    <a:pt x="283474" y="556298"/>
-                  </a:lnTo>
-                  <a:lnTo>
-                    <a:pt x="355097" y="682165"/>
-                  </a:lnTo>
-                  <a:lnTo>
-                    <a:pt x="426719" y="802621"/>
-                  </a:lnTo>
-                  <a:lnTo>
-                    <a:pt x="498342" y="917897"/>
-                  </a:lnTo>
-                  <a:lnTo>
-                    <a:pt x="569964" y="1028218"/>
-                  </a:lnTo>
-                  <a:lnTo>
-                    <a:pt x="641587" y="1133795"/>
-                  </a:lnTo>
-                  <a:lnTo>
-                    <a:pt x="713209" y="1234832"/>
-                  </a:lnTo>
-                  <a:lnTo>
-                    <a:pt x="784832" y="1331525"/>
-                  </a:lnTo>
-                  <a:lnTo>
-                    <a:pt x="856454" y="1424061"/>
-                  </a:lnTo>
-                  <a:lnTo>
-                    <a:pt x="928077" y="1512619"/>
-                  </a:lnTo>
-                  <a:lnTo>
-                    <a:pt x="999699" y="1597369"/>
-                  </a:lnTo>
-                  <a:lnTo>
-                    <a:pt x="1071322" y="1678474"/>
-                  </a:lnTo>
-                  <a:lnTo>
-                    <a:pt x="1142944" y="1756093"/>
-                  </a:lnTo>
-                  <a:lnTo>
-                    <a:pt x="1214567" y="1830375"/>
-                  </a:lnTo>
-                  <a:lnTo>
-                    <a:pt x="1286189" y="1901462"/>
-                  </a:lnTo>
-                  <a:lnTo>
-                    <a:pt x="1357812" y="1969494"/>
-                  </a:lnTo>
-                  <a:lnTo>
-                    <a:pt x="1429435" y="2034600"/>
-                  </a:lnTo>
-                  <a:lnTo>
-                    <a:pt x="1501057" y="2096907"/>
-                  </a:lnTo>
-                  <a:lnTo>
-                    <a:pt x="1572680" y="2156535"/>
-                  </a:lnTo>
-                  <a:lnTo>
-                    <a:pt x="1644302" y="2213599"/>
-                  </a:lnTo>
-                  <a:lnTo>
-                    <a:pt x="1715925" y="2268210"/>
-                  </a:lnTo>
-                  <a:lnTo>
-                    <a:pt x="1787547" y="2320472"/>
-                  </a:lnTo>
-                  <a:lnTo>
-                    <a:pt x="1859170" y="2370488"/>
-                  </a:lnTo>
-                  <a:lnTo>
-                    <a:pt x="1930792" y="2418353"/>
-                  </a:lnTo>
-                  <a:lnTo>
-                    <a:pt x="2002415" y="2464160"/>
-                  </a:lnTo>
-                  <a:lnTo>
-                    <a:pt x="2074037" y="2507998"/>
-                  </a:lnTo>
-                  <a:lnTo>
-                    <a:pt x="2145660" y="2549951"/>
-                  </a:lnTo>
-                  <a:lnTo>
-                    <a:pt x="2217282" y="2590100"/>
-                  </a:lnTo>
-                  <a:lnTo>
-                    <a:pt x="2288905" y="2628523"/>
-                  </a:lnTo>
-                  <a:lnTo>
-                    <a:pt x="2360527" y="2651630"/>
-                  </a:lnTo>
-                  <a:lnTo>
-                    <a:pt x="2432150" y="2642844"/>
-                  </a:lnTo>
-                  <a:lnTo>
-                    <a:pt x="2503772" y="2633966"/>
-                  </a:lnTo>
-                  <a:lnTo>
-                    <a:pt x="2575395" y="2624994"/>
-                  </a:lnTo>
-                  <a:lnTo>
-                    <a:pt x="2647017" y="2615927"/>
-                  </a:lnTo>
-                  <a:lnTo>
-                    <a:pt x="2718640" y="2606765"/>
-                  </a:lnTo>
-                  <a:lnTo>
-                    <a:pt x="2790263" y="2597505"/>
-                  </a:lnTo>
-                  <a:lnTo>
-                    <a:pt x="2861885" y="2588149"/>
-                  </a:lnTo>
-                  <a:lnTo>
-                    <a:pt x="2933508" y="2578693"/>
-                  </a:lnTo>
-                  <a:lnTo>
-                    <a:pt x="3005130" y="2569137"/>
-                  </a:lnTo>
-                  <a:lnTo>
-                    <a:pt x="3076753" y="2559481"/>
-                  </a:lnTo>
-                  <a:lnTo>
-                    <a:pt x="3148375" y="2549722"/>
-                  </a:lnTo>
-                  <a:lnTo>
-                    <a:pt x="3219998" y="2539861"/>
-                  </a:lnTo>
-                  <a:lnTo>
-                    <a:pt x="3291620" y="2529895"/>
-                  </a:lnTo>
-                  <a:lnTo>
-                    <a:pt x="3363243" y="2519825"/>
-                  </a:lnTo>
-                  <a:lnTo>
-                    <a:pt x="3434865" y="2509647"/>
-                  </a:lnTo>
-                  <a:lnTo>
-                    <a:pt x="3506488" y="2499363"/>
-                  </a:lnTo>
-                  <a:lnTo>
-                    <a:pt x="3578110" y="2488970"/>
-                  </a:lnTo>
-                  <a:lnTo>
-                    <a:pt x="3649733" y="2478467"/>
-                  </a:lnTo>
-                  <a:lnTo>
-                    <a:pt x="3721355" y="2467853"/>
-                  </a:lnTo>
-                  <a:lnTo>
-                    <a:pt x="3792978" y="2457127"/>
-                  </a:lnTo>
-                  <a:lnTo>
-                    <a:pt x="3864600" y="2446288"/>
-                  </a:lnTo>
-                  <a:lnTo>
-                    <a:pt x="3936223" y="2435335"/>
-                  </a:lnTo>
-                  <a:lnTo>
-                    <a:pt x="4007845" y="2424266"/>
-                  </a:lnTo>
-                  <a:lnTo>
-                    <a:pt x="4079468" y="2413080"/>
-                  </a:lnTo>
-                  <a:lnTo>
-                    <a:pt x="4151091" y="2401776"/>
-                  </a:lnTo>
-                  <a:lnTo>
-                    <a:pt x="4222713" y="2390352"/>
-                  </a:lnTo>
-                  <a:lnTo>
-                    <a:pt x="4294336" y="2378808"/>
-                  </a:lnTo>
-                  <a:lnTo>
-                    <a:pt x="4365958" y="2367142"/>
-                  </a:lnTo>
-                  <a:lnTo>
-                    <a:pt x="4437581" y="2355353"/>
-                  </a:lnTo>
-                  <a:lnTo>
-                    <a:pt x="4509203" y="2343439"/>
-                  </a:lnTo>
-                  <a:lnTo>
-                    <a:pt x="4580826" y="2331400"/>
-                  </a:lnTo>
-                  <a:lnTo>
-                    <a:pt x="4652448" y="2319233"/>
-                  </a:lnTo>
-                  <a:lnTo>
-                    <a:pt x="4724071" y="2306938"/>
-                  </a:lnTo>
-                  <a:lnTo>
-                    <a:pt x="4795693" y="2294514"/>
-                  </a:lnTo>
-                  <a:lnTo>
-                    <a:pt x="4867316" y="2281958"/>
-                  </a:lnTo>
-                  <a:lnTo>
-                    <a:pt x="4938938" y="2269269"/>
-                  </a:lnTo>
-                  <a:lnTo>
-                    <a:pt x="5010561" y="2256447"/>
-                  </a:lnTo>
-                  <a:lnTo>
-                    <a:pt x="5082183" y="2243489"/>
-                  </a:lnTo>
-                  <a:lnTo>
-                    <a:pt x="5153806" y="2230394"/>
-                  </a:lnTo>
-                  <a:lnTo>
-                    <a:pt x="5225428" y="2217161"/>
-                  </a:lnTo>
-                  <a:lnTo>
-                    <a:pt x="5297051" y="2203789"/>
-                  </a:lnTo>
-                  <a:lnTo>
-                    <a:pt x="5368673" y="2190275"/>
-                  </a:lnTo>
-                  <a:lnTo>
-                    <a:pt x="5440296" y="2176618"/>
-                  </a:lnTo>
-                  <a:lnTo>
-                    <a:pt x="5511919" y="2162818"/>
-                  </a:lnTo>
-                  <a:lnTo>
-                    <a:pt x="5583541" y="2148871"/>
-                  </a:lnTo>
-                  <a:lnTo>
-                    <a:pt x="5655164" y="2134778"/>
-                  </a:lnTo>
-                  <a:lnTo>
-                    <a:pt x="5726786" y="2120535"/>
-                  </a:lnTo>
-                  <a:lnTo>
-                    <a:pt x="5798409" y="2106143"/>
-                  </a:lnTo>
-                  <a:lnTo>
-                    <a:pt x="5870031" y="2091598"/>
-                  </a:lnTo>
-                  <a:lnTo>
-                    <a:pt x="5941654" y="2076899"/>
-                  </a:lnTo>
-                  <a:lnTo>
-                    <a:pt x="6013276" y="2062046"/>
-                  </a:lnTo>
-                </a:path>
-              </a:pathLst>
-            </a:custGeom>
-          </p:spPr>
-          <p:txBody>
-            <a:bodyPr/>
-            <a:lstStyle/>
-            <a:p/>
-          </p:txBody>
-        </p:sp>
-        <p:sp>
-          <p:nvSpPr>
             <p:cNvPr id="22" name="pl22"/>
             <p:cNvSpPr/>
             <p:nvPr/>
           </p:nvSpPr>
           <p:spPr>
             <a:xfrm>
-              <a:off x="1172049" y="4733826"/>
-              <a:ext cx="7090630" cy="736405"/>
+              <a:off x="2293441" y="2143092"/>
+              <a:ext cx="5905975" cy="956910"/>
             </a:xfrm>
             <a:custGeom>
               <a:avLst/>
               <a:pathLst>
-                <a:path w="7090630" h="736405">
+                <a:path w="5905975" h="956910">
                   <a:moveTo>
-                    <a:pt x="7090630" y="736405"/>
+                    <a:pt x="0" y="0"/>
                   </a:moveTo>
                   <a:lnTo>
-                    <a:pt x="7019007" y="732496"/>
-                  </a:lnTo>
-                  <a:lnTo>
-                    <a:pt x="6947385" y="728411"/>
-                  </a:lnTo>
-                  <a:lnTo>
-                    <a:pt x="6875762" y="724142"/>
-                  </a:lnTo>
-                  <a:lnTo>
-                    <a:pt x="6804139" y="719682"/>
-                  </a:lnTo>
-                  <a:lnTo>
-                    <a:pt x="6732517" y="715021"/>
-                  </a:lnTo>
-                  <a:lnTo>
-                    <a:pt x="6660894" y="710151"/>
-                  </a:lnTo>
-                  <a:lnTo>
-                    <a:pt x="6589272" y="705062"/>
-                  </a:lnTo>
-                  <a:lnTo>
-                    <a:pt x="6517649" y="699744"/>
-                  </a:lnTo>
-                  <a:lnTo>
-                    <a:pt x="6446027" y="694188"/>
-                  </a:lnTo>
-                  <a:lnTo>
-                    <a:pt x="6374404" y="688382"/>
-                  </a:lnTo>
-                  <a:lnTo>
-                    <a:pt x="6302782" y="682315"/>
-                  </a:lnTo>
-                  <a:lnTo>
-                    <a:pt x="6231159" y="675975"/>
-                  </a:lnTo>
-                  <a:lnTo>
-                    <a:pt x="6159537" y="669351"/>
-                  </a:lnTo>
-                  <a:lnTo>
-                    <a:pt x="6087914" y="662429"/>
-                  </a:lnTo>
-                  <a:lnTo>
-                    <a:pt x="6016292" y="655196"/>
-                  </a:lnTo>
-                  <a:lnTo>
-                    <a:pt x="5944669" y="647638"/>
-                  </a:lnTo>
-                  <a:lnTo>
-                    <a:pt x="5873047" y="639740"/>
-                  </a:lnTo>
-                  <a:lnTo>
-                    <a:pt x="5801424" y="631488"/>
-                  </a:lnTo>
-                  <a:lnTo>
-                    <a:pt x="5729802" y="622865"/>
-                  </a:lnTo>
-                  <a:lnTo>
-                    <a:pt x="5658179" y="613854"/>
-                  </a:lnTo>
-                  <a:lnTo>
-                    <a:pt x="5586557" y="604439"/>
-                  </a:lnTo>
-                  <a:lnTo>
-                    <a:pt x="5514934" y="594600"/>
-                  </a:lnTo>
-                  <a:lnTo>
-                    <a:pt x="5443311" y="584320"/>
-                  </a:lnTo>
-                  <a:lnTo>
-                    <a:pt x="5371689" y="573578"/>
-                  </a:lnTo>
-                  <a:lnTo>
-                    <a:pt x="5300066" y="562353"/>
-                  </a:lnTo>
-                  <a:lnTo>
-                    <a:pt x="5228444" y="550624"/>
-                  </a:lnTo>
-                  <a:lnTo>
-                    <a:pt x="5156821" y="538368"/>
-                  </a:lnTo>
-                  <a:lnTo>
-                    <a:pt x="5085199" y="525561"/>
-                  </a:lnTo>
-                  <a:lnTo>
-                    <a:pt x="5013576" y="512179"/>
-                  </a:lnTo>
-                  <a:lnTo>
-                    <a:pt x="4941954" y="498196"/>
-                  </a:lnTo>
-                  <a:lnTo>
-                    <a:pt x="4870331" y="483584"/>
-                  </a:lnTo>
-                  <a:lnTo>
-                    <a:pt x="4798709" y="468316"/>
-                  </a:lnTo>
-                  <a:lnTo>
-                    <a:pt x="4727086" y="452362"/>
-                  </a:lnTo>
-                  <a:lnTo>
-                    <a:pt x="4655464" y="435691"/>
-                  </a:lnTo>
-                  <a:lnTo>
-                    <a:pt x="4583841" y="418272"/>
-                  </a:lnTo>
-                  <a:lnTo>
-                    <a:pt x="4512219" y="400069"/>
-                  </a:lnTo>
-                  <a:lnTo>
-                    <a:pt x="4440596" y="381049"/>
-                  </a:lnTo>
-                  <a:lnTo>
-                    <a:pt x="4368974" y="361175"/>
-                  </a:lnTo>
-                  <a:lnTo>
-                    <a:pt x="4297351" y="340407"/>
-                  </a:lnTo>
-                  <a:lnTo>
-                    <a:pt x="4225729" y="318707"/>
-                  </a:lnTo>
-                  <a:lnTo>
-                    <a:pt x="4154106" y="296031"/>
-                  </a:lnTo>
-                  <a:lnTo>
-                    <a:pt x="4082483" y="272337"/>
-                  </a:lnTo>
-                  <a:lnTo>
-                    <a:pt x="4010861" y="247578"/>
-                  </a:lnTo>
-                  <a:lnTo>
-                    <a:pt x="3939238" y="221707"/>
-                  </a:lnTo>
-                  <a:lnTo>
-                    <a:pt x="3867616" y="194674"/>
-                  </a:lnTo>
-                  <a:lnTo>
-                    <a:pt x="3795993" y="166426"/>
-                  </a:lnTo>
-                  <a:lnTo>
-                    <a:pt x="3724371" y="136909"/>
-                  </a:lnTo>
-                  <a:lnTo>
-                    <a:pt x="3652748" y="106065"/>
-                  </a:lnTo>
-                  <a:lnTo>
-                    <a:pt x="3581126" y="73837"/>
-                  </a:lnTo>
-                  <a:lnTo>
-                    <a:pt x="3509503" y="40160"/>
-                  </a:lnTo>
-                  <a:lnTo>
-                    <a:pt x="3437881" y="4970"/>
-                  </a:lnTo>
-                  <a:lnTo>
-                    <a:pt x="3366258" y="0"/>
-                  </a:lnTo>
-                  <a:lnTo>
-                    <a:pt x="3294636" y="8602"/>
-                  </a:lnTo>
-                  <a:lnTo>
-                    <a:pt x="3223013" y="17115"/>
-                  </a:lnTo>
-                  <a:lnTo>
-                    <a:pt x="3151391" y="25539"/>
-                  </a:lnTo>
-                  <a:lnTo>
-                    <a:pt x="3079768" y="33876"/>
-                  </a:lnTo>
-                  <a:lnTo>
-                    <a:pt x="3008146" y="42124"/>
-                  </a:lnTo>
-                  <a:lnTo>
-                    <a:pt x="2936523" y="50287"/>
-                  </a:lnTo>
-                  <a:lnTo>
-                    <a:pt x="2864901" y="58365"/>
-                  </a:lnTo>
-                  <a:lnTo>
-                    <a:pt x="2793278" y="66358"/>
-                  </a:lnTo>
-                  <a:lnTo>
-                    <a:pt x="2721655" y="74267"/>
-                  </a:lnTo>
-                  <a:lnTo>
-                    <a:pt x="2650033" y="82094"/>
-                  </a:lnTo>
-                  <a:lnTo>
-                    <a:pt x="2578410" y="89840"/>
-                  </a:lnTo>
-                  <a:lnTo>
-                    <a:pt x="2506788" y="97504"/>
-                  </a:lnTo>
-                  <a:lnTo>
-                    <a:pt x="2435165" y="105088"/>
-                  </a:lnTo>
-                  <a:lnTo>
-                    <a:pt x="2363543" y="112593"/>
-                  </a:lnTo>
-                  <a:lnTo>
-                    <a:pt x="2291920" y="120019"/>
-                  </a:lnTo>
-                  <a:lnTo>
-                    <a:pt x="2220298" y="127368"/>
-                  </a:lnTo>
-                  <a:lnTo>
-                    <a:pt x="2148675" y="134641"/>
-                  </a:lnTo>
-                  <a:lnTo>
-                    <a:pt x="2077053" y="141837"/>
-                  </a:lnTo>
-                  <a:lnTo>
-                    <a:pt x="2005430" y="148958"/>
-                  </a:lnTo>
-                  <a:lnTo>
-                    <a:pt x="1933808" y="156004"/>
-                  </a:lnTo>
-                  <a:lnTo>
-                    <a:pt x="1862185" y="162977"/>
-                  </a:lnTo>
-                  <a:lnTo>
-                    <a:pt x="1790563" y="169878"/>
-                  </a:lnTo>
-                  <a:lnTo>
-                    <a:pt x="1718940" y="176706"/>
-                  </a:lnTo>
-                  <a:lnTo>
-                    <a:pt x="1647318" y="183462"/>
-                  </a:lnTo>
-                  <a:lnTo>
-                    <a:pt x="1575695" y="190148"/>
-                  </a:lnTo>
-                  <a:lnTo>
-                    <a:pt x="1504073" y="196765"/>
-                  </a:lnTo>
-                  <a:lnTo>
-                    <a:pt x="1432450" y="203312"/>
-                  </a:lnTo>
-                  <a:lnTo>
-                    <a:pt x="1360827" y="209791"/>
-                  </a:lnTo>
-                  <a:lnTo>
-                    <a:pt x="1289205" y="216202"/>
-                  </a:lnTo>
-                  <a:lnTo>
-                    <a:pt x="1217582" y="222546"/>
-                  </a:lnTo>
-                  <a:lnTo>
-                    <a:pt x="1145960" y="228823"/>
-                  </a:lnTo>
-                  <a:lnTo>
-                    <a:pt x="1074337" y="235036"/>
-                  </a:lnTo>
-                  <a:lnTo>
-                    <a:pt x="1002715" y="241183"/>
-                  </a:lnTo>
-                  <a:lnTo>
-                    <a:pt x="931092" y="247266"/>
-                  </a:lnTo>
-                  <a:lnTo>
-                    <a:pt x="859470" y="253286"/>
-                  </a:lnTo>
-                  <a:lnTo>
-                    <a:pt x="787847" y="259242"/>
-                  </a:lnTo>
-                  <a:lnTo>
-                    <a:pt x="716225" y="265137"/>
-                  </a:lnTo>
-                  <a:lnTo>
-                    <a:pt x="644602" y="270969"/>
-                  </a:lnTo>
-                  <a:lnTo>
-                    <a:pt x="572980" y="276741"/>
-                  </a:lnTo>
-                  <a:lnTo>
-                    <a:pt x="501357" y="282453"/>
-                  </a:lnTo>
-                  <a:lnTo>
-                    <a:pt x="429735" y="288105"/>
-                  </a:lnTo>
-                  <a:lnTo>
-                    <a:pt x="358112" y="293698"/>
-                  </a:lnTo>
-                  <a:lnTo>
-                    <a:pt x="286490" y="299232"/>
-                  </a:lnTo>
-                  <a:lnTo>
-                    <a:pt x="214867" y="304709"/>
-                  </a:lnTo>
-                  <a:lnTo>
-                    <a:pt x="143245" y="310128"/>
-                  </a:lnTo>
-                  <a:lnTo>
-                    <a:pt x="71622" y="315491"/>
-                  </a:lnTo>
-                  <a:lnTo>
-                    <a:pt x="0" y="320797"/>
+                    <a:pt x="67382" y="51872"/>
+                  </a:lnTo>
+                  <a:lnTo>
+                    <a:pt x="137727" y="103696"/>
+                  </a:lnTo>
+                  <a:lnTo>
+                    <a:pt x="208071" y="153291"/>
+                  </a:lnTo>
+                  <a:lnTo>
+                    <a:pt x="278416" y="200755"/>
+                  </a:lnTo>
+                  <a:lnTo>
+                    <a:pt x="348760" y="246177"/>
+                  </a:lnTo>
+                  <a:lnTo>
+                    <a:pt x="419105" y="289647"/>
+                  </a:lnTo>
+                  <a:lnTo>
+                    <a:pt x="489449" y="331247"/>
+                  </a:lnTo>
+                  <a:lnTo>
+                    <a:pt x="559794" y="371059"/>
+                  </a:lnTo>
+                  <a:lnTo>
+                    <a:pt x="630138" y="409159"/>
+                  </a:lnTo>
+                  <a:lnTo>
+                    <a:pt x="700483" y="445622"/>
+                  </a:lnTo>
+                  <a:lnTo>
+                    <a:pt x="770827" y="480516"/>
+                  </a:lnTo>
+                  <a:lnTo>
+                    <a:pt x="841172" y="513910"/>
+                  </a:lnTo>
+                  <a:lnTo>
+                    <a:pt x="911516" y="545868"/>
+                  </a:lnTo>
+                  <a:lnTo>
+                    <a:pt x="981861" y="576452"/>
+                  </a:lnTo>
+                  <a:lnTo>
+                    <a:pt x="1052205" y="605722"/>
+                  </a:lnTo>
+                  <a:lnTo>
+                    <a:pt x="1122550" y="633732"/>
+                  </a:lnTo>
+                  <a:lnTo>
+                    <a:pt x="1192894" y="660539"/>
+                  </a:lnTo>
+                  <a:lnTo>
+                    <a:pt x="1263239" y="686193"/>
+                  </a:lnTo>
+                  <a:lnTo>
+                    <a:pt x="1333583" y="710744"/>
+                  </a:lnTo>
+                  <a:lnTo>
+                    <a:pt x="1403928" y="734239"/>
+                  </a:lnTo>
+                  <a:lnTo>
+                    <a:pt x="1474272" y="756724"/>
+                  </a:lnTo>
+                  <a:lnTo>
+                    <a:pt x="1544617" y="778242"/>
+                  </a:lnTo>
+                  <a:lnTo>
+                    <a:pt x="1614961" y="798835"/>
+                  </a:lnTo>
+                  <a:lnTo>
+                    <a:pt x="1685306" y="818543"/>
+                  </a:lnTo>
+                  <a:lnTo>
+                    <a:pt x="1755650" y="837404"/>
+                  </a:lnTo>
+                  <a:lnTo>
+                    <a:pt x="1825995" y="855453"/>
+                  </a:lnTo>
+                  <a:lnTo>
+                    <a:pt x="1896339" y="872726"/>
+                  </a:lnTo>
+                  <a:lnTo>
+                    <a:pt x="1966684" y="889257"/>
+                  </a:lnTo>
+                  <a:lnTo>
+                    <a:pt x="2037028" y="905077"/>
+                  </a:lnTo>
+                  <a:lnTo>
+                    <a:pt x="2107373" y="920217"/>
+                  </a:lnTo>
+                  <a:lnTo>
+                    <a:pt x="2177717" y="934706"/>
+                  </a:lnTo>
+                  <a:lnTo>
+                    <a:pt x="2248062" y="948572"/>
+                  </a:lnTo>
+                  <a:lnTo>
+                    <a:pt x="2318406" y="956910"/>
+                  </a:lnTo>
+                  <a:lnTo>
+                    <a:pt x="2388750" y="953740"/>
+                  </a:lnTo>
+                  <a:lnTo>
+                    <a:pt x="2459095" y="950536"/>
+                  </a:lnTo>
+                  <a:lnTo>
+                    <a:pt x="2529439" y="947298"/>
+                  </a:lnTo>
+                  <a:lnTo>
+                    <a:pt x="2599784" y="944026"/>
+                  </a:lnTo>
+                  <a:lnTo>
+                    <a:pt x="2670128" y="940720"/>
+                  </a:lnTo>
+                  <a:lnTo>
+                    <a:pt x="2740473" y="937378"/>
+                  </a:lnTo>
+                  <a:lnTo>
+                    <a:pt x="2810817" y="934002"/>
+                  </a:lnTo>
+                  <a:lnTo>
+                    <a:pt x="2881162" y="930589"/>
+                  </a:lnTo>
+                  <a:lnTo>
+                    <a:pt x="2951506" y="927141"/>
+                  </a:lnTo>
+                  <a:lnTo>
+                    <a:pt x="3021851" y="923656"/>
+                  </a:lnTo>
+                  <a:lnTo>
+                    <a:pt x="3092195" y="920134"/>
+                  </a:lnTo>
+                  <a:lnTo>
+                    <a:pt x="3162540" y="916576"/>
+                  </a:lnTo>
+                  <a:lnTo>
+                    <a:pt x="3232884" y="912979"/>
+                  </a:lnTo>
+                  <a:lnTo>
+                    <a:pt x="3303229" y="909345"/>
+                  </a:lnTo>
+                  <a:lnTo>
+                    <a:pt x="3373573" y="905672"/>
+                  </a:lnTo>
+                  <a:lnTo>
+                    <a:pt x="3443918" y="901961"/>
+                  </a:lnTo>
+                  <a:lnTo>
+                    <a:pt x="3514262" y="898210"/>
+                  </a:lnTo>
+                  <a:lnTo>
+                    <a:pt x="3584607" y="894420"/>
+                  </a:lnTo>
+                  <a:lnTo>
+                    <a:pt x="3654951" y="890590"/>
+                  </a:lnTo>
+                  <a:lnTo>
+                    <a:pt x="3725296" y="886719"/>
+                  </a:lnTo>
+                  <a:lnTo>
+                    <a:pt x="3795640" y="882808"/>
+                  </a:lnTo>
+                  <a:lnTo>
+                    <a:pt x="3865985" y="878855"/>
+                  </a:lnTo>
+                  <a:lnTo>
+                    <a:pt x="3936329" y="874860"/>
+                  </a:lnTo>
+                  <a:lnTo>
+                    <a:pt x="4006674" y="870823"/>
+                  </a:lnTo>
+                  <a:lnTo>
+                    <a:pt x="4077018" y="866744"/>
+                  </a:lnTo>
+                  <a:lnTo>
+                    <a:pt x="4147363" y="862622"/>
+                  </a:lnTo>
+                  <a:lnTo>
+                    <a:pt x="4217707" y="858456"/>
+                  </a:lnTo>
+                  <a:lnTo>
+                    <a:pt x="4288052" y="854246"/>
+                  </a:lnTo>
+                  <a:lnTo>
+                    <a:pt x="4358396" y="849991"/>
+                  </a:lnTo>
+                  <a:lnTo>
+                    <a:pt x="4428741" y="845692"/>
+                  </a:lnTo>
+                  <a:lnTo>
+                    <a:pt x="4499085" y="841347"/>
+                  </a:lnTo>
+                  <a:lnTo>
+                    <a:pt x="4569430" y="836956"/>
+                  </a:lnTo>
+                  <a:lnTo>
+                    <a:pt x="4639774" y="832520"/>
+                  </a:lnTo>
+                  <a:lnTo>
+                    <a:pt x="4710119" y="828036"/>
+                  </a:lnTo>
+                  <a:lnTo>
+                    <a:pt x="4780463" y="823505"/>
+                  </a:lnTo>
+                  <a:lnTo>
+                    <a:pt x="4850808" y="818926"/>
+                  </a:lnTo>
+                  <a:lnTo>
+                    <a:pt x="4921152" y="814298"/>
+                  </a:lnTo>
+                  <a:lnTo>
+                    <a:pt x="4991497" y="809622"/>
+                  </a:lnTo>
+                  <a:lnTo>
+                    <a:pt x="5061841" y="804897"/>
+                  </a:lnTo>
+                  <a:lnTo>
+                    <a:pt x="5132186" y="800121"/>
+                  </a:lnTo>
+                  <a:lnTo>
+                    <a:pt x="5202530" y="795295"/>
+                  </a:lnTo>
+                  <a:lnTo>
+                    <a:pt x="5272875" y="790418"/>
+                  </a:lnTo>
+                  <a:lnTo>
+                    <a:pt x="5343219" y="785490"/>
+                  </a:lnTo>
+                  <a:lnTo>
+                    <a:pt x="5413564" y="780510"/>
+                  </a:lnTo>
+                  <a:lnTo>
+                    <a:pt x="5483908" y="775477"/>
+                  </a:lnTo>
+                  <a:lnTo>
+                    <a:pt x="5554253" y="770391"/>
+                  </a:lnTo>
+                  <a:lnTo>
+                    <a:pt x="5624597" y="765251"/>
+                  </a:lnTo>
+                  <a:lnTo>
+                    <a:pt x="5694942" y="760057"/>
+                  </a:lnTo>
+                  <a:lnTo>
+                    <a:pt x="5765286" y="754808"/>
+                  </a:lnTo>
+                  <a:lnTo>
+                    <a:pt x="5835631" y="749504"/>
+                  </a:lnTo>
+                  <a:lnTo>
+                    <a:pt x="5905975" y="744144"/>
                   </a:lnTo>
                 </a:path>
               </a:pathLst>
@@ -4150,312 +3860,637 @@
           </p:nvSpPr>
           <p:spPr>
             <a:xfrm>
-              <a:off x="1172049" y="3715696"/>
-              <a:ext cx="7090630" cy="1489825"/>
+              <a:off x="1235312" y="3103140"/>
+              <a:ext cx="6964104" cy="265751"/>
             </a:xfrm>
             <a:custGeom>
               <a:avLst/>
               <a:pathLst>
-                <a:path w="7090630" h="1489825">
+                <a:path w="6964104" h="265751">
+                  <a:moveTo>
+                    <a:pt x="6964104" y="265751"/>
+                  </a:moveTo>
+                  <a:lnTo>
+                    <a:pt x="6893760" y="264340"/>
+                  </a:lnTo>
+                  <a:lnTo>
+                    <a:pt x="6823415" y="262866"/>
+                  </a:lnTo>
+                  <a:lnTo>
+                    <a:pt x="6753071" y="261326"/>
+                  </a:lnTo>
+                  <a:lnTo>
+                    <a:pt x="6682726" y="259716"/>
+                  </a:lnTo>
+                  <a:lnTo>
+                    <a:pt x="6612382" y="258034"/>
+                  </a:lnTo>
+                  <a:lnTo>
+                    <a:pt x="6542037" y="256276"/>
+                  </a:lnTo>
+                  <a:lnTo>
+                    <a:pt x="6471693" y="254440"/>
+                  </a:lnTo>
+                  <a:lnTo>
+                    <a:pt x="6401348" y="252521"/>
+                  </a:lnTo>
+                  <a:lnTo>
+                    <a:pt x="6331004" y="250516"/>
+                  </a:lnTo>
+                  <a:lnTo>
+                    <a:pt x="6260659" y="248420"/>
+                  </a:lnTo>
+                  <a:lnTo>
+                    <a:pt x="6190315" y="246231"/>
+                  </a:lnTo>
+                  <a:lnTo>
+                    <a:pt x="6119970" y="243943"/>
+                  </a:lnTo>
+                  <a:lnTo>
+                    <a:pt x="6049626" y="241553"/>
+                  </a:lnTo>
+                  <a:lnTo>
+                    <a:pt x="5979281" y="239055"/>
+                  </a:lnTo>
+                  <a:lnTo>
+                    <a:pt x="5908937" y="236444"/>
+                  </a:lnTo>
+                  <a:lnTo>
+                    <a:pt x="5838592" y="233717"/>
+                  </a:lnTo>
+                  <a:lnTo>
+                    <a:pt x="5768248" y="230867"/>
+                  </a:lnTo>
+                  <a:lnTo>
+                    <a:pt x="5697903" y="227889"/>
+                  </a:lnTo>
+                  <a:lnTo>
+                    <a:pt x="5627559" y="224777"/>
+                  </a:lnTo>
+                  <a:lnTo>
+                    <a:pt x="5557214" y="221525"/>
+                  </a:lnTo>
+                  <a:lnTo>
+                    <a:pt x="5486870" y="218127"/>
+                  </a:lnTo>
+                  <a:lnTo>
+                    <a:pt x="5416525" y="214577"/>
+                  </a:lnTo>
+                  <a:lnTo>
+                    <a:pt x="5346181" y="210867"/>
+                  </a:lnTo>
+                  <a:lnTo>
+                    <a:pt x="5275836" y="206990"/>
+                  </a:lnTo>
+                  <a:lnTo>
+                    <a:pt x="5205492" y="202940"/>
+                  </a:lnTo>
+                  <a:lnTo>
+                    <a:pt x="5135147" y="198707"/>
+                  </a:lnTo>
+                  <a:lnTo>
+                    <a:pt x="5064803" y="194284"/>
+                  </a:lnTo>
+                  <a:lnTo>
+                    <a:pt x="4994458" y="189662"/>
+                  </a:lnTo>
+                  <a:lnTo>
+                    <a:pt x="4924114" y="184833"/>
+                  </a:lnTo>
+                  <a:lnTo>
+                    <a:pt x="4853769" y="179787"/>
+                  </a:lnTo>
+                  <a:lnTo>
+                    <a:pt x="4783425" y="174514"/>
+                  </a:lnTo>
+                  <a:lnTo>
+                    <a:pt x="4713080" y="169004"/>
+                  </a:lnTo>
+                  <a:lnTo>
+                    <a:pt x="4642736" y="163247"/>
+                  </a:lnTo>
+                  <a:lnTo>
+                    <a:pt x="4572391" y="157230"/>
+                  </a:lnTo>
+                  <a:lnTo>
+                    <a:pt x="4502047" y="150944"/>
+                  </a:lnTo>
+                  <a:lnTo>
+                    <a:pt x="4431702" y="144375"/>
+                  </a:lnTo>
+                  <a:lnTo>
+                    <a:pt x="4361358" y="137511"/>
+                  </a:lnTo>
+                  <a:lnTo>
+                    <a:pt x="4291013" y="130339"/>
+                  </a:lnTo>
+                  <a:lnTo>
+                    <a:pt x="4220669" y="122845"/>
+                  </a:lnTo>
+                  <a:lnTo>
+                    <a:pt x="4150324" y="115013"/>
+                  </a:lnTo>
+                  <a:lnTo>
+                    <a:pt x="4079980" y="106830"/>
+                  </a:lnTo>
+                  <a:lnTo>
+                    <a:pt x="4009635" y="98280"/>
+                  </a:lnTo>
+                  <a:lnTo>
+                    <a:pt x="3939291" y="89345"/>
+                  </a:lnTo>
+                  <a:lnTo>
+                    <a:pt x="3868946" y="80009"/>
+                  </a:lnTo>
+                  <a:lnTo>
+                    <a:pt x="3798602" y="70253"/>
+                  </a:lnTo>
+                  <a:lnTo>
+                    <a:pt x="3728257" y="60059"/>
+                  </a:lnTo>
+                  <a:lnTo>
+                    <a:pt x="3657913" y="49407"/>
+                  </a:lnTo>
+                  <a:lnTo>
+                    <a:pt x="3587569" y="38276"/>
+                  </a:lnTo>
+                  <a:lnTo>
+                    <a:pt x="3517224" y="26646"/>
+                  </a:lnTo>
+                  <a:lnTo>
+                    <a:pt x="3446880" y="14492"/>
+                  </a:lnTo>
+                  <a:lnTo>
+                    <a:pt x="3376535" y="1793"/>
+                  </a:lnTo>
+                  <a:lnTo>
+                    <a:pt x="3306191" y="0"/>
+                  </a:lnTo>
+                  <a:lnTo>
+                    <a:pt x="3235846" y="3104"/>
+                  </a:lnTo>
+                  <a:lnTo>
+                    <a:pt x="3165502" y="6176"/>
+                  </a:lnTo>
+                  <a:lnTo>
+                    <a:pt x="3095157" y="9216"/>
+                  </a:lnTo>
+                  <a:lnTo>
+                    <a:pt x="3024813" y="12225"/>
+                  </a:lnTo>
+                  <a:lnTo>
+                    <a:pt x="2954468" y="15201"/>
+                  </a:lnTo>
+                  <a:lnTo>
+                    <a:pt x="2884124" y="18147"/>
+                  </a:lnTo>
+                  <a:lnTo>
+                    <a:pt x="2813779" y="21062"/>
+                  </a:lnTo>
+                  <a:lnTo>
+                    <a:pt x="2743435" y="23947"/>
+                  </a:lnTo>
+                  <a:lnTo>
+                    <a:pt x="2673090" y="26801"/>
+                  </a:lnTo>
+                  <a:lnTo>
+                    <a:pt x="2602746" y="29626"/>
+                  </a:lnTo>
+                  <a:lnTo>
+                    <a:pt x="2532401" y="32421"/>
+                  </a:lnTo>
+                  <a:lnTo>
+                    <a:pt x="2462057" y="35187"/>
+                  </a:lnTo>
+                  <a:lnTo>
+                    <a:pt x="2391712" y="37923"/>
+                  </a:lnTo>
+                  <a:lnTo>
+                    <a:pt x="2321368" y="40632"/>
+                  </a:lnTo>
+                  <a:lnTo>
+                    <a:pt x="2251023" y="43312"/>
+                  </a:lnTo>
+                  <a:lnTo>
+                    <a:pt x="2180679" y="45964"/>
+                  </a:lnTo>
+                  <a:lnTo>
+                    <a:pt x="2110334" y="48588"/>
+                  </a:lnTo>
+                  <a:lnTo>
+                    <a:pt x="2039990" y="51185"/>
+                  </a:lnTo>
+                  <a:lnTo>
+                    <a:pt x="1969645" y="53755"/>
+                  </a:lnTo>
+                  <a:lnTo>
+                    <a:pt x="1899301" y="56298"/>
+                  </a:lnTo>
+                  <a:lnTo>
+                    <a:pt x="1828956" y="58814"/>
+                  </a:lnTo>
+                  <a:lnTo>
+                    <a:pt x="1758612" y="61304"/>
+                  </a:lnTo>
+                  <a:lnTo>
+                    <a:pt x="1688267" y="63769"/>
+                  </a:lnTo>
+                  <a:lnTo>
+                    <a:pt x="1617923" y="66207"/>
+                  </a:lnTo>
+                  <a:lnTo>
+                    <a:pt x="1547578" y="68620"/>
+                  </a:lnTo>
+                  <a:lnTo>
+                    <a:pt x="1477234" y="71007"/>
+                  </a:lnTo>
+                  <a:lnTo>
+                    <a:pt x="1406889" y="73370"/>
+                  </a:lnTo>
+                  <a:lnTo>
+                    <a:pt x="1336545" y="75708"/>
+                  </a:lnTo>
+                  <a:lnTo>
+                    <a:pt x="1266200" y="78022"/>
+                  </a:lnTo>
+                  <a:lnTo>
+                    <a:pt x="1195856" y="80311"/>
+                  </a:lnTo>
+                  <a:lnTo>
+                    <a:pt x="1125511" y="82577"/>
+                  </a:lnTo>
+                  <a:lnTo>
+                    <a:pt x="1055167" y="84819"/>
+                  </a:lnTo>
+                  <a:lnTo>
+                    <a:pt x="984822" y="87037"/>
+                  </a:lnTo>
+                  <a:lnTo>
+                    <a:pt x="914478" y="89232"/>
+                  </a:lnTo>
+                  <a:lnTo>
+                    <a:pt x="844133" y="91404"/>
+                  </a:lnTo>
+                  <a:lnTo>
+                    <a:pt x="773789" y="93554"/>
+                  </a:lnTo>
+                  <a:lnTo>
+                    <a:pt x="703444" y="95681"/>
+                  </a:lnTo>
+                  <a:lnTo>
+                    <a:pt x="633100" y="97786"/>
+                  </a:lnTo>
+                  <a:lnTo>
+                    <a:pt x="562755" y="99869"/>
+                  </a:lnTo>
+                  <a:lnTo>
+                    <a:pt x="492411" y="101930"/>
+                  </a:lnTo>
+                  <a:lnTo>
+                    <a:pt x="422066" y="103970"/>
+                  </a:lnTo>
+                  <a:lnTo>
+                    <a:pt x="351722" y="105988"/>
+                  </a:lnTo>
+                  <a:lnTo>
+                    <a:pt x="281377" y="107985"/>
+                  </a:lnTo>
+                  <a:lnTo>
+                    <a:pt x="211033" y="109962"/>
+                  </a:lnTo>
+                  <a:lnTo>
+                    <a:pt x="140688" y="111918"/>
+                  </a:lnTo>
+                  <a:lnTo>
+                    <a:pt x="70344" y="113853"/>
+                  </a:lnTo>
+                  <a:lnTo>
+                    <a:pt x="0" y="115768"/>
+                  </a:lnTo>
+                </a:path>
+              </a:pathLst>
+            </a:custGeom>
+          </p:spPr>
+          <p:txBody>
+            <a:bodyPr/>
+            <a:lstStyle/>
+            <a:p/>
+          </p:txBody>
+        </p:sp>
+        <p:sp>
+          <p:nvSpPr>
+            <p:cNvPr id="24" name="pl24"/>
+            <p:cNvSpPr/>
+            <p:nvPr/>
+          </p:nvSpPr>
+          <p:spPr>
+            <a:xfrm>
+              <a:off x="1235312" y="2735721"/>
+              <a:ext cx="6964104" cy="537643"/>
+            </a:xfrm>
+            <a:custGeom>
+              <a:avLst/>
+              <a:pathLst>
+                <a:path w="6964104" h="537643">
                   <a:moveTo>
                     <a:pt x="0" y="0"/>
                   </a:moveTo>
                   <a:lnTo>
-                    <a:pt x="71622" y="30538"/>
-                  </a:lnTo>
-                  <a:lnTo>
-                    <a:pt x="143245" y="60571"/>
-                  </a:lnTo>
-                  <a:lnTo>
-                    <a:pt x="214867" y="90105"/>
-                  </a:lnTo>
-                  <a:lnTo>
-                    <a:pt x="286490" y="119150"/>
-                  </a:lnTo>
-                  <a:lnTo>
-                    <a:pt x="358112" y="147713"/>
-                  </a:lnTo>
-                  <a:lnTo>
-                    <a:pt x="429735" y="175803"/>
-                  </a:lnTo>
-                  <a:lnTo>
-                    <a:pt x="501357" y="203426"/>
-                  </a:lnTo>
-                  <a:lnTo>
-                    <a:pt x="572980" y="230592"/>
-                  </a:lnTo>
-                  <a:lnTo>
-                    <a:pt x="644602" y="257307"/>
-                  </a:lnTo>
-                  <a:lnTo>
-                    <a:pt x="716225" y="283579"/>
-                  </a:lnTo>
-                  <a:lnTo>
-                    <a:pt x="787847" y="309415"/>
-                  </a:lnTo>
-                  <a:lnTo>
-                    <a:pt x="859470" y="334823"/>
-                  </a:lnTo>
-                  <a:lnTo>
-                    <a:pt x="931092" y="359809"/>
-                  </a:lnTo>
-                  <a:lnTo>
-                    <a:pt x="1002715" y="384381"/>
-                  </a:lnTo>
-                  <a:lnTo>
-                    <a:pt x="1074337" y="408546"/>
-                  </a:lnTo>
-                  <a:lnTo>
-                    <a:pt x="1145960" y="432310"/>
-                  </a:lnTo>
-                  <a:lnTo>
-                    <a:pt x="1217582" y="455680"/>
-                  </a:lnTo>
-                  <a:lnTo>
-                    <a:pt x="1289205" y="478662"/>
-                  </a:lnTo>
-                  <a:lnTo>
-                    <a:pt x="1360827" y="501263"/>
-                  </a:lnTo>
-                  <a:lnTo>
-                    <a:pt x="1432450" y="523490"/>
-                  </a:lnTo>
-                  <a:lnTo>
-                    <a:pt x="1504073" y="545347"/>
-                  </a:lnTo>
-                  <a:lnTo>
-                    <a:pt x="1575695" y="566843"/>
-                  </a:lnTo>
-                  <a:lnTo>
-                    <a:pt x="1647318" y="587982"/>
-                  </a:lnTo>
-                  <a:lnTo>
-                    <a:pt x="1718940" y="608770"/>
-                  </a:lnTo>
-                  <a:lnTo>
-                    <a:pt x="1790563" y="629213"/>
-                  </a:lnTo>
-                  <a:lnTo>
-                    <a:pt x="1862185" y="649318"/>
-                  </a:lnTo>
-                  <a:lnTo>
-                    <a:pt x="1933808" y="669089"/>
-                  </a:lnTo>
-                  <a:lnTo>
-                    <a:pt x="2005430" y="688532"/>
-                  </a:lnTo>
-                  <a:lnTo>
-                    <a:pt x="2077053" y="707653"/>
-                  </a:lnTo>
-                  <a:lnTo>
-                    <a:pt x="2148675" y="726457"/>
-                  </a:lnTo>
-                  <a:lnTo>
-                    <a:pt x="2220298" y="744949"/>
-                  </a:lnTo>
-                  <a:lnTo>
-                    <a:pt x="2291920" y="763134"/>
-                  </a:lnTo>
-                  <a:lnTo>
-                    <a:pt x="2363543" y="781018"/>
-                  </a:lnTo>
-                  <a:lnTo>
-                    <a:pt x="2435165" y="798605"/>
-                  </a:lnTo>
-                  <a:lnTo>
-                    <a:pt x="2506788" y="815900"/>
-                  </a:lnTo>
-                  <a:lnTo>
-                    <a:pt x="2578410" y="832909"/>
-                  </a:lnTo>
-                  <a:lnTo>
-                    <a:pt x="2650033" y="849636"/>
-                  </a:lnTo>
-                  <a:lnTo>
-                    <a:pt x="2721655" y="866085"/>
-                  </a:lnTo>
-                  <a:lnTo>
-                    <a:pt x="2793278" y="882261"/>
-                  </a:lnTo>
-                  <a:lnTo>
-                    <a:pt x="2864901" y="898169"/>
-                  </a:lnTo>
-                  <a:lnTo>
-                    <a:pt x="2936523" y="913814"/>
-                  </a:lnTo>
-                  <a:lnTo>
-                    <a:pt x="3008146" y="929199"/>
-                  </a:lnTo>
-                  <a:lnTo>
-                    <a:pt x="3079768" y="944329"/>
-                  </a:lnTo>
-                  <a:lnTo>
-                    <a:pt x="3151391" y="959207"/>
-                  </a:lnTo>
-                  <a:lnTo>
-                    <a:pt x="3223013" y="973840"/>
-                  </a:lnTo>
-                  <a:lnTo>
-                    <a:pt x="3294636" y="988229"/>
-                  </a:lnTo>
-                  <a:lnTo>
-                    <a:pt x="3366258" y="1002380"/>
-                  </a:lnTo>
-                  <a:lnTo>
-                    <a:pt x="3437881" y="1016296"/>
-                  </a:lnTo>
-                  <a:lnTo>
-                    <a:pt x="3509503" y="1029982"/>
-                  </a:lnTo>
-                  <a:lnTo>
-                    <a:pt x="3581126" y="1043440"/>
-                  </a:lnTo>
-                  <a:lnTo>
-                    <a:pt x="3652748" y="1056676"/>
-                  </a:lnTo>
-                  <a:lnTo>
-                    <a:pt x="3724371" y="1069691"/>
-                  </a:lnTo>
-                  <a:lnTo>
-                    <a:pt x="3795993" y="1082491"/>
-                  </a:lnTo>
-                  <a:lnTo>
-                    <a:pt x="3867616" y="1095079"/>
-                  </a:lnTo>
-                  <a:lnTo>
-                    <a:pt x="3939238" y="1107458"/>
-                  </a:lnTo>
-                  <a:lnTo>
-                    <a:pt x="4010861" y="1119632"/>
-                  </a:lnTo>
-                  <a:lnTo>
-                    <a:pt x="4082483" y="1131603"/>
-                  </a:lnTo>
-                  <a:lnTo>
-                    <a:pt x="4154106" y="1143377"/>
-                  </a:lnTo>
-                  <a:lnTo>
-                    <a:pt x="4225729" y="1154955"/>
-                  </a:lnTo>
-                  <a:lnTo>
-                    <a:pt x="4297351" y="1166341"/>
-                  </a:lnTo>
-                  <a:lnTo>
-                    <a:pt x="4368974" y="1177538"/>
-                  </a:lnTo>
-                  <a:lnTo>
-                    <a:pt x="4440596" y="1188550"/>
-                  </a:lnTo>
-                  <a:lnTo>
-                    <a:pt x="4512219" y="1199378"/>
-                  </a:lnTo>
-                  <a:lnTo>
-                    <a:pt x="4583841" y="1210028"/>
-                  </a:lnTo>
-                  <a:lnTo>
-                    <a:pt x="4655464" y="1220501"/>
-                  </a:lnTo>
-                  <a:lnTo>
-                    <a:pt x="4727086" y="1230800"/>
-                  </a:lnTo>
-                  <a:lnTo>
-                    <a:pt x="4798709" y="1240928"/>
-                  </a:lnTo>
-                  <a:lnTo>
-                    <a:pt x="4870331" y="1250888"/>
-                  </a:lnTo>
-                  <a:lnTo>
-                    <a:pt x="4941954" y="1260683"/>
-                  </a:lnTo>
-                  <a:lnTo>
-                    <a:pt x="5013576" y="1270316"/>
-                  </a:lnTo>
-                  <a:lnTo>
-                    <a:pt x="5085199" y="1279789"/>
-                  </a:lnTo>
-                  <a:lnTo>
-                    <a:pt x="5156821" y="1289105"/>
-                  </a:lnTo>
-                  <a:lnTo>
-                    <a:pt x="5228444" y="1298266"/>
-                  </a:lnTo>
-                  <a:lnTo>
-                    <a:pt x="5300066" y="1307276"/>
-                  </a:lnTo>
-                  <a:lnTo>
-                    <a:pt x="5371689" y="1316136"/>
-                  </a:lnTo>
-                  <a:lnTo>
-                    <a:pt x="5443311" y="1324849"/>
-                  </a:lnTo>
-                  <a:lnTo>
-                    <a:pt x="5514934" y="1333418"/>
-                  </a:lnTo>
-                  <a:lnTo>
-                    <a:pt x="5586557" y="1341844"/>
-                  </a:lnTo>
-                  <a:lnTo>
-                    <a:pt x="5658179" y="1350131"/>
-                  </a:lnTo>
-                  <a:lnTo>
-                    <a:pt x="5729802" y="1358280"/>
-                  </a:lnTo>
-                  <a:lnTo>
-                    <a:pt x="5801424" y="1366295"/>
-                  </a:lnTo>
-                  <a:lnTo>
-                    <a:pt x="5873047" y="1374176"/>
-                  </a:lnTo>
-                  <a:lnTo>
-                    <a:pt x="5944669" y="1381926"/>
-                  </a:lnTo>
-                  <a:lnTo>
-                    <a:pt x="6016292" y="1389549"/>
-                  </a:lnTo>
-                  <a:lnTo>
-                    <a:pt x="6087914" y="1397044"/>
-                  </a:lnTo>
-                  <a:lnTo>
-                    <a:pt x="6159537" y="1404416"/>
-                  </a:lnTo>
-                  <a:lnTo>
-                    <a:pt x="6231159" y="1411665"/>
-                  </a:lnTo>
-                  <a:lnTo>
-                    <a:pt x="6302782" y="1418794"/>
-                  </a:lnTo>
-                  <a:lnTo>
-                    <a:pt x="6374404" y="1425804"/>
-                  </a:lnTo>
-                  <a:lnTo>
-                    <a:pt x="6446027" y="1432699"/>
-                  </a:lnTo>
-                  <a:lnTo>
-                    <a:pt x="6517649" y="1439479"/>
-                  </a:lnTo>
-                  <a:lnTo>
-                    <a:pt x="6589272" y="1446147"/>
-                  </a:lnTo>
-                  <a:lnTo>
-                    <a:pt x="6660894" y="1452704"/>
-                  </a:lnTo>
-                  <a:lnTo>
-                    <a:pt x="6732517" y="1459152"/>
-                  </a:lnTo>
-                  <a:lnTo>
-                    <a:pt x="6804139" y="1465494"/>
-                  </a:lnTo>
-                  <a:lnTo>
-                    <a:pt x="6875762" y="1471730"/>
-                  </a:lnTo>
-                  <a:lnTo>
-                    <a:pt x="6947385" y="1477863"/>
-                  </a:lnTo>
-                  <a:lnTo>
-                    <a:pt x="7019007" y="1483894"/>
-                  </a:lnTo>
-                  <a:lnTo>
-                    <a:pt x="7090630" y="1489825"/>
+                    <a:pt x="70344" y="11020"/>
+                  </a:lnTo>
+                  <a:lnTo>
+                    <a:pt x="140688" y="21858"/>
+                  </a:lnTo>
+                  <a:lnTo>
+                    <a:pt x="211033" y="32517"/>
+                  </a:lnTo>
+                  <a:lnTo>
+                    <a:pt x="281377" y="42998"/>
+                  </a:lnTo>
+                  <a:lnTo>
+                    <a:pt x="351722" y="53306"/>
+                  </a:lnTo>
+                  <a:lnTo>
+                    <a:pt x="422066" y="63443"/>
+                  </a:lnTo>
+                  <a:lnTo>
+                    <a:pt x="492411" y="73411"/>
+                  </a:lnTo>
+                  <a:lnTo>
+                    <a:pt x="562755" y="83215"/>
+                  </a:lnTo>
+                  <a:lnTo>
+                    <a:pt x="633100" y="92856"/>
+                  </a:lnTo>
+                  <a:lnTo>
+                    <a:pt x="703444" y="102337"/>
+                  </a:lnTo>
+                  <a:lnTo>
+                    <a:pt x="773789" y="111660"/>
+                  </a:lnTo>
+                  <a:lnTo>
+                    <a:pt x="844133" y="120829"/>
+                  </a:lnTo>
+                  <a:lnTo>
+                    <a:pt x="914478" y="129846"/>
+                  </a:lnTo>
+                  <a:lnTo>
+                    <a:pt x="984822" y="138714"/>
+                  </a:lnTo>
+                  <a:lnTo>
+                    <a:pt x="1055167" y="147434"/>
+                  </a:lnTo>
+                  <a:lnTo>
+                    <a:pt x="1125511" y="156010"/>
+                  </a:lnTo>
+                  <a:lnTo>
+                    <a:pt x="1195856" y="164444"/>
+                  </a:lnTo>
+                  <a:lnTo>
+                    <a:pt x="1266200" y="172738"/>
+                  </a:lnTo>
+                  <a:lnTo>
+                    <a:pt x="1336545" y="180894"/>
+                  </a:lnTo>
+                  <a:lnTo>
+                    <a:pt x="1406889" y="188915"/>
+                  </a:lnTo>
+                  <a:lnTo>
+                    <a:pt x="1477234" y="196803"/>
+                  </a:lnTo>
+                  <a:lnTo>
+                    <a:pt x="1547578" y="204560"/>
+                  </a:lnTo>
+                  <a:lnTo>
+                    <a:pt x="1617923" y="212188"/>
+                  </a:lnTo>
+                  <a:lnTo>
+                    <a:pt x="1688267" y="219690"/>
+                  </a:lnTo>
+                  <a:lnTo>
+                    <a:pt x="1758612" y="227068"/>
+                  </a:lnTo>
+                  <a:lnTo>
+                    <a:pt x="1828956" y="234323"/>
+                  </a:lnTo>
+                  <a:lnTo>
+                    <a:pt x="1899301" y="241458"/>
+                  </a:lnTo>
+                  <a:lnTo>
+                    <a:pt x="1969645" y="248475"/>
+                  </a:lnTo>
+                  <a:lnTo>
+                    <a:pt x="2039990" y="255375"/>
+                  </a:lnTo>
+                  <a:lnTo>
+                    <a:pt x="2110334" y="262161"/>
+                  </a:lnTo>
+                  <a:lnTo>
+                    <a:pt x="2180679" y="268834"/>
+                  </a:lnTo>
+                  <a:lnTo>
+                    <a:pt x="2251023" y="275397"/>
+                  </a:lnTo>
+                  <a:lnTo>
+                    <a:pt x="2321368" y="281851"/>
+                  </a:lnTo>
+                  <a:lnTo>
+                    <a:pt x="2391712" y="288197"/>
+                  </a:lnTo>
+                  <a:lnTo>
+                    <a:pt x="2462057" y="294439"/>
+                  </a:lnTo>
+                  <a:lnTo>
+                    <a:pt x="2532401" y="300577"/>
+                  </a:lnTo>
+                  <a:lnTo>
+                    <a:pt x="2602746" y="306613"/>
+                  </a:lnTo>
+                  <a:lnTo>
+                    <a:pt x="2673090" y="312549"/>
+                  </a:lnTo>
+                  <a:lnTo>
+                    <a:pt x="2743435" y="318387"/>
+                  </a:lnTo>
+                  <a:lnTo>
+                    <a:pt x="2813779" y="324128"/>
+                  </a:lnTo>
+                  <a:lnTo>
+                    <a:pt x="2884124" y="329774"/>
+                  </a:lnTo>
+                  <a:lnTo>
+                    <a:pt x="2954468" y="335326"/>
+                  </a:lnTo>
+                  <a:lnTo>
+                    <a:pt x="3024813" y="340786"/>
+                  </a:lnTo>
+                  <a:lnTo>
+                    <a:pt x="3095157" y="346155"/>
+                  </a:lnTo>
+                  <a:lnTo>
+                    <a:pt x="3165502" y="351435"/>
+                  </a:lnTo>
+                  <a:lnTo>
+                    <a:pt x="3235846" y="356628"/>
+                  </a:lnTo>
+                  <a:lnTo>
+                    <a:pt x="3306191" y="361735"/>
+                  </a:lnTo>
+                  <a:lnTo>
+                    <a:pt x="3376535" y="366757"/>
+                  </a:lnTo>
+                  <a:lnTo>
+                    <a:pt x="3446880" y="371696"/>
+                  </a:lnTo>
+                  <a:lnTo>
+                    <a:pt x="3517224" y="376553"/>
+                  </a:lnTo>
+                  <a:lnTo>
+                    <a:pt x="3587569" y="381329"/>
+                  </a:lnTo>
+                  <a:lnTo>
+                    <a:pt x="3657913" y="386026"/>
+                  </a:lnTo>
+                  <a:lnTo>
+                    <a:pt x="3728257" y="390645"/>
+                  </a:lnTo>
+                  <a:lnTo>
+                    <a:pt x="3798602" y="395188"/>
+                  </a:lnTo>
+                  <a:lnTo>
+                    <a:pt x="3868946" y="399655"/>
+                  </a:lnTo>
+                  <a:lnTo>
+                    <a:pt x="3939291" y="404048"/>
+                  </a:lnTo>
+                  <a:lnTo>
+                    <a:pt x="4009635" y="408369"/>
+                  </a:lnTo>
+                  <a:lnTo>
+                    <a:pt x="4079980" y="412617"/>
+                  </a:lnTo>
+                  <a:lnTo>
+                    <a:pt x="4150324" y="416796"/>
+                  </a:lnTo>
+                  <a:lnTo>
+                    <a:pt x="4220669" y="420905"/>
+                  </a:lnTo>
+                  <a:lnTo>
+                    <a:pt x="4291013" y="424945"/>
+                  </a:lnTo>
+                  <a:lnTo>
+                    <a:pt x="4361358" y="428919"/>
+                  </a:lnTo>
+                  <a:lnTo>
+                    <a:pt x="4431702" y="432827"/>
+                  </a:lnTo>
+                  <a:lnTo>
+                    <a:pt x="4502047" y="436670"/>
+                  </a:lnTo>
+                  <a:lnTo>
+                    <a:pt x="4572391" y="440450"/>
+                  </a:lnTo>
+                  <a:lnTo>
+                    <a:pt x="4642736" y="444166"/>
+                  </a:lnTo>
+                  <a:lnTo>
+                    <a:pt x="4713080" y="447821"/>
+                  </a:lnTo>
+                  <a:lnTo>
+                    <a:pt x="4783425" y="451416"/>
+                  </a:lnTo>
+                  <a:lnTo>
+                    <a:pt x="4853769" y="454951"/>
+                  </a:lnTo>
+                  <a:lnTo>
+                    <a:pt x="4924114" y="458427"/>
+                  </a:lnTo>
+                  <a:lnTo>
+                    <a:pt x="4994458" y="461845"/>
+                  </a:lnTo>
+                  <a:lnTo>
+                    <a:pt x="5064803" y="465207"/>
+                  </a:lnTo>
+                  <a:lnTo>
+                    <a:pt x="5135147" y="468513"/>
+                  </a:lnTo>
+                  <a:lnTo>
+                    <a:pt x="5205492" y="471765"/>
+                  </a:lnTo>
+                  <a:lnTo>
+                    <a:pt x="5275836" y="474962"/>
+                  </a:lnTo>
+                  <a:lnTo>
+                    <a:pt x="5346181" y="478106"/>
+                  </a:lnTo>
+                  <a:lnTo>
+                    <a:pt x="5416525" y="481199"/>
+                  </a:lnTo>
+                  <a:lnTo>
+                    <a:pt x="5486870" y="484240"/>
+                  </a:lnTo>
+                  <a:lnTo>
+                    <a:pt x="5557214" y="487230"/>
+                  </a:lnTo>
+                  <a:lnTo>
+                    <a:pt x="5627559" y="490171"/>
+                  </a:lnTo>
+                  <a:lnTo>
+                    <a:pt x="5697903" y="493063"/>
+                  </a:lnTo>
+                  <a:lnTo>
+                    <a:pt x="5768248" y="495907"/>
+                  </a:lnTo>
+                  <a:lnTo>
+                    <a:pt x="5838592" y="498704"/>
+                  </a:lnTo>
+                  <a:lnTo>
+                    <a:pt x="5908937" y="501455"/>
+                  </a:lnTo>
+                  <a:lnTo>
+                    <a:pt x="5979281" y="504160"/>
+                  </a:lnTo>
+                  <a:lnTo>
+                    <a:pt x="6049626" y="506820"/>
+                  </a:lnTo>
+                  <a:lnTo>
+                    <a:pt x="6119970" y="509436"/>
+                  </a:lnTo>
+                  <a:lnTo>
+                    <a:pt x="6190315" y="512009"/>
+                  </a:lnTo>
+                  <a:lnTo>
+                    <a:pt x="6260659" y="514539"/>
+                  </a:lnTo>
+                  <a:lnTo>
+                    <a:pt x="6331004" y="517027"/>
+                  </a:lnTo>
+                  <a:lnTo>
+                    <a:pt x="6401348" y="519474"/>
+                  </a:lnTo>
+                  <a:lnTo>
+                    <a:pt x="6471693" y="521880"/>
+                  </a:lnTo>
+                  <a:lnTo>
+                    <a:pt x="6542037" y="524246"/>
+                  </a:lnTo>
+                  <a:lnTo>
+                    <a:pt x="6612382" y="526573"/>
+                  </a:lnTo>
+                  <a:lnTo>
+                    <a:pt x="6682726" y="528862"/>
+                  </a:lnTo>
+                  <a:lnTo>
+                    <a:pt x="6753071" y="531112"/>
+                  </a:lnTo>
+                  <a:lnTo>
+                    <a:pt x="6823415" y="533326"/>
+                  </a:lnTo>
+                  <a:lnTo>
+                    <a:pt x="6893760" y="535502"/>
+                  </a:lnTo>
+                  <a:lnTo>
+                    <a:pt x="6964104" y="537643"/>
                   </a:lnTo>
                 </a:path>
               </a:pathLst>
@@ -4478,27 +4513,27 @@
         </p:sp>
         <p:sp>
           <p:nvSpPr>
-            <p:cNvPr id="24" name="pl24"/>
+            <p:cNvPr id="25" name="pl25"/>
             <p:cNvSpPr/>
             <p:nvPr/>
           </p:nvSpPr>
           <p:spPr>
             <a:xfrm>
-              <a:off x="817517" y="4727786"/>
-              <a:ext cx="7799693" cy="0"/>
+              <a:off x="887106" y="3100960"/>
+              <a:ext cx="7660515" cy="0"/>
             </a:xfrm>
             <a:custGeom>
               <a:avLst/>
               <a:pathLst>
-                <a:path w="7799693" h="0">
+                <a:path w="7660515" h="0">
                   <a:moveTo>
                     <a:pt x="0" y="0"/>
                   </a:moveTo>
                   <a:lnTo>
-                    <a:pt x="7799693" y="0"/>
-                  </a:lnTo>
-                  <a:lnTo>
-                    <a:pt x="7799693" y="0"/>
+                    <a:pt x="7660515" y="0"/>
+                  </a:lnTo>
+                  <a:lnTo>
+                    <a:pt x="7660515" y="0"/>
                   </a:lnTo>
                 </a:path>
               </a:pathLst>
@@ -4521,21 +4556,21 @@
         </p:sp>
         <p:sp>
           <p:nvSpPr>
-            <p:cNvPr id="25" name="pl25"/>
+            <p:cNvPr id="26" name="pl26"/>
             <p:cNvSpPr/>
             <p:nvPr/>
           </p:nvSpPr>
           <p:spPr>
             <a:xfrm>
-              <a:off x="4588151" y="2073503"/>
-              <a:ext cx="0" cy="3649639"/>
+              <a:off x="4590457" y="2143092"/>
+              <a:ext cx="0" cy="1317069"/>
             </a:xfrm>
             <a:custGeom>
               <a:avLst/>
               <a:pathLst>
-                <a:path w="0" h="3649639">
+                <a:path w="0" h="1317069">
                   <a:moveTo>
-                    <a:pt x="0" y="3649639"/>
+                    <a:pt x="0" y="1317069"/>
                   </a:moveTo>
                   <a:lnTo>
                     <a:pt x="0" y="0"/>
@@ -4564,13 +4599,13 @@
         </p:sp>
         <p:sp>
           <p:nvSpPr>
-            <p:cNvPr id="26" name="tx26"/>
+            <p:cNvPr id="27" name="tx27"/>
             <p:cNvSpPr/>
             <p:nvPr/>
           </p:nvSpPr>
           <p:spPr>
             <a:xfrm>
-              <a:off x="692708" y="5517199"/>
+              <a:off x="762297" y="3360243"/>
               <a:ext cx="62179" cy="80101"/>
             </a:xfrm>
             <a:prstGeom prst="rect">
@@ -4610,13 +4645,13 @@
         </p:sp>
         <p:sp>
           <p:nvSpPr>
-            <p:cNvPr id="27" name="tx27"/>
+            <p:cNvPr id="28" name="tx28"/>
             <p:cNvSpPr/>
             <p:nvPr/>
           </p:nvSpPr>
           <p:spPr>
             <a:xfrm>
-              <a:off x="692708" y="4687735"/>
+              <a:off x="762297" y="3060909"/>
               <a:ext cx="62179" cy="80101"/>
             </a:xfrm>
             <a:prstGeom prst="rect">
@@ -4656,13 +4691,13 @@
         </p:sp>
         <p:sp>
           <p:nvSpPr>
-            <p:cNvPr id="28" name="tx28"/>
+            <p:cNvPr id="29" name="tx29"/>
             <p:cNvSpPr/>
             <p:nvPr/>
           </p:nvSpPr>
           <p:spPr>
             <a:xfrm>
-              <a:off x="692708" y="3858272"/>
+              <a:off x="762297" y="2761575"/>
               <a:ext cx="62179" cy="80101"/>
             </a:xfrm>
             <a:prstGeom prst="rect">
@@ -4702,13 +4737,13 @@
         </p:sp>
         <p:sp>
           <p:nvSpPr>
-            <p:cNvPr id="29" name="tx29"/>
+            <p:cNvPr id="30" name="tx30"/>
             <p:cNvSpPr/>
             <p:nvPr/>
           </p:nvSpPr>
           <p:spPr>
             <a:xfrm>
-              <a:off x="692708" y="3028808"/>
+              <a:off x="762297" y="2462242"/>
               <a:ext cx="62179" cy="80101"/>
             </a:xfrm>
             <a:prstGeom prst="rect">
@@ -4748,13 +4783,13 @@
         </p:sp>
         <p:sp>
           <p:nvSpPr>
-            <p:cNvPr id="30" name="tx30"/>
+            <p:cNvPr id="31" name="tx31"/>
             <p:cNvSpPr/>
             <p:nvPr/>
           </p:nvSpPr>
           <p:spPr>
             <a:xfrm>
-              <a:off x="692708" y="2199345"/>
+              <a:off x="762297" y="2162908"/>
               <a:ext cx="62179" cy="80101"/>
             </a:xfrm>
             <a:prstGeom prst="rect">
@@ -4794,13 +4829,13 @@
         </p:sp>
         <p:sp>
           <p:nvSpPr>
-            <p:cNvPr id="31" name="tx31"/>
+            <p:cNvPr id="32" name="tx32"/>
             <p:cNvSpPr/>
             <p:nvPr/>
           </p:nvSpPr>
           <p:spPr>
             <a:xfrm>
-              <a:off x="2360651" y="5785772"/>
+              <a:off x="2401262" y="3522791"/>
               <a:ext cx="161574" cy="80101"/>
             </a:xfrm>
             <a:prstGeom prst="rect">
@@ -4840,13 +4875,13 @@
         </p:sp>
         <p:sp>
           <p:nvSpPr>
-            <p:cNvPr id="32" name="tx32"/>
+            <p:cNvPr id="33" name="tx33"/>
             <p:cNvSpPr/>
             <p:nvPr/>
           </p:nvSpPr>
           <p:spPr>
             <a:xfrm>
-              <a:off x="4561958" y="5785772"/>
+              <a:off x="4564176" y="3522791"/>
               <a:ext cx="62179" cy="80101"/>
             </a:xfrm>
             <a:prstGeom prst="rect">
@@ -4886,13 +4921,13 @@
         </p:sp>
         <p:sp>
           <p:nvSpPr>
-            <p:cNvPr id="33" name="tx33"/>
+            <p:cNvPr id="34" name="tx34"/>
             <p:cNvSpPr/>
             <p:nvPr/>
           </p:nvSpPr>
           <p:spPr>
             <a:xfrm>
-              <a:off x="6682478" y="5785772"/>
+              <a:off x="6646302" y="3522791"/>
               <a:ext cx="124358" cy="80101"/>
             </a:xfrm>
             <a:prstGeom prst="rect">
@@ -4932,13 +4967,13 @@
         </p:sp>
         <p:sp>
           <p:nvSpPr>
-            <p:cNvPr id="34" name="tx34"/>
+            <p:cNvPr id="35" name="tx35"/>
             <p:cNvSpPr/>
             <p:nvPr/>
           </p:nvSpPr>
           <p:spPr>
             <a:xfrm>
-              <a:off x="2928340" y="5925448"/>
+              <a:off x="2928340" y="3662467"/>
               <a:ext cx="3578047" cy="100218"/>
             </a:xfrm>
             <a:prstGeom prst="rect">
@@ -4978,13 +5013,13 @@
         </p:sp>
         <p:sp>
           <p:nvSpPr>
-            <p:cNvPr id="35" name="tx35"/>
+            <p:cNvPr id="36" name="tx36"/>
             <p:cNvSpPr/>
             <p:nvPr/>
           </p:nvSpPr>
           <p:spPr>
             <a:xfrm rot="-5400000">
-              <a:off x="68446" y="3848213"/>
+              <a:off x="138035" y="2751517"/>
               <a:ext cx="1016904" cy="100218"/>
             </a:xfrm>
             <a:prstGeom prst="rect">
@@ -5024,13 +5059,13 @@
         </p:sp>
         <p:sp>
           <p:nvSpPr>
-            <p:cNvPr id="36" name="tx36"/>
+            <p:cNvPr id="37" name="tx37"/>
             <p:cNvSpPr/>
             <p:nvPr/>
           </p:nvSpPr>
           <p:spPr>
             <a:xfrm>
-              <a:off x="817517" y="1896563"/>
+              <a:off x="887106" y="1966152"/>
               <a:ext cx="6321612" cy="82021"/>
             </a:xfrm>
             <a:prstGeom prst="rect">
@@ -5070,13 +5105,3613 @@
         </p:sp>
         <p:sp>
           <p:nvSpPr>
-            <p:cNvPr id="37" name="tx37"/>
+            <p:cNvPr id="38" name="tx38"/>
             <p:cNvSpPr/>
             <p:nvPr/>
           </p:nvSpPr>
           <p:spPr>
             <a:xfrm>
-              <a:off x="817517" y="1669789"/>
+              <a:off x="887106" y="1739378"/>
+              <a:ext cx="1471361" cy="120152"/>
+            </a:xfrm>
+            <a:prstGeom prst="rect">
+              <a:avLst/>
+            </a:prstGeom>
+            <a:noFill/>
+          </p:spPr>
+          <p:txBody>
+            <a:bodyPr lIns="0" rIns="0" tIns="0" bIns="0" anchorCtr="1" anchor="ctr" wrap="none"/>
+            <a:lstStyle/>
+            <a:p>
+              <a:pPr algn="l" marL="0" marR="0" indent="0">
+                <a:lnSpc>
+                  <a:spcPts val="1320"/>
+                </a:lnSpc>
+                <a:spcBef>
+                  <a:spcPts val="0"/>
+                </a:spcBef>
+                <a:spcAft>
+                  <a:spcPts val="0"/>
+                </a:spcAft>
+              </a:pPr>
+              <a:r>
+                <a:rPr sz="1320">
+                  <a:solidFill>
+                    <a:srgbClr val="000000">
+                      <a:alpha val="100000"/>
+                    </a:srgbClr>
+                  </a:solidFill>
+                  <a:latin typeface="Helvetica"/>
+                  <a:cs typeface="Helvetica"/>
+                </a:rPr>
+                <a:t>Febrile Neutropenia</a:t>
+              </a:r>
+            </a:p>
+          </p:txBody>
+        </p:sp>
+        <p:sp>
+          <p:nvSpPr>
+            <p:cNvPr id="39" name="pl39"/>
+            <p:cNvSpPr/>
+            <p:nvPr/>
+          </p:nvSpPr>
+          <p:spPr>
+            <a:xfrm>
+              <a:off x="887106" y="5444019"/>
+              <a:ext cx="7660515" cy="0"/>
+            </a:xfrm>
+            <a:custGeom>
+              <a:avLst/>
+              <a:pathLst>
+                <a:path w="7660515" h="0">
+                  <a:moveTo>
+                    <a:pt x="0" y="0"/>
+                  </a:moveTo>
+                  <a:lnTo>
+                    <a:pt x="7660515" y="0"/>
+                  </a:lnTo>
+                  <a:lnTo>
+                    <a:pt x="7660515" y="0"/>
+                  </a:lnTo>
+                </a:path>
+              </a:pathLst>
+            </a:custGeom>
+            <a:ln w="6775" cap="flat">
+              <a:solidFill>
+                <a:srgbClr val="EBEBEB">
+                  <a:alpha val="100000"/>
+                </a:srgbClr>
+              </a:solidFill>
+              <a:prstDash val="solid"/>
+              <a:round/>
+            </a:ln>
+          </p:spPr>
+          <p:txBody>
+            <a:bodyPr/>
+            <a:lstStyle/>
+            <a:p/>
+          </p:txBody>
+        </p:sp>
+        <p:sp>
+          <p:nvSpPr>
+            <p:cNvPr id="40" name="pl40"/>
+            <p:cNvSpPr/>
+            <p:nvPr/>
+          </p:nvSpPr>
+          <p:spPr>
+            <a:xfrm>
+              <a:off x="887106" y="5144686"/>
+              <a:ext cx="7660515" cy="0"/>
+            </a:xfrm>
+            <a:custGeom>
+              <a:avLst/>
+              <a:pathLst>
+                <a:path w="7660515" h="0">
+                  <a:moveTo>
+                    <a:pt x="0" y="0"/>
+                  </a:moveTo>
+                  <a:lnTo>
+                    <a:pt x="7660515" y="0"/>
+                  </a:lnTo>
+                  <a:lnTo>
+                    <a:pt x="7660515" y="0"/>
+                  </a:lnTo>
+                </a:path>
+              </a:pathLst>
+            </a:custGeom>
+            <a:ln w="6775" cap="flat">
+              <a:solidFill>
+                <a:srgbClr val="EBEBEB">
+                  <a:alpha val="100000"/>
+                </a:srgbClr>
+              </a:solidFill>
+              <a:prstDash val="solid"/>
+              <a:round/>
+            </a:ln>
+          </p:spPr>
+          <p:txBody>
+            <a:bodyPr/>
+            <a:lstStyle/>
+            <a:p/>
+          </p:txBody>
+        </p:sp>
+        <p:sp>
+          <p:nvSpPr>
+            <p:cNvPr id="41" name="pl41"/>
+            <p:cNvSpPr/>
+            <p:nvPr/>
+          </p:nvSpPr>
+          <p:spPr>
+            <a:xfrm>
+              <a:off x="887106" y="4845352"/>
+              <a:ext cx="7660515" cy="0"/>
+            </a:xfrm>
+            <a:custGeom>
+              <a:avLst/>
+              <a:pathLst>
+                <a:path w="7660515" h="0">
+                  <a:moveTo>
+                    <a:pt x="0" y="0"/>
+                  </a:moveTo>
+                  <a:lnTo>
+                    <a:pt x="7660515" y="0"/>
+                  </a:lnTo>
+                  <a:lnTo>
+                    <a:pt x="7660515" y="0"/>
+                  </a:lnTo>
+                </a:path>
+              </a:pathLst>
+            </a:custGeom>
+            <a:ln w="6775" cap="flat">
+              <a:solidFill>
+                <a:srgbClr val="EBEBEB">
+                  <a:alpha val="100000"/>
+                </a:srgbClr>
+              </a:solidFill>
+              <a:prstDash val="solid"/>
+              <a:round/>
+            </a:ln>
+          </p:spPr>
+          <p:txBody>
+            <a:bodyPr/>
+            <a:lstStyle/>
+            <a:p/>
+          </p:txBody>
+        </p:sp>
+        <p:sp>
+          <p:nvSpPr>
+            <p:cNvPr id="42" name="pl42"/>
+            <p:cNvSpPr/>
+            <p:nvPr/>
+          </p:nvSpPr>
+          <p:spPr>
+            <a:xfrm>
+              <a:off x="887106" y="4546018"/>
+              <a:ext cx="7660515" cy="0"/>
+            </a:xfrm>
+            <a:custGeom>
+              <a:avLst/>
+              <a:pathLst>
+                <a:path w="7660515" h="0">
+                  <a:moveTo>
+                    <a:pt x="0" y="0"/>
+                  </a:moveTo>
+                  <a:lnTo>
+                    <a:pt x="7660515" y="0"/>
+                  </a:lnTo>
+                  <a:lnTo>
+                    <a:pt x="7660515" y="0"/>
+                  </a:lnTo>
+                </a:path>
+              </a:pathLst>
+            </a:custGeom>
+            <a:ln w="6775" cap="flat">
+              <a:solidFill>
+                <a:srgbClr val="EBEBEB">
+                  <a:alpha val="100000"/>
+                </a:srgbClr>
+              </a:solidFill>
+              <a:prstDash val="solid"/>
+              <a:round/>
+            </a:ln>
+          </p:spPr>
+          <p:txBody>
+            <a:bodyPr/>
+            <a:lstStyle/>
+            <a:p/>
+          </p:txBody>
+        </p:sp>
+        <p:sp>
+          <p:nvSpPr>
+            <p:cNvPr id="43" name="pl43"/>
+            <p:cNvSpPr/>
+            <p:nvPr/>
+          </p:nvSpPr>
+          <p:spPr>
+            <a:xfrm>
+              <a:off x="1636763" y="4336484"/>
+              <a:ext cx="0" cy="1317069"/>
+            </a:xfrm>
+            <a:custGeom>
+              <a:avLst/>
+              <a:pathLst>
+                <a:path w="0" h="1317069">
+                  <a:moveTo>
+                    <a:pt x="0" y="1317069"/>
+                  </a:moveTo>
+                  <a:lnTo>
+                    <a:pt x="0" y="0"/>
+                  </a:lnTo>
+                  <a:lnTo>
+                    <a:pt x="0" y="0"/>
+                  </a:lnTo>
+                </a:path>
+              </a:pathLst>
+            </a:custGeom>
+            <a:ln w="6775" cap="flat">
+              <a:solidFill>
+                <a:srgbClr val="EBEBEB">
+                  <a:alpha val="100000"/>
+                </a:srgbClr>
+              </a:solidFill>
+              <a:prstDash val="solid"/>
+              <a:round/>
+            </a:ln>
+          </p:spPr>
+          <p:txBody>
+            <a:bodyPr/>
+            <a:lstStyle/>
+            <a:p/>
+          </p:txBody>
+        </p:sp>
+        <p:sp>
+          <p:nvSpPr>
+            <p:cNvPr id="44" name="pl44"/>
+            <p:cNvSpPr/>
+            <p:nvPr/>
+          </p:nvSpPr>
+          <p:spPr>
+            <a:xfrm>
+              <a:off x="2482050" y="4336484"/>
+              <a:ext cx="0" cy="1317069"/>
+            </a:xfrm>
+            <a:custGeom>
+              <a:avLst/>
+              <a:pathLst>
+                <a:path w="0" h="1317069">
+                  <a:moveTo>
+                    <a:pt x="0" y="1317069"/>
+                  </a:moveTo>
+                  <a:lnTo>
+                    <a:pt x="0" y="0"/>
+                  </a:lnTo>
+                  <a:lnTo>
+                    <a:pt x="0" y="0"/>
+                  </a:lnTo>
+                </a:path>
+              </a:pathLst>
+            </a:custGeom>
+            <a:ln w="6775" cap="flat">
+              <a:solidFill>
+                <a:srgbClr val="EBEBEB">
+                  <a:alpha val="100000"/>
+                </a:srgbClr>
+              </a:solidFill>
+              <a:prstDash val="solid"/>
+              <a:round/>
+            </a:ln>
+          </p:spPr>
+          <p:txBody>
+            <a:bodyPr/>
+            <a:lstStyle/>
+            <a:p/>
+          </p:txBody>
+        </p:sp>
+        <p:sp>
+          <p:nvSpPr>
+            <p:cNvPr id="45" name="pl45"/>
+            <p:cNvSpPr/>
+            <p:nvPr/>
+          </p:nvSpPr>
+          <p:spPr>
+            <a:xfrm>
+              <a:off x="3327336" y="4336484"/>
+              <a:ext cx="0" cy="1317069"/>
+            </a:xfrm>
+            <a:custGeom>
+              <a:avLst/>
+              <a:pathLst>
+                <a:path w="0" h="1317069">
+                  <a:moveTo>
+                    <a:pt x="0" y="1317069"/>
+                  </a:moveTo>
+                  <a:lnTo>
+                    <a:pt x="0" y="0"/>
+                  </a:lnTo>
+                  <a:lnTo>
+                    <a:pt x="0" y="0"/>
+                  </a:lnTo>
+                </a:path>
+              </a:pathLst>
+            </a:custGeom>
+            <a:ln w="6775" cap="flat">
+              <a:solidFill>
+                <a:srgbClr val="EBEBEB">
+                  <a:alpha val="100000"/>
+                </a:srgbClr>
+              </a:solidFill>
+              <a:prstDash val="solid"/>
+              <a:round/>
+            </a:ln>
+          </p:spPr>
+          <p:txBody>
+            <a:bodyPr/>
+            <a:lstStyle/>
+            <a:p/>
+          </p:txBody>
+        </p:sp>
+        <p:sp>
+          <p:nvSpPr>
+            <p:cNvPr id="46" name="pl46"/>
+            <p:cNvSpPr/>
+            <p:nvPr/>
+          </p:nvSpPr>
+          <p:spPr>
+            <a:xfrm>
+              <a:off x="4172622" y="4336484"/>
+              <a:ext cx="0" cy="1317069"/>
+            </a:xfrm>
+            <a:custGeom>
+              <a:avLst/>
+              <a:pathLst>
+                <a:path w="0" h="1317069">
+                  <a:moveTo>
+                    <a:pt x="0" y="1317069"/>
+                  </a:moveTo>
+                  <a:lnTo>
+                    <a:pt x="0" y="0"/>
+                  </a:lnTo>
+                  <a:lnTo>
+                    <a:pt x="0" y="0"/>
+                  </a:lnTo>
+                </a:path>
+              </a:pathLst>
+            </a:custGeom>
+            <a:ln w="6775" cap="flat">
+              <a:solidFill>
+                <a:srgbClr val="EBEBEB">
+                  <a:alpha val="100000"/>
+                </a:srgbClr>
+              </a:solidFill>
+              <a:prstDash val="solid"/>
+              <a:round/>
+            </a:ln>
+          </p:spPr>
+          <p:txBody>
+            <a:bodyPr/>
+            <a:lstStyle/>
+            <a:p/>
+          </p:txBody>
+        </p:sp>
+        <p:sp>
+          <p:nvSpPr>
+            <p:cNvPr id="47" name="pl47"/>
+            <p:cNvSpPr/>
+            <p:nvPr/>
+          </p:nvSpPr>
+          <p:spPr>
+            <a:xfrm>
+              <a:off x="5017909" y="4336484"/>
+              <a:ext cx="0" cy="1317069"/>
+            </a:xfrm>
+            <a:custGeom>
+              <a:avLst/>
+              <a:pathLst>
+                <a:path w="0" h="1317069">
+                  <a:moveTo>
+                    <a:pt x="0" y="1317069"/>
+                  </a:moveTo>
+                  <a:lnTo>
+                    <a:pt x="0" y="0"/>
+                  </a:lnTo>
+                  <a:lnTo>
+                    <a:pt x="0" y="0"/>
+                  </a:lnTo>
+                </a:path>
+              </a:pathLst>
+            </a:custGeom>
+            <a:ln w="6775" cap="flat">
+              <a:solidFill>
+                <a:srgbClr val="EBEBEB">
+                  <a:alpha val="100000"/>
+                </a:srgbClr>
+              </a:solidFill>
+              <a:prstDash val="solid"/>
+              <a:round/>
+            </a:ln>
+          </p:spPr>
+          <p:txBody>
+            <a:bodyPr/>
+            <a:lstStyle/>
+            <a:p/>
+          </p:txBody>
+        </p:sp>
+        <p:sp>
+          <p:nvSpPr>
+            <p:cNvPr id="48" name="pl48"/>
+            <p:cNvSpPr/>
+            <p:nvPr/>
+          </p:nvSpPr>
+          <p:spPr>
+            <a:xfrm>
+              <a:off x="5863195" y="4336484"/>
+              <a:ext cx="0" cy="1317069"/>
+            </a:xfrm>
+            <a:custGeom>
+              <a:avLst/>
+              <a:pathLst>
+                <a:path w="0" h="1317069">
+                  <a:moveTo>
+                    <a:pt x="0" y="1317069"/>
+                  </a:moveTo>
+                  <a:lnTo>
+                    <a:pt x="0" y="0"/>
+                  </a:lnTo>
+                  <a:lnTo>
+                    <a:pt x="0" y="0"/>
+                  </a:lnTo>
+                </a:path>
+              </a:pathLst>
+            </a:custGeom>
+            <a:ln w="6775" cap="flat">
+              <a:solidFill>
+                <a:srgbClr val="EBEBEB">
+                  <a:alpha val="100000"/>
+                </a:srgbClr>
+              </a:solidFill>
+              <a:prstDash val="solid"/>
+              <a:round/>
+            </a:ln>
+          </p:spPr>
+          <p:txBody>
+            <a:bodyPr/>
+            <a:lstStyle/>
+            <a:p/>
+          </p:txBody>
+        </p:sp>
+        <p:sp>
+          <p:nvSpPr>
+            <p:cNvPr id="49" name="pl49"/>
+            <p:cNvSpPr/>
+            <p:nvPr/>
+          </p:nvSpPr>
+          <p:spPr>
+            <a:xfrm>
+              <a:off x="6708482" y="4336484"/>
+              <a:ext cx="0" cy="1317069"/>
+            </a:xfrm>
+            <a:custGeom>
+              <a:avLst/>
+              <a:pathLst>
+                <a:path w="0" h="1317069">
+                  <a:moveTo>
+                    <a:pt x="0" y="1317069"/>
+                  </a:moveTo>
+                  <a:lnTo>
+                    <a:pt x="0" y="0"/>
+                  </a:lnTo>
+                  <a:lnTo>
+                    <a:pt x="0" y="0"/>
+                  </a:lnTo>
+                </a:path>
+              </a:pathLst>
+            </a:custGeom>
+            <a:ln w="6775" cap="flat">
+              <a:solidFill>
+                <a:srgbClr val="EBEBEB">
+                  <a:alpha val="100000"/>
+                </a:srgbClr>
+              </a:solidFill>
+              <a:prstDash val="solid"/>
+              <a:round/>
+            </a:ln>
+          </p:spPr>
+          <p:txBody>
+            <a:bodyPr/>
+            <a:lstStyle/>
+            <a:p/>
+          </p:txBody>
+        </p:sp>
+        <p:sp>
+          <p:nvSpPr>
+            <p:cNvPr id="50" name="pl50"/>
+            <p:cNvSpPr/>
+            <p:nvPr/>
+          </p:nvSpPr>
+          <p:spPr>
+            <a:xfrm>
+              <a:off x="7553768" y="4336484"/>
+              <a:ext cx="0" cy="1317069"/>
+            </a:xfrm>
+            <a:custGeom>
+              <a:avLst/>
+              <a:pathLst>
+                <a:path w="0" h="1317069">
+                  <a:moveTo>
+                    <a:pt x="0" y="1317069"/>
+                  </a:moveTo>
+                  <a:lnTo>
+                    <a:pt x="0" y="0"/>
+                  </a:lnTo>
+                  <a:lnTo>
+                    <a:pt x="0" y="0"/>
+                  </a:lnTo>
+                </a:path>
+              </a:pathLst>
+            </a:custGeom>
+            <a:ln w="6775" cap="flat">
+              <a:solidFill>
+                <a:srgbClr val="EBEBEB">
+                  <a:alpha val="100000"/>
+                </a:srgbClr>
+              </a:solidFill>
+              <a:prstDash val="solid"/>
+              <a:round/>
+            </a:ln>
+          </p:spPr>
+          <p:txBody>
+            <a:bodyPr/>
+            <a:lstStyle/>
+            <a:p/>
+          </p:txBody>
+        </p:sp>
+        <p:sp>
+          <p:nvSpPr>
+            <p:cNvPr id="51" name="pl51"/>
+            <p:cNvSpPr/>
+            <p:nvPr/>
+          </p:nvSpPr>
+          <p:spPr>
+            <a:xfrm>
+              <a:off x="8399054" y="4336484"/>
+              <a:ext cx="0" cy="1317069"/>
+            </a:xfrm>
+            <a:custGeom>
+              <a:avLst/>
+              <a:pathLst>
+                <a:path w="0" h="1317069">
+                  <a:moveTo>
+                    <a:pt x="0" y="1317069"/>
+                  </a:moveTo>
+                  <a:lnTo>
+                    <a:pt x="0" y="0"/>
+                  </a:lnTo>
+                  <a:lnTo>
+                    <a:pt x="0" y="0"/>
+                  </a:lnTo>
+                </a:path>
+              </a:pathLst>
+            </a:custGeom>
+            <a:ln w="6775" cap="flat">
+              <a:solidFill>
+                <a:srgbClr val="EBEBEB">
+                  <a:alpha val="100000"/>
+                </a:srgbClr>
+              </a:solidFill>
+              <a:prstDash val="solid"/>
+              <a:round/>
+            </a:ln>
+          </p:spPr>
+          <p:txBody>
+            <a:bodyPr/>
+            <a:lstStyle/>
+            <a:p/>
+          </p:txBody>
+        </p:sp>
+        <p:sp>
+          <p:nvSpPr>
+            <p:cNvPr id="52" name="pl52"/>
+            <p:cNvSpPr/>
+            <p:nvPr/>
+          </p:nvSpPr>
+          <p:spPr>
+            <a:xfrm>
+              <a:off x="887106" y="5593686"/>
+              <a:ext cx="7660515" cy="0"/>
+            </a:xfrm>
+            <a:custGeom>
+              <a:avLst/>
+              <a:pathLst>
+                <a:path w="7660515" h="0">
+                  <a:moveTo>
+                    <a:pt x="0" y="0"/>
+                  </a:moveTo>
+                  <a:lnTo>
+                    <a:pt x="7660515" y="0"/>
+                  </a:lnTo>
+                  <a:lnTo>
+                    <a:pt x="7660515" y="0"/>
+                  </a:lnTo>
+                </a:path>
+              </a:pathLst>
+            </a:custGeom>
+            <a:ln w="13550" cap="flat">
+              <a:solidFill>
+                <a:srgbClr val="EBEBEB">
+                  <a:alpha val="100000"/>
+                </a:srgbClr>
+              </a:solidFill>
+              <a:prstDash val="solid"/>
+              <a:round/>
+            </a:ln>
+          </p:spPr>
+          <p:txBody>
+            <a:bodyPr/>
+            <a:lstStyle/>
+            <a:p/>
+          </p:txBody>
+        </p:sp>
+        <p:sp>
+          <p:nvSpPr>
+            <p:cNvPr id="53" name="pl53"/>
+            <p:cNvSpPr/>
+            <p:nvPr/>
+          </p:nvSpPr>
+          <p:spPr>
+            <a:xfrm>
+              <a:off x="887106" y="5294352"/>
+              <a:ext cx="7660515" cy="0"/>
+            </a:xfrm>
+            <a:custGeom>
+              <a:avLst/>
+              <a:pathLst>
+                <a:path w="7660515" h="0">
+                  <a:moveTo>
+                    <a:pt x="0" y="0"/>
+                  </a:moveTo>
+                  <a:lnTo>
+                    <a:pt x="7660515" y="0"/>
+                  </a:lnTo>
+                  <a:lnTo>
+                    <a:pt x="7660515" y="0"/>
+                  </a:lnTo>
+                </a:path>
+              </a:pathLst>
+            </a:custGeom>
+            <a:ln w="13550" cap="flat">
+              <a:solidFill>
+                <a:srgbClr val="EBEBEB">
+                  <a:alpha val="100000"/>
+                </a:srgbClr>
+              </a:solidFill>
+              <a:prstDash val="solid"/>
+              <a:round/>
+            </a:ln>
+          </p:spPr>
+          <p:txBody>
+            <a:bodyPr/>
+            <a:lstStyle/>
+            <a:p/>
+          </p:txBody>
+        </p:sp>
+        <p:sp>
+          <p:nvSpPr>
+            <p:cNvPr id="54" name="pl54"/>
+            <p:cNvSpPr/>
+            <p:nvPr/>
+          </p:nvSpPr>
+          <p:spPr>
+            <a:xfrm>
+              <a:off x="887106" y="4995019"/>
+              <a:ext cx="7660515" cy="0"/>
+            </a:xfrm>
+            <a:custGeom>
+              <a:avLst/>
+              <a:pathLst>
+                <a:path w="7660515" h="0">
+                  <a:moveTo>
+                    <a:pt x="0" y="0"/>
+                  </a:moveTo>
+                  <a:lnTo>
+                    <a:pt x="7660515" y="0"/>
+                  </a:lnTo>
+                  <a:lnTo>
+                    <a:pt x="7660515" y="0"/>
+                  </a:lnTo>
+                </a:path>
+              </a:pathLst>
+            </a:custGeom>
+            <a:ln w="13550" cap="flat">
+              <a:solidFill>
+                <a:srgbClr val="EBEBEB">
+                  <a:alpha val="100000"/>
+                </a:srgbClr>
+              </a:solidFill>
+              <a:prstDash val="solid"/>
+              <a:round/>
+            </a:ln>
+          </p:spPr>
+          <p:txBody>
+            <a:bodyPr/>
+            <a:lstStyle/>
+            <a:p/>
+          </p:txBody>
+        </p:sp>
+        <p:sp>
+          <p:nvSpPr>
+            <p:cNvPr id="55" name="pl55"/>
+            <p:cNvSpPr/>
+            <p:nvPr/>
+          </p:nvSpPr>
+          <p:spPr>
+            <a:xfrm>
+              <a:off x="887106" y="4695685"/>
+              <a:ext cx="7660515" cy="0"/>
+            </a:xfrm>
+            <a:custGeom>
+              <a:avLst/>
+              <a:pathLst>
+                <a:path w="7660515" h="0">
+                  <a:moveTo>
+                    <a:pt x="0" y="0"/>
+                  </a:moveTo>
+                  <a:lnTo>
+                    <a:pt x="7660515" y="0"/>
+                  </a:lnTo>
+                  <a:lnTo>
+                    <a:pt x="7660515" y="0"/>
+                  </a:lnTo>
+                </a:path>
+              </a:pathLst>
+            </a:custGeom>
+            <a:ln w="13550" cap="flat">
+              <a:solidFill>
+                <a:srgbClr val="EBEBEB">
+                  <a:alpha val="100000"/>
+                </a:srgbClr>
+              </a:solidFill>
+              <a:prstDash val="solid"/>
+              <a:round/>
+            </a:ln>
+          </p:spPr>
+          <p:txBody>
+            <a:bodyPr/>
+            <a:lstStyle/>
+            <a:p/>
+          </p:txBody>
+        </p:sp>
+        <p:sp>
+          <p:nvSpPr>
+            <p:cNvPr id="56" name="pl56"/>
+            <p:cNvSpPr/>
+            <p:nvPr/>
+          </p:nvSpPr>
+          <p:spPr>
+            <a:xfrm>
+              <a:off x="887106" y="4396351"/>
+              <a:ext cx="7660515" cy="0"/>
+            </a:xfrm>
+            <a:custGeom>
+              <a:avLst/>
+              <a:pathLst>
+                <a:path w="7660515" h="0">
+                  <a:moveTo>
+                    <a:pt x="0" y="0"/>
+                  </a:moveTo>
+                  <a:lnTo>
+                    <a:pt x="7660515" y="0"/>
+                  </a:lnTo>
+                  <a:lnTo>
+                    <a:pt x="7660515" y="0"/>
+                  </a:lnTo>
+                </a:path>
+              </a:pathLst>
+            </a:custGeom>
+            <a:ln w="13550" cap="flat">
+              <a:solidFill>
+                <a:srgbClr val="EBEBEB">
+                  <a:alpha val="100000"/>
+                </a:srgbClr>
+              </a:solidFill>
+              <a:prstDash val="solid"/>
+              <a:round/>
+            </a:ln>
+          </p:spPr>
+          <p:txBody>
+            <a:bodyPr/>
+            <a:lstStyle/>
+            <a:p/>
+          </p:txBody>
+        </p:sp>
+        <p:sp>
+          <p:nvSpPr>
+            <p:cNvPr id="57" name="pl57"/>
+            <p:cNvSpPr/>
+            <p:nvPr/>
+          </p:nvSpPr>
+          <p:spPr>
+            <a:xfrm>
+              <a:off x="1214120" y="4336484"/>
+              <a:ext cx="0" cy="1317069"/>
+            </a:xfrm>
+            <a:custGeom>
+              <a:avLst/>
+              <a:pathLst>
+                <a:path w="0" h="1317069">
+                  <a:moveTo>
+                    <a:pt x="0" y="1317069"/>
+                  </a:moveTo>
+                  <a:lnTo>
+                    <a:pt x="0" y="0"/>
+                  </a:lnTo>
+                  <a:lnTo>
+                    <a:pt x="0" y="0"/>
+                  </a:lnTo>
+                </a:path>
+              </a:pathLst>
+            </a:custGeom>
+            <a:ln w="13550" cap="flat">
+              <a:solidFill>
+                <a:srgbClr val="EBEBEB">
+                  <a:alpha val="100000"/>
+                </a:srgbClr>
+              </a:solidFill>
+              <a:prstDash val="solid"/>
+              <a:round/>
+            </a:ln>
+          </p:spPr>
+          <p:txBody>
+            <a:bodyPr/>
+            <a:lstStyle/>
+            <a:p/>
+          </p:txBody>
+        </p:sp>
+        <p:sp>
+          <p:nvSpPr>
+            <p:cNvPr id="58" name="pl58"/>
+            <p:cNvSpPr/>
+            <p:nvPr/>
+          </p:nvSpPr>
+          <p:spPr>
+            <a:xfrm>
+              <a:off x="2059406" y="4336484"/>
+              <a:ext cx="0" cy="1317069"/>
+            </a:xfrm>
+            <a:custGeom>
+              <a:avLst/>
+              <a:pathLst>
+                <a:path w="0" h="1317069">
+                  <a:moveTo>
+                    <a:pt x="0" y="1317069"/>
+                  </a:moveTo>
+                  <a:lnTo>
+                    <a:pt x="0" y="0"/>
+                  </a:lnTo>
+                  <a:lnTo>
+                    <a:pt x="0" y="0"/>
+                  </a:lnTo>
+                </a:path>
+              </a:pathLst>
+            </a:custGeom>
+            <a:ln w="13550" cap="flat">
+              <a:solidFill>
+                <a:srgbClr val="EBEBEB">
+                  <a:alpha val="100000"/>
+                </a:srgbClr>
+              </a:solidFill>
+              <a:prstDash val="solid"/>
+              <a:round/>
+            </a:ln>
+          </p:spPr>
+          <p:txBody>
+            <a:bodyPr/>
+            <a:lstStyle/>
+            <a:p/>
+          </p:txBody>
+        </p:sp>
+        <p:sp>
+          <p:nvSpPr>
+            <p:cNvPr id="59" name="pl59"/>
+            <p:cNvSpPr/>
+            <p:nvPr/>
+          </p:nvSpPr>
+          <p:spPr>
+            <a:xfrm>
+              <a:off x="2904693" y="4336484"/>
+              <a:ext cx="0" cy="1317069"/>
+            </a:xfrm>
+            <a:custGeom>
+              <a:avLst/>
+              <a:pathLst>
+                <a:path w="0" h="1317069">
+                  <a:moveTo>
+                    <a:pt x="0" y="1317069"/>
+                  </a:moveTo>
+                  <a:lnTo>
+                    <a:pt x="0" y="0"/>
+                  </a:lnTo>
+                  <a:lnTo>
+                    <a:pt x="0" y="0"/>
+                  </a:lnTo>
+                </a:path>
+              </a:pathLst>
+            </a:custGeom>
+            <a:ln w="13550" cap="flat">
+              <a:solidFill>
+                <a:srgbClr val="EBEBEB">
+                  <a:alpha val="100000"/>
+                </a:srgbClr>
+              </a:solidFill>
+              <a:prstDash val="solid"/>
+              <a:round/>
+            </a:ln>
+          </p:spPr>
+          <p:txBody>
+            <a:bodyPr/>
+            <a:lstStyle/>
+            <a:p/>
+          </p:txBody>
+        </p:sp>
+        <p:sp>
+          <p:nvSpPr>
+            <p:cNvPr id="60" name="pl60"/>
+            <p:cNvSpPr/>
+            <p:nvPr/>
+          </p:nvSpPr>
+          <p:spPr>
+            <a:xfrm>
+              <a:off x="3749979" y="4336484"/>
+              <a:ext cx="0" cy="1317069"/>
+            </a:xfrm>
+            <a:custGeom>
+              <a:avLst/>
+              <a:pathLst>
+                <a:path w="0" h="1317069">
+                  <a:moveTo>
+                    <a:pt x="0" y="1317069"/>
+                  </a:moveTo>
+                  <a:lnTo>
+                    <a:pt x="0" y="0"/>
+                  </a:lnTo>
+                  <a:lnTo>
+                    <a:pt x="0" y="0"/>
+                  </a:lnTo>
+                </a:path>
+              </a:pathLst>
+            </a:custGeom>
+            <a:ln w="13550" cap="flat">
+              <a:solidFill>
+                <a:srgbClr val="EBEBEB">
+                  <a:alpha val="100000"/>
+                </a:srgbClr>
+              </a:solidFill>
+              <a:prstDash val="solid"/>
+              <a:round/>
+            </a:ln>
+          </p:spPr>
+          <p:txBody>
+            <a:bodyPr/>
+            <a:lstStyle/>
+            <a:p/>
+          </p:txBody>
+        </p:sp>
+        <p:sp>
+          <p:nvSpPr>
+            <p:cNvPr id="61" name="pl61"/>
+            <p:cNvSpPr/>
+            <p:nvPr/>
+          </p:nvSpPr>
+          <p:spPr>
+            <a:xfrm>
+              <a:off x="4595266" y="4336484"/>
+              <a:ext cx="0" cy="1317069"/>
+            </a:xfrm>
+            <a:custGeom>
+              <a:avLst/>
+              <a:pathLst>
+                <a:path w="0" h="1317069">
+                  <a:moveTo>
+                    <a:pt x="0" y="1317069"/>
+                  </a:moveTo>
+                  <a:lnTo>
+                    <a:pt x="0" y="0"/>
+                  </a:lnTo>
+                  <a:lnTo>
+                    <a:pt x="0" y="0"/>
+                  </a:lnTo>
+                </a:path>
+              </a:pathLst>
+            </a:custGeom>
+            <a:ln w="13550" cap="flat">
+              <a:solidFill>
+                <a:srgbClr val="EBEBEB">
+                  <a:alpha val="100000"/>
+                </a:srgbClr>
+              </a:solidFill>
+              <a:prstDash val="solid"/>
+              <a:round/>
+            </a:ln>
+          </p:spPr>
+          <p:txBody>
+            <a:bodyPr/>
+            <a:lstStyle/>
+            <a:p/>
+          </p:txBody>
+        </p:sp>
+        <p:sp>
+          <p:nvSpPr>
+            <p:cNvPr id="62" name="pl62"/>
+            <p:cNvSpPr/>
+            <p:nvPr/>
+          </p:nvSpPr>
+          <p:spPr>
+            <a:xfrm>
+              <a:off x="5440552" y="4336484"/>
+              <a:ext cx="0" cy="1317069"/>
+            </a:xfrm>
+            <a:custGeom>
+              <a:avLst/>
+              <a:pathLst>
+                <a:path w="0" h="1317069">
+                  <a:moveTo>
+                    <a:pt x="0" y="1317069"/>
+                  </a:moveTo>
+                  <a:lnTo>
+                    <a:pt x="0" y="0"/>
+                  </a:lnTo>
+                  <a:lnTo>
+                    <a:pt x="0" y="0"/>
+                  </a:lnTo>
+                </a:path>
+              </a:pathLst>
+            </a:custGeom>
+            <a:ln w="13550" cap="flat">
+              <a:solidFill>
+                <a:srgbClr val="EBEBEB">
+                  <a:alpha val="100000"/>
+                </a:srgbClr>
+              </a:solidFill>
+              <a:prstDash val="solid"/>
+              <a:round/>
+            </a:ln>
+          </p:spPr>
+          <p:txBody>
+            <a:bodyPr/>
+            <a:lstStyle/>
+            <a:p/>
+          </p:txBody>
+        </p:sp>
+        <p:sp>
+          <p:nvSpPr>
+            <p:cNvPr id="63" name="pl63"/>
+            <p:cNvSpPr/>
+            <p:nvPr/>
+          </p:nvSpPr>
+          <p:spPr>
+            <a:xfrm>
+              <a:off x="6285838" y="4336484"/>
+              <a:ext cx="0" cy="1317069"/>
+            </a:xfrm>
+            <a:custGeom>
+              <a:avLst/>
+              <a:pathLst>
+                <a:path w="0" h="1317069">
+                  <a:moveTo>
+                    <a:pt x="0" y="1317069"/>
+                  </a:moveTo>
+                  <a:lnTo>
+                    <a:pt x="0" y="0"/>
+                  </a:lnTo>
+                  <a:lnTo>
+                    <a:pt x="0" y="0"/>
+                  </a:lnTo>
+                </a:path>
+              </a:pathLst>
+            </a:custGeom>
+            <a:ln w="13550" cap="flat">
+              <a:solidFill>
+                <a:srgbClr val="EBEBEB">
+                  <a:alpha val="100000"/>
+                </a:srgbClr>
+              </a:solidFill>
+              <a:prstDash val="solid"/>
+              <a:round/>
+            </a:ln>
+          </p:spPr>
+          <p:txBody>
+            <a:bodyPr/>
+            <a:lstStyle/>
+            <a:p/>
+          </p:txBody>
+        </p:sp>
+        <p:sp>
+          <p:nvSpPr>
+            <p:cNvPr id="64" name="pl64"/>
+            <p:cNvSpPr/>
+            <p:nvPr/>
+          </p:nvSpPr>
+          <p:spPr>
+            <a:xfrm>
+              <a:off x="7131125" y="4336484"/>
+              <a:ext cx="0" cy="1317069"/>
+            </a:xfrm>
+            <a:custGeom>
+              <a:avLst/>
+              <a:pathLst>
+                <a:path w="0" h="1317069">
+                  <a:moveTo>
+                    <a:pt x="0" y="1317069"/>
+                  </a:moveTo>
+                  <a:lnTo>
+                    <a:pt x="0" y="0"/>
+                  </a:lnTo>
+                  <a:lnTo>
+                    <a:pt x="0" y="0"/>
+                  </a:lnTo>
+                </a:path>
+              </a:pathLst>
+            </a:custGeom>
+            <a:ln w="13550" cap="flat">
+              <a:solidFill>
+                <a:srgbClr val="EBEBEB">
+                  <a:alpha val="100000"/>
+                </a:srgbClr>
+              </a:solidFill>
+              <a:prstDash val="solid"/>
+              <a:round/>
+            </a:ln>
+          </p:spPr>
+          <p:txBody>
+            <a:bodyPr/>
+            <a:lstStyle/>
+            <a:p/>
+          </p:txBody>
+        </p:sp>
+        <p:sp>
+          <p:nvSpPr>
+            <p:cNvPr id="65" name="pl65"/>
+            <p:cNvSpPr/>
+            <p:nvPr/>
+          </p:nvSpPr>
+          <p:spPr>
+            <a:xfrm>
+              <a:off x="7976411" y="4336484"/>
+              <a:ext cx="0" cy="1317069"/>
+            </a:xfrm>
+            <a:custGeom>
+              <a:avLst/>
+              <a:pathLst>
+                <a:path w="0" h="1317069">
+                  <a:moveTo>
+                    <a:pt x="0" y="1317069"/>
+                  </a:moveTo>
+                  <a:lnTo>
+                    <a:pt x="0" y="0"/>
+                  </a:lnTo>
+                  <a:lnTo>
+                    <a:pt x="0" y="0"/>
+                  </a:lnTo>
+                </a:path>
+              </a:pathLst>
+            </a:custGeom>
+            <a:ln w="13550" cap="flat">
+              <a:solidFill>
+                <a:srgbClr val="EBEBEB">
+                  <a:alpha val="100000"/>
+                </a:srgbClr>
+              </a:solidFill>
+              <a:prstDash val="solid"/>
+              <a:round/>
+            </a:ln>
+          </p:spPr>
+          <p:txBody>
+            <a:bodyPr/>
+            <a:lstStyle/>
+            <a:p/>
+          </p:txBody>
+        </p:sp>
+        <p:sp>
+          <p:nvSpPr>
+            <p:cNvPr id="66" name="pg66"/>
+            <p:cNvSpPr/>
+            <p:nvPr/>
+          </p:nvSpPr>
+          <p:spPr>
+            <a:xfrm>
+              <a:off x="1235312" y="4336484"/>
+              <a:ext cx="6964104" cy="1225799"/>
+            </a:xfrm>
+            <a:custGeom>
+              <a:avLst/>
+              <a:pathLst>
+                <a:path w="6964104" h="1225799">
+                  <a:moveTo>
+                    <a:pt x="1058129" y="0"/>
+                  </a:moveTo>
+                  <a:lnTo>
+                    <a:pt x="1125511" y="51872"/>
+                  </a:lnTo>
+                  <a:lnTo>
+                    <a:pt x="1195856" y="103696"/>
+                  </a:lnTo>
+                  <a:lnTo>
+                    <a:pt x="1266200" y="153291"/>
+                  </a:lnTo>
+                  <a:lnTo>
+                    <a:pt x="1336545" y="200755"/>
+                  </a:lnTo>
+                  <a:lnTo>
+                    <a:pt x="1406889" y="246177"/>
+                  </a:lnTo>
+                  <a:lnTo>
+                    <a:pt x="1477234" y="289647"/>
+                  </a:lnTo>
+                  <a:lnTo>
+                    <a:pt x="1547578" y="331247"/>
+                  </a:lnTo>
+                  <a:lnTo>
+                    <a:pt x="1617923" y="371059"/>
+                  </a:lnTo>
+                  <a:lnTo>
+                    <a:pt x="1688267" y="409159"/>
+                  </a:lnTo>
+                  <a:lnTo>
+                    <a:pt x="1758612" y="445622"/>
+                  </a:lnTo>
+                  <a:lnTo>
+                    <a:pt x="1828956" y="480516"/>
+                  </a:lnTo>
+                  <a:lnTo>
+                    <a:pt x="1899301" y="513910"/>
+                  </a:lnTo>
+                  <a:lnTo>
+                    <a:pt x="1969645" y="545868"/>
+                  </a:lnTo>
+                  <a:lnTo>
+                    <a:pt x="2039990" y="576452"/>
+                  </a:lnTo>
+                  <a:lnTo>
+                    <a:pt x="2110334" y="605722"/>
+                  </a:lnTo>
+                  <a:lnTo>
+                    <a:pt x="2180679" y="633732"/>
+                  </a:lnTo>
+                  <a:lnTo>
+                    <a:pt x="2251023" y="660539"/>
+                  </a:lnTo>
+                  <a:lnTo>
+                    <a:pt x="2321368" y="686193"/>
+                  </a:lnTo>
+                  <a:lnTo>
+                    <a:pt x="2391712" y="710744"/>
+                  </a:lnTo>
+                  <a:lnTo>
+                    <a:pt x="2462057" y="734239"/>
+                  </a:lnTo>
+                  <a:lnTo>
+                    <a:pt x="2532401" y="756724"/>
+                  </a:lnTo>
+                  <a:lnTo>
+                    <a:pt x="2602746" y="778242"/>
+                  </a:lnTo>
+                  <a:lnTo>
+                    <a:pt x="2673090" y="798835"/>
+                  </a:lnTo>
+                  <a:lnTo>
+                    <a:pt x="2743435" y="818543"/>
+                  </a:lnTo>
+                  <a:lnTo>
+                    <a:pt x="2813779" y="837404"/>
+                  </a:lnTo>
+                  <a:lnTo>
+                    <a:pt x="2884124" y="855453"/>
+                  </a:lnTo>
+                  <a:lnTo>
+                    <a:pt x="2954468" y="872726"/>
+                  </a:lnTo>
+                  <a:lnTo>
+                    <a:pt x="3024813" y="889257"/>
+                  </a:lnTo>
+                  <a:lnTo>
+                    <a:pt x="3095157" y="905077"/>
+                  </a:lnTo>
+                  <a:lnTo>
+                    <a:pt x="3165502" y="920217"/>
+                  </a:lnTo>
+                  <a:lnTo>
+                    <a:pt x="3235846" y="934706"/>
+                  </a:lnTo>
+                  <a:lnTo>
+                    <a:pt x="3306191" y="948572"/>
+                  </a:lnTo>
+                  <a:lnTo>
+                    <a:pt x="3376535" y="956910"/>
+                  </a:lnTo>
+                  <a:lnTo>
+                    <a:pt x="3446880" y="953740"/>
+                  </a:lnTo>
+                  <a:lnTo>
+                    <a:pt x="3517224" y="950536"/>
+                  </a:lnTo>
+                  <a:lnTo>
+                    <a:pt x="3587569" y="947298"/>
+                  </a:lnTo>
+                  <a:lnTo>
+                    <a:pt x="3657913" y="944026"/>
+                  </a:lnTo>
+                  <a:lnTo>
+                    <a:pt x="3728257" y="940720"/>
+                  </a:lnTo>
+                  <a:lnTo>
+                    <a:pt x="3798602" y="937378"/>
+                  </a:lnTo>
+                  <a:lnTo>
+                    <a:pt x="3868946" y="934002"/>
+                  </a:lnTo>
+                  <a:lnTo>
+                    <a:pt x="3939291" y="930589"/>
+                  </a:lnTo>
+                  <a:lnTo>
+                    <a:pt x="4009635" y="927141"/>
+                  </a:lnTo>
+                  <a:lnTo>
+                    <a:pt x="4079980" y="923656"/>
+                  </a:lnTo>
+                  <a:lnTo>
+                    <a:pt x="4150324" y="920134"/>
+                  </a:lnTo>
+                  <a:lnTo>
+                    <a:pt x="4220669" y="916576"/>
+                  </a:lnTo>
+                  <a:lnTo>
+                    <a:pt x="4291013" y="912979"/>
+                  </a:lnTo>
+                  <a:lnTo>
+                    <a:pt x="4361358" y="909345"/>
+                  </a:lnTo>
+                  <a:lnTo>
+                    <a:pt x="4431702" y="905672"/>
+                  </a:lnTo>
+                  <a:lnTo>
+                    <a:pt x="4502047" y="901961"/>
+                  </a:lnTo>
+                  <a:lnTo>
+                    <a:pt x="4572391" y="898210"/>
+                  </a:lnTo>
+                  <a:lnTo>
+                    <a:pt x="4642736" y="894420"/>
+                  </a:lnTo>
+                  <a:lnTo>
+                    <a:pt x="4713080" y="890590"/>
+                  </a:lnTo>
+                  <a:lnTo>
+                    <a:pt x="4783425" y="886719"/>
+                  </a:lnTo>
+                  <a:lnTo>
+                    <a:pt x="4853769" y="882808"/>
+                  </a:lnTo>
+                  <a:lnTo>
+                    <a:pt x="4924114" y="878855"/>
+                  </a:lnTo>
+                  <a:lnTo>
+                    <a:pt x="4994458" y="874860"/>
+                  </a:lnTo>
+                  <a:lnTo>
+                    <a:pt x="5064803" y="870823"/>
+                  </a:lnTo>
+                  <a:lnTo>
+                    <a:pt x="5135147" y="866744"/>
+                  </a:lnTo>
+                  <a:lnTo>
+                    <a:pt x="5205492" y="862622"/>
+                  </a:lnTo>
+                  <a:lnTo>
+                    <a:pt x="5275836" y="858456"/>
+                  </a:lnTo>
+                  <a:lnTo>
+                    <a:pt x="5346181" y="854246"/>
+                  </a:lnTo>
+                  <a:lnTo>
+                    <a:pt x="5416525" y="849991"/>
+                  </a:lnTo>
+                  <a:lnTo>
+                    <a:pt x="5486870" y="845692"/>
+                  </a:lnTo>
+                  <a:lnTo>
+                    <a:pt x="5557214" y="841347"/>
+                  </a:lnTo>
+                  <a:lnTo>
+                    <a:pt x="5627559" y="836956"/>
+                  </a:lnTo>
+                  <a:lnTo>
+                    <a:pt x="5697903" y="832520"/>
+                  </a:lnTo>
+                  <a:lnTo>
+                    <a:pt x="5768248" y="828036"/>
+                  </a:lnTo>
+                  <a:lnTo>
+                    <a:pt x="5838592" y="823505"/>
+                  </a:lnTo>
+                  <a:lnTo>
+                    <a:pt x="5908937" y="818926"/>
+                  </a:lnTo>
+                  <a:lnTo>
+                    <a:pt x="5979281" y="814298"/>
+                  </a:lnTo>
+                  <a:lnTo>
+                    <a:pt x="6049626" y="809622"/>
+                  </a:lnTo>
+                  <a:lnTo>
+                    <a:pt x="6119970" y="804897"/>
+                  </a:lnTo>
+                  <a:lnTo>
+                    <a:pt x="6190315" y="800121"/>
+                  </a:lnTo>
+                  <a:lnTo>
+                    <a:pt x="6260659" y="795295"/>
+                  </a:lnTo>
+                  <a:lnTo>
+                    <a:pt x="6331004" y="790418"/>
+                  </a:lnTo>
+                  <a:lnTo>
+                    <a:pt x="6401348" y="785490"/>
+                  </a:lnTo>
+                  <a:lnTo>
+                    <a:pt x="6471693" y="780510"/>
+                  </a:lnTo>
+                  <a:lnTo>
+                    <a:pt x="6542037" y="775477"/>
+                  </a:lnTo>
+                  <a:lnTo>
+                    <a:pt x="6612382" y="770391"/>
+                  </a:lnTo>
+                  <a:lnTo>
+                    <a:pt x="6682726" y="765251"/>
+                  </a:lnTo>
+                  <a:lnTo>
+                    <a:pt x="6753071" y="760057"/>
+                  </a:lnTo>
+                  <a:lnTo>
+                    <a:pt x="6823415" y="754808"/>
+                  </a:lnTo>
+                  <a:lnTo>
+                    <a:pt x="6893760" y="749504"/>
+                  </a:lnTo>
+                  <a:lnTo>
+                    <a:pt x="6964104" y="744144"/>
+                  </a:lnTo>
+                  <a:lnTo>
+                    <a:pt x="6964104" y="1225799"/>
+                  </a:lnTo>
+                  <a:lnTo>
+                    <a:pt x="6893760" y="1224389"/>
+                  </a:lnTo>
+                  <a:lnTo>
+                    <a:pt x="6823415" y="1222914"/>
+                  </a:lnTo>
+                  <a:lnTo>
+                    <a:pt x="6753071" y="1221374"/>
+                  </a:lnTo>
+                  <a:lnTo>
+                    <a:pt x="6682726" y="1219764"/>
+                  </a:lnTo>
+                  <a:lnTo>
+                    <a:pt x="6612382" y="1218082"/>
+                  </a:lnTo>
+                  <a:lnTo>
+                    <a:pt x="6542037" y="1216325"/>
+                  </a:lnTo>
+                  <a:lnTo>
+                    <a:pt x="6471693" y="1214488"/>
+                  </a:lnTo>
+                  <a:lnTo>
+                    <a:pt x="6401348" y="1212569"/>
+                  </a:lnTo>
+                  <a:lnTo>
+                    <a:pt x="6331004" y="1210564"/>
+                  </a:lnTo>
+                  <a:lnTo>
+                    <a:pt x="6260659" y="1208469"/>
+                  </a:lnTo>
+                  <a:lnTo>
+                    <a:pt x="6190315" y="1206279"/>
+                  </a:lnTo>
+                  <a:lnTo>
+                    <a:pt x="6119970" y="1203991"/>
+                  </a:lnTo>
+                  <a:lnTo>
+                    <a:pt x="6049626" y="1201601"/>
+                  </a:lnTo>
+                  <a:lnTo>
+                    <a:pt x="5979281" y="1199103"/>
+                  </a:lnTo>
+                  <a:lnTo>
+                    <a:pt x="5908937" y="1196493"/>
+                  </a:lnTo>
+                  <a:lnTo>
+                    <a:pt x="5838592" y="1193765"/>
+                  </a:lnTo>
+                  <a:lnTo>
+                    <a:pt x="5768248" y="1190915"/>
+                  </a:lnTo>
+                  <a:lnTo>
+                    <a:pt x="5697903" y="1187937"/>
+                  </a:lnTo>
+                  <a:lnTo>
+                    <a:pt x="5627559" y="1184825"/>
+                  </a:lnTo>
+                  <a:lnTo>
+                    <a:pt x="5557214" y="1181573"/>
+                  </a:lnTo>
+                  <a:lnTo>
+                    <a:pt x="5486870" y="1178176"/>
+                  </a:lnTo>
+                  <a:lnTo>
+                    <a:pt x="5416525" y="1174625"/>
+                  </a:lnTo>
+                  <a:lnTo>
+                    <a:pt x="5346181" y="1170915"/>
+                  </a:lnTo>
+                  <a:lnTo>
+                    <a:pt x="5275836" y="1167039"/>
+                  </a:lnTo>
+                  <a:lnTo>
+                    <a:pt x="5205492" y="1162988"/>
+                  </a:lnTo>
+                  <a:lnTo>
+                    <a:pt x="5135147" y="1158755"/>
+                  </a:lnTo>
+                  <a:lnTo>
+                    <a:pt x="5064803" y="1154332"/>
+                  </a:lnTo>
+                  <a:lnTo>
+                    <a:pt x="4994458" y="1149711"/>
+                  </a:lnTo>
+                  <a:lnTo>
+                    <a:pt x="4924114" y="1144881"/>
+                  </a:lnTo>
+                  <a:lnTo>
+                    <a:pt x="4853769" y="1139835"/>
+                  </a:lnTo>
+                  <a:lnTo>
+                    <a:pt x="4783425" y="1134562"/>
+                  </a:lnTo>
+                  <a:lnTo>
+                    <a:pt x="4713080" y="1129052"/>
+                  </a:lnTo>
+                  <a:lnTo>
+                    <a:pt x="4642736" y="1123295"/>
+                  </a:lnTo>
+                  <a:lnTo>
+                    <a:pt x="4572391" y="1117279"/>
+                  </a:lnTo>
+                  <a:lnTo>
+                    <a:pt x="4502047" y="1110992"/>
+                  </a:lnTo>
+                  <a:lnTo>
+                    <a:pt x="4431702" y="1104424"/>
+                  </a:lnTo>
+                  <a:lnTo>
+                    <a:pt x="4361358" y="1097560"/>
+                  </a:lnTo>
+                  <a:lnTo>
+                    <a:pt x="4291013" y="1090387"/>
+                  </a:lnTo>
+                  <a:lnTo>
+                    <a:pt x="4220669" y="1082893"/>
+                  </a:lnTo>
+                  <a:lnTo>
+                    <a:pt x="4150324" y="1075062"/>
+                  </a:lnTo>
+                  <a:lnTo>
+                    <a:pt x="4079980" y="1066879"/>
+                  </a:lnTo>
+                  <a:lnTo>
+                    <a:pt x="4009635" y="1058328"/>
+                  </a:lnTo>
+                  <a:lnTo>
+                    <a:pt x="3939291" y="1049393"/>
+                  </a:lnTo>
+                  <a:lnTo>
+                    <a:pt x="3868946" y="1040057"/>
+                  </a:lnTo>
+                  <a:lnTo>
+                    <a:pt x="3798602" y="1030301"/>
+                  </a:lnTo>
+                  <a:lnTo>
+                    <a:pt x="3728257" y="1020107"/>
+                  </a:lnTo>
+                  <a:lnTo>
+                    <a:pt x="3657913" y="1009455"/>
+                  </a:lnTo>
+                  <a:lnTo>
+                    <a:pt x="3587569" y="998324"/>
+                  </a:lnTo>
+                  <a:lnTo>
+                    <a:pt x="3517224" y="986694"/>
+                  </a:lnTo>
+                  <a:lnTo>
+                    <a:pt x="3446880" y="974541"/>
+                  </a:lnTo>
+                  <a:lnTo>
+                    <a:pt x="3376535" y="961841"/>
+                  </a:lnTo>
+                  <a:lnTo>
+                    <a:pt x="3306191" y="960048"/>
+                  </a:lnTo>
+                  <a:lnTo>
+                    <a:pt x="3235846" y="963152"/>
+                  </a:lnTo>
+                  <a:lnTo>
+                    <a:pt x="3165502" y="966225"/>
+                  </a:lnTo>
+                  <a:lnTo>
+                    <a:pt x="3095157" y="969265"/>
+                  </a:lnTo>
+                  <a:lnTo>
+                    <a:pt x="3024813" y="972273"/>
+                  </a:lnTo>
+                  <a:lnTo>
+                    <a:pt x="2954468" y="975250"/>
+                  </a:lnTo>
+                  <a:lnTo>
+                    <a:pt x="2884124" y="978195"/>
+                  </a:lnTo>
+                  <a:lnTo>
+                    <a:pt x="2813779" y="981110"/>
+                  </a:lnTo>
+                  <a:lnTo>
+                    <a:pt x="2743435" y="983995"/>
+                  </a:lnTo>
+                  <a:lnTo>
+                    <a:pt x="2673090" y="986849"/>
+                  </a:lnTo>
+                  <a:lnTo>
+                    <a:pt x="2602746" y="989674"/>
+                  </a:lnTo>
+                  <a:lnTo>
+                    <a:pt x="2532401" y="992469"/>
+                  </a:lnTo>
+                  <a:lnTo>
+                    <a:pt x="2462057" y="995235"/>
+                  </a:lnTo>
+                  <a:lnTo>
+                    <a:pt x="2391712" y="997972"/>
+                  </a:lnTo>
+                  <a:lnTo>
+                    <a:pt x="2321368" y="1000680"/>
+                  </a:lnTo>
+                  <a:lnTo>
+                    <a:pt x="2251023" y="1003360"/>
+                  </a:lnTo>
+                  <a:lnTo>
+                    <a:pt x="2180679" y="1006012"/>
+                  </a:lnTo>
+                  <a:lnTo>
+                    <a:pt x="2110334" y="1008637"/>
+                  </a:lnTo>
+                  <a:lnTo>
+                    <a:pt x="2039990" y="1011234"/>
+                  </a:lnTo>
+                  <a:lnTo>
+                    <a:pt x="1969645" y="1013803"/>
+                  </a:lnTo>
+                  <a:lnTo>
+                    <a:pt x="1899301" y="1016346"/>
+                  </a:lnTo>
+                  <a:lnTo>
+                    <a:pt x="1828956" y="1018863"/>
+                  </a:lnTo>
+                  <a:lnTo>
+                    <a:pt x="1758612" y="1021353"/>
+                  </a:lnTo>
+                  <a:lnTo>
+                    <a:pt x="1688267" y="1023817"/>
+                  </a:lnTo>
+                  <a:lnTo>
+                    <a:pt x="1617923" y="1026255"/>
+                  </a:lnTo>
+                  <a:lnTo>
+                    <a:pt x="1547578" y="1028668"/>
+                  </a:lnTo>
+                  <a:lnTo>
+                    <a:pt x="1477234" y="1031056"/>
+                  </a:lnTo>
+                  <a:lnTo>
+                    <a:pt x="1406889" y="1033418"/>
+                  </a:lnTo>
+                  <a:lnTo>
+                    <a:pt x="1336545" y="1035756"/>
+                  </a:lnTo>
+                  <a:lnTo>
+                    <a:pt x="1266200" y="1038070"/>
+                  </a:lnTo>
+                  <a:lnTo>
+                    <a:pt x="1195856" y="1040359"/>
+                  </a:lnTo>
+                  <a:lnTo>
+                    <a:pt x="1125511" y="1042625"/>
+                  </a:lnTo>
+                  <a:lnTo>
+                    <a:pt x="1055167" y="1044867"/>
+                  </a:lnTo>
+                  <a:lnTo>
+                    <a:pt x="984822" y="1047085"/>
+                  </a:lnTo>
+                  <a:lnTo>
+                    <a:pt x="914478" y="1049280"/>
+                  </a:lnTo>
+                  <a:lnTo>
+                    <a:pt x="844133" y="1051453"/>
+                  </a:lnTo>
+                  <a:lnTo>
+                    <a:pt x="773789" y="1053602"/>
+                  </a:lnTo>
+                  <a:lnTo>
+                    <a:pt x="703444" y="1055730"/>
+                  </a:lnTo>
+                  <a:lnTo>
+                    <a:pt x="633100" y="1057834"/>
+                  </a:lnTo>
+                  <a:lnTo>
+                    <a:pt x="562755" y="1059917"/>
+                  </a:lnTo>
+                  <a:lnTo>
+                    <a:pt x="492411" y="1061979"/>
+                  </a:lnTo>
+                  <a:lnTo>
+                    <a:pt x="422066" y="1064018"/>
+                  </a:lnTo>
+                  <a:lnTo>
+                    <a:pt x="351722" y="1066037"/>
+                  </a:lnTo>
+                  <a:lnTo>
+                    <a:pt x="281377" y="1068034"/>
+                  </a:lnTo>
+                  <a:lnTo>
+                    <a:pt x="211033" y="1070010"/>
+                  </a:lnTo>
+                  <a:lnTo>
+                    <a:pt x="140688" y="1071966"/>
+                  </a:lnTo>
+                  <a:lnTo>
+                    <a:pt x="70344" y="1073901"/>
+                  </a:lnTo>
+                  <a:lnTo>
+                    <a:pt x="0" y="1075816"/>
+                  </a:lnTo>
+                  <a:close/>
+                </a:path>
+              </a:pathLst>
+            </a:custGeom>
+            <a:solidFill>
+              <a:srgbClr val="FF8C00">
+                <a:alpha val="20000"/>
+              </a:srgbClr>
+            </a:solidFill>
+          </p:spPr>
+          <p:txBody>
+            <a:bodyPr/>
+            <a:lstStyle/>
+            <a:p/>
+          </p:txBody>
+        </p:sp>
+        <p:sp>
+          <p:nvSpPr>
+            <p:cNvPr id="67" name="pl67"/>
+            <p:cNvSpPr/>
+            <p:nvPr/>
+          </p:nvSpPr>
+          <p:spPr>
+            <a:xfrm>
+              <a:off x="2293441" y="4336484"/>
+              <a:ext cx="5905975" cy="956910"/>
+            </a:xfrm>
+            <a:custGeom>
+              <a:avLst/>
+              <a:pathLst>
+                <a:path w="5905975" h="956910">
+                  <a:moveTo>
+                    <a:pt x="0" y="0"/>
+                  </a:moveTo>
+                  <a:lnTo>
+                    <a:pt x="67382" y="51872"/>
+                  </a:lnTo>
+                  <a:lnTo>
+                    <a:pt x="137727" y="103696"/>
+                  </a:lnTo>
+                  <a:lnTo>
+                    <a:pt x="208071" y="153291"/>
+                  </a:lnTo>
+                  <a:lnTo>
+                    <a:pt x="278416" y="200755"/>
+                  </a:lnTo>
+                  <a:lnTo>
+                    <a:pt x="348760" y="246177"/>
+                  </a:lnTo>
+                  <a:lnTo>
+                    <a:pt x="419105" y="289647"/>
+                  </a:lnTo>
+                  <a:lnTo>
+                    <a:pt x="489449" y="331247"/>
+                  </a:lnTo>
+                  <a:lnTo>
+                    <a:pt x="559794" y="371059"/>
+                  </a:lnTo>
+                  <a:lnTo>
+                    <a:pt x="630138" y="409159"/>
+                  </a:lnTo>
+                  <a:lnTo>
+                    <a:pt x="700483" y="445622"/>
+                  </a:lnTo>
+                  <a:lnTo>
+                    <a:pt x="770827" y="480516"/>
+                  </a:lnTo>
+                  <a:lnTo>
+                    <a:pt x="841172" y="513910"/>
+                  </a:lnTo>
+                  <a:lnTo>
+                    <a:pt x="911516" y="545868"/>
+                  </a:lnTo>
+                  <a:lnTo>
+                    <a:pt x="981861" y="576452"/>
+                  </a:lnTo>
+                  <a:lnTo>
+                    <a:pt x="1052205" y="605722"/>
+                  </a:lnTo>
+                  <a:lnTo>
+                    <a:pt x="1122550" y="633732"/>
+                  </a:lnTo>
+                  <a:lnTo>
+                    <a:pt x="1192894" y="660539"/>
+                  </a:lnTo>
+                  <a:lnTo>
+                    <a:pt x="1263239" y="686193"/>
+                  </a:lnTo>
+                  <a:lnTo>
+                    <a:pt x="1333583" y="710744"/>
+                  </a:lnTo>
+                  <a:lnTo>
+                    <a:pt x="1403928" y="734239"/>
+                  </a:lnTo>
+                  <a:lnTo>
+                    <a:pt x="1474272" y="756724"/>
+                  </a:lnTo>
+                  <a:lnTo>
+                    <a:pt x="1544617" y="778242"/>
+                  </a:lnTo>
+                  <a:lnTo>
+                    <a:pt x="1614961" y="798835"/>
+                  </a:lnTo>
+                  <a:lnTo>
+                    <a:pt x="1685306" y="818543"/>
+                  </a:lnTo>
+                  <a:lnTo>
+                    <a:pt x="1755650" y="837404"/>
+                  </a:lnTo>
+                  <a:lnTo>
+                    <a:pt x="1825995" y="855453"/>
+                  </a:lnTo>
+                  <a:lnTo>
+                    <a:pt x="1896339" y="872726"/>
+                  </a:lnTo>
+                  <a:lnTo>
+                    <a:pt x="1966684" y="889257"/>
+                  </a:lnTo>
+                  <a:lnTo>
+                    <a:pt x="2037028" y="905077"/>
+                  </a:lnTo>
+                  <a:lnTo>
+                    <a:pt x="2107373" y="920217"/>
+                  </a:lnTo>
+                  <a:lnTo>
+                    <a:pt x="2177717" y="934706"/>
+                  </a:lnTo>
+                  <a:lnTo>
+                    <a:pt x="2248062" y="948572"/>
+                  </a:lnTo>
+                  <a:lnTo>
+                    <a:pt x="2318406" y="956910"/>
+                  </a:lnTo>
+                  <a:lnTo>
+                    <a:pt x="2388750" y="953740"/>
+                  </a:lnTo>
+                  <a:lnTo>
+                    <a:pt x="2459095" y="950536"/>
+                  </a:lnTo>
+                  <a:lnTo>
+                    <a:pt x="2529439" y="947298"/>
+                  </a:lnTo>
+                  <a:lnTo>
+                    <a:pt x="2599784" y="944026"/>
+                  </a:lnTo>
+                  <a:lnTo>
+                    <a:pt x="2670128" y="940720"/>
+                  </a:lnTo>
+                  <a:lnTo>
+                    <a:pt x="2740473" y="937378"/>
+                  </a:lnTo>
+                  <a:lnTo>
+                    <a:pt x="2810817" y="934002"/>
+                  </a:lnTo>
+                  <a:lnTo>
+                    <a:pt x="2881162" y="930589"/>
+                  </a:lnTo>
+                  <a:lnTo>
+                    <a:pt x="2951506" y="927141"/>
+                  </a:lnTo>
+                  <a:lnTo>
+                    <a:pt x="3021851" y="923656"/>
+                  </a:lnTo>
+                  <a:lnTo>
+                    <a:pt x="3092195" y="920134"/>
+                  </a:lnTo>
+                  <a:lnTo>
+                    <a:pt x="3162540" y="916576"/>
+                  </a:lnTo>
+                  <a:lnTo>
+                    <a:pt x="3232884" y="912979"/>
+                  </a:lnTo>
+                  <a:lnTo>
+                    <a:pt x="3303229" y="909345"/>
+                  </a:lnTo>
+                  <a:lnTo>
+                    <a:pt x="3373573" y="905672"/>
+                  </a:lnTo>
+                  <a:lnTo>
+                    <a:pt x="3443918" y="901961"/>
+                  </a:lnTo>
+                  <a:lnTo>
+                    <a:pt x="3514262" y="898210"/>
+                  </a:lnTo>
+                  <a:lnTo>
+                    <a:pt x="3584607" y="894420"/>
+                  </a:lnTo>
+                  <a:lnTo>
+                    <a:pt x="3654951" y="890590"/>
+                  </a:lnTo>
+                  <a:lnTo>
+                    <a:pt x="3725296" y="886719"/>
+                  </a:lnTo>
+                  <a:lnTo>
+                    <a:pt x="3795640" y="882808"/>
+                  </a:lnTo>
+                  <a:lnTo>
+                    <a:pt x="3865985" y="878855"/>
+                  </a:lnTo>
+                  <a:lnTo>
+                    <a:pt x="3936329" y="874860"/>
+                  </a:lnTo>
+                  <a:lnTo>
+                    <a:pt x="4006674" y="870823"/>
+                  </a:lnTo>
+                  <a:lnTo>
+                    <a:pt x="4077018" y="866744"/>
+                  </a:lnTo>
+                  <a:lnTo>
+                    <a:pt x="4147363" y="862622"/>
+                  </a:lnTo>
+                  <a:lnTo>
+                    <a:pt x="4217707" y="858456"/>
+                  </a:lnTo>
+                  <a:lnTo>
+                    <a:pt x="4288052" y="854246"/>
+                  </a:lnTo>
+                  <a:lnTo>
+                    <a:pt x="4358396" y="849991"/>
+                  </a:lnTo>
+                  <a:lnTo>
+                    <a:pt x="4428741" y="845692"/>
+                  </a:lnTo>
+                  <a:lnTo>
+                    <a:pt x="4499085" y="841347"/>
+                  </a:lnTo>
+                  <a:lnTo>
+                    <a:pt x="4569430" y="836956"/>
+                  </a:lnTo>
+                  <a:lnTo>
+                    <a:pt x="4639774" y="832520"/>
+                  </a:lnTo>
+                  <a:lnTo>
+                    <a:pt x="4710119" y="828036"/>
+                  </a:lnTo>
+                  <a:lnTo>
+                    <a:pt x="4780463" y="823505"/>
+                  </a:lnTo>
+                  <a:lnTo>
+                    <a:pt x="4850808" y="818926"/>
+                  </a:lnTo>
+                  <a:lnTo>
+                    <a:pt x="4921152" y="814298"/>
+                  </a:lnTo>
+                  <a:lnTo>
+                    <a:pt x="4991497" y="809622"/>
+                  </a:lnTo>
+                  <a:lnTo>
+                    <a:pt x="5061841" y="804897"/>
+                  </a:lnTo>
+                  <a:lnTo>
+                    <a:pt x="5132186" y="800121"/>
+                  </a:lnTo>
+                  <a:lnTo>
+                    <a:pt x="5202530" y="795295"/>
+                  </a:lnTo>
+                  <a:lnTo>
+                    <a:pt x="5272875" y="790418"/>
+                  </a:lnTo>
+                  <a:lnTo>
+                    <a:pt x="5343219" y="785490"/>
+                  </a:lnTo>
+                  <a:lnTo>
+                    <a:pt x="5413564" y="780510"/>
+                  </a:lnTo>
+                  <a:lnTo>
+                    <a:pt x="5483908" y="775477"/>
+                  </a:lnTo>
+                  <a:lnTo>
+                    <a:pt x="5554253" y="770391"/>
+                  </a:lnTo>
+                  <a:lnTo>
+                    <a:pt x="5624597" y="765251"/>
+                  </a:lnTo>
+                  <a:lnTo>
+                    <a:pt x="5694942" y="760057"/>
+                  </a:lnTo>
+                  <a:lnTo>
+                    <a:pt x="5765286" y="754808"/>
+                  </a:lnTo>
+                  <a:lnTo>
+                    <a:pt x="5835631" y="749504"/>
+                  </a:lnTo>
+                  <a:lnTo>
+                    <a:pt x="5905975" y="744144"/>
+                  </a:lnTo>
+                </a:path>
+              </a:pathLst>
+            </a:custGeom>
+          </p:spPr>
+          <p:txBody>
+            <a:bodyPr/>
+            <a:lstStyle/>
+            <a:p/>
+          </p:txBody>
+        </p:sp>
+        <p:sp>
+          <p:nvSpPr>
+            <p:cNvPr id="68" name="pl68"/>
+            <p:cNvSpPr/>
+            <p:nvPr/>
+          </p:nvSpPr>
+          <p:spPr>
+            <a:xfrm>
+              <a:off x="1235312" y="5296532"/>
+              <a:ext cx="6964104" cy="265751"/>
+            </a:xfrm>
+            <a:custGeom>
+              <a:avLst/>
+              <a:pathLst>
+                <a:path w="6964104" h="265751">
+                  <a:moveTo>
+                    <a:pt x="6964104" y="265751"/>
+                  </a:moveTo>
+                  <a:lnTo>
+                    <a:pt x="6893760" y="264340"/>
+                  </a:lnTo>
+                  <a:lnTo>
+                    <a:pt x="6823415" y="262866"/>
+                  </a:lnTo>
+                  <a:lnTo>
+                    <a:pt x="6753071" y="261326"/>
+                  </a:lnTo>
+                  <a:lnTo>
+                    <a:pt x="6682726" y="259716"/>
+                  </a:lnTo>
+                  <a:lnTo>
+                    <a:pt x="6612382" y="258034"/>
+                  </a:lnTo>
+                  <a:lnTo>
+                    <a:pt x="6542037" y="256276"/>
+                  </a:lnTo>
+                  <a:lnTo>
+                    <a:pt x="6471693" y="254440"/>
+                  </a:lnTo>
+                  <a:lnTo>
+                    <a:pt x="6401348" y="252521"/>
+                  </a:lnTo>
+                  <a:lnTo>
+                    <a:pt x="6331004" y="250516"/>
+                  </a:lnTo>
+                  <a:lnTo>
+                    <a:pt x="6260659" y="248420"/>
+                  </a:lnTo>
+                  <a:lnTo>
+                    <a:pt x="6190315" y="246231"/>
+                  </a:lnTo>
+                  <a:lnTo>
+                    <a:pt x="6119970" y="243943"/>
+                  </a:lnTo>
+                  <a:lnTo>
+                    <a:pt x="6049626" y="241553"/>
+                  </a:lnTo>
+                  <a:lnTo>
+                    <a:pt x="5979281" y="239055"/>
+                  </a:lnTo>
+                  <a:lnTo>
+                    <a:pt x="5908937" y="236444"/>
+                  </a:lnTo>
+                  <a:lnTo>
+                    <a:pt x="5838592" y="233717"/>
+                  </a:lnTo>
+                  <a:lnTo>
+                    <a:pt x="5768248" y="230867"/>
+                  </a:lnTo>
+                  <a:lnTo>
+                    <a:pt x="5697903" y="227889"/>
+                  </a:lnTo>
+                  <a:lnTo>
+                    <a:pt x="5627559" y="224777"/>
+                  </a:lnTo>
+                  <a:lnTo>
+                    <a:pt x="5557214" y="221525"/>
+                  </a:lnTo>
+                  <a:lnTo>
+                    <a:pt x="5486870" y="218127"/>
+                  </a:lnTo>
+                  <a:lnTo>
+                    <a:pt x="5416525" y="214577"/>
+                  </a:lnTo>
+                  <a:lnTo>
+                    <a:pt x="5346181" y="210867"/>
+                  </a:lnTo>
+                  <a:lnTo>
+                    <a:pt x="5275836" y="206990"/>
+                  </a:lnTo>
+                  <a:lnTo>
+                    <a:pt x="5205492" y="202940"/>
+                  </a:lnTo>
+                  <a:lnTo>
+                    <a:pt x="5135147" y="198707"/>
+                  </a:lnTo>
+                  <a:lnTo>
+                    <a:pt x="5064803" y="194284"/>
+                  </a:lnTo>
+                  <a:lnTo>
+                    <a:pt x="4994458" y="189662"/>
+                  </a:lnTo>
+                  <a:lnTo>
+                    <a:pt x="4924114" y="184833"/>
+                  </a:lnTo>
+                  <a:lnTo>
+                    <a:pt x="4853769" y="179787"/>
+                  </a:lnTo>
+                  <a:lnTo>
+                    <a:pt x="4783425" y="174514"/>
+                  </a:lnTo>
+                  <a:lnTo>
+                    <a:pt x="4713080" y="169004"/>
+                  </a:lnTo>
+                  <a:lnTo>
+                    <a:pt x="4642736" y="163247"/>
+                  </a:lnTo>
+                  <a:lnTo>
+                    <a:pt x="4572391" y="157230"/>
+                  </a:lnTo>
+                  <a:lnTo>
+                    <a:pt x="4502047" y="150944"/>
+                  </a:lnTo>
+                  <a:lnTo>
+                    <a:pt x="4431702" y="144375"/>
+                  </a:lnTo>
+                  <a:lnTo>
+                    <a:pt x="4361358" y="137511"/>
+                  </a:lnTo>
+                  <a:lnTo>
+                    <a:pt x="4291013" y="130339"/>
+                  </a:lnTo>
+                  <a:lnTo>
+                    <a:pt x="4220669" y="122845"/>
+                  </a:lnTo>
+                  <a:lnTo>
+                    <a:pt x="4150324" y="115013"/>
+                  </a:lnTo>
+                  <a:lnTo>
+                    <a:pt x="4079980" y="106830"/>
+                  </a:lnTo>
+                  <a:lnTo>
+                    <a:pt x="4009635" y="98280"/>
+                  </a:lnTo>
+                  <a:lnTo>
+                    <a:pt x="3939291" y="89345"/>
+                  </a:lnTo>
+                  <a:lnTo>
+                    <a:pt x="3868946" y="80009"/>
+                  </a:lnTo>
+                  <a:lnTo>
+                    <a:pt x="3798602" y="70253"/>
+                  </a:lnTo>
+                  <a:lnTo>
+                    <a:pt x="3728257" y="60059"/>
+                  </a:lnTo>
+                  <a:lnTo>
+                    <a:pt x="3657913" y="49407"/>
+                  </a:lnTo>
+                  <a:lnTo>
+                    <a:pt x="3587569" y="38276"/>
+                  </a:lnTo>
+                  <a:lnTo>
+                    <a:pt x="3517224" y="26646"/>
+                  </a:lnTo>
+                  <a:lnTo>
+                    <a:pt x="3446880" y="14492"/>
+                  </a:lnTo>
+                  <a:lnTo>
+                    <a:pt x="3376535" y="1793"/>
+                  </a:lnTo>
+                  <a:lnTo>
+                    <a:pt x="3306191" y="0"/>
+                  </a:lnTo>
+                  <a:lnTo>
+                    <a:pt x="3235846" y="3104"/>
+                  </a:lnTo>
+                  <a:lnTo>
+                    <a:pt x="3165502" y="6176"/>
+                  </a:lnTo>
+                  <a:lnTo>
+                    <a:pt x="3095157" y="9216"/>
+                  </a:lnTo>
+                  <a:lnTo>
+                    <a:pt x="3024813" y="12225"/>
+                  </a:lnTo>
+                  <a:lnTo>
+                    <a:pt x="2954468" y="15201"/>
+                  </a:lnTo>
+                  <a:lnTo>
+                    <a:pt x="2884124" y="18147"/>
+                  </a:lnTo>
+                  <a:lnTo>
+                    <a:pt x="2813779" y="21062"/>
+                  </a:lnTo>
+                  <a:lnTo>
+                    <a:pt x="2743435" y="23947"/>
+                  </a:lnTo>
+                  <a:lnTo>
+                    <a:pt x="2673090" y="26801"/>
+                  </a:lnTo>
+                  <a:lnTo>
+                    <a:pt x="2602746" y="29626"/>
+                  </a:lnTo>
+                  <a:lnTo>
+                    <a:pt x="2532401" y="32421"/>
+                  </a:lnTo>
+                  <a:lnTo>
+                    <a:pt x="2462057" y="35187"/>
+                  </a:lnTo>
+                  <a:lnTo>
+                    <a:pt x="2391712" y="37923"/>
+                  </a:lnTo>
+                  <a:lnTo>
+                    <a:pt x="2321368" y="40632"/>
+                  </a:lnTo>
+                  <a:lnTo>
+                    <a:pt x="2251023" y="43312"/>
+                  </a:lnTo>
+                  <a:lnTo>
+                    <a:pt x="2180679" y="45964"/>
+                  </a:lnTo>
+                  <a:lnTo>
+                    <a:pt x="2110334" y="48588"/>
+                  </a:lnTo>
+                  <a:lnTo>
+                    <a:pt x="2039990" y="51185"/>
+                  </a:lnTo>
+                  <a:lnTo>
+                    <a:pt x="1969645" y="53755"/>
+                  </a:lnTo>
+                  <a:lnTo>
+                    <a:pt x="1899301" y="56298"/>
+                  </a:lnTo>
+                  <a:lnTo>
+                    <a:pt x="1828956" y="58814"/>
+                  </a:lnTo>
+                  <a:lnTo>
+                    <a:pt x="1758612" y="61304"/>
+                  </a:lnTo>
+                  <a:lnTo>
+                    <a:pt x="1688267" y="63769"/>
+                  </a:lnTo>
+                  <a:lnTo>
+                    <a:pt x="1617923" y="66207"/>
+                  </a:lnTo>
+                  <a:lnTo>
+                    <a:pt x="1547578" y="68620"/>
+                  </a:lnTo>
+                  <a:lnTo>
+                    <a:pt x="1477234" y="71007"/>
+                  </a:lnTo>
+                  <a:lnTo>
+                    <a:pt x="1406889" y="73370"/>
+                  </a:lnTo>
+                  <a:lnTo>
+                    <a:pt x="1336545" y="75708"/>
+                  </a:lnTo>
+                  <a:lnTo>
+                    <a:pt x="1266200" y="78022"/>
+                  </a:lnTo>
+                  <a:lnTo>
+                    <a:pt x="1195856" y="80311"/>
+                  </a:lnTo>
+                  <a:lnTo>
+                    <a:pt x="1125511" y="82577"/>
+                  </a:lnTo>
+                  <a:lnTo>
+                    <a:pt x="1055167" y="84819"/>
+                  </a:lnTo>
+                  <a:lnTo>
+                    <a:pt x="984822" y="87037"/>
+                  </a:lnTo>
+                  <a:lnTo>
+                    <a:pt x="914478" y="89232"/>
+                  </a:lnTo>
+                  <a:lnTo>
+                    <a:pt x="844133" y="91404"/>
+                  </a:lnTo>
+                  <a:lnTo>
+                    <a:pt x="773789" y="93554"/>
+                  </a:lnTo>
+                  <a:lnTo>
+                    <a:pt x="703444" y="95681"/>
+                  </a:lnTo>
+                  <a:lnTo>
+                    <a:pt x="633100" y="97786"/>
+                  </a:lnTo>
+                  <a:lnTo>
+                    <a:pt x="562755" y="99869"/>
+                  </a:lnTo>
+                  <a:lnTo>
+                    <a:pt x="492411" y="101930"/>
+                  </a:lnTo>
+                  <a:lnTo>
+                    <a:pt x="422066" y="103970"/>
+                  </a:lnTo>
+                  <a:lnTo>
+                    <a:pt x="351722" y="105988"/>
+                  </a:lnTo>
+                  <a:lnTo>
+                    <a:pt x="281377" y="107985"/>
+                  </a:lnTo>
+                  <a:lnTo>
+                    <a:pt x="211033" y="109962"/>
+                  </a:lnTo>
+                  <a:lnTo>
+                    <a:pt x="140688" y="111918"/>
+                  </a:lnTo>
+                  <a:lnTo>
+                    <a:pt x="70344" y="113853"/>
+                  </a:lnTo>
+                  <a:lnTo>
+                    <a:pt x="0" y="115768"/>
+                  </a:lnTo>
+                </a:path>
+              </a:pathLst>
+            </a:custGeom>
+          </p:spPr>
+          <p:txBody>
+            <a:bodyPr/>
+            <a:lstStyle/>
+            <a:p/>
+          </p:txBody>
+        </p:sp>
+        <p:sp>
+          <p:nvSpPr>
+            <p:cNvPr id="69" name="pl69"/>
+            <p:cNvSpPr/>
+            <p:nvPr/>
+          </p:nvSpPr>
+          <p:spPr>
+            <a:xfrm>
+              <a:off x="1235312" y="4929113"/>
+              <a:ext cx="6964104" cy="537643"/>
+            </a:xfrm>
+            <a:custGeom>
+              <a:avLst/>
+              <a:pathLst>
+                <a:path w="6964104" h="537643">
+                  <a:moveTo>
+                    <a:pt x="0" y="0"/>
+                  </a:moveTo>
+                  <a:lnTo>
+                    <a:pt x="70344" y="11020"/>
+                  </a:lnTo>
+                  <a:lnTo>
+                    <a:pt x="140688" y="21858"/>
+                  </a:lnTo>
+                  <a:lnTo>
+                    <a:pt x="211033" y="32517"/>
+                  </a:lnTo>
+                  <a:lnTo>
+                    <a:pt x="281377" y="42998"/>
+                  </a:lnTo>
+                  <a:lnTo>
+                    <a:pt x="351722" y="53306"/>
+                  </a:lnTo>
+                  <a:lnTo>
+                    <a:pt x="422066" y="63443"/>
+                  </a:lnTo>
+                  <a:lnTo>
+                    <a:pt x="492411" y="73411"/>
+                  </a:lnTo>
+                  <a:lnTo>
+                    <a:pt x="562755" y="83215"/>
+                  </a:lnTo>
+                  <a:lnTo>
+                    <a:pt x="633100" y="92856"/>
+                  </a:lnTo>
+                  <a:lnTo>
+                    <a:pt x="703444" y="102337"/>
+                  </a:lnTo>
+                  <a:lnTo>
+                    <a:pt x="773789" y="111660"/>
+                  </a:lnTo>
+                  <a:lnTo>
+                    <a:pt x="844133" y="120829"/>
+                  </a:lnTo>
+                  <a:lnTo>
+                    <a:pt x="914478" y="129846"/>
+                  </a:lnTo>
+                  <a:lnTo>
+                    <a:pt x="984822" y="138714"/>
+                  </a:lnTo>
+                  <a:lnTo>
+                    <a:pt x="1055167" y="147434"/>
+                  </a:lnTo>
+                  <a:lnTo>
+                    <a:pt x="1125511" y="156010"/>
+                  </a:lnTo>
+                  <a:lnTo>
+                    <a:pt x="1195856" y="164444"/>
+                  </a:lnTo>
+                  <a:lnTo>
+                    <a:pt x="1266200" y="172738"/>
+                  </a:lnTo>
+                  <a:lnTo>
+                    <a:pt x="1336545" y="180894"/>
+                  </a:lnTo>
+                  <a:lnTo>
+                    <a:pt x="1406889" y="188915"/>
+                  </a:lnTo>
+                  <a:lnTo>
+                    <a:pt x="1477234" y="196803"/>
+                  </a:lnTo>
+                  <a:lnTo>
+                    <a:pt x="1547578" y="204560"/>
+                  </a:lnTo>
+                  <a:lnTo>
+                    <a:pt x="1617923" y="212188"/>
+                  </a:lnTo>
+                  <a:lnTo>
+                    <a:pt x="1688267" y="219690"/>
+                  </a:lnTo>
+                  <a:lnTo>
+                    <a:pt x="1758612" y="227068"/>
+                  </a:lnTo>
+                  <a:lnTo>
+                    <a:pt x="1828956" y="234323"/>
+                  </a:lnTo>
+                  <a:lnTo>
+                    <a:pt x="1899301" y="241458"/>
+                  </a:lnTo>
+                  <a:lnTo>
+                    <a:pt x="1969645" y="248475"/>
+                  </a:lnTo>
+                  <a:lnTo>
+                    <a:pt x="2039990" y="255375"/>
+                  </a:lnTo>
+                  <a:lnTo>
+                    <a:pt x="2110334" y="262161"/>
+                  </a:lnTo>
+                  <a:lnTo>
+                    <a:pt x="2180679" y="268834"/>
+                  </a:lnTo>
+                  <a:lnTo>
+                    <a:pt x="2251023" y="275397"/>
+                  </a:lnTo>
+                  <a:lnTo>
+                    <a:pt x="2321368" y="281851"/>
+                  </a:lnTo>
+                  <a:lnTo>
+                    <a:pt x="2391712" y="288197"/>
+                  </a:lnTo>
+                  <a:lnTo>
+                    <a:pt x="2462057" y="294439"/>
+                  </a:lnTo>
+                  <a:lnTo>
+                    <a:pt x="2532401" y="300577"/>
+                  </a:lnTo>
+                  <a:lnTo>
+                    <a:pt x="2602746" y="306613"/>
+                  </a:lnTo>
+                  <a:lnTo>
+                    <a:pt x="2673090" y="312549"/>
+                  </a:lnTo>
+                  <a:lnTo>
+                    <a:pt x="2743435" y="318387"/>
+                  </a:lnTo>
+                  <a:lnTo>
+                    <a:pt x="2813779" y="324128"/>
+                  </a:lnTo>
+                  <a:lnTo>
+                    <a:pt x="2884124" y="329774"/>
+                  </a:lnTo>
+                  <a:lnTo>
+                    <a:pt x="2954468" y="335326"/>
+                  </a:lnTo>
+                  <a:lnTo>
+                    <a:pt x="3024813" y="340786"/>
+                  </a:lnTo>
+                  <a:lnTo>
+                    <a:pt x="3095157" y="346155"/>
+                  </a:lnTo>
+                  <a:lnTo>
+                    <a:pt x="3165502" y="351435"/>
+                  </a:lnTo>
+                  <a:lnTo>
+                    <a:pt x="3235846" y="356628"/>
+                  </a:lnTo>
+                  <a:lnTo>
+                    <a:pt x="3306191" y="361735"/>
+                  </a:lnTo>
+                  <a:lnTo>
+                    <a:pt x="3376535" y="366757"/>
+                  </a:lnTo>
+                  <a:lnTo>
+                    <a:pt x="3446880" y="371696"/>
+                  </a:lnTo>
+                  <a:lnTo>
+                    <a:pt x="3517224" y="376553"/>
+                  </a:lnTo>
+                  <a:lnTo>
+                    <a:pt x="3587569" y="381329"/>
+                  </a:lnTo>
+                  <a:lnTo>
+                    <a:pt x="3657913" y="386026"/>
+                  </a:lnTo>
+                  <a:lnTo>
+                    <a:pt x="3728257" y="390645"/>
+                  </a:lnTo>
+                  <a:lnTo>
+                    <a:pt x="3798602" y="395188"/>
+                  </a:lnTo>
+                  <a:lnTo>
+                    <a:pt x="3868946" y="399655"/>
+                  </a:lnTo>
+                  <a:lnTo>
+                    <a:pt x="3939291" y="404048"/>
+                  </a:lnTo>
+                  <a:lnTo>
+                    <a:pt x="4009635" y="408369"/>
+                  </a:lnTo>
+                  <a:lnTo>
+                    <a:pt x="4079980" y="412617"/>
+                  </a:lnTo>
+                  <a:lnTo>
+                    <a:pt x="4150324" y="416796"/>
+                  </a:lnTo>
+                  <a:lnTo>
+                    <a:pt x="4220669" y="420905"/>
+                  </a:lnTo>
+                  <a:lnTo>
+                    <a:pt x="4291013" y="424945"/>
+                  </a:lnTo>
+                  <a:lnTo>
+                    <a:pt x="4361358" y="428919"/>
+                  </a:lnTo>
+                  <a:lnTo>
+                    <a:pt x="4431702" y="432827"/>
+                  </a:lnTo>
+                  <a:lnTo>
+                    <a:pt x="4502047" y="436670"/>
+                  </a:lnTo>
+                  <a:lnTo>
+                    <a:pt x="4572391" y="440450"/>
+                  </a:lnTo>
+                  <a:lnTo>
+                    <a:pt x="4642736" y="444166"/>
+                  </a:lnTo>
+                  <a:lnTo>
+                    <a:pt x="4713080" y="447821"/>
+                  </a:lnTo>
+                  <a:lnTo>
+                    <a:pt x="4783425" y="451416"/>
+                  </a:lnTo>
+                  <a:lnTo>
+                    <a:pt x="4853769" y="454951"/>
+                  </a:lnTo>
+                  <a:lnTo>
+                    <a:pt x="4924114" y="458427"/>
+                  </a:lnTo>
+                  <a:lnTo>
+                    <a:pt x="4994458" y="461845"/>
+                  </a:lnTo>
+                  <a:lnTo>
+                    <a:pt x="5064803" y="465207"/>
+                  </a:lnTo>
+                  <a:lnTo>
+                    <a:pt x="5135147" y="468513"/>
+                  </a:lnTo>
+                  <a:lnTo>
+                    <a:pt x="5205492" y="471765"/>
+                  </a:lnTo>
+                  <a:lnTo>
+                    <a:pt x="5275836" y="474962"/>
+                  </a:lnTo>
+                  <a:lnTo>
+                    <a:pt x="5346181" y="478106"/>
+                  </a:lnTo>
+                  <a:lnTo>
+                    <a:pt x="5416525" y="481199"/>
+                  </a:lnTo>
+                  <a:lnTo>
+                    <a:pt x="5486870" y="484240"/>
+                  </a:lnTo>
+                  <a:lnTo>
+                    <a:pt x="5557214" y="487230"/>
+                  </a:lnTo>
+                  <a:lnTo>
+                    <a:pt x="5627559" y="490171"/>
+                  </a:lnTo>
+                  <a:lnTo>
+                    <a:pt x="5697903" y="493063"/>
+                  </a:lnTo>
+                  <a:lnTo>
+                    <a:pt x="5768248" y="495907"/>
+                  </a:lnTo>
+                  <a:lnTo>
+                    <a:pt x="5838592" y="498704"/>
+                  </a:lnTo>
+                  <a:lnTo>
+                    <a:pt x="5908937" y="501455"/>
+                  </a:lnTo>
+                  <a:lnTo>
+                    <a:pt x="5979281" y="504160"/>
+                  </a:lnTo>
+                  <a:lnTo>
+                    <a:pt x="6049626" y="506820"/>
+                  </a:lnTo>
+                  <a:lnTo>
+                    <a:pt x="6119970" y="509436"/>
+                  </a:lnTo>
+                  <a:lnTo>
+                    <a:pt x="6190315" y="512009"/>
+                  </a:lnTo>
+                  <a:lnTo>
+                    <a:pt x="6260659" y="514539"/>
+                  </a:lnTo>
+                  <a:lnTo>
+                    <a:pt x="6331004" y="517027"/>
+                  </a:lnTo>
+                  <a:lnTo>
+                    <a:pt x="6401348" y="519474"/>
+                  </a:lnTo>
+                  <a:lnTo>
+                    <a:pt x="6471693" y="521880"/>
+                  </a:lnTo>
+                  <a:lnTo>
+                    <a:pt x="6542037" y="524246"/>
+                  </a:lnTo>
+                  <a:lnTo>
+                    <a:pt x="6612382" y="526573"/>
+                  </a:lnTo>
+                  <a:lnTo>
+                    <a:pt x="6682726" y="528862"/>
+                  </a:lnTo>
+                  <a:lnTo>
+                    <a:pt x="6753071" y="531112"/>
+                  </a:lnTo>
+                  <a:lnTo>
+                    <a:pt x="6823415" y="533326"/>
+                  </a:lnTo>
+                  <a:lnTo>
+                    <a:pt x="6893760" y="535502"/>
+                  </a:lnTo>
+                  <a:lnTo>
+                    <a:pt x="6964104" y="537643"/>
+                  </a:lnTo>
+                </a:path>
+              </a:pathLst>
+            </a:custGeom>
+            <a:ln w="27101" cap="flat">
+              <a:solidFill>
+                <a:srgbClr val="FF8C00">
+                  <a:alpha val="100000"/>
+                </a:srgbClr>
+              </a:solidFill>
+              <a:prstDash val="solid"/>
+              <a:round/>
+            </a:ln>
+          </p:spPr>
+          <p:txBody>
+            <a:bodyPr/>
+            <a:lstStyle/>
+            <a:p/>
+          </p:txBody>
+        </p:sp>
+        <p:sp>
+          <p:nvSpPr>
+            <p:cNvPr id="70" name="pl70"/>
+            <p:cNvSpPr/>
+            <p:nvPr/>
+          </p:nvSpPr>
+          <p:spPr>
+            <a:xfrm>
+              <a:off x="887106" y="5294352"/>
+              <a:ext cx="7660515" cy="0"/>
+            </a:xfrm>
+            <a:custGeom>
+              <a:avLst/>
+              <a:pathLst>
+                <a:path w="7660515" h="0">
+                  <a:moveTo>
+                    <a:pt x="0" y="0"/>
+                  </a:moveTo>
+                  <a:lnTo>
+                    <a:pt x="7660515" y="0"/>
+                  </a:lnTo>
+                  <a:lnTo>
+                    <a:pt x="7660515" y="0"/>
+                  </a:lnTo>
+                </a:path>
+              </a:pathLst>
+            </a:custGeom>
+            <a:ln w="13550" cap="flat">
+              <a:solidFill>
+                <a:srgbClr val="7F7F7F">
+                  <a:alpha val="100000"/>
+                </a:srgbClr>
+              </a:solidFill>
+              <a:prstDash val="dash"/>
+              <a:round/>
+            </a:ln>
+          </p:spPr>
+          <p:txBody>
+            <a:bodyPr/>
+            <a:lstStyle/>
+            <a:p/>
+          </p:txBody>
+        </p:sp>
+        <p:sp>
+          <p:nvSpPr>
+            <p:cNvPr id="71" name="pl71"/>
+            <p:cNvSpPr/>
+            <p:nvPr/>
+          </p:nvSpPr>
+          <p:spPr>
+            <a:xfrm>
+              <a:off x="4590457" y="4336484"/>
+              <a:ext cx="0" cy="1317069"/>
+            </a:xfrm>
+            <a:custGeom>
+              <a:avLst/>
+              <a:pathLst>
+                <a:path w="0" h="1317069">
+                  <a:moveTo>
+                    <a:pt x="0" y="1317069"/>
+                  </a:moveTo>
+                  <a:lnTo>
+                    <a:pt x="0" y="0"/>
+                  </a:lnTo>
+                  <a:lnTo>
+                    <a:pt x="0" y="0"/>
+                  </a:lnTo>
+                </a:path>
+              </a:pathLst>
+            </a:custGeom>
+            <a:ln w="13550" cap="flat">
+              <a:solidFill>
+                <a:srgbClr val="666666">
+                  <a:alpha val="100000"/>
+                </a:srgbClr>
+              </a:solidFill>
+              <a:prstDash val="dot"/>
+              <a:round/>
+            </a:ln>
+          </p:spPr>
+          <p:txBody>
+            <a:bodyPr/>
+            <a:lstStyle/>
+            <a:p/>
+          </p:txBody>
+        </p:sp>
+        <p:sp>
+          <p:nvSpPr>
+            <p:cNvPr id="72" name="tx72"/>
+            <p:cNvSpPr/>
+            <p:nvPr/>
+          </p:nvSpPr>
+          <p:spPr>
+            <a:xfrm>
+              <a:off x="762297" y="5553636"/>
+              <a:ext cx="62179" cy="80101"/>
+            </a:xfrm>
+            <a:prstGeom prst="rect">
+              <a:avLst/>
+            </a:prstGeom>
+            <a:noFill/>
+          </p:spPr>
+          <p:txBody>
+            <a:bodyPr lIns="0" rIns="0" tIns="0" bIns="0" anchorCtr="1" anchor="ctr" wrap="none"/>
+            <a:lstStyle/>
+            <a:p>
+              <a:pPr algn="l" marL="0" marR="0" indent="0">
+                <a:lnSpc>
+                  <a:spcPts val="880"/>
+                </a:lnSpc>
+                <a:spcBef>
+                  <a:spcPts val="0"/>
+                </a:spcBef>
+                <a:spcAft>
+                  <a:spcPts val="0"/>
+                </a:spcAft>
+              </a:pPr>
+              <a:r>
+                <a:rPr sz="880">
+                  <a:solidFill>
+                    <a:srgbClr val="4D4D4D">
+                      <a:alpha val="100000"/>
+                    </a:srgbClr>
+                  </a:solidFill>
+                  <a:latin typeface="Helvetica"/>
+                  <a:cs typeface="Helvetica"/>
+                </a:rPr>
+                <a:t>0</a:t>
+              </a:r>
+            </a:p>
+          </p:txBody>
+        </p:sp>
+        <p:sp>
+          <p:nvSpPr>
+            <p:cNvPr id="73" name="tx73"/>
+            <p:cNvSpPr/>
+            <p:nvPr/>
+          </p:nvSpPr>
+          <p:spPr>
+            <a:xfrm>
+              <a:off x="762297" y="5254302"/>
+              <a:ext cx="62179" cy="80101"/>
+            </a:xfrm>
+            <a:prstGeom prst="rect">
+              <a:avLst/>
+            </a:prstGeom>
+            <a:noFill/>
+          </p:spPr>
+          <p:txBody>
+            <a:bodyPr lIns="0" rIns="0" tIns="0" bIns="0" anchorCtr="1" anchor="ctr" wrap="none"/>
+            <a:lstStyle/>
+            <a:p>
+              <a:pPr algn="l" marL="0" marR="0" indent="0">
+                <a:lnSpc>
+                  <a:spcPts val="880"/>
+                </a:lnSpc>
+                <a:spcBef>
+                  <a:spcPts val="0"/>
+                </a:spcBef>
+                <a:spcAft>
+                  <a:spcPts val="0"/>
+                </a:spcAft>
+              </a:pPr>
+              <a:r>
+                <a:rPr sz="880">
+                  <a:solidFill>
+                    <a:srgbClr val="4D4D4D">
+                      <a:alpha val="100000"/>
+                    </a:srgbClr>
+                  </a:solidFill>
+                  <a:latin typeface="Helvetica"/>
+                  <a:cs typeface="Helvetica"/>
+                </a:rPr>
+                <a:t>1</a:t>
+              </a:r>
+            </a:p>
+          </p:txBody>
+        </p:sp>
+        <p:sp>
+          <p:nvSpPr>
+            <p:cNvPr id="74" name="tx74"/>
+            <p:cNvSpPr/>
+            <p:nvPr/>
+          </p:nvSpPr>
+          <p:spPr>
+            <a:xfrm>
+              <a:off x="762297" y="4954968"/>
+              <a:ext cx="62179" cy="80101"/>
+            </a:xfrm>
+            <a:prstGeom prst="rect">
+              <a:avLst/>
+            </a:prstGeom>
+            <a:noFill/>
+          </p:spPr>
+          <p:txBody>
+            <a:bodyPr lIns="0" rIns="0" tIns="0" bIns="0" anchorCtr="1" anchor="ctr" wrap="none"/>
+            <a:lstStyle/>
+            <a:p>
+              <a:pPr algn="l" marL="0" marR="0" indent="0">
+                <a:lnSpc>
+                  <a:spcPts val="880"/>
+                </a:lnSpc>
+                <a:spcBef>
+                  <a:spcPts val="0"/>
+                </a:spcBef>
+                <a:spcAft>
+                  <a:spcPts val="0"/>
+                </a:spcAft>
+              </a:pPr>
+              <a:r>
+                <a:rPr sz="880">
+                  <a:solidFill>
+                    <a:srgbClr val="4D4D4D">
+                      <a:alpha val="100000"/>
+                    </a:srgbClr>
+                  </a:solidFill>
+                  <a:latin typeface="Helvetica"/>
+                  <a:cs typeface="Helvetica"/>
+                </a:rPr>
+                <a:t>2</a:t>
+              </a:r>
+            </a:p>
+          </p:txBody>
+        </p:sp>
+        <p:sp>
+          <p:nvSpPr>
+            <p:cNvPr id="75" name="tx75"/>
+            <p:cNvSpPr/>
+            <p:nvPr/>
+          </p:nvSpPr>
+          <p:spPr>
+            <a:xfrm>
+              <a:off x="762297" y="4655634"/>
+              <a:ext cx="62179" cy="80101"/>
+            </a:xfrm>
+            <a:prstGeom prst="rect">
+              <a:avLst/>
+            </a:prstGeom>
+            <a:noFill/>
+          </p:spPr>
+          <p:txBody>
+            <a:bodyPr lIns="0" rIns="0" tIns="0" bIns="0" anchorCtr="1" anchor="ctr" wrap="none"/>
+            <a:lstStyle/>
+            <a:p>
+              <a:pPr algn="l" marL="0" marR="0" indent="0">
+                <a:lnSpc>
+                  <a:spcPts val="880"/>
+                </a:lnSpc>
+                <a:spcBef>
+                  <a:spcPts val="0"/>
+                </a:spcBef>
+                <a:spcAft>
+                  <a:spcPts val="0"/>
+                </a:spcAft>
+              </a:pPr>
+              <a:r>
+                <a:rPr sz="880">
+                  <a:solidFill>
+                    <a:srgbClr val="4D4D4D">
+                      <a:alpha val="100000"/>
+                    </a:srgbClr>
+                  </a:solidFill>
+                  <a:latin typeface="Helvetica"/>
+                  <a:cs typeface="Helvetica"/>
+                </a:rPr>
+                <a:t>3</a:t>
+              </a:r>
+            </a:p>
+          </p:txBody>
+        </p:sp>
+        <p:sp>
+          <p:nvSpPr>
+            <p:cNvPr id="76" name="tx76"/>
+            <p:cNvSpPr/>
+            <p:nvPr/>
+          </p:nvSpPr>
+          <p:spPr>
+            <a:xfrm>
+              <a:off x="762297" y="4356300"/>
+              <a:ext cx="62179" cy="80101"/>
+            </a:xfrm>
+            <a:prstGeom prst="rect">
+              <a:avLst/>
+            </a:prstGeom>
+            <a:noFill/>
+          </p:spPr>
+          <p:txBody>
+            <a:bodyPr lIns="0" rIns="0" tIns="0" bIns="0" anchorCtr="1" anchor="ctr" wrap="none"/>
+            <a:lstStyle/>
+            <a:p>
+              <a:pPr algn="l" marL="0" marR="0" indent="0">
+                <a:lnSpc>
+                  <a:spcPts val="880"/>
+                </a:lnSpc>
+                <a:spcBef>
+                  <a:spcPts val="0"/>
+                </a:spcBef>
+                <a:spcAft>
+                  <a:spcPts val="0"/>
+                </a:spcAft>
+              </a:pPr>
+              <a:r>
+                <a:rPr sz="880">
+                  <a:solidFill>
+                    <a:srgbClr val="4D4D4D">
+                      <a:alpha val="100000"/>
+                    </a:srgbClr>
+                  </a:solidFill>
+                  <a:latin typeface="Helvetica"/>
+                  <a:cs typeface="Helvetica"/>
+                </a:rPr>
+                <a:t>4</a:t>
+              </a:r>
+            </a:p>
+          </p:txBody>
+        </p:sp>
+        <p:sp>
+          <p:nvSpPr>
+            <p:cNvPr id="77" name="tx77"/>
+            <p:cNvSpPr/>
+            <p:nvPr/>
+          </p:nvSpPr>
+          <p:spPr>
+            <a:xfrm>
+              <a:off x="1133333" y="5716183"/>
+              <a:ext cx="161574" cy="80101"/>
+            </a:xfrm>
+            <a:prstGeom prst="rect">
+              <a:avLst/>
+            </a:prstGeom>
+            <a:noFill/>
+          </p:spPr>
+          <p:txBody>
+            <a:bodyPr lIns="0" rIns="0" tIns="0" bIns="0" anchorCtr="1" anchor="ctr" wrap="none"/>
+            <a:lstStyle/>
+            <a:p>
+              <a:pPr algn="l" marL="0" marR="0" indent="0">
+                <a:lnSpc>
+                  <a:spcPts val="880"/>
+                </a:lnSpc>
+                <a:spcBef>
+                  <a:spcPts val="0"/>
+                </a:spcBef>
+                <a:spcAft>
+                  <a:spcPts val="0"/>
+                </a:spcAft>
+              </a:pPr>
+              <a:r>
+                <a:rPr sz="880">
+                  <a:solidFill>
+                    <a:srgbClr val="4D4D4D">
+                      <a:alpha val="100000"/>
+                    </a:srgbClr>
+                  </a:solidFill>
+                  <a:latin typeface="Helvetica"/>
+                  <a:cs typeface="Helvetica"/>
+                </a:rPr>
+                <a:t>-40</a:t>
+              </a:r>
+            </a:p>
+          </p:txBody>
+        </p:sp>
+        <p:sp>
+          <p:nvSpPr>
+            <p:cNvPr id="78" name="tx78"/>
+            <p:cNvSpPr/>
+            <p:nvPr/>
+          </p:nvSpPr>
+          <p:spPr>
+            <a:xfrm>
+              <a:off x="1978619" y="5716183"/>
+              <a:ext cx="161574" cy="80101"/>
+            </a:xfrm>
+            <a:prstGeom prst="rect">
+              <a:avLst/>
+            </a:prstGeom>
+            <a:noFill/>
+          </p:spPr>
+          <p:txBody>
+            <a:bodyPr lIns="0" rIns="0" tIns="0" bIns="0" anchorCtr="1" anchor="ctr" wrap="none"/>
+            <a:lstStyle/>
+            <a:p>
+              <a:pPr algn="l" marL="0" marR="0" indent="0">
+                <a:lnSpc>
+                  <a:spcPts val="880"/>
+                </a:lnSpc>
+                <a:spcBef>
+                  <a:spcPts val="0"/>
+                </a:spcBef>
+                <a:spcAft>
+                  <a:spcPts val="0"/>
+                </a:spcAft>
+              </a:pPr>
+              <a:r>
+                <a:rPr sz="880">
+                  <a:solidFill>
+                    <a:srgbClr val="4D4D4D">
+                      <a:alpha val="100000"/>
+                    </a:srgbClr>
+                  </a:solidFill>
+                  <a:latin typeface="Helvetica"/>
+                  <a:cs typeface="Helvetica"/>
+                </a:rPr>
+                <a:t>-30</a:t>
+              </a:r>
+            </a:p>
+          </p:txBody>
+        </p:sp>
+        <p:sp>
+          <p:nvSpPr>
+            <p:cNvPr id="79" name="tx79"/>
+            <p:cNvSpPr/>
+            <p:nvPr/>
+          </p:nvSpPr>
+          <p:spPr>
+            <a:xfrm>
+              <a:off x="2823906" y="5716183"/>
+              <a:ext cx="161574" cy="80101"/>
+            </a:xfrm>
+            <a:prstGeom prst="rect">
+              <a:avLst/>
+            </a:prstGeom>
+            <a:noFill/>
+          </p:spPr>
+          <p:txBody>
+            <a:bodyPr lIns="0" rIns="0" tIns="0" bIns="0" anchorCtr="1" anchor="ctr" wrap="none"/>
+            <a:lstStyle/>
+            <a:p>
+              <a:pPr algn="l" marL="0" marR="0" indent="0">
+                <a:lnSpc>
+                  <a:spcPts val="880"/>
+                </a:lnSpc>
+                <a:spcBef>
+                  <a:spcPts val="0"/>
+                </a:spcBef>
+                <a:spcAft>
+                  <a:spcPts val="0"/>
+                </a:spcAft>
+              </a:pPr>
+              <a:r>
+                <a:rPr sz="880">
+                  <a:solidFill>
+                    <a:srgbClr val="4D4D4D">
+                      <a:alpha val="100000"/>
+                    </a:srgbClr>
+                  </a:solidFill>
+                  <a:latin typeface="Helvetica"/>
+                  <a:cs typeface="Helvetica"/>
+                </a:rPr>
+                <a:t>-20</a:t>
+              </a:r>
+            </a:p>
+          </p:txBody>
+        </p:sp>
+        <p:sp>
+          <p:nvSpPr>
+            <p:cNvPr id="80" name="tx80"/>
+            <p:cNvSpPr/>
+            <p:nvPr/>
+          </p:nvSpPr>
+          <p:spPr>
+            <a:xfrm>
+              <a:off x="3669192" y="5716183"/>
+              <a:ext cx="161574" cy="80101"/>
+            </a:xfrm>
+            <a:prstGeom prst="rect">
+              <a:avLst/>
+            </a:prstGeom>
+            <a:noFill/>
+          </p:spPr>
+          <p:txBody>
+            <a:bodyPr lIns="0" rIns="0" tIns="0" bIns="0" anchorCtr="1" anchor="ctr" wrap="none"/>
+            <a:lstStyle/>
+            <a:p>
+              <a:pPr algn="l" marL="0" marR="0" indent="0">
+                <a:lnSpc>
+                  <a:spcPts val="880"/>
+                </a:lnSpc>
+                <a:spcBef>
+                  <a:spcPts val="0"/>
+                </a:spcBef>
+                <a:spcAft>
+                  <a:spcPts val="0"/>
+                </a:spcAft>
+              </a:pPr>
+              <a:r>
+                <a:rPr sz="880">
+                  <a:solidFill>
+                    <a:srgbClr val="4D4D4D">
+                      <a:alpha val="100000"/>
+                    </a:srgbClr>
+                  </a:solidFill>
+                  <a:latin typeface="Helvetica"/>
+                  <a:cs typeface="Helvetica"/>
+                </a:rPr>
+                <a:t>-10</a:t>
+              </a:r>
+            </a:p>
+          </p:txBody>
+        </p:sp>
+        <p:sp>
+          <p:nvSpPr>
+            <p:cNvPr id="81" name="tx81"/>
+            <p:cNvSpPr/>
+            <p:nvPr/>
+          </p:nvSpPr>
+          <p:spPr>
+            <a:xfrm>
+              <a:off x="4564176" y="5716183"/>
+              <a:ext cx="62179" cy="80101"/>
+            </a:xfrm>
+            <a:prstGeom prst="rect">
+              <a:avLst/>
+            </a:prstGeom>
+            <a:noFill/>
+          </p:spPr>
+          <p:txBody>
+            <a:bodyPr lIns="0" rIns="0" tIns="0" bIns="0" anchorCtr="1" anchor="ctr" wrap="none"/>
+            <a:lstStyle/>
+            <a:p>
+              <a:pPr algn="l" marL="0" marR="0" indent="0">
+                <a:lnSpc>
+                  <a:spcPts val="880"/>
+                </a:lnSpc>
+                <a:spcBef>
+                  <a:spcPts val="0"/>
+                </a:spcBef>
+                <a:spcAft>
+                  <a:spcPts val="0"/>
+                </a:spcAft>
+              </a:pPr>
+              <a:r>
+                <a:rPr sz="880">
+                  <a:solidFill>
+                    <a:srgbClr val="4D4D4D">
+                      <a:alpha val="100000"/>
+                    </a:srgbClr>
+                  </a:solidFill>
+                  <a:latin typeface="Helvetica"/>
+                  <a:cs typeface="Helvetica"/>
+                </a:rPr>
+                <a:t>0</a:t>
+              </a:r>
+            </a:p>
+          </p:txBody>
+        </p:sp>
+        <p:sp>
+          <p:nvSpPr>
+            <p:cNvPr id="82" name="tx82"/>
+            <p:cNvSpPr/>
+            <p:nvPr/>
+          </p:nvSpPr>
+          <p:spPr>
+            <a:xfrm>
+              <a:off x="5378373" y="5716183"/>
+              <a:ext cx="124358" cy="80101"/>
+            </a:xfrm>
+            <a:prstGeom prst="rect">
+              <a:avLst/>
+            </a:prstGeom>
+            <a:noFill/>
+          </p:spPr>
+          <p:txBody>
+            <a:bodyPr lIns="0" rIns="0" tIns="0" bIns="0" anchorCtr="1" anchor="ctr" wrap="none"/>
+            <a:lstStyle/>
+            <a:p>
+              <a:pPr algn="l" marL="0" marR="0" indent="0">
+                <a:lnSpc>
+                  <a:spcPts val="880"/>
+                </a:lnSpc>
+                <a:spcBef>
+                  <a:spcPts val="0"/>
+                </a:spcBef>
+                <a:spcAft>
+                  <a:spcPts val="0"/>
+                </a:spcAft>
+              </a:pPr>
+              <a:r>
+                <a:rPr sz="880">
+                  <a:solidFill>
+                    <a:srgbClr val="4D4D4D">
+                      <a:alpha val="100000"/>
+                    </a:srgbClr>
+                  </a:solidFill>
+                  <a:latin typeface="Helvetica"/>
+                  <a:cs typeface="Helvetica"/>
+                </a:rPr>
+                <a:t>10</a:t>
+              </a:r>
+            </a:p>
+          </p:txBody>
+        </p:sp>
+        <p:sp>
+          <p:nvSpPr>
+            <p:cNvPr id="83" name="tx83"/>
+            <p:cNvSpPr/>
+            <p:nvPr/>
+          </p:nvSpPr>
+          <p:spPr>
+            <a:xfrm>
+              <a:off x="6223659" y="5716183"/>
+              <a:ext cx="124358" cy="80101"/>
+            </a:xfrm>
+            <a:prstGeom prst="rect">
+              <a:avLst/>
+            </a:prstGeom>
+            <a:noFill/>
+          </p:spPr>
+          <p:txBody>
+            <a:bodyPr lIns="0" rIns="0" tIns="0" bIns="0" anchorCtr="1" anchor="ctr" wrap="none"/>
+            <a:lstStyle/>
+            <a:p>
+              <a:pPr algn="l" marL="0" marR="0" indent="0">
+                <a:lnSpc>
+                  <a:spcPts val="880"/>
+                </a:lnSpc>
+                <a:spcBef>
+                  <a:spcPts val="0"/>
+                </a:spcBef>
+                <a:spcAft>
+                  <a:spcPts val="0"/>
+                </a:spcAft>
+              </a:pPr>
+              <a:r>
+                <a:rPr sz="880">
+                  <a:solidFill>
+                    <a:srgbClr val="4D4D4D">
+                      <a:alpha val="100000"/>
+                    </a:srgbClr>
+                  </a:solidFill>
+                  <a:latin typeface="Helvetica"/>
+                  <a:cs typeface="Helvetica"/>
+                </a:rPr>
+                <a:t>20</a:t>
+              </a:r>
+            </a:p>
+          </p:txBody>
+        </p:sp>
+        <p:sp>
+          <p:nvSpPr>
+            <p:cNvPr id="84" name="tx84"/>
+            <p:cNvSpPr/>
+            <p:nvPr/>
+          </p:nvSpPr>
+          <p:spPr>
+            <a:xfrm>
+              <a:off x="7068946" y="5716183"/>
+              <a:ext cx="124358" cy="80101"/>
+            </a:xfrm>
+            <a:prstGeom prst="rect">
+              <a:avLst/>
+            </a:prstGeom>
+            <a:noFill/>
+          </p:spPr>
+          <p:txBody>
+            <a:bodyPr lIns="0" rIns="0" tIns="0" bIns="0" anchorCtr="1" anchor="ctr" wrap="none"/>
+            <a:lstStyle/>
+            <a:p>
+              <a:pPr algn="l" marL="0" marR="0" indent="0">
+                <a:lnSpc>
+                  <a:spcPts val="880"/>
+                </a:lnSpc>
+                <a:spcBef>
+                  <a:spcPts val="0"/>
+                </a:spcBef>
+                <a:spcAft>
+                  <a:spcPts val="0"/>
+                </a:spcAft>
+              </a:pPr>
+              <a:r>
+                <a:rPr sz="880">
+                  <a:solidFill>
+                    <a:srgbClr val="4D4D4D">
+                      <a:alpha val="100000"/>
+                    </a:srgbClr>
+                  </a:solidFill>
+                  <a:latin typeface="Helvetica"/>
+                  <a:cs typeface="Helvetica"/>
+                </a:rPr>
+                <a:t>30</a:t>
+              </a:r>
+            </a:p>
+          </p:txBody>
+        </p:sp>
+        <p:sp>
+          <p:nvSpPr>
+            <p:cNvPr id="85" name="tx85"/>
+            <p:cNvSpPr/>
+            <p:nvPr/>
+          </p:nvSpPr>
+          <p:spPr>
+            <a:xfrm>
+              <a:off x="7914232" y="5716183"/>
+              <a:ext cx="124358" cy="80101"/>
+            </a:xfrm>
+            <a:prstGeom prst="rect">
+              <a:avLst/>
+            </a:prstGeom>
+            <a:noFill/>
+          </p:spPr>
+          <p:txBody>
+            <a:bodyPr lIns="0" rIns="0" tIns="0" bIns="0" anchorCtr="1" anchor="ctr" wrap="none"/>
+            <a:lstStyle/>
+            <a:p>
+              <a:pPr algn="l" marL="0" marR="0" indent="0">
+                <a:lnSpc>
+                  <a:spcPts val="880"/>
+                </a:lnSpc>
+                <a:spcBef>
+                  <a:spcPts val="0"/>
+                </a:spcBef>
+                <a:spcAft>
+                  <a:spcPts val="0"/>
+                </a:spcAft>
+              </a:pPr>
+              <a:r>
+                <a:rPr sz="880">
+                  <a:solidFill>
+                    <a:srgbClr val="4D4D4D">
+                      <a:alpha val="100000"/>
+                    </a:srgbClr>
+                  </a:solidFill>
+                  <a:latin typeface="Helvetica"/>
+                  <a:cs typeface="Helvetica"/>
+                </a:rPr>
+                <a:t>40</a:t>
+              </a:r>
+            </a:p>
+          </p:txBody>
+        </p:sp>
+        <p:sp>
+          <p:nvSpPr>
+            <p:cNvPr id="86" name="tx86"/>
+            <p:cNvSpPr/>
+            <p:nvPr/>
+          </p:nvSpPr>
+          <p:spPr>
+            <a:xfrm>
+              <a:off x="2928340" y="5855859"/>
+              <a:ext cx="3578047" cy="100218"/>
+            </a:xfrm>
+            <a:prstGeom prst="rect">
+              <a:avLst/>
+            </a:prstGeom>
+            <a:noFill/>
+          </p:spPr>
+          <p:txBody>
+            <a:bodyPr lIns="0" rIns="0" tIns="0" bIns="0" anchorCtr="1" anchor="ctr" wrap="none"/>
+            <a:lstStyle/>
+            <a:p>
+              <a:pPr algn="l" marL="0" marR="0" indent="0">
+                <a:lnSpc>
+                  <a:spcPts val="1100"/>
+                </a:lnSpc>
+                <a:spcBef>
+                  <a:spcPts val="0"/>
+                </a:spcBef>
+                <a:spcAft>
+                  <a:spcPts val="0"/>
+                </a:spcAft>
+              </a:pPr>
+              <a:r>
+                <a:rPr sz="1100">
+                  <a:solidFill>
+                    <a:srgbClr val="000000">
+                      <a:alpha val="100000"/>
+                    </a:srgbClr>
+                  </a:solidFill>
+                  <a:latin typeface="Helvetica"/>
+                  <a:cs typeface="Helvetica"/>
+                </a:rPr>
+                <a:t>eGFR difference (%): 100 × (CKD-EPI Cr-Cys − CG) / CG</a:t>
+              </a:r>
+            </a:p>
+          </p:txBody>
+        </p:sp>
+        <p:sp>
+          <p:nvSpPr>
+            <p:cNvPr id="87" name="tx87"/>
+            <p:cNvSpPr/>
+            <p:nvPr/>
+          </p:nvSpPr>
+          <p:spPr>
+            <a:xfrm rot="-5400000">
+              <a:off x="138035" y="4944909"/>
+              <a:ext cx="1016904" cy="100218"/>
+            </a:xfrm>
+            <a:prstGeom prst="rect">
+              <a:avLst/>
+            </a:prstGeom>
+            <a:noFill/>
+          </p:spPr>
+          <p:txBody>
+            <a:bodyPr lIns="0" rIns="0" tIns="0" bIns="0" anchorCtr="1" anchor="ctr" wrap="none"/>
+            <a:lstStyle/>
+            <a:p>
+              <a:pPr algn="l" marL="0" marR="0" indent="0">
+                <a:lnSpc>
+                  <a:spcPts val="1100"/>
+                </a:lnSpc>
+                <a:spcBef>
+                  <a:spcPts val="0"/>
+                </a:spcBef>
+                <a:spcAft>
+                  <a:spcPts val="0"/>
+                </a:spcAft>
+              </a:pPr>
+              <a:r>
+                <a:rPr sz="1100">
+                  <a:solidFill>
+                    <a:srgbClr val="000000">
+                      <a:alpha val="100000"/>
+                    </a:srgbClr>
+                  </a:solidFill>
+                  <a:latin typeface="Helvetica"/>
+                  <a:cs typeface="Helvetica"/>
+                </a:rPr>
+                <a:t>subHR (95% CI)</a:t>
+              </a:r>
+            </a:p>
+          </p:txBody>
+        </p:sp>
+        <p:sp>
+          <p:nvSpPr>
+            <p:cNvPr id="88" name="tx88"/>
+            <p:cNvSpPr/>
+            <p:nvPr/>
+          </p:nvSpPr>
+          <p:spPr>
+            <a:xfrm>
+              <a:off x="887106" y="4159544"/>
+              <a:ext cx="6321612" cy="82021"/>
+            </a:xfrm>
+            <a:prstGeom prst="rect">
+              <a:avLst/>
+            </a:prstGeom>
+            <a:noFill/>
+          </p:spPr>
+          <p:txBody>
+            <a:bodyPr lIns="0" rIns="0" tIns="0" bIns="0" anchorCtr="1" anchor="ctr" wrap="none"/>
+            <a:lstStyle/>
+            <a:p>
+              <a:pPr algn="l" marL="0" marR="0" indent="0">
+                <a:lnSpc>
+                  <a:spcPts val="900"/>
+                </a:lnSpc>
+                <a:spcBef>
+                  <a:spcPts val="0"/>
+                </a:spcBef>
+                <a:spcAft>
+                  <a:spcPts val="0"/>
+                </a:spcAft>
+              </a:pPr>
+              <a:r>
+                <a:rPr sz="900">
+                  <a:solidFill>
+                    <a:srgbClr val="404040">
+                      <a:alpha val="100000"/>
+                    </a:srgbClr>
+                  </a:solidFill>
+                  <a:latin typeface="Helvetica"/>
+                  <a:cs typeface="Helvetica"/>
+                </a:rPr>
+                <a:t>subHR per 10 % decline: 1.22 (0.88-1.70), p = 0.229  |  per IQR decline (Δ = 29.3 %): 1.80 (0.69-4.69)  |  IQR: [-14.6, 14.7] %</a:t>
+              </a:r>
+            </a:p>
+          </p:txBody>
+        </p:sp>
+        <p:sp>
+          <p:nvSpPr>
+            <p:cNvPr id="89" name="tx89"/>
+            <p:cNvSpPr/>
+            <p:nvPr/>
+          </p:nvSpPr>
+          <p:spPr>
+            <a:xfrm>
+              <a:off x="887106" y="3932770"/>
               <a:ext cx="1471361" cy="120152"/>
             </a:xfrm>
             <a:prstGeom prst="rect">
